--- a/round2/Axis.pptx
+++ b/round2/Axis.pptx
@@ -139,23 +139,23 @@
   <p:extLst>
     <p:ext uri="{521415D9-36F7-43E2-AB2F-B90AF26B5E84}">
       <p14:sectionLst xmlns:p14="http://schemas.microsoft.com/office/powerpoint/2010/main">
-        <p14:section name="Cover" id="{F97283D7-F421-4C62-BF26-01AD972183CE}">
+        <p14:section name="Cover" id="{BCC36DB7-B804-4A0E-823F-8CE4923E1CEA}">
           <p14:sldIdLst>
             <p14:sldId id="256"/>
           </p14:sldIdLst>
         </p14:section>
-        <p14:section name="The problem" id="{06C325B4-8EAC-4674-AC9D-8B27D054DCAE}">
+        <p14:section name="The problem" id="{B4AE20BB-9034-4E6E-8F67-8D0F02025850}">
           <p14:sldIdLst>
             <p14:sldId id="257"/>
             <p14:sldId id="258"/>
           </p14:sldIdLst>
         </p14:section>
-        <p14:section name="The answer" id="{32487D19-4432-4ED7-BF2A-DBD479AF98A6}">
+        <p14:section name="The answer" id="{8D566F6B-0025-498F-9483-AB0B3A4EA1C5}">
           <p14:sldIdLst>
             <p14:sldId id="259"/>
           </p14:sldIdLst>
         </p14:section>
-        <p14:section name="The five calls" id="{E10E7975-F12A-4E71-BF90-62D743E06665}">
+        <p14:section name="The five calls" id="{35499CFB-AF45-4277-B4BC-B738DF7B2B4B}">
           <p14:sldIdLst>
             <p14:sldId id="260"/>
             <p14:sldId id="261"/>
@@ -164,24 +164,24 @@
             <p14:sldId id="264"/>
           </p14:sldIdLst>
         </p14:section>
-        <p14:section name="Will it hold" id="{8A56E647-5397-4575-85B2-FD89F5F6AE48}">
+        <p14:section name="Will it hold" id="{6160854A-F5D2-4583-887B-EFF1C1FB7764}">
           <p14:sldIdLst>
             <p14:sldId id="265"/>
           </p14:sldIdLst>
         </p14:section>
-        <p14:section name="What next" id="{B025E062-29E1-49BA-BEA4-4EA273A27552}">
+        <p14:section name="What next" id="{F1AB1DD9-F96E-4BC1-9261-EA1FFA6A1B6C}">
           <p14:sldIdLst>
             <p14:sldId id="266"/>
             <p14:sldId id="267"/>
           </p14:sldIdLst>
         </p14:section>
-        <p14:section name="Us" id="{54184064-EAAB-464F-BA1A-CB40A565CAA3}">
+        <p14:section name="Us" id="{BE82FD12-45C9-4477-9010-40DE4ACE323C}">
           <p14:sldIdLst>
             <p14:sldId id="268"/>
             <p14:sldId id="269"/>
           </p14:sldIdLst>
         </p14:section>
-        <p14:section name="Close" id="{0217D62E-6241-4F06-8BE8-D87ACBC94D39}">
+        <p14:section name="Close" id="{4C57063A-78E2-4343-B017-A55E4647955D}">
           <p14:sldIdLst>
             <p14:sldId id="270"/>
           </p14:sldIdLst>
@@ -231,7 +231,7 @@
     </p:spTree>
     <p:extLst>
       <p:ext uri="{BB962C8B-B14F-4D97-AF65-F5344CB8AC3E}">
-        <p14:creationId xmlns:p14="http://schemas.microsoft.com/office/powerpoint/2010/main" val="3578137109"/>
+        <p14:creationId xmlns:p14="http://schemas.microsoft.com/office/powerpoint/2010/main" val="3931233745"/>
       </p:ext>
     </p:extLst>
   </p:cSld>
@@ -5621,7 +5621,7 @@
         </p:nvSpPr>
         <p:spPr>
           <a:xfrm>
-            <a:off x="457200" y="2475309"/>
+            <a:off x="457200" y="2532459"/>
             <a:ext cx="11277600" cy="9525"/>
           </a:xfrm>
           <a:prstGeom prst="rect">
@@ -5651,7 +5651,7 @@
         </p:nvSpPr>
         <p:spPr>
           <a:xfrm>
-            <a:off x="457200" y="1925104"/>
+            <a:off x="457200" y="1982254"/>
             <a:ext cx="2086746" cy="222885"/>
           </a:xfrm>
           <a:prstGeom prst="rect">
@@ -5696,7 +5696,7 @@
         </p:nvSpPr>
         <p:spPr>
           <a:xfrm>
-            <a:off x="457200" y="2147804"/>
+            <a:off x="457200" y="2204954"/>
             <a:ext cx="2363769" cy="180022"/>
           </a:xfrm>
           <a:prstGeom prst="rect">
@@ -5741,7 +5741,7 @@
         </p:nvSpPr>
         <p:spPr>
           <a:xfrm>
-            <a:off x="3390900" y="2176760"/>
+            <a:off x="3390900" y="2233910"/>
             <a:ext cx="5257800" cy="133350"/>
           </a:xfrm>
           <a:prstGeom prst="roundRect">
@@ -5773,7 +5773,7 @@
         </p:nvSpPr>
         <p:spPr>
           <a:xfrm rot="16200000">
-            <a:off x="4112865" y="1454795"/>
+            <a:off x="4112865" y="1511945"/>
             <a:ext cx="133350" cy="1577280"/>
           </a:xfrm>
           <a:prstGeom prst="round2SameRect">
@@ -5806,7 +5806,7 @@
         </p:nvSpPr>
         <p:spPr>
           <a:xfrm rot="5400000">
-            <a:off x="6294760" y="850181"/>
+            <a:off x="6294760" y="907331"/>
             <a:ext cx="133350" cy="2786509"/>
           </a:xfrm>
           <a:prstGeom prst="round2SameRect">
@@ -5847,7 +5847,7 @@
         </p:nvSpPr>
         <p:spPr>
           <a:xfrm>
-            <a:off x="4968180" y="2176760"/>
+            <a:off x="4968180" y="2233910"/>
             <a:ext cx="19050" cy="133350"/>
           </a:xfrm>
           <a:prstGeom prst="rect">
@@ -5877,7 +5877,7 @@
         </p:nvSpPr>
         <p:spPr>
           <a:xfrm>
-            <a:off x="4812655" y="1968734"/>
+            <a:off x="4812655" y="2025884"/>
             <a:ext cx="444014" cy="133350"/>
           </a:xfrm>
           <a:prstGeom prst="rect">
@@ -5922,7 +5922,7 @@
         </p:nvSpPr>
         <p:spPr>
           <a:xfrm>
-            <a:off x="7333059" y="1701463"/>
+            <a:off x="7333059" y="1758613"/>
             <a:ext cx="1008471" cy="381000"/>
           </a:xfrm>
           <a:prstGeom prst="rect">
@@ -5967,7 +5967,7 @@
         </p:nvSpPr>
         <p:spPr>
           <a:xfrm>
-            <a:off x="9182100" y="1827973"/>
+            <a:off x="9182100" y="1885123"/>
             <a:ext cx="1883396" cy="180022"/>
           </a:xfrm>
           <a:prstGeom prst="rect">
@@ -6021,7 +6021,7 @@
         </p:nvSpPr>
         <p:spPr>
           <a:xfrm>
-            <a:off x="9182100" y="2036481"/>
+            <a:off x="9182100" y="2093631"/>
             <a:ext cx="2102837" cy="180022"/>
           </a:xfrm>
           <a:prstGeom prst="rect">
@@ -6075,7 +6075,7 @@
         </p:nvSpPr>
         <p:spPr>
           <a:xfrm>
-            <a:off x="9182100" y="2244989"/>
+            <a:off x="9182100" y="2302139"/>
             <a:ext cx="1832440" cy="180022"/>
           </a:xfrm>
           <a:prstGeom prst="rect">
@@ -6129,7 +6129,7 @@
         </p:nvSpPr>
         <p:spPr>
           <a:xfrm>
-            <a:off x="457200" y="3132534"/>
+            <a:off x="457200" y="3189684"/>
             <a:ext cx="11277600" cy="9525"/>
           </a:xfrm>
           <a:prstGeom prst="rect">
@@ -6159,7 +6159,7 @@
         </p:nvSpPr>
         <p:spPr>
           <a:xfrm>
-            <a:off x="457200" y="2601956"/>
+            <a:off x="457200" y="2659106"/>
             <a:ext cx="1909111" cy="198120"/>
           </a:xfrm>
           <a:prstGeom prst="rect">
@@ -6204,7 +6204,7 @@
         </p:nvSpPr>
         <p:spPr>
           <a:xfrm>
-            <a:off x="457200" y="2805476"/>
+            <a:off x="457200" y="2862626"/>
             <a:ext cx="2263750" cy="180022"/>
           </a:xfrm>
           <a:prstGeom prst="rect">
@@ -6249,7 +6249,7 @@
         </p:nvSpPr>
         <p:spPr>
           <a:xfrm>
-            <a:off x="3390900" y="2846784"/>
+            <a:off x="3390900" y="2903934"/>
             <a:ext cx="5257800" cy="133350"/>
           </a:xfrm>
           <a:prstGeom prst="roundRect">
@@ -6281,7 +6281,7 @@
         </p:nvSpPr>
         <p:spPr>
           <a:xfrm rot="16200000">
-            <a:off x="4165402" y="2072283"/>
+            <a:off x="4165402" y="2129433"/>
             <a:ext cx="133350" cy="1682353"/>
           </a:xfrm>
           <a:prstGeom prst="round2SameRect">
@@ -6314,7 +6314,7 @@
         </p:nvSpPr>
         <p:spPr>
           <a:xfrm rot="5400000">
-            <a:off x="6662738" y="1257300"/>
+            <a:off x="6662738" y="1314450"/>
             <a:ext cx="133350" cy="3312319"/>
           </a:xfrm>
           <a:prstGeom prst="round2SameRect">
@@ -6355,7 +6355,7 @@
         </p:nvSpPr>
         <p:spPr>
           <a:xfrm>
-            <a:off x="5073253" y="2846784"/>
+            <a:off x="5073253" y="2903934"/>
             <a:ext cx="19050" cy="133350"/>
           </a:xfrm>
           <a:prstGeom prst="rect">
@@ -6385,7 +6385,7 @@
         </p:nvSpPr>
         <p:spPr>
           <a:xfrm>
-            <a:off x="4926062" y="2638758"/>
+            <a:off x="4926062" y="2695908"/>
             <a:ext cx="426345" cy="133350"/>
           </a:xfrm>
           <a:prstGeom prst="rect">
@@ -6430,7 +6430,7 @@
         </p:nvSpPr>
         <p:spPr>
           <a:xfrm>
-            <a:off x="8174385" y="2573417"/>
+            <a:off x="8174385" y="2630567"/>
             <a:ext cx="562332" cy="190500"/>
           </a:xfrm>
           <a:prstGeom prst="rect">
@@ -6475,7 +6475,7 @@
         </p:nvSpPr>
         <p:spPr>
           <a:xfrm>
-            <a:off x="9182100" y="2602176"/>
+            <a:off x="9182100" y="2659326"/>
             <a:ext cx="2102837" cy="180022"/>
           </a:xfrm>
           <a:prstGeom prst="rect">
@@ -6529,7 +6529,7 @@
         </p:nvSpPr>
         <p:spPr>
           <a:xfrm>
-            <a:off x="9182100" y="2810685"/>
+            <a:off x="9182100" y="2867835"/>
             <a:ext cx="2143223" cy="180022"/>
           </a:xfrm>
           <a:prstGeom prst="rect">
@@ -6583,7 +6583,7 @@
         </p:nvSpPr>
         <p:spPr>
           <a:xfrm>
-            <a:off x="457200" y="3789759"/>
+            <a:off x="457200" y="3846909"/>
             <a:ext cx="11277600" cy="9525"/>
           </a:xfrm>
           <a:prstGeom prst="rect">
@@ -6613,7 +6613,7 @@
         </p:nvSpPr>
         <p:spPr>
           <a:xfrm>
-            <a:off x="457200" y="3259181"/>
+            <a:off x="457200" y="3316331"/>
             <a:ext cx="2194968" cy="198120"/>
           </a:xfrm>
           <a:prstGeom prst="rect">
@@ -6658,7 +6658,7 @@
         </p:nvSpPr>
         <p:spPr>
           <a:xfrm>
-            <a:off x="457200" y="3462701"/>
+            <a:off x="457200" y="3519851"/>
             <a:ext cx="2427345" cy="180022"/>
           </a:xfrm>
           <a:prstGeom prst="rect">
@@ -6703,7 +6703,7 @@
         </p:nvSpPr>
         <p:spPr>
           <a:xfrm>
-            <a:off x="3390900" y="3504009"/>
+            <a:off x="3390900" y="3561159"/>
             <a:ext cx="5257800" cy="133350"/>
           </a:xfrm>
           <a:prstGeom prst="roundRect">
@@ -6735,7 +6735,7 @@
         </p:nvSpPr>
         <p:spPr>
           <a:xfrm rot="16200000">
-            <a:off x="4060254" y="2834655"/>
+            <a:off x="4060254" y="2891805"/>
             <a:ext cx="133350" cy="1472059"/>
           </a:xfrm>
           <a:prstGeom prst="round2SameRect">
@@ -6768,7 +6768,7 @@
         </p:nvSpPr>
         <p:spPr>
           <a:xfrm rot="5400000">
-            <a:off x="6478712" y="1888257"/>
+            <a:off x="6478712" y="1945407"/>
             <a:ext cx="133350" cy="3364855"/>
           </a:xfrm>
           <a:prstGeom prst="round2SameRect">
@@ -6809,7 +6809,7 @@
         </p:nvSpPr>
         <p:spPr>
           <a:xfrm>
-            <a:off x="4862959" y="3504009"/>
+            <a:off x="4862959" y="3561159"/>
             <a:ext cx="19050" cy="133350"/>
           </a:xfrm>
           <a:prstGeom prst="rect">
@@ -6839,7 +6839,7 @@
         </p:nvSpPr>
         <p:spPr>
           <a:xfrm>
-            <a:off x="4714503" y="3295983"/>
+            <a:off x="4714503" y="3353133"/>
             <a:ext cx="429027" cy="133350"/>
           </a:xfrm>
           <a:prstGeom prst="rect">
@@ -6884,7 +6884,7 @@
         </p:nvSpPr>
         <p:spPr>
           <a:xfrm>
-            <a:off x="8018338" y="3230642"/>
+            <a:off x="8018338" y="3287792"/>
             <a:ext cx="558704" cy="190500"/>
           </a:xfrm>
           <a:prstGeom prst="rect">
@@ -6929,7 +6929,7 @@
         </p:nvSpPr>
         <p:spPr>
           <a:xfrm>
-            <a:off x="9182100" y="3259401"/>
+            <a:off x="9182100" y="3316551"/>
             <a:ext cx="2215634" cy="180022"/>
           </a:xfrm>
           <a:prstGeom prst="rect">
@@ -6983,7 +6983,7 @@
         </p:nvSpPr>
         <p:spPr>
           <a:xfrm>
-            <a:off x="9182100" y="3467910"/>
+            <a:off x="9182100" y="3525060"/>
             <a:ext cx="2165309" cy="180022"/>
           </a:xfrm>
           <a:prstGeom prst="rect">
@@ -7037,7 +7037,7 @@
         </p:nvSpPr>
         <p:spPr>
           <a:xfrm>
-            <a:off x="457200" y="4446984"/>
+            <a:off x="457200" y="4504134"/>
             <a:ext cx="11277600" cy="9525"/>
           </a:xfrm>
           <a:prstGeom prst="rect">
@@ -7067,7 +7067,7 @@
         </p:nvSpPr>
         <p:spPr>
           <a:xfrm>
-            <a:off x="457200" y="3916406"/>
+            <a:off x="457200" y="3973556"/>
             <a:ext cx="1530965" cy="198120"/>
           </a:xfrm>
           <a:prstGeom prst="rect">
@@ -7112,7 +7112,7 @@
         </p:nvSpPr>
         <p:spPr>
           <a:xfrm>
-            <a:off x="457200" y="4119926"/>
+            <a:off x="457200" y="4177076"/>
             <a:ext cx="1860994" cy="180022"/>
           </a:xfrm>
           <a:prstGeom prst="rect">
@@ -7157,7 +7157,7 @@
         </p:nvSpPr>
         <p:spPr>
           <a:xfrm>
-            <a:off x="3390900" y="4161234"/>
+            <a:off x="3390900" y="4218384"/>
             <a:ext cx="5257800" cy="133350"/>
           </a:xfrm>
           <a:prstGeom prst="roundRect">
@@ -7189,7 +7189,7 @@
         </p:nvSpPr>
         <p:spPr>
           <a:xfrm rot="16200000">
-            <a:off x="4927848" y="2624286"/>
+            <a:off x="4927848" y="2681436"/>
             <a:ext cx="133350" cy="3207246"/>
           </a:xfrm>
           <a:prstGeom prst="round2SameRect">
@@ -7222,7 +7222,7 @@
         </p:nvSpPr>
         <p:spPr>
           <a:xfrm rot="5400000">
-            <a:off x="7530405" y="3228975"/>
+            <a:off x="7530405" y="3286125"/>
             <a:ext cx="133350" cy="1997869"/>
           </a:xfrm>
           <a:prstGeom prst="round2SameRect">
@@ -7263,7 +7263,7 @@
         </p:nvSpPr>
         <p:spPr>
           <a:xfrm>
-            <a:off x="6598146" y="4161234"/>
+            <a:off x="6598146" y="4218384"/>
             <a:ext cx="19050" cy="133350"/>
           </a:xfrm>
           <a:prstGeom prst="rect">
@@ -7293,7 +7293,7 @@
         </p:nvSpPr>
         <p:spPr>
           <a:xfrm>
-            <a:off x="6466136" y="3953208"/>
+            <a:off x="6466136" y="4010358"/>
             <a:ext cx="394162" cy="133350"/>
           </a:xfrm>
           <a:prstGeom prst="rect">
@@ -7338,7 +7338,7 @@
         </p:nvSpPr>
         <p:spPr>
           <a:xfrm>
-            <a:off x="8385944" y="3887867"/>
+            <a:off x="8385944" y="3945017"/>
             <a:ext cx="559650" cy="190500"/>
           </a:xfrm>
           <a:prstGeom prst="rect">
@@ -7383,7 +7383,7 @@
         </p:nvSpPr>
         <p:spPr>
           <a:xfrm>
-            <a:off x="9182100" y="4020806"/>
+            <a:off x="9182100" y="4077956"/>
             <a:ext cx="1463918" cy="180022"/>
           </a:xfrm>
           <a:prstGeom prst="rect">
@@ -7437,7 +7437,7 @@
         </p:nvSpPr>
         <p:spPr>
           <a:xfrm>
-            <a:off x="3390900" y="4505658"/>
+            <a:off x="3390900" y="4562808"/>
             <a:ext cx="355512" cy="133350"/>
           </a:xfrm>
           <a:prstGeom prst="rect">
@@ -7482,7 +7482,7 @@
         </p:nvSpPr>
         <p:spPr>
           <a:xfrm>
-            <a:off x="5864944" y="4505658"/>
+            <a:off x="5864944" y="4562808"/>
             <a:ext cx="442594" cy="133350"/>
           </a:xfrm>
           <a:prstGeom prst="rect">
@@ -7527,7 +7527,7 @@
         </p:nvSpPr>
         <p:spPr>
           <a:xfrm>
-            <a:off x="8274100" y="4505658"/>
+            <a:off x="8274100" y="4562808"/>
             <a:ext cx="511376" cy="133350"/>
           </a:xfrm>
           <a:prstGeom prst="rect">
@@ -7572,7 +7572,7 @@
         </p:nvSpPr>
         <p:spPr>
           <a:xfrm>
-            <a:off x="457200" y="4745688"/>
+            <a:off x="457200" y="4802838"/>
             <a:ext cx="8587157" cy="186690"/>
           </a:xfrm>
           <a:prstGeom prst="rect">
@@ -36578,7 +36578,7 @@
         </p:nvSpPr>
         <p:spPr>
           <a:xfrm>
-            <a:off x="2005274" y="2897928"/>
+            <a:off x="2181933" y="2910132"/>
             <a:ext cx="935903" cy="320010"/>
           </a:xfrm>
           <a:prstGeom prst="rect">
@@ -38213,7 +38213,7 @@
         </p:nvSpPr>
         <p:spPr>
           <a:xfrm>
-            <a:off x="9299633" y="5063466"/>
+            <a:off x="9726567" y="5063466"/>
             <a:ext cx="853869" cy="166688"/>
           </a:xfrm>
           <a:prstGeom prst="rect">
@@ -38227,7 +38227,7 @@
           </a:bodyPr>
           <a:lstStyle/>
           <a:p>
-            <a:pPr algn="r">
+            <a:pPr algn="ctr">
               <a:lnSpc>
                 <a:spcPts val="1312"/>
               </a:lnSpc>
@@ -38258,7 +38258,7 @@
         </p:nvSpPr>
         <p:spPr>
           <a:xfrm>
-            <a:off x="9682037" y="4896779"/>
+            <a:off x="9917769" y="4896779"/>
             <a:ext cx="471464" cy="166688"/>
           </a:xfrm>
           <a:prstGeom prst="rect">
@@ -38272,7 +38272,7 @@
           </a:bodyPr>
           <a:lstStyle/>
           <a:p>
-            <a:pPr algn="r">
+            <a:pPr algn="ctr">
               <a:lnSpc>
                 <a:spcPts val="1312"/>
               </a:lnSpc>
@@ -45787,7 +45787,7 @@
         </p:nvSpPr>
         <p:spPr>
           <a:xfrm>
-            <a:off x="3450729" y="2294072"/>
+            <a:off x="3152924" y="2294072"/>
             <a:ext cx="810643" cy="133350"/>
           </a:xfrm>
           <a:prstGeom prst="rect">

--- a/round2/Axis.pptx
+++ b/round2/Axis.pptx
@@ -139,23 +139,23 @@
   <p:extLst>
     <p:ext uri="{521415D9-36F7-43E2-AB2F-B90AF26B5E84}">
       <p14:sectionLst xmlns:p14="http://schemas.microsoft.com/office/powerpoint/2010/main">
-        <p14:section name="Cover" id="{BCC36DB7-B804-4A0E-823F-8CE4923E1CEA}">
+        <p14:section name="Cover" id="{4AE57B03-8268-4085-A305-BF9E6CD6B786}">
           <p14:sldIdLst>
             <p14:sldId id="256"/>
           </p14:sldIdLst>
         </p14:section>
-        <p14:section name="The problem" id="{B4AE20BB-9034-4E6E-8F67-8D0F02025850}">
+        <p14:section name="The problem" id="{C6C051C1-459F-497D-8E94-9F655188B7DC}">
           <p14:sldIdLst>
             <p14:sldId id="257"/>
             <p14:sldId id="258"/>
           </p14:sldIdLst>
         </p14:section>
-        <p14:section name="The answer" id="{8D566F6B-0025-498F-9483-AB0B3A4EA1C5}">
+        <p14:section name="The answer" id="{27D892BC-97AD-4CFE-9816-752990510CC7}">
           <p14:sldIdLst>
             <p14:sldId id="259"/>
           </p14:sldIdLst>
         </p14:section>
-        <p14:section name="The five calls" id="{35499CFB-AF45-4277-B4BC-B738DF7B2B4B}">
+        <p14:section name="The five calls" id="{90CC3477-5762-4107-91EA-A885C9730F3A}">
           <p14:sldIdLst>
             <p14:sldId id="260"/>
             <p14:sldId id="261"/>
@@ -164,24 +164,24 @@
             <p14:sldId id="264"/>
           </p14:sldIdLst>
         </p14:section>
-        <p14:section name="Will it hold" id="{6160854A-F5D2-4583-887B-EFF1C1FB7764}">
+        <p14:section name="Will it hold" id="{53A6917D-AB03-49CD-9FDB-E165A7750E88}">
           <p14:sldIdLst>
             <p14:sldId id="265"/>
           </p14:sldIdLst>
         </p14:section>
-        <p14:section name="What next" id="{F1AB1DD9-F96E-4BC1-9261-EA1FFA6A1B6C}">
+        <p14:section name="What next" id="{4FB18FB6-8FFF-411D-835D-33A3203211FD}">
           <p14:sldIdLst>
             <p14:sldId id="266"/>
             <p14:sldId id="267"/>
           </p14:sldIdLst>
         </p14:section>
-        <p14:section name="Us" id="{BE82FD12-45C9-4477-9010-40DE4ACE323C}">
+        <p14:section name="Us" id="{B8FA3937-29CF-4970-8A54-A0EA7586942F}">
           <p14:sldIdLst>
             <p14:sldId id="268"/>
             <p14:sldId id="269"/>
           </p14:sldIdLst>
         </p14:section>
-        <p14:section name="Close" id="{4C57063A-78E2-4343-B017-A55E4647955D}">
+        <p14:section name="Close" id="{EF652838-B172-40A9-A342-7B9AE077CCC2}">
           <p14:sldIdLst>
             <p14:sldId id="270"/>
           </p14:sldIdLst>
@@ -231,7 +231,7 @@
     </p:spTree>
     <p:extLst>
       <p:ext uri="{BB962C8B-B14F-4D97-AF65-F5344CB8AC3E}">
-        <p14:creationId xmlns:p14="http://schemas.microsoft.com/office/powerpoint/2010/main" val="3931233745"/>
+        <p14:creationId xmlns:p14="http://schemas.microsoft.com/office/powerpoint/2010/main" val="3561950661"/>
       </p:ext>
     </p:extLst>
   </p:cSld>
@@ -461,7 +461,7 @@
           <a:lstStyle/>
           <a:p>
             <a:r>
-              <a:t>Lookbua: Then we tried to break the plan. The hardest test: Adrian loses his job at 60. The four decisions alone last in 30% of futures; the full plan, 83%. Years of low returns, or high inflation with dearer medical care: 92% or better. And if Carmen lives to 95: 99%.</a:t>
+              <a:t>Lookbua: Then we tried to break the plan. The hardest test: Adrian loses his job at 60. Here the four decisions alone last in 30% of futures; the full plan, with its reserve and spending rules, 83%. Years of low returns, or high inflation with dearer medical care: 92% or better. And if Carmen lives to 95: 99%.</a:t>
             </a:r>
           </a:p>
         </p:txBody>
@@ -531,7 +531,7 @@
           <a:lstStyle/>
           <a:p>
             <a:r>
-              <a:t>Lookbua: It starts this month: wills and a joint account in month one, the cover within three months, a portfolio each within six, a family meeting at a year. After that, dates trigger each step: Chloe's offer in 2028, the business from 2035, the home and the annuities from 2037, the medical review in 2047. Pete.</a:t>
+              <a:t>Lookbua: It starts this month: wills in month one, the cover within three months. After that, dates trigger each step, from Chloe's offer in 2028 to the medical review in 2047, and we review the plan whenever life changes. Pete.</a:t>
             </a:r>
           </a:p>
         </p:txBody>
@@ -601,7 +601,7 @@
           <a:lstStyle/>
           <a:p>
             <a:r>
-              <a:t>Pete: The legacy the case is named for: in the futures where Carmen had to sell, the plan leaves Ryan and Chloe HK$7.7M, not HK$2.3M. And if either parent dies early, the wills name a guardian for Chloe and hold each child's share in trust until 25, 30 and 35. Meanwhile, a scholarship in sustainable design joins Carmen's mission to Chloe's interest.</a:t>
+              <a:t>Pete: The legacy the case is named for: in the futures where Carmen had to sell, the plan leaves Ryan and Chloe HK$7.7M, not HK$2.3M. If a parent dies early, the wills name Chloe's guardian and hold each child's share in trust, paid at 25, 30 and 35. And a scholarship in sustainable design joins Carmen's mission to Chloe's interest.</a:t>
             </a:r>
           </a:p>
         </p:txBody>
@@ -671,7 +671,7 @@
           <a:lstStyle/>
           <a:p>
             <a:r>
-              <a:t>Pete: And for us? Since 2021, Wealth Management Connect has let residents of Hong Kong, Macao and nine mainland cities invest across the boundary, now up to three million renminbi each. Southbound, a Hong Kong bank won't solicit or recommend across the boundary unless the investor asks, so an adviser's value is a clear, suitable answer. We kept Northbound out: their home, income and business are all in Hong Kong. If Adrian's work moves across the boundary, it becomes the right tool.</a:t>
+              <a:t>Pete: Since 2021, Wealth Management Connect has let residents of Hong Kong, Macao and nine mainland cities invest across the boundary, now up to three million renminbi each. For the Wongs, Northbound is a tool for later: their home, income and business are all in Hong Kong. For us, Southbound is the market we want to serve: a Hong Kong bank won't solicit or recommend across the boundary unless the client asks, so an adviser's value is a clear, suitable answer.</a:t>
             </a:r>
           </a:p>
         </p:txBody>
@@ -901,7 +901,7 @@
           <a:lstStyle/>
           <a:p>
             <a:r>
-              <a:t>Pete: Meet the Wongs. Adrian, 54, wants his capital, retirement and health protected. Carmen, 49, runs a business and wants money that reflects her values. Ryan, 24, holds crypto. Chloe, 16, starts university in 2028. On paper, they're secure: HK$24.4 million, 41% of income saved, little debt.</a:t>
+              <a:t>Pete: Meet the Wongs. Adrian, 54, wants his capital, retirement and health protected. Carmen, 49, runs a business and wants money that reflects her values. Ryan, 24, holds crypto. Chloe, 16, starts university in 2028. On paper, they're secure: HK$24.4 million. The parents want to retire at 65 and 62, on HK$780K a year. But will it last to Carmen's 89? We tested it in 10,000 futures.</a:t>
             </a:r>
           </a:p>
         </p:txBody>
@@ -971,7 +971,7 @@
           <a:lstStyle/>
           <a:p>
             <a:r>
-              <a:t>Pete: But will it last? Our written case measured investments alone: 33%. The fairer test is what a sensible family would do: sell the business when Carmen retires, keep the flat, and sell it only if they must. Across 10,000 simulated markets, in 51% they must. In a typical one, Carmen, at 83 and on her own, sells the home where they raised Ryan and Chloe. By 86 the money has run out again, and the wealth meant for their children pays the bills: of HK$24.4 million, just HK$2.3M is left to them.</a:t>
+              <a:t>Pete: Living on investments alone, as our written case measured, the money lasts in only 33%. The fairer test is their own way: sell the business when Carmen retires, keep the flat, and sell it only if they must. In 51% of futures, they must. In a typical one, Carmen, at 83 and on her own, sells the home where they raised Ryan and Chloe. By 86 the money has run out again, and the wealth meant for their children pays the bills: just HK$2.3M is left to them.</a:t>
             </a:r>
           </a:p>
         </p:txBody>
@@ -1111,7 +1111,7 @@
           <a:lstStyle/>
           <a:p>
             <a:r>
-              <a:t>Lookbua: Thanks, Pete. Call one: insure the income, not the life. Neither parent has disability cover: if one couldn't work, their pay would stop. So disability cover comes first, 65% of pay until they retire; then critical illness, medical cover of their own, and a term-life top-up. About HK$100K a year, 14% of their surplus. Term, because the need ends at retirement. And within three months: wills, a guardian for Chloe, powers of attorney, and a buy-sell agreement so her business survives her. Fahtai.</a:t>
+              <a:t>Lookbua: Thanks, Pete. Call one: insure the income, not the life. Neither parent has disability cover: if Adrian couldn't work tomorrow, they'd be HK$22K short every month. So disability cover comes first, then critical illness, medical cover of their own, and a term-life top-up: about HK$100K a year. Term, because the need ends at retirement. And a buy-sell agreement, so Carmen's business survives her. Protected first; now Fahtai turns what they own into income.</a:t>
             </a:r>
           </a:p>
         </p:txBody>
@@ -1181,7 +1181,7 @@
           <a:lstStyle/>
           <a:p>
             <a:r>
-              <a:t>Fahtai: Thanks, Lookbua. Call two: the home and the business will pay for their retirement either way. The question is when, and on whose terms. At 65 they choose: stay, with a reverse mortgage paying HK$230K a year for life, or downsize. The business is sold in stages to her co-founder and managers; we count only HK$3 million of its five. A survivor plans on 70%, and the MPF buys annuities. Four decisions, taken now: 83%, not 62%.</a:t>
+              <a:t>Fahtai: Call two: the home and the business will pay for their retirement either way. The question is when. At 65 they choose: stay, with a reverse mortgage paying HK$230K a year for life, or downsize. The business is sold in stages to Carmen's team; we count only HK$3 million of its five. After the first death, the survivor plans on 70% of the budget. And the MPF buys annuities, an income each can't outlive. Four decisions, taken now, lift the odds from 62% to 83%. The price: the annuities can't be undone.</a:t>
             </a:r>
           </a:p>
         </p:txBody>
@@ -1251,7 +1251,7 @@
           <a:lstStyle/>
           <a:p>
             <a:r>
-              <a:t>Fahtai: Call three: the cost their budget leaves out. Kept on Flexi for life, medical premiums climb to HK$375K a year. So at Adrian's 75 they review the tier: the Standard plan costs about a third as much. And from 2039, two spending rules: no raise for inflation after a year markets fall, and a 10% trim only if they draw on savings too fast; essentials are never cut. Remember that future? Now the money lasts to 89, and the home stays theirs. The odds: 97% with the review, almost every future with the rules. Win.</a:t>
+              <a:t>Fahtai: Call three: the cost the budget ignores. Kept on Flexi for life, medical premiums climb to HK$375K a year, close to half the budget. So at Adrian's 75 they review the tier: the Standard plan costs a third as much, with lower limits. And from 2039, two spending rules for the bad years; essentials are never cut. Remember that future? Now the money lasts to 89, and the home stays theirs: 97% with the review, almost every future with the rules. Win.</a:t>
             </a:r>
           </a:p>
         </p:txBody>
@@ -1321,7 +1321,7 @@
           <a:lstStyle/>
           <a:p>
             <a:r>
-              <a:t>Win: Thanks, Fahtai. Call four: one family policy, a plan for each person. Today HK$2.5 million sits idle in cash, and most of their shares are in funds charging 1.5% a year. We give every dollar a job: a twelve-month reserve; HK$2.57 million for Chloe's degree, funded today wherever she goes; and a portfolio each, Adrian 40% in shares, Carmen 60%. Ryan saves 30% of his pay in a plan of his own. Index funds alone save HK$45K a year.</a:t>
+              <a:t>Win: Thanks, Fahtai. Call four: one family investment policy, a plan for each person. Today HK$2.5 million sits idle in cash, and most of their shares are in funds charging 1.5% a year. We give every dollar a job: a year's reserve; HK$2.57 million for Chloe's degree, wherever she goes; and a portfolio fitted to each parent's risk: Adrian 40% in shares, Carmen 60%. Ryan saves 30% of his pay in a plan of his own. Index funds alone save HK$45K a year.</a:t>
             </a:r>
           </a:p>
         </p:txBody>
@@ -1391,7 +1391,7 @@
           <a:lstStyle/>
           <a:p>
             <a:r>
-              <a:t>Win: Call five: values and innovation, with guardrails. Carmen asked for 20 to 25% in ESG. We reach 25%, up from 11%, in SFC-listed funds that must pass two ratings. Crypto isn't yes or no, it's sized per person. Adrian holds none; Carmen up to 2%, through an ETF; Ryan keeps his HK$500K but adds nothing new, so its share falls from 74% of his wealth to 20% by 35. Lookbua.</a:t>
+              <a:t>Win: Call five: values and innovation, with guardrails. ESG rises from 11% to 25%, only in funds on the SFC's ESG list that pass two ratings, because raters often disagree. Crypto is sized per person, and held only where a regulator watches. Adrian holds none; Carmen up to 2%; Ryan keeps his HK$500K but adds nothing new, so its share falls from 74% of his wealth to 20% by 35. The price: a 70% fall would cost him HK$350K. Lookbua.</a:t>
             </a:r>
           </a:p>
         </p:txBody>

--- a/round2/Axis.pptx
+++ b/round2/Axis.pptx
@@ -139,23 +139,23 @@
   <p:extLst>
     <p:ext uri="{521415D9-36F7-43E2-AB2F-B90AF26B5E84}">
       <p14:sectionLst xmlns:p14="http://schemas.microsoft.com/office/powerpoint/2010/main">
-        <p14:section name="Cover" id="{4AE57B03-8268-4085-A305-BF9E6CD6B786}">
+        <p14:section name="Cover" id="{A51F3274-C6D8-4CC7-B1C8-7879F99C7AEA}">
           <p14:sldIdLst>
             <p14:sldId id="256"/>
           </p14:sldIdLst>
         </p14:section>
-        <p14:section name="The problem" id="{C6C051C1-459F-497D-8E94-9F655188B7DC}">
+        <p14:section name="The problem" id="{24F0F80F-E5B0-4FA9-95EB-7CD8D059BCBA}">
           <p14:sldIdLst>
             <p14:sldId id="257"/>
             <p14:sldId id="258"/>
           </p14:sldIdLst>
         </p14:section>
-        <p14:section name="The answer" id="{27D892BC-97AD-4CFE-9816-752990510CC7}">
+        <p14:section name="The answer" id="{DAB36994-4E1C-4ADD-BDCB-67B54966F9F2}">
           <p14:sldIdLst>
             <p14:sldId id="259"/>
           </p14:sldIdLst>
         </p14:section>
-        <p14:section name="The five calls" id="{90CC3477-5762-4107-91EA-A885C9730F3A}">
+        <p14:section name="The five calls" id="{D6132812-9CF1-4AA1-AE5B-9878FCEB414E}">
           <p14:sldIdLst>
             <p14:sldId id="260"/>
             <p14:sldId id="261"/>
@@ -164,24 +164,24 @@
             <p14:sldId id="264"/>
           </p14:sldIdLst>
         </p14:section>
-        <p14:section name="Will it hold" id="{53A6917D-AB03-49CD-9FDB-E165A7750E88}">
+        <p14:section name="Will it hold" id="{3E582B87-30B0-4BB5-AF3E-202879F717A1}">
           <p14:sldIdLst>
             <p14:sldId id="265"/>
           </p14:sldIdLst>
         </p14:section>
-        <p14:section name="What next" id="{4FB18FB6-8FFF-411D-835D-33A3203211FD}">
+        <p14:section name="What next" id="{DB546855-8D15-4EC6-B059-4B7EB544973A}">
           <p14:sldIdLst>
             <p14:sldId id="266"/>
             <p14:sldId id="267"/>
           </p14:sldIdLst>
         </p14:section>
-        <p14:section name="Us" id="{B8FA3937-29CF-4970-8A54-A0EA7586942F}">
+        <p14:section name="Us" id="{B0C18B8A-A580-4F94-8368-057315AB9B0E}">
           <p14:sldIdLst>
             <p14:sldId id="268"/>
             <p14:sldId id="269"/>
           </p14:sldIdLst>
         </p14:section>
-        <p14:section name="Close" id="{EF652838-B172-40A9-A342-7B9AE077CCC2}">
+        <p14:section name="Close" id="{FDFBEA0C-6C7A-447F-B8EF-6DB218777EB7}">
           <p14:sldIdLst>
             <p14:sldId id="270"/>
           </p14:sldIdLst>
@@ -231,7 +231,7 @@
     </p:spTree>
     <p:extLst>
       <p:ext uri="{BB962C8B-B14F-4D97-AF65-F5344CB8AC3E}">
-        <p14:creationId xmlns:p14="http://schemas.microsoft.com/office/powerpoint/2010/main" val="3561950661"/>
+        <p14:creationId xmlns:p14="http://schemas.microsoft.com/office/powerpoint/2010/main" val="192233609"/>
       </p:ext>
     </p:extLst>
   </p:cSld>
@@ -4385,7 +4385,7 @@
       </p:grpSpPr>
       <p:sp>
         <p:nvSpPr>
-          <p:cNvPr id="2" name="div"/>
+          <p:cNvPr id="2" name="!!div 86fce566"/>
           <p:cNvSpPr/>
           <p:nvPr/>
         </p:nvSpPr>
@@ -4415,7 +4415,7 @@
       </p:sp>
       <p:sp>
         <p:nvSpPr>
-          <p:cNvPr id="3" name="Text"/>
+          <p:cNvPr id="3" name="!!T Hong Kong Undergraduate Financial Planne"/>
           <p:cNvSpPr txBox="1"/>
           <p:nvPr/>
         </p:nvSpPr>
@@ -4482,7 +4482,7 @@
       </p:sp>
       <p:sp>
         <p:nvSpPr>
-          <p:cNvPr id="4" name="Text"/>
+          <p:cNvPr id="4" name="!!T Built to Last"/>
           <p:cNvSpPr txBox="1"/>
           <p:nvPr/>
         </p:nvSpPr>
@@ -4549,7 +4549,7 @@
       </p:sp>
       <p:sp>
         <p:nvSpPr>
-          <p:cNvPr id="5" name="Text"/>
+          <p:cNvPr id="5" name="!!T Five calls that make the Wong family's w"/>
           <p:cNvSpPr txBox="1"/>
           <p:nvPr/>
         </p:nvSpPr>
@@ -4616,7 +4616,7 @@
       </p:sp>
       <p:sp>
         <p:nvSpPr>
-          <p:cNvPr id="6" name="Text"/>
+          <p:cNvPr id="6" name="!!T Team Axis"/>
           <p:cNvSpPr txBox="1"/>
           <p:nvPr/>
         </p:nvSpPr>
@@ -4661,7 +4661,7 @@
       </p:sp>
       <p:sp>
         <p:nvSpPr>
-          <p:cNvPr id="7" name="Text"/>
+          <p:cNvPr id="7" name="!!T 2026"/>
           <p:cNvSpPr txBox="1"/>
           <p:nvPr/>
         </p:nvSpPr>
@@ -4706,7 +4706,7 @@
       </p:sp>
       <p:sp>
         <p:nvSpPr>
-          <p:cNvPr id="8" name="Text"/>
+          <p:cNvPr id="8" name="!!T Pete"/>
           <p:cNvSpPr txBox="1"/>
           <p:nvPr/>
         </p:nvSpPr>
@@ -4751,7 +4751,7 @@
       </p:sp>
       <p:sp>
         <p:nvSpPr>
-          <p:cNvPr id="9" name="Text"/>
+          <p:cNvPr id="9" name="!!T Lead adviser"/>
           <p:cNvSpPr txBox="1"/>
           <p:nvPr/>
         </p:nvSpPr>
@@ -4796,7 +4796,7 @@
       </p:sp>
       <p:sp>
         <p:nvSpPr>
-          <p:cNvPr id="10" name="Text"/>
+          <p:cNvPr id="10" name="!!T Fahtai"/>
           <p:cNvSpPr txBox="1"/>
           <p:nvPr/>
         </p:nvSpPr>
@@ -4841,7 +4841,7 @@
       </p:sp>
       <p:sp>
         <p:nvSpPr>
-          <p:cNvPr id="11" name="Text"/>
+          <p:cNvPr id="11" name="!!T Retirement"/>
           <p:cNvSpPr txBox="1"/>
           <p:nvPr/>
         </p:nvSpPr>
@@ -4886,7 +4886,7 @@
       </p:sp>
       <p:sp>
         <p:nvSpPr>
-          <p:cNvPr id="12" name="Text"/>
+          <p:cNvPr id="12" name="!!T Win"/>
           <p:cNvSpPr txBox="1"/>
           <p:nvPr/>
         </p:nvSpPr>
@@ -4931,7 +4931,7 @@
       </p:sp>
       <p:sp>
         <p:nvSpPr>
-          <p:cNvPr id="13" name="Text"/>
+          <p:cNvPr id="13" name="!!T Investment"/>
           <p:cNvSpPr txBox="1"/>
           <p:nvPr/>
         </p:nvSpPr>
@@ -4976,7 +4976,7 @@
       </p:sp>
       <p:sp>
         <p:nvSpPr>
-          <p:cNvPr id="14" name="Text"/>
+          <p:cNvPr id="14" name="!!T Lookbua"/>
           <p:cNvSpPr txBox="1"/>
           <p:nvPr/>
         </p:nvSpPr>
@@ -5021,7 +5021,7 @@
       </p:sp>
       <p:sp>
         <p:nvSpPr>
-          <p:cNvPr id="15" name="Text"/>
+          <p:cNvPr id="15" name="!!T Protection and risk"/>
           <p:cNvSpPr txBox="1"/>
           <p:nvPr/>
         </p:nvSpPr>
@@ -5066,7 +5066,7 @@
       </p:sp>
       <p:sp>
         <p:nvSpPr>
-          <p:cNvPr id="16" name="div"/>
+          <p:cNvPr id="16" name="!!div fdfd9047"/>
           <p:cNvSpPr/>
           <p:nvPr/>
         </p:nvSpPr>
@@ -5096,7 +5096,7 @@
       </p:sp>
       <p:pic>
         <p:nvPicPr>
-          <p:cNvPr id="17" name="Picture" descr="image.jpg"/>
+          <p:cNvPr id="17" name="!!Picture 5a53ae4d" descr="image.jpg"/>
           <p:cNvPicPr>
             <a:picLocks noChangeAspect="1"/>
           </p:cNvPicPr>
@@ -5121,7 +5121,7 @@
       </p:pic>
       <p:sp>
         <p:nvSpPr>
-          <p:cNvPr id="18" name="Text"/>
+          <p:cNvPr id="18" name="!!T Photograph: Peter Steinhauer, Cocoons"/>
           <p:cNvSpPr txBox="1"/>
           <p:nvPr/>
         </p:nvSpPr>
@@ -5182,6 +5182,9 @@
   <p:clrMapOvr>
     <a:masterClrMapping/>
   </p:clrMapOvr>
+  <p:transition>
+    <p:fade/>
+  </p:transition>
 </p:sld>
 </file>
 
@@ -5204,7 +5207,7 @@
       </p:grpSpPr>
       <p:sp>
         <p:nvSpPr>
-          <p:cNvPr id="2" name="Rule"/>
+          <p:cNvPr id="2" name="!!Rule 6ff153ce"/>
           <p:cNvSpPr/>
           <p:nvPr/>
         </p:nvSpPr>
@@ -5234,7 +5237,7 @@
       </p:sp>
       <p:sp>
         <p:nvSpPr>
-          <p:cNvPr id="3" name="Text"/>
+          <p:cNvPr id="3" name="!!T Will it hold?"/>
           <p:cNvSpPr txBox="1"/>
           <p:nvPr/>
         </p:nvSpPr>
@@ -5279,7 +5282,7 @@
       </p:sp>
       <p:sp>
         <p:nvSpPr>
-          <p:cNvPr id="4" name="Text"/>
+          <p:cNvPr id="4" name="!!T Tested against the worst: even if Adrian"/>
           <p:cNvSpPr txBox="1"/>
           <p:nvPr/>
         </p:nvSpPr>
@@ -5324,7 +5327,7 @@
       </p:sp>
       <p:sp>
         <p:nvSpPr>
-          <p:cNvPr id="5" name="i"/>
+          <p:cNvPr id="5" name="!!i 0e1ccda2"/>
           <p:cNvSpPr/>
           <p:nvPr/>
         </p:nvSpPr>
@@ -5356,7 +5359,7 @@
       </p:sp>
       <p:sp>
         <p:nvSpPr>
-          <p:cNvPr id="6" name="i"/>
+          <p:cNvPr id="6" name="!!i 9d61c349"/>
           <p:cNvSpPr/>
           <p:nvPr/>
         </p:nvSpPr>
@@ -5396,7 +5399,7 @@
       </p:sp>
       <p:sp>
         <p:nvSpPr>
-          <p:cNvPr id="7" name="Text"/>
+          <p:cNvPr id="7" name="!!T Four hard tests in the same 10,000 marke"/>
           <p:cNvSpPr txBox="1"/>
           <p:nvPr/>
         </p:nvSpPr>
@@ -5450,7 +5453,7 @@
       </p:sp>
       <p:sp>
         <p:nvSpPr>
-          <p:cNvPr id="8" name="Rule"/>
+          <p:cNvPr id="8" name="!!Rule 760d7dc2"/>
           <p:cNvSpPr/>
           <p:nvPr/>
         </p:nvSpPr>
@@ -5480,7 +5483,7 @@
       </p:sp>
       <p:sp>
         <p:nvSpPr>
-          <p:cNvPr id="9" name="Text"/>
+          <p:cNvPr id="9" name="!!T The test"/>
           <p:cNvSpPr txBox="1"/>
           <p:nvPr/>
         </p:nvSpPr>
@@ -5525,7 +5528,7 @@
       </p:sp>
       <p:sp>
         <p:nvSpPr>
-          <p:cNvPr id="10" name="Text"/>
+          <p:cNvPr id="10" name="!!T Chance the money lasts to Carmen's 89"/>
           <p:cNvSpPr txBox="1"/>
           <p:nvPr/>
         </p:nvSpPr>
@@ -5570,7 +5573,7 @@
       </p:sp>
       <p:sp>
         <p:nvSpPr>
-          <p:cNvPr id="11" name="Text"/>
+          <p:cNvPr id="11" name="!!T What holds it"/>
           <p:cNvSpPr txBox="1"/>
           <p:nvPr/>
         </p:nvSpPr>
@@ -5615,7 +5618,7 @@
       </p:sp>
       <p:sp>
         <p:nvSpPr>
-          <p:cNvPr id="12" name="Rule"/>
+          <p:cNvPr id="12" name="!!Rule 838c27a8"/>
           <p:cNvSpPr/>
           <p:nvPr/>
         </p:nvSpPr>
@@ -5645,7 +5648,7 @@
       </p:sp>
       <p:sp>
         <p:nvSpPr>
-          <p:cNvPr id="13" name="Text"/>
+          <p:cNvPr id="13" name="!!T Adrian's job ends at 60"/>
           <p:cNvSpPr txBox="1"/>
           <p:nvPr/>
         </p:nvSpPr>
@@ -5690,7 +5693,7 @@
       </p:sp>
       <p:sp>
         <p:nvSpPr>
-          <p:cNvPr id="14" name="Text"/>
+          <p:cNvPr id="14" name="!!T no pay or MPF to 65, no severance"/>
           <p:cNvSpPr txBox="1"/>
           <p:nvPr/>
         </p:nvSpPr>
@@ -5735,7 +5738,7 @@
       </p:sp>
       <p:sp>
         <p:nvSpPr>
-          <p:cNvPr id="15" name="ps-el"/>
+          <p:cNvPr id="15" name="!!ps-el a14cbae3"/>
           <p:cNvSpPr/>
           <p:nvPr/>
         </p:nvSpPr>
@@ -5767,7 +5770,7 @@
       </p:sp>
       <p:sp>
         <p:nvSpPr>
-          <p:cNvPr id="16" name="span"/>
+          <p:cNvPr id="16" name="!!span 0a5913c7"/>
           <p:cNvSpPr/>
           <p:nvPr/>
         </p:nvSpPr>
@@ -5800,7 +5803,7 @@
       </p:sp>
       <p:sp>
         <p:nvSpPr>
-          <p:cNvPr id="17" name="span"/>
+          <p:cNvPr id="17" name="!!span a27bee5f"/>
           <p:cNvSpPr/>
           <p:nvPr/>
         </p:nvSpPr>
@@ -5841,7 +5844,7 @@
       </p:sp>
       <p:sp>
         <p:nvSpPr>
-          <p:cNvPr id="18" name="Rule"/>
+          <p:cNvPr id="18" name="!!Rule a07366dd"/>
           <p:cNvSpPr/>
           <p:nvPr/>
         </p:nvSpPr>
@@ -5871,7 +5874,7 @@
       </p:sp>
       <p:sp>
         <p:nvSpPr>
-          <p:cNvPr id="19" name="Text"/>
+          <p:cNvPr id="19" name="!!T 30%"/>
           <p:cNvSpPr txBox="1"/>
           <p:nvPr/>
         </p:nvSpPr>
@@ -5916,7 +5919,7 @@
       </p:sp>
       <p:sp>
         <p:nvSpPr>
-          <p:cNvPr id="20" name="Text"/>
+          <p:cNvPr id="20" name="!!T 83%"/>
           <p:cNvSpPr txBox="1"/>
           <p:nvPr/>
         </p:nvSpPr>
@@ -5961,7 +5964,7 @@
       </p:sp>
       <p:sp>
         <p:nvSpPr>
-          <p:cNvPr id="21" name="Text"/>
+          <p:cNvPr id="21" name="!!T Reserve pays a year of bills"/>
           <p:cNvSpPr txBox="1"/>
           <p:nvPr/>
         </p:nvSpPr>
@@ -6015,7 +6018,7 @@
       </p:sp>
       <p:sp>
         <p:nvSpPr>
-          <p:cNvPr id="22" name="Text"/>
+          <p:cNvPr id="22" name="!!T Spending rules trim lean years"/>
           <p:cNvSpPr txBox="1"/>
           <p:nvPr/>
         </p:nvSpPr>
@@ -6069,7 +6072,7 @@
       </p:sp>
       <p:sp>
         <p:nvSpPr>
-          <p:cNvPr id="23" name="Text"/>
+          <p:cNvPr id="23" name="!!T Full review resets the plan"/>
           <p:cNvSpPr txBox="1"/>
           <p:nvPr/>
         </p:nvSpPr>
@@ -6123,7 +6126,7 @@
       </p:sp>
       <p:sp>
         <p:nvSpPr>
-          <p:cNvPr id="24" name="Rule"/>
+          <p:cNvPr id="24" name="!!Rule f9dc0d51"/>
           <p:cNvSpPr/>
           <p:nvPr/>
         </p:nvSpPr>
@@ -6153,7 +6156,7 @@
       </p:sp>
       <p:sp>
         <p:nvSpPr>
-          <p:cNvPr id="25" name="Text"/>
+          <p:cNvPr id="25" name="!!T Low returns, every year"/>
           <p:cNvSpPr txBox="1"/>
           <p:nvPr/>
         </p:nvSpPr>
@@ -6198,7 +6201,7 @@
       </p:sp>
       <p:sp>
         <p:nvSpPr>
-          <p:cNvPr id="26" name="Text"/>
+          <p:cNvPr id="26" name="!!T shares 4%, bonds 2.5%, to 2066"/>
           <p:cNvSpPr txBox="1"/>
           <p:nvPr/>
         </p:nvSpPr>
@@ -6243,7 +6246,7 @@
       </p:sp>
       <p:sp>
         <p:nvSpPr>
-          <p:cNvPr id="27" name="ps-el"/>
+          <p:cNvPr id="27" name="!!ps-el 603f9092"/>
           <p:cNvSpPr/>
           <p:nvPr/>
         </p:nvSpPr>
@@ -6275,7 +6278,7 @@
       </p:sp>
       <p:sp>
         <p:nvSpPr>
-          <p:cNvPr id="28" name="span"/>
+          <p:cNvPr id="28" name="!!span be8a703d"/>
           <p:cNvSpPr/>
           <p:nvPr/>
         </p:nvSpPr>
@@ -6308,7 +6311,7 @@
       </p:sp>
       <p:sp>
         <p:nvSpPr>
-          <p:cNvPr id="29" name="span"/>
+          <p:cNvPr id="29" name="!!span f33f1255"/>
           <p:cNvSpPr/>
           <p:nvPr/>
         </p:nvSpPr>
@@ -6349,7 +6352,7 @@
       </p:sp>
       <p:sp>
         <p:nvSpPr>
-          <p:cNvPr id="30" name="Rule"/>
+          <p:cNvPr id="30" name="!!Rule e49d9551"/>
           <p:cNvSpPr/>
           <p:nvPr/>
         </p:nvSpPr>
@@ -6379,7 +6382,7 @@
       </p:sp>
       <p:sp>
         <p:nvSpPr>
-          <p:cNvPr id="31" name="Text"/>
+          <p:cNvPr id="31" name="!!T 32%"/>
           <p:cNvSpPr txBox="1"/>
           <p:nvPr/>
         </p:nvSpPr>
@@ -6424,7 +6427,7 @@
       </p:sp>
       <p:sp>
         <p:nvSpPr>
-          <p:cNvPr id="32" name="Text"/>
+          <p:cNvPr id="32" name="!!T 95%"/>
           <p:cNvSpPr txBox="1"/>
           <p:nvPr/>
         </p:nvSpPr>
@@ -6469,7 +6472,7 @@
       </p:sp>
       <p:sp>
         <p:nvSpPr>
-          <p:cNvPr id="33" name="Text"/>
+          <p:cNvPr id="33" name="!!T Spending rules trim lean years #2"/>
           <p:cNvSpPr txBox="1"/>
           <p:nvPr/>
         </p:nvSpPr>
@@ -6523,7 +6526,7 @@
       </p:sp>
       <p:sp>
         <p:nvSpPr>
-          <p:cNvPr id="34" name="Text"/>
+          <p:cNvPr id="34" name="!!T Treasuries mature on schedule"/>
           <p:cNvSpPr txBox="1"/>
           <p:nvPr/>
         </p:nvSpPr>
@@ -6577,7 +6580,7 @@
       </p:sp>
       <p:sp>
         <p:nvSpPr>
-          <p:cNvPr id="35" name="Rule"/>
+          <p:cNvPr id="35" name="!!Rule 5d953a4b"/>
           <p:cNvSpPr/>
           <p:nvPr/>
         </p:nvSpPr>
@@ -6607,7 +6610,7 @@
       </p:sp>
       <p:sp>
         <p:nvSpPr>
-          <p:cNvPr id="36" name="Text"/>
+          <p:cNvPr id="36" name="!!T Inflation and medical costs"/>
           <p:cNvSpPr txBox="1"/>
           <p:nvPr/>
         </p:nvSpPr>
@@ -6652,7 +6655,7 @@
       </p:sp>
       <p:sp>
         <p:nvSpPr>
-          <p:cNvPr id="37" name="Text"/>
+          <p:cNvPr id="37" name="!!T inflation 3.5%, medical 8.5% a year"/>
           <p:cNvSpPr txBox="1"/>
           <p:nvPr/>
         </p:nvSpPr>
@@ -6697,7 +6700,7 @@
       </p:sp>
       <p:sp>
         <p:nvSpPr>
-          <p:cNvPr id="38" name="ps-el"/>
+          <p:cNvPr id="38" name="!!ps-el 83e6bb3a"/>
           <p:cNvSpPr/>
           <p:nvPr/>
         </p:nvSpPr>
@@ -6729,7 +6732,7 @@
       </p:sp>
       <p:sp>
         <p:nvSpPr>
-          <p:cNvPr id="39" name="span"/>
+          <p:cNvPr id="39" name="!!span c149a3be"/>
           <p:cNvSpPr/>
           <p:nvPr/>
         </p:nvSpPr>
@@ -6762,7 +6765,7 @@
       </p:sp>
       <p:sp>
         <p:nvSpPr>
-          <p:cNvPr id="40" name="span"/>
+          <p:cNvPr id="40" name="!!span f8c76270"/>
           <p:cNvSpPr/>
           <p:nvPr/>
         </p:nvSpPr>
@@ -6803,7 +6806,7 @@
       </p:sp>
       <p:sp>
         <p:nvSpPr>
-          <p:cNvPr id="41" name="Rule"/>
+          <p:cNvPr id="41" name="!!Rule bdeb7c5d"/>
           <p:cNvSpPr/>
           <p:nvPr/>
         </p:nvSpPr>
@@ -6833,7 +6836,7 @@
       </p:sp>
       <p:sp>
         <p:nvSpPr>
-          <p:cNvPr id="42" name="Text"/>
+          <p:cNvPr id="42" name="!!T 28%"/>
           <p:cNvSpPr txBox="1"/>
           <p:nvPr/>
         </p:nvSpPr>
@@ -6878,7 +6881,7 @@
       </p:sp>
       <p:sp>
         <p:nvSpPr>
-          <p:cNvPr id="43" name="Text"/>
+          <p:cNvPr id="43" name="!!T 92%"/>
           <p:cNvSpPr txBox="1"/>
           <p:nvPr/>
         </p:nvSpPr>
@@ -6923,7 +6926,7 @@
       </p:sp>
       <p:sp>
         <p:nvSpPr>
-          <p:cNvPr id="44" name="Text"/>
+          <p:cNvPr id="44" name="!!T Review at 75 cuts the premiums"/>
           <p:cNvSpPr txBox="1"/>
           <p:nvPr/>
         </p:nvSpPr>
@@ -6977,7 +6980,7 @@
       </p:sp>
       <p:sp>
         <p:nvSpPr>
-          <p:cNvPr id="45" name="Text"/>
+          <p:cNvPr id="45" name="!!T Spending rules absorb the rest"/>
           <p:cNvSpPr txBox="1"/>
           <p:nvPr/>
         </p:nvSpPr>
@@ -7031,7 +7034,7 @@
       </p:sp>
       <p:sp>
         <p:nvSpPr>
-          <p:cNvPr id="46" name="Rule"/>
+          <p:cNvPr id="46" name="!!Rule aa0675ea"/>
           <p:cNvSpPr/>
           <p:nvPr/>
         </p:nvSpPr>
@@ -7061,7 +7064,7 @@
       </p:sp>
       <p:sp>
         <p:nvSpPr>
-          <p:cNvPr id="47" name="Text"/>
+          <p:cNvPr id="47" name="!!T Carmen lives to 95"/>
           <p:cNvSpPr txBox="1"/>
           <p:nvPr/>
         </p:nvSpPr>
@@ -7106,7 +7109,7 @@
       </p:sp>
       <p:sp>
         <p:nvSpPr>
-          <p:cNvPr id="48" name="Text"/>
+          <p:cNvPr id="48" name="!!T six years past the plan's 89"/>
           <p:cNvSpPr txBox="1"/>
           <p:nvPr/>
         </p:nvSpPr>
@@ -7151,7 +7154,7 @@
       </p:sp>
       <p:sp>
         <p:nvSpPr>
-          <p:cNvPr id="49" name="ps-el"/>
+          <p:cNvPr id="49" name="!!ps-el 6c550c84"/>
           <p:cNvSpPr/>
           <p:nvPr/>
         </p:nvSpPr>
@@ -7183,7 +7186,7 @@
       </p:sp>
       <p:sp>
         <p:nvSpPr>
-          <p:cNvPr id="50" name="span"/>
+          <p:cNvPr id="50" name="!!span 153aa188"/>
           <p:cNvSpPr/>
           <p:nvPr/>
         </p:nvSpPr>
@@ -7216,7 +7219,7 @@
       </p:sp>
       <p:sp>
         <p:nvSpPr>
-          <p:cNvPr id="51" name="span"/>
+          <p:cNvPr id="51" name="!!span e5f3da39"/>
           <p:cNvSpPr/>
           <p:nvPr/>
         </p:nvSpPr>
@@ -7257,7 +7260,7 @@
       </p:sp>
       <p:sp>
         <p:nvSpPr>
-          <p:cNvPr id="52" name="Rule"/>
+          <p:cNvPr id="52" name="!!Rule 7a2724c5"/>
           <p:cNvSpPr/>
           <p:nvPr/>
         </p:nvSpPr>
@@ -7287,7 +7290,7 @@
       </p:sp>
       <p:sp>
         <p:nvSpPr>
-          <p:cNvPr id="53" name="Text"/>
+          <p:cNvPr id="53" name="!!T 61%"/>
           <p:cNvSpPr txBox="1"/>
           <p:nvPr/>
         </p:nvSpPr>
@@ -7332,7 +7335,7 @@
       </p:sp>
       <p:sp>
         <p:nvSpPr>
-          <p:cNvPr id="54" name="Text"/>
+          <p:cNvPr id="54" name="!!T 99%"/>
           <p:cNvSpPr txBox="1"/>
           <p:nvPr/>
         </p:nvSpPr>
@@ -7377,7 +7380,7 @@
       </p:sp>
       <p:sp>
         <p:nvSpPr>
-          <p:cNvPr id="55" name="Text"/>
+          <p:cNvPr id="55" name="!!T Annuities pay for life"/>
           <p:cNvSpPr txBox="1"/>
           <p:nvPr/>
         </p:nvSpPr>
@@ -7431,7 +7434,7 @@
       </p:sp>
       <p:sp>
         <p:nvSpPr>
-          <p:cNvPr id="56" name="Text"/>
+          <p:cNvPr id="56" name="!!T 0%"/>
           <p:cNvSpPr txBox="1"/>
           <p:nvPr/>
         </p:nvSpPr>
@@ -7476,7 +7479,7 @@
       </p:sp>
       <p:sp>
         <p:nvSpPr>
-          <p:cNvPr id="57" name="Text"/>
+          <p:cNvPr id="57" name="!!T 50%"/>
           <p:cNvSpPr txBox="1"/>
           <p:nvPr/>
         </p:nvSpPr>
@@ -7521,7 +7524,7 @@
       </p:sp>
       <p:sp>
         <p:nvSpPr>
-          <p:cNvPr id="58" name="Text"/>
+          <p:cNvPr id="58" name="!!T 100%"/>
           <p:cNvSpPr txBox="1"/>
           <p:nvPr/>
         </p:nvSpPr>
@@ -7566,7 +7569,7 @@
       </p:sp>
       <p:sp>
         <p:nvSpPr>
-          <p:cNvPr id="59" name="Text"/>
+          <p:cNvPr id="59" name="!!T The price of holding: in years of low re"/>
           <p:cNvSpPr txBox="1"/>
           <p:nvPr/>
         </p:nvSpPr>
@@ -7638,7 +7641,7 @@
       </p:sp>
       <p:sp>
         <p:nvSpPr>
-          <p:cNvPr id="60" name="Rule"/>
+          <p:cNvPr id="60" name="!!Rule 4482664d"/>
           <p:cNvSpPr/>
           <p:nvPr/>
         </p:nvSpPr>
@@ -7668,7 +7671,7 @@
       </p:sp>
       <p:sp>
         <p:nvSpPr>
-          <p:cNvPr id="61" name="Text"/>
+          <p:cNvPr id="61" name="!!T written case, risk register"/>
           <p:cNvSpPr txBox="1"/>
           <p:nvPr/>
         </p:nvSpPr>
@@ -7713,7 +7716,7 @@
       </p:sp>
       <p:sp>
         <p:nvSpPr>
-          <p:cNvPr id="62" name="Text"/>
+          <p:cNvPr id="62" name="!!T Every other risk has a named defence"/>
           <p:cNvSpPr txBox="1"/>
           <p:nvPr/>
         </p:nvSpPr>
@@ -7780,7 +7783,7 @@
       </p:sp>
       <p:sp>
         <p:nvSpPr>
-          <p:cNvPr id="63" name="span"/>
+          <p:cNvPr id="63" name="!!span eea6115d"/>
           <p:cNvSpPr/>
           <p:nvPr/>
         </p:nvSpPr>
@@ -7810,7 +7813,7 @@
       </p:sp>
       <p:pic>
         <p:nvPicPr>
-          <p:cNvPr id="64" name="Drawing" descr="image.png"/>
+          <p:cNvPr id="64" name="!!Drawing c4eaa9b8" descr="image.png"/>
           <p:cNvPicPr>
             <a:picLocks noChangeAspect="1"/>
           </p:cNvPicPr>
@@ -7840,7 +7843,7 @@
       </p:pic>
       <p:sp>
         <p:nvSpPr>
-          <p:cNvPr id="65" name="Text"/>
+          <p:cNvPr id="65" name="!!T The business doesn't sell"/>
           <p:cNvSpPr txBox="1"/>
           <p:nvPr/>
         </p:nvSpPr>
@@ -7885,7 +7888,7 @@
       </p:sp>
       <p:sp>
         <p:nvSpPr>
-          <p:cNvPr id="66" name="span"/>
+          <p:cNvPr id="66" name="!!span 90014fb4"/>
           <p:cNvSpPr/>
           <p:nvPr/>
         </p:nvSpPr>
@@ -7915,7 +7918,7 @@
       </p:sp>
       <p:pic>
         <p:nvPicPr>
-          <p:cNvPr id="67" name="Drawing" descr="image.png"/>
+          <p:cNvPr id="67" name="!!Drawing 928d39af" descr="image.png"/>
           <p:cNvPicPr>
             <a:picLocks noChangeAspect="1"/>
           </p:cNvPicPr>
@@ -7945,7 +7948,7 @@
       </p:pic>
       <p:sp>
         <p:nvSpPr>
-          <p:cNvPr id="68" name="Text"/>
+          <p:cNvPr id="68" name="!!T Three risk appetites"/>
           <p:cNvSpPr txBox="1"/>
           <p:nvPr/>
         </p:nvSpPr>
@@ -7990,7 +7993,7 @@
       </p:sp>
       <p:sp>
         <p:nvSpPr>
-          <p:cNvPr id="69" name="span"/>
+          <p:cNvPr id="69" name="!!span 8fdfea72"/>
           <p:cNvSpPr/>
           <p:nvPr/>
         </p:nvSpPr>
@@ -8020,7 +8023,7 @@
       </p:sp>
       <p:pic>
         <p:nvPicPr>
-          <p:cNvPr id="70" name="Drawing" descr="image.png"/>
+          <p:cNvPr id="70" name="!!Drawing dbc1cd2e" descr="image.png"/>
           <p:cNvPicPr>
             <a:picLocks noChangeAspect="1"/>
           </p:cNvPicPr>
@@ -8050,7 +8053,7 @@
       </p:pic>
       <p:sp>
         <p:nvSpPr>
-          <p:cNvPr id="71" name="Text"/>
+          <p:cNvPr id="71" name="!!T Crypto rules or licences change"/>
           <p:cNvSpPr txBox="1"/>
           <p:nvPr/>
         </p:nvSpPr>
@@ -8095,7 +8098,7 @@
       </p:sp>
       <p:sp>
         <p:nvSpPr>
-          <p:cNvPr id="72" name="span"/>
+          <p:cNvPr id="72" name="!!span e391b3d2"/>
           <p:cNvSpPr/>
           <p:nvPr/>
         </p:nvSpPr>
@@ -8125,7 +8128,7 @@
       </p:sp>
       <p:pic>
         <p:nvPicPr>
-          <p:cNvPr id="73" name="Drawing" descr="image.png"/>
+          <p:cNvPr id="73" name="!!Drawing 509cae11" descr="image.png"/>
           <p:cNvPicPr>
             <a:picLocks noChangeAspect="1"/>
           </p:cNvPicPr>
@@ -8155,7 +8158,7 @@
       </p:pic>
       <p:sp>
         <p:nvSpPr>
-          <p:cNvPr id="74" name="Text"/>
+          <p:cNvPr id="74" name="!!T Greenwashing"/>
           <p:cNvSpPr txBox="1"/>
           <p:nvPr/>
         </p:nvSpPr>
@@ -8200,7 +8203,7 @@
       </p:sp>
       <p:sp>
         <p:nvSpPr>
-          <p:cNvPr id="75" name="span"/>
+          <p:cNvPr id="75" name="!!span f53af421"/>
           <p:cNvSpPr/>
           <p:nvPr/>
         </p:nvSpPr>
@@ -8230,7 +8233,7 @@
       </p:sp>
       <p:pic>
         <p:nvPicPr>
-          <p:cNvPr id="76" name="Drawing" descr="image.png"/>
+          <p:cNvPr id="76" name="!!Drawing ff1cb4bb" descr="image.png"/>
           <p:cNvPicPr>
             <a:picLocks noChangeAspect="1"/>
           </p:cNvPicPr>
@@ -8260,7 +8263,7 @@
       </p:pic>
       <p:sp>
         <p:nvSpPr>
-          <p:cNvPr id="77" name="Text"/>
+          <p:cNvPr id="77" name="!!T Model risk"/>
           <p:cNvSpPr txBox="1"/>
           <p:nvPr/>
         </p:nvSpPr>
@@ -8305,7 +8308,7 @@
       </p:sp>
       <p:sp>
         <p:nvSpPr>
-          <p:cNvPr id="78" name="p"/>
+          <p:cNvPr id="78" name="!!p 442bdd76"/>
           <p:cNvSpPr/>
           <p:nvPr/>
         </p:nvSpPr>
@@ -8335,7 +8338,7 @@
       </p:sp>
       <p:sp>
         <p:nvSpPr>
-          <p:cNvPr id="79" name="Text"/>
+          <p:cNvPr id="79" name="!!T It holds when the hardest things happen,"/>
           <p:cNvSpPr txBox="1"/>
           <p:nvPr/>
         </p:nvSpPr>
@@ -8380,7 +8383,7 @@
       </p:sp>
       <p:sp>
         <p:nvSpPr>
-          <p:cNvPr id="80" name="Text"/>
+          <p:cNvPr id="80" name="!!T Chance the money lasts to Carmen's 89 (9"/>
           <p:cNvSpPr txBox="1"/>
           <p:nvPr/>
         </p:nvSpPr>
@@ -8447,7 +8450,7 @@
       </p:sp>
       <p:sp>
         <p:nvSpPr>
-          <p:cNvPr id="81" name="Text"/>
+          <p:cNvPr id="81" name="!!T The problem"/>
           <p:cNvSpPr txBox="1"/>
           <p:nvPr/>
         </p:nvSpPr>
@@ -8492,7 +8495,7 @@
       </p:sp>
       <p:sp>
         <p:nvSpPr>
-          <p:cNvPr id="82" name="Text"/>
+          <p:cNvPr id="82" name="!!T The answer"/>
           <p:cNvSpPr txBox="1"/>
           <p:nvPr/>
         </p:nvSpPr>
@@ -8537,7 +8540,7 @@
       </p:sp>
       <p:sp>
         <p:nvSpPr>
-          <p:cNvPr id="83" name="Text"/>
+          <p:cNvPr id="83" name="!!T The five calls"/>
           <p:cNvSpPr txBox="1"/>
           <p:nvPr/>
         </p:nvSpPr>
@@ -8582,7 +8585,7 @@
       </p:sp>
       <p:sp>
         <p:nvSpPr>
-          <p:cNvPr id="84" name="Text"/>
+          <p:cNvPr id="84" name="!!T Will it hold"/>
           <p:cNvSpPr txBox="1"/>
           <p:nvPr/>
         </p:nvSpPr>
@@ -8627,7 +8630,7 @@
       </p:sp>
       <p:sp>
         <p:nvSpPr>
-          <p:cNvPr id="85" name="Text"/>
+          <p:cNvPr id="85" name="!!T What next"/>
           <p:cNvSpPr txBox="1"/>
           <p:nvPr/>
         </p:nvSpPr>
@@ -8672,7 +8675,7 @@
       </p:sp>
       <p:sp>
         <p:nvSpPr>
-          <p:cNvPr id="86" name="Text"/>
+          <p:cNvPr id="86" name="!!T Us"/>
           <p:cNvSpPr txBox="1"/>
           <p:nvPr/>
         </p:nvSpPr>
@@ -8717,7 +8720,7 @@
       </p:sp>
       <p:sp>
         <p:nvSpPr>
-          <p:cNvPr id="87" name="Text"/>
+          <p:cNvPr id="87" name="!!T 10 / 15"/>
           <p:cNvSpPr txBox="1"/>
           <p:nvPr/>
         </p:nvSpPr>
@@ -8765,6 +8768,9 @@
   <p:clrMapOvr>
     <a:masterClrMapping/>
   </p:clrMapOvr>
+  <p:transition>
+    <p:fade/>
+  </p:transition>
 </p:sld>
 </file>
 
@@ -8787,7 +8793,7 @@
       </p:grpSpPr>
       <p:sp>
         <p:nvSpPr>
-          <p:cNvPr id="2" name="Rule"/>
+          <p:cNvPr id="2" name="!!Rule 2286b0a1"/>
           <p:cNvSpPr/>
           <p:nvPr/>
         </p:nvSpPr>
@@ -8817,7 +8823,7 @@
       </p:sp>
       <p:sp>
         <p:nvSpPr>
-          <p:cNvPr id="3" name="Text"/>
+          <p:cNvPr id="3" name="!!T What happens when"/>
           <p:cNvSpPr txBox="1"/>
           <p:nvPr/>
         </p:nvSpPr>
@@ -8862,7 +8868,7 @@
       </p:sp>
       <p:sp>
         <p:nvSpPr>
-          <p:cNvPr id="4" name="Text"/>
+          <p:cNvPr id="4" name="!!T It starts this month and closes every ga"/>
           <p:cNvSpPr txBox="1"/>
           <p:nvPr/>
         </p:nvSpPr>
@@ -8929,7 +8935,7 @@
       </p:sp>
       <p:sp>
         <p:nvSpPr>
-          <p:cNvPr id="5" name="Rule"/>
+          <p:cNvPr id="5" name="!!Rule c58b1ef9"/>
           <p:cNvSpPr/>
           <p:nvPr/>
         </p:nvSpPr>
@@ -8959,7 +8965,7 @@
       </p:sp>
       <p:sp>
         <p:nvSpPr>
-          <p:cNvPr id="6" name="Text"/>
+          <p:cNvPr id="6" name="!!T This year: close every gap…"/>
           <p:cNvSpPr txBox="1"/>
           <p:nvPr/>
         </p:nvSpPr>
@@ -9004,7 +9010,7 @@
       </p:sp>
       <p:sp>
         <p:nvSpPr>
-          <p:cNvPr id="7" name="Rule"/>
+          <p:cNvPr id="7" name="!!Rule 5fe1fbff"/>
           <p:cNvSpPr/>
           <p:nvPr/>
         </p:nvSpPr>
@@ -9034,7 +9040,7 @@
       </p:sp>
       <p:sp>
         <p:nvSpPr>
-          <p:cNvPr id="8" name="Text"/>
+          <p:cNvPr id="8" name="!!T Month 1"/>
           <p:cNvSpPr txBox="1"/>
           <p:nvPr/>
         </p:nvSpPr>
@@ -9079,7 +9085,7 @@
       </p:sp>
       <p:sp>
         <p:nvSpPr>
-          <p:cNvPr id="9" name="Text"/>
+          <p:cNvPr id="9" name="!!T Wills and a joint account"/>
           <p:cNvSpPr txBox="1"/>
           <p:nvPr/>
         </p:nvSpPr>
@@ -9146,7 +9152,7 @@
       </p:sp>
       <p:sp>
         <p:nvSpPr>
-          <p:cNvPr id="10" name="Text"/>
+          <p:cNvPr id="10" name="!!T a guardian; powers of attorney"/>
           <p:cNvSpPr txBox="1"/>
           <p:nvPr/>
         </p:nvSpPr>
@@ -9213,7 +9219,7 @@
       </p:sp>
       <p:pic>
         <p:nvPicPr>
-          <p:cNvPr id="11" name="Picture" descr="image.jpg"/>
+          <p:cNvPr id="11" name="!!Picture 6a9345b5" descr="image.jpg"/>
           <p:cNvPicPr>
             <a:picLocks noChangeAspect="1"/>
           </p:cNvPicPr>
@@ -9249,7 +9255,7 @@
       </p:pic>
       <p:pic>
         <p:nvPicPr>
-          <p:cNvPr id="12" name="Picture" descr="image.jpg"/>
+          <p:cNvPr id="12" name="!!Picture abd34fdc" descr="image.jpg"/>
           <p:cNvPicPr>
             <a:picLocks noChangeAspect="1"/>
           </p:cNvPicPr>
@@ -9285,7 +9291,7 @@
       </p:pic>
       <p:sp>
         <p:nvSpPr>
-          <p:cNvPr id="13" name="Text"/>
+          <p:cNvPr id="13" name="!!T By month 3"/>
           <p:cNvSpPr txBox="1"/>
           <p:nvPr/>
         </p:nvSpPr>
@@ -9330,7 +9336,7 @@
       </p:sp>
       <p:sp>
         <p:nvSpPr>
-          <p:cNvPr id="14" name="Text"/>
+          <p:cNvPr id="14" name="!!T The cover in place"/>
           <p:cNvSpPr txBox="1"/>
           <p:nvPr/>
         </p:nvSpPr>
@@ -9397,7 +9403,7 @@
       </p:sp>
       <p:sp>
         <p:nvSpPr>
-          <p:cNvPr id="15" name="Text"/>
+          <p:cNvPr id="15" name="!!T about HK$100K a year"/>
           <p:cNvSpPr txBox="1"/>
           <p:nvPr/>
         </p:nvSpPr>
@@ -9464,7 +9470,7 @@
       </p:sp>
       <p:pic>
         <p:nvPicPr>
-          <p:cNvPr id="16" name="Picture" descr="image.jpg"/>
+          <p:cNvPr id="16" name="!!Picture ef3cc36d" descr="image.jpg"/>
           <p:cNvPicPr>
             <a:picLocks noChangeAspect="1"/>
           </p:cNvPicPr>
@@ -9500,7 +9506,7 @@
       </p:pic>
       <p:pic>
         <p:nvPicPr>
-          <p:cNvPr id="17" name="Picture" descr="image.jpg"/>
+          <p:cNvPr id="17" name="!!Picture d2df3b36" descr="image.jpg"/>
           <p:cNvPicPr>
             <a:picLocks noChangeAspect="1"/>
           </p:cNvPicPr>
@@ -9536,7 +9542,7 @@
       </p:pic>
       <p:pic>
         <p:nvPicPr>
-          <p:cNvPr id="18" name="Picture" descr="image.jpg"/>
+          <p:cNvPr id="18" name="!!Picture da0880d0" descr="image.jpg"/>
           <p:cNvPicPr>
             <a:picLocks noChangeAspect="1"/>
           </p:cNvPicPr>
@@ -9572,7 +9578,7 @@
       </p:pic>
       <p:sp>
         <p:nvSpPr>
-          <p:cNvPr id="19" name="Text"/>
+          <p:cNvPr id="19" name="!!T By month 6"/>
           <p:cNvSpPr txBox="1"/>
           <p:nvPr/>
         </p:nvSpPr>
@@ -9617,7 +9623,7 @@
       </p:sp>
       <p:sp>
         <p:nvSpPr>
-          <p:cNvPr id="20" name="Text"/>
+          <p:cNvPr id="20" name="!!T A portfolio each"/>
           <p:cNvSpPr txBox="1"/>
           <p:nvPr/>
         </p:nvSpPr>
@@ -9662,7 +9668,7 @@
       </p:sp>
       <p:sp>
         <p:nvSpPr>
-          <p:cNvPr id="21" name="Text"/>
+          <p:cNvPr id="21" name="!!T HK$45K a year less in fees"/>
           <p:cNvSpPr txBox="1"/>
           <p:nvPr/>
         </p:nvSpPr>
@@ -9729,7 +9735,7 @@
       </p:sp>
       <p:pic>
         <p:nvPicPr>
-          <p:cNvPr id="22" name="Picture" descr="image.jpg"/>
+          <p:cNvPr id="22" name="!!Picture 5415930d" descr="image.jpg"/>
           <p:cNvPicPr>
             <a:picLocks noChangeAspect="1"/>
           </p:cNvPicPr>
@@ -9765,7 +9771,7 @@
       </p:pic>
       <p:pic>
         <p:nvPicPr>
-          <p:cNvPr id="23" name="Picture" descr="image.jpg"/>
+          <p:cNvPr id="23" name="!!Picture b5e33b9c" descr="image.jpg"/>
           <p:cNvPicPr>
             <a:picLocks noChangeAspect="1"/>
           </p:cNvPicPr>
@@ -9801,7 +9807,7 @@
       </p:pic>
       <p:pic>
         <p:nvPicPr>
-          <p:cNvPr id="24" name="Picture" descr="image.jpg"/>
+          <p:cNvPr id="24" name="!!Picture b2f69ffe" descr="image.jpg"/>
           <p:cNvPicPr>
             <a:picLocks noChangeAspect="1"/>
           </p:cNvPicPr>
@@ -9837,7 +9843,7 @@
       </p:pic>
       <p:sp>
         <p:nvSpPr>
-          <p:cNvPr id="25" name="Text"/>
+          <p:cNvPr id="25" name="!!T Month 12"/>
           <p:cNvSpPr txBox="1"/>
           <p:nvPr/>
         </p:nvSpPr>
@@ -9882,7 +9888,7 @@
       </p:sp>
       <p:sp>
         <p:nvSpPr>
-          <p:cNvPr id="26" name="Text"/>
+          <p:cNvPr id="26" name="!!T First family meeting"/>
           <p:cNvSpPr txBox="1"/>
           <p:nvPr/>
         </p:nvSpPr>
@@ -9949,7 +9955,7 @@
       </p:sp>
       <p:sp>
         <p:nvSpPr>
-          <p:cNvPr id="27" name="Text"/>
+          <p:cNvPr id="27" name="!!T a charter; Ryan's own plan"/>
           <p:cNvSpPr txBox="1"/>
           <p:nvPr/>
         </p:nvSpPr>
@@ -10016,7 +10022,7 @@
       </p:sp>
       <p:pic>
         <p:nvPicPr>
-          <p:cNvPr id="28" name="Picture" descr="image.jpg"/>
+          <p:cNvPr id="28" name="!!Picture c493aaa3" descr="image.jpg"/>
           <p:cNvPicPr>
             <a:picLocks noChangeAspect="1"/>
           </p:cNvPicPr>
@@ -10052,7 +10058,7 @@
       </p:pic>
       <p:pic>
         <p:nvPicPr>
-          <p:cNvPr id="29" name="Picture" descr="image.jpg"/>
+          <p:cNvPr id="29" name="!!Picture 3e1d8c1e" descr="image.jpg"/>
           <p:cNvPicPr>
             <a:picLocks noChangeAspect="1"/>
           </p:cNvPicPr>
@@ -10088,7 +10094,7 @@
       </p:pic>
       <p:pic>
         <p:nvPicPr>
-          <p:cNvPr id="30" name="Picture" descr="image.jpg"/>
+          <p:cNvPr id="30" name="!!Picture 91210872" descr="image.jpg"/>
           <p:cNvPicPr>
             <a:picLocks noChangeAspect="1"/>
           </p:cNvPicPr>
@@ -10124,7 +10130,7 @@
       </p:pic>
       <p:pic>
         <p:nvPicPr>
-          <p:cNvPr id="31" name="Picture" descr="image.jpg"/>
+          <p:cNvPr id="31" name="!!Picture a55b9ee3" descr="image.jpg"/>
           <p:cNvPicPr>
             <a:picLocks noChangeAspect="1"/>
           </p:cNvPicPr>
@@ -10160,7 +10166,7 @@
       </p:pic>
       <p:sp>
         <p:nvSpPr>
-          <p:cNvPr id="32" name="Rule"/>
+          <p:cNvPr id="32" name="!!Rule b392e74e"/>
           <p:cNvSpPr/>
           <p:nvPr/>
         </p:nvSpPr>
@@ -10190,7 +10196,7 @@
       </p:sp>
       <p:sp>
         <p:nvSpPr>
-          <p:cNvPr id="33" name="Text"/>
+          <p:cNvPr id="33" name="!!T …then dates trigger each step"/>
           <p:cNvSpPr txBox="1"/>
           <p:nvPr/>
         </p:nvSpPr>
@@ -10235,7 +10241,7 @@
       </p:sp>
       <p:sp>
         <p:nvSpPr>
-          <p:cNvPr id="34" name="Rule"/>
+          <p:cNvPr id="34" name="!!Rule 422da07f"/>
           <p:cNvSpPr/>
           <p:nvPr/>
         </p:nvSpPr>
@@ -10265,7 +10271,7 @@
       </p:sp>
       <p:sp>
         <p:nvSpPr>
-          <p:cNvPr id="35" name="ps-el"/>
+          <p:cNvPr id="35" name="!!ps-el a3cb03a1"/>
           <p:cNvSpPr/>
           <p:nvPr/>
         </p:nvSpPr>
@@ -10295,7 +10301,7 @@
       </p:sp>
       <p:sp>
         <p:nvSpPr>
-          <p:cNvPr id="36" name="Text"/>
+          <p:cNvPr id="36" name="!!T 2028"/>
           <p:cNvSpPr txBox="1"/>
           <p:nvPr/>
         </p:nvSpPr>
@@ -10340,7 +10346,7 @@
       </p:sp>
       <p:sp>
         <p:nvSpPr>
-          <p:cNvPr id="37" name="Text"/>
+          <p:cNvPr id="37" name="!!T Chloe accepts an offer"/>
           <p:cNvSpPr txBox="1"/>
           <p:nvPr/>
         </p:nvSpPr>
@@ -10385,7 +10391,7 @@
       </p:sp>
       <p:sp>
         <p:nvSpPr>
-          <p:cNvPr id="38" name="Text"/>
+          <p:cNvPr id="38" name="!!T fees converted: no currency risk"/>
           <p:cNvSpPr txBox="1"/>
           <p:nvPr/>
         </p:nvSpPr>
@@ -10430,7 +10436,7 @@
       </p:sp>
       <p:pic>
         <p:nvPicPr>
-          <p:cNvPr id="39" name="Picture" descr="image.jpg"/>
+          <p:cNvPr id="39" name="!!Picture 10645dc9" descr="image.jpg"/>
           <p:cNvPicPr>
             <a:picLocks noChangeAspect="1"/>
           </p:cNvPicPr>
@@ -10466,7 +10472,7 @@
       </p:pic>
       <p:pic>
         <p:nvPicPr>
-          <p:cNvPr id="40" name="Picture" descr="image.jpg"/>
+          <p:cNvPr id="40" name="!!Picture fa66dd2b" descr="image.jpg"/>
           <p:cNvPicPr>
             <a:picLocks noChangeAspect="1"/>
           </p:cNvPicPr>
@@ -10502,7 +10508,7 @@
       </p:pic>
       <p:pic>
         <p:nvPicPr>
-          <p:cNvPr id="41" name="Picture" descr="image.jpg"/>
+          <p:cNvPr id="41" name="!!Picture 04939d8e" descr="image.jpg"/>
           <p:cNvPicPr>
             <a:picLocks noChangeAspect="1"/>
           </p:cNvPicPr>
@@ -10538,7 +10544,7 @@
       </p:pic>
       <p:sp>
         <p:nvSpPr>
-          <p:cNvPr id="42" name="ps-el"/>
+          <p:cNvPr id="42" name="!!ps-el b9a39bfd"/>
           <p:cNvSpPr/>
           <p:nvPr/>
         </p:nvSpPr>
@@ -10568,7 +10574,7 @@
       </p:sp>
       <p:sp>
         <p:nvSpPr>
-          <p:cNvPr id="43" name="Text"/>
+          <p:cNvPr id="43" name="!!T 2032"/>
           <p:cNvSpPr txBox="1"/>
           <p:nvPr/>
         </p:nvSpPr>
@@ -10613,7 +10619,7 @@
       </p:sp>
       <p:sp>
         <p:nvSpPr>
-          <p:cNvPr id="44" name="Text"/>
+          <p:cNvPr id="44" name="!!T Chloe starts work"/>
           <p:cNvSpPr txBox="1"/>
           <p:nvPr/>
         </p:nvSpPr>
@@ -10658,7 +10664,7 @@
       </p:sp>
       <p:sp>
         <p:nvSpPr>
-          <p:cNvPr id="45" name="Text"/>
+          <p:cNvPr id="45" name="!!T with a plan of her own"/>
           <p:cNvSpPr txBox="1"/>
           <p:nvPr/>
         </p:nvSpPr>
@@ -10703,7 +10709,7 @@
       </p:sp>
       <p:pic>
         <p:nvPicPr>
-          <p:cNvPr id="46" name="Picture" descr="image.jpg"/>
+          <p:cNvPr id="46" name="!!Picture 3f248ff5" descr="image.jpg"/>
           <p:cNvPicPr>
             <a:picLocks noChangeAspect="1"/>
           </p:cNvPicPr>
@@ -10739,7 +10745,7 @@
       </p:pic>
       <p:sp>
         <p:nvSpPr>
-          <p:cNvPr id="47" name="ps-el"/>
+          <p:cNvPr id="47" name="!!ps-el 3717c98e"/>
           <p:cNvSpPr/>
           <p:nvPr/>
         </p:nvSpPr>
@@ -10769,7 +10775,7 @@
       </p:sp>
       <p:sp>
         <p:nvSpPr>
-          <p:cNvPr id="48" name="Text"/>
+          <p:cNvPr id="48" name="!!T 2035–39"/>
           <p:cNvSpPr txBox="1"/>
           <p:nvPr/>
         </p:nvSpPr>
@@ -10814,7 +10820,7 @@
       </p:sp>
       <p:sp>
         <p:nvSpPr>
-          <p:cNvPr id="49" name="Text"/>
+          <p:cNvPr id="49" name="!!T Carmen's business"/>
           <p:cNvSpPr txBox="1"/>
           <p:nvPr/>
         </p:nvSpPr>
@@ -10859,7 +10865,7 @@
       </p:sp>
       <p:sp>
         <p:nvSpPr>
-          <p:cNvPr id="50" name="Text"/>
+          <p:cNvPr id="50" name="!!T sold in stages to her team"/>
           <p:cNvSpPr txBox="1"/>
           <p:nvPr/>
         </p:nvSpPr>
@@ -10904,7 +10910,7 @@
       </p:sp>
       <p:pic>
         <p:nvPicPr>
-          <p:cNvPr id="51" name="Picture" descr="image.jpg"/>
+          <p:cNvPr id="51" name="!!Picture d11c9736" descr="image.jpg"/>
           <p:cNvPicPr>
             <a:picLocks noChangeAspect="1"/>
           </p:cNvPicPr>
@@ -10940,7 +10946,7 @@
       </p:pic>
       <p:sp>
         <p:nvSpPr>
-          <p:cNvPr id="52" name="ps-el"/>
+          <p:cNvPr id="52" name="!!ps-el e76982b8"/>
           <p:cNvSpPr/>
           <p:nvPr/>
         </p:nvSpPr>
@@ -10970,7 +10976,7 @@
       </p:sp>
       <p:sp>
         <p:nvSpPr>
-          <p:cNvPr id="53" name="Text"/>
+          <p:cNvPr id="53" name="!!T 2037–39"/>
           <p:cNvSpPr txBox="1"/>
           <p:nvPr/>
         </p:nvSpPr>
@@ -11015,7 +11021,7 @@
       </p:sp>
       <p:sp>
         <p:nvSpPr>
-          <p:cNvPr id="54" name="Text"/>
+          <p:cNvPr id="54" name="!!T They retire"/>
           <p:cNvSpPr txBox="1"/>
           <p:nvPr/>
         </p:nvSpPr>
@@ -11060,7 +11066,7 @@
       </p:sp>
       <p:sp>
         <p:nvSpPr>
-          <p:cNvPr id="55" name="Text"/>
+          <p:cNvPr id="55" name="!!T the home released; an annuity each"/>
           <p:cNvSpPr txBox="1"/>
           <p:nvPr/>
         </p:nvSpPr>
@@ -11105,7 +11111,7 @@
       </p:sp>
       <p:pic>
         <p:nvPicPr>
-          <p:cNvPr id="56" name="Picture" descr="image.jpg"/>
+          <p:cNvPr id="56" name="!!Picture 6aeb2954" descr="image.jpg"/>
           <p:cNvPicPr>
             <a:picLocks noChangeAspect="1"/>
           </p:cNvPicPr>
@@ -11141,7 +11147,7 @@
       </p:pic>
       <p:pic>
         <p:nvPicPr>
-          <p:cNvPr id="57" name="Picture" descr="image.jpg"/>
+          <p:cNvPr id="57" name="!!Picture b62b3fad" descr="image.jpg"/>
           <p:cNvPicPr>
             <a:picLocks noChangeAspect="1"/>
           </p:cNvPicPr>
@@ -11177,7 +11183,7 @@
       </p:pic>
       <p:sp>
         <p:nvSpPr>
-          <p:cNvPr id="58" name="ps-el"/>
+          <p:cNvPr id="58" name="!!ps-el 771a37b3"/>
           <p:cNvSpPr/>
           <p:nvPr/>
         </p:nvSpPr>
@@ -11207,7 +11213,7 @@
       </p:sp>
       <p:sp>
         <p:nvSpPr>
-          <p:cNvPr id="59" name="Text"/>
+          <p:cNvPr id="59" name="!!T 2047"/>
           <p:cNvSpPr txBox="1"/>
           <p:nvPr/>
         </p:nvSpPr>
@@ -11252,7 +11258,7 @@
       </p:sp>
       <p:sp>
         <p:nvSpPr>
-          <p:cNvPr id="60" name="Text"/>
+          <p:cNvPr id="60" name="!!T The medical review"/>
           <p:cNvSpPr txBox="1"/>
           <p:nvPr/>
         </p:nvSpPr>
@@ -11297,7 +11303,7 @@
       </p:sp>
       <p:sp>
         <p:nvSpPr>
-          <p:cNvPr id="61" name="Text"/>
+          <p:cNvPr id="61" name="!!T at Adrian's 75"/>
           <p:cNvSpPr txBox="1"/>
           <p:nvPr/>
         </p:nvSpPr>
@@ -11342,7 +11348,7 @@
       </p:sp>
       <p:pic>
         <p:nvPicPr>
-          <p:cNvPr id="62" name="Picture" descr="image.jpg"/>
+          <p:cNvPr id="62" name="!!Picture bb69afc7" descr="image.jpg"/>
           <p:cNvPicPr>
             <a:picLocks noChangeAspect="1"/>
           </p:cNvPicPr>
@@ -11378,7 +11384,7 @@
       </p:pic>
       <p:pic>
         <p:nvPicPr>
-          <p:cNvPr id="63" name="Picture" descr="image.jpg"/>
+          <p:cNvPr id="63" name="!!Picture e76b9a10" descr="image.jpg"/>
           <p:cNvPicPr>
             <a:picLocks noChangeAspect="1"/>
           </p:cNvPicPr>
@@ -11414,7 +11420,7 @@
       </p:pic>
       <p:sp>
         <p:nvSpPr>
-          <p:cNvPr id="64" name="Rule"/>
+          <p:cNvPr id="64" name="!!Rule 15a2d7a3"/>
           <p:cNvSpPr/>
           <p:nvPr/>
         </p:nvSpPr>
@@ -11444,7 +11450,7 @@
       </p:sp>
       <p:pic>
         <p:nvPicPr>
-          <p:cNvPr id="65" name="Drawing" descr="image.png"/>
+          <p:cNvPr id="65" name="!!Drawing b74e5c59" descr="image.png"/>
           <p:cNvPicPr>
             <a:picLocks noChangeAspect="1"/>
           </p:cNvPicPr>
@@ -11474,7 +11480,7 @@
       </p:pic>
       <p:sp>
         <p:nvSpPr>
-          <p:cNvPr id="66" name="Text"/>
+          <p:cNvPr id="66" name="!!T Reviewed as life changes: the portfolio "/>
           <p:cNvSpPr txBox="1"/>
           <p:nvPr/>
         </p:nvSpPr>
@@ -11528,7 +11534,7 @@
       </p:sp>
       <p:sp>
         <p:nvSpPr>
-          <p:cNvPr id="67" name="p"/>
+          <p:cNvPr id="67" name="!!p 442bdd76"/>
           <p:cNvSpPr/>
           <p:nvPr/>
         </p:nvSpPr>
@@ -11558,7 +11564,7 @@
       </p:sp>
       <p:sp>
         <p:nvSpPr>
-          <p:cNvPr id="68" name="Text"/>
+          <p:cNvPr id="68" name="!!T For the Wongs, it starts this month; for"/>
           <p:cNvSpPr txBox="1"/>
           <p:nvPr/>
         </p:nvSpPr>
@@ -11603,7 +11609,7 @@
       </p:sp>
       <p:sp>
         <p:nvSpPr>
-          <p:cNvPr id="69" name="Text"/>
+          <p:cNvPr id="69" name="!!T The roadmap: written case §10, Figure 23"/>
           <p:cNvSpPr txBox="1"/>
           <p:nvPr/>
         </p:nvSpPr>
@@ -11670,7 +11676,7 @@
       </p:sp>
       <p:sp>
         <p:nvSpPr>
-          <p:cNvPr id="70" name="Text"/>
+          <p:cNvPr id="70" name="!!T The problem"/>
           <p:cNvSpPr txBox="1"/>
           <p:nvPr/>
         </p:nvSpPr>
@@ -11715,7 +11721,7 @@
       </p:sp>
       <p:sp>
         <p:nvSpPr>
-          <p:cNvPr id="71" name="Text"/>
+          <p:cNvPr id="71" name="!!T The answer"/>
           <p:cNvSpPr txBox="1"/>
           <p:nvPr/>
         </p:nvSpPr>
@@ -11760,7 +11766,7 @@
       </p:sp>
       <p:sp>
         <p:nvSpPr>
-          <p:cNvPr id="72" name="Text"/>
+          <p:cNvPr id="72" name="!!T The five calls"/>
           <p:cNvSpPr txBox="1"/>
           <p:nvPr/>
         </p:nvSpPr>
@@ -11805,7 +11811,7 @@
       </p:sp>
       <p:sp>
         <p:nvSpPr>
-          <p:cNvPr id="73" name="Text"/>
+          <p:cNvPr id="73" name="!!T Will it hold"/>
           <p:cNvSpPr txBox="1"/>
           <p:nvPr/>
         </p:nvSpPr>
@@ -11850,7 +11856,7 @@
       </p:sp>
       <p:sp>
         <p:nvSpPr>
-          <p:cNvPr id="74" name="Text"/>
+          <p:cNvPr id="74" name="!!T What next"/>
           <p:cNvSpPr txBox="1"/>
           <p:nvPr/>
         </p:nvSpPr>
@@ -11895,7 +11901,7 @@
       </p:sp>
       <p:sp>
         <p:nvSpPr>
-          <p:cNvPr id="75" name="Text"/>
+          <p:cNvPr id="75" name="!!T Us"/>
           <p:cNvSpPr txBox="1"/>
           <p:nvPr/>
         </p:nvSpPr>
@@ -11940,7 +11946,7 @@
       </p:sp>
       <p:sp>
         <p:nvSpPr>
-          <p:cNvPr id="76" name="Text"/>
+          <p:cNvPr id="76" name="!!T 11 / 15"/>
           <p:cNvSpPr txBox="1"/>
           <p:nvPr/>
         </p:nvSpPr>
@@ -11985,7 +11991,7 @@
       </p:sp>
       <p:sp>
         <p:nvSpPr>
-          <p:cNvPr id="77" name="Ring"/>
+          <p:cNvPr id="77" name="!!Ring 4877fa0e"/>
           <p:cNvSpPr/>
           <p:nvPr/>
         </p:nvSpPr>
@@ -12015,7 +12021,7 @@
       </p:sp>
       <p:sp>
         <p:nvSpPr>
-          <p:cNvPr id="78" name="span"/>
+          <p:cNvPr id="78" name="!!span 625ab906"/>
           <p:cNvSpPr/>
           <p:nvPr/>
         </p:nvSpPr>
@@ -12053,7 +12059,7 @@
       </p:sp>
       <p:pic>
         <p:nvPicPr>
-          <p:cNvPr id="79" name="Drawing" descr="image.png"/>
+          <p:cNvPr id="79" name="!!Drawing d47f8ea3" descr="image.png"/>
           <p:cNvPicPr>
             <a:picLocks noChangeAspect="1"/>
           </p:cNvPicPr>
@@ -12083,7 +12089,7 @@
       </p:pic>
       <p:sp>
         <p:nvSpPr>
-          <p:cNvPr id="80" name="Ring"/>
+          <p:cNvPr id="80" name="!!Ring dd7cb4d9"/>
           <p:cNvSpPr/>
           <p:nvPr/>
         </p:nvSpPr>
@@ -12113,7 +12119,7 @@
       </p:sp>
       <p:sp>
         <p:nvSpPr>
-          <p:cNvPr id="81" name="span"/>
+          <p:cNvPr id="81" name="!!span 2d0c4856"/>
           <p:cNvSpPr/>
           <p:nvPr/>
         </p:nvSpPr>
@@ -12143,7 +12149,7 @@
       </p:sp>
       <p:pic>
         <p:nvPicPr>
-          <p:cNvPr id="82" name="Drawing" descr="image.png"/>
+          <p:cNvPr id="82" name="!!Drawing b078a87f" descr="image.png"/>
           <p:cNvPicPr>
             <a:picLocks noChangeAspect="1"/>
           </p:cNvPicPr>
@@ -12173,7 +12179,7 @@
       </p:pic>
       <p:sp>
         <p:nvSpPr>
-          <p:cNvPr id="83" name="Ring"/>
+          <p:cNvPr id="83" name="!!Ring 55aecc8e"/>
           <p:cNvSpPr/>
           <p:nvPr/>
         </p:nvSpPr>
@@ -12203,7 +12209,7 @@
       </p:sp>
       <p:sp>
         <p:nvSpPr>
-          <p:cNvPr id="84" name="span"/>
+          <p:cNvPr id="84" name="!!span cbd59824"/>
           <p:cNvSpPr/>
           <p:nvPr/>
         </p:nvSpPr>
@@ -12233,7 +12239,7 @@
       </p:sp>
       <p:pic>
         <p:nvPicPr>
-          <p:cNvPr id="85" name="Drawing" descr="image.png"/>
+          <p:cNvPr id="85" name="!!Drawing bd0f25c0" descr="image.png"/>
           <p:cNvPicPr>
             <a:picLocks noChangeAspect="1"/>
           </p:cNvPicPr>
@@ -12263,7 +12269,7 @@
       </p:pic>
       <p:sp>
         <p:nvSpPr>
-          <p:cNvPr id="86" name="Ring"/>
+          <p:cNvPr id="86" name="!!Ring 6d8a1c38"/>
           <p:cNvSpPr/>
           <p:nvPr/>
         </p:nvSpPr>
@@ -12293,7 +12299,7 @@
       </p:sp>
       <p:sp>
         <p:nvSpPr>
-          <p:cNvPr id="87" name="span"/>
+          <p:cNvPr id="87" name="!!span d0d204da"/>
           <p:cNvSpPr/>
           <p:nvPr/>
         </p:nvSpPr>
@@ -12323,7 +12329,7 @@
       </p:sp>
       <p:pic>
         <p:nvPicPr>
-          <p:cNvPr id="88" name="Drawing" descr="image.png"/>
+          <p:cNvPr id="88" name="!!Drawing 9d1c2717" descr="image.png"/>
           <p:cNvPicPr>
             <a:picLocks noChangeAspect="1"/>
           </p:cNvPicPr>
@@ -12356,6 +12362,9 @@
   <p:clrMapOvr>
     <a:masterClrMapping/>
   </p:clrMapOvr>
+  <p:transition>
+    <p:fade/>
+  </p:transition>
 </p:sld>
 </file>
 
@@ -12378,7 +12387,7 @@
       </p:grpSpPr>
       <p:sp>
         <p:nvSpPr>
-          <p:cNvPr id="2" name="Rule"/>
+          <p:cNvPr id="2" name="!!Rule 2286b0a1"/>
           <p:cNvSpPr/>
           <p:nvPr/>
         </p:nvSpPr>
@@ -12408,7 +12417,7 @@
       </p:sp>
       <p:pic>
         <p:nvPicPr>
-          <p:cNvPr id="3" name="Drawing" descr="image.png"/>
+          <p:cNvPr id="3" name="!!house" descr="image.png"/>
           <p:cNvPicPr>
             <a:picLocks noChangeAspect="1"/>
           </p:cNvPicPr>
@@ -12438,7 +12447,7 @@
       </p:pic>
       <p:sp>
         <p:nvSpPr>
-          <p:cNvPr id="4" name="Text"/>
+          <p:cNvPr id="4" name="!!T What passes on"/>
           <p:cNvSpPr txBox="1"/>
           <p:nvPr/>
         </p:nvSpPr>
@@ -12483,7 +12492,7 @@
       </p:sp>
       <p:sp>
         <p:nvSpPr>
-          <p:cNvPr id="5" name="Text"/>
+          <p:cNvPr id="5" name="!!T In the very futures where their own way "/>
           <p:cNvSpPr txBox="1"/>
           <p:nvPr/>
         </p:nvSpPr>
@@ -12550,7 +12559,7 @@
       </p:sp>
       <p:sp>
         <p:nvSpPr>
-          <p:cNvPr id="6" name="Rule"/>
+          <p:cNvPr id="6" name="!!Rule 9b9ff67d"/>
           <p:cNvSpPr/>
           <p:nvPr/>
         </p:nvSpPr>
@@ -12580,7 +12589,7 @@
       </p:sp>
       <p:sp>
         <p:nvSpPr>
-          <p:cNvPr id="7" name="Text"/>
+          <p:cNvPr id="7" name="!!T What their wealth does, and what is left"/>
           <p:cNvSpPr txBox="1"/>
           <p:nvPr/>
         </p:nvSpPr>
@@ -12625,7 +12634,7 @@
       </p:sp>
       <p:sp>
         <p:nvSpPr>
-          <p:cNvPr id="8" name="Text"/>
+          <p:cNvPr id="8" name="!!T HK$24.4M"/>
           <p:cNvSpPr txBox="1"/>
           <p:nvPr/>
         </p:nvSpPr>
@@ -12670,7 +12679,7 @@
       </p:sp>
       <p:sp>
         <p:nvSpPr>
-          <p:cNvPr id="9" name="Text"/>
+          <p:cNvPr id="9" name="!!T Today, their net worth"/>
           <p:cNvSpPr txBox="1"/>
           <p:nvPr/>
         </p:nvSpPr>
@@ -12715,7 +12724,7 @@
       </p:sp>
       <p:sp>
         <p:nvSpPr>
-          <p:cNvPr id="10" name="Text"/>
+          <p:cNvPr id="10" name="!!T with their pay until they retire"/>
           <p:cNvSpPr txBox="1"/>
           <p:nvPr/>
         </p:nvSpPr>
@@ -12760,7 +12769,7 @@
       </p:sp>
       <p:sp>
         <p:nvSpPr>
-          <p:cNvPr id="11" name="Rule"/>
+          <p:cNvPr id="11" name="!!Rule 92589817"/>
           <p:cNvSpPr/>
           <p:nvPr/>
         </p:nvSpPr>
@@ -12790,7 +12799,7 @@
       </p:sp>
       <p:sp>
         <p:nvSpPr>
-          <p:cNvPr id="12" name="Arrowhead"/>
+          <p:cNvPr id="12" name="!!Arrowhead 5d09b9b1"/>
           <p:cNvSpPr/>
           <p:nvPr/>
         </p:nvSpPr>
@@ -12820,7 +12829,7 @@
       </p:sp>
       <p:sp>
         <p:nvSpPr>
-          <p:cNvPr id="13" name="Text"/>
+          <p:cNvPr id="13" name="!!T First, it pays for 40 years of the life "/>
           <p:cNvSpPr txBox="1"/>
           <p:nvPr/>
         </p:nvSpPr>
@@ -12896,7 +12905,7 @@
       </p:sp>
       <p:sp>
         <p:nvSpPr>
-          <p:cNvPr id="14" name="Rule"/>
+          <p:cNvPr id="14" name="!!Rule e20d4f7a"/>
           <p:cNvSpPr/>
           <p:nvPr/>
         </p:nvSpPr>
@@ -12926,7 +12935,7 @@
       </p:sp>
       <p:sp>
         <p:nvSpPr>
-          <p:cNvPr id="15" name="Text"/>
+          <p:cNvPr id="15" name="!!T Left to Ryan and Chloe at Carmen's 89, i"/>
           <p:cNvSpPr txBox="1"/>
           <p:nvPr/>
         </p:nvSpPr>
@@ -12993,7 +13002,7 @@
       </p:sp>
       <p:sp>
         <p:nvSpPr>
-          <p:cNvPr id="16" name="Text"/>
+          <p:cNvPr id="16" name="!!T Their own way"/>
           <p:cNvSpPr txBox="1"/>
           <p:nvPr/>
         </p:nvSpPr>
@@ -13038,7 +13047,7 @@
       </p:sp>
       <p:sp>
         <p:nvSpPr>
-          <p:cNvPr id="17" name="i"/>
+          <p:cNvPr id="17" name="!!i 25051afd"/>
           <p:cNvSpPr/>
           <p:nvPr/>
         </p:nvSpPr>
@@ -13068,7 +13077,7 @@
       </p:sp>
       <p:sp>
         <p:nvSpPr>
-          <p:cNvPr id="18" name="Text"/>
+          <p:cNvPr id="18" name="!!T HK$2.3M"/>
           <p:cNvSpPr txBox="1"/>
           <p:nvPr/>
         </p:nvSpPr>
@@ -13113,7 +13122,7 @@
       </p:sp>
       <p:sp>
         <p:nvSpPr>
-          <p:cNvPr id="19" name="Text"/>
+          <p:cNvPr id="19" name="!!T With the plan"/>
           <p:cNvSpPr txBox="1"/>
           <p:nvPr/>
         </p:nvSpPr>
@@ -13158,7 +13167,7 @@
       </p:sp>
       <p:sp>
         <p:nvSpPr>
-          <p:cNvPr id="20" name="i"/>
+          <p:cNvPr id="20" name="!!i 7a5a3a1d"/>
           <p:cNvSpPr/>
           <p:nvPr/>
         </p:nvSpPr>
@@ -13196,7 +13205,7 @@
       </p:sp>
       <p:sp>
         <p:nvSpPr>
-          <p:cNvPr id="21" name="Text"/>
+          <p:cNvPr id="21" name="!!T HK$7.7M"/>
           <p:cNvSpPr txBox="1"/>
           <p:nvPr/>
         </p:nvSpPr>
@@ -13241,7 +13250,7 @@
       </p:sp>
       <p:sp>
         <p:nvSpPr>
-          <p:cNvPr id="22" name="Text"/>
+          <p:cNvPr id="22" name="!!T More than three times as much, and more "/>
           <p:cNvSpPr txBox="1"/>
           <p:nvPr/>
         </p:nvSpPr>
@@ -13286,7 +13295,7 @@
       </p:sp>
       <p:sp>
         <p:nvSpPr>
-          <p:cNvPr id="23" name="Rule"/>
+          <p:cNvPr id="23" name="!!Rule d1bf885b"/>
           <p:cNvSpPr/>
           <p:nvPr/>
         </p:nvSpPr>
@@ -13316,7 +13325,7 @@
       </p:sp>
       <p:sp>
         <p:nvSpPr>
-          <p:cNvPr id="24" name="Text"/>
+          <p:cNvPr id="24" name="!!T …and if a parent dies early, it still pa"/>
           <p:cNvSpPr txBox="1"/>
           <p:nvPr/>
         </p:nvSpPr>
@@ -13361,7 +13370,7 @@
       </p:sp>
       <p:sp>
         <p:nvSpPr>
-          <p:cNvPr id="25" name="Text"/>
+          <p:cNvPr id="25" name="!!T Wills, a guardian and trusts, signed in "/>
           <p:cNvSpPr txBox="1"/>
           <p:nvPr/>
         </p:nvSpPr>
@@ -13406,7 +13415,7 @@
       </p:sp>
       <p:sp>
         <p:nvSpPr>
-          <p:cNvPr id="26" name="span"/>
+          <p:cNvPr id="26" name="!!span 57a85e08"/>
           <p:cNvSpPr/>
           <p:nvPr/>
         </p:nvSpPr>
@@ -13445,7 +13454,7 @@
       </p:sp>
       <p:pic>
         <p:nvPicPr>
-          <p:cNvPr id="27" name="Picture" descr="image.jpg"/>
+          <p:cNvPr id="27" name="!!Picture 756929ab" descr="image.jpg"/>
           <p:cNvPicPr>
             <a:picLocks noChangeAspect="1"/>
           </p:cNvPicPr>
@@ -13469,7 +13478,7 @@
       </p:pic>
       <p:sp>
         <p:nvSpPr>
-          <p:cNvPr id="28" name="span"/>
+          <p:cNvPr id="28" name="!!span 238e4fb2"/>
           <p:cNvSpPr/>
           <p:nvPr/>
         </p:nvSpPr>
@@ -13508,7 +13517,7 @@
       </p:sp>
       <p:pic>
         <p:nvPicPr>
-          <p:cNvPr id="29" name="Picture" descr="image.jpg"/>
+          <p:cNvPr id="29" name="!!Picture bc75644c" descr="image.jpg"/>
           <p:cNvPicPr>
             <a:picLocks noChangeAspect="1"/>
           </p:cNvPicPr>
@@ -13532,7 +13541,7 @@
       </p:pic>
       <p:sp>
         <p:nvSpPr>
-          <p:cNvPr id="30" name="Text"/>
+          <p:cNvPr id="30" name="!!T Adrian and Carmen: each to the other fir"/>
           <p:cNvSpPr txBox="1"/>
           <p:nvPr/>
         </p:nvSpPr>
@@ -13577,7 +13586,7 @@
       </p:sp>
       <p:sp>
         <p:nvSpPr>
-          <p:cNvPr id="31" name="Text"/>
+          <p:cNvPr id="31" name="!!T then to Ryan and Chloe"/>
           <p:cNvSpPr txBox="1"/>
           <p:nvPr/>
         </p:nvSpPr>
@@ -13622,7 +13631,7 @@
       </p:sp>
       <p:sp>
         <p:nvSpPr>
-          <p:cNvPr id="32" name="Rule"/>
+          <p:cNvPr id="32" name="!!Rule c682b590"/>
           <p:cNvSpPr/>
           <p:nvPr/>
         </p:nvSpPr>
@@ -13652,7 +13661,7 @@
       </p:sp>
       <p:sp>
         <p:nvSpPr>
-          <p:cNvPr id="33" name="Rule"/>
+          <p:cNvPr id="33" name="!!Rule 6e7f88ae"/>
           <p:cNvSpPr/>
           <p:nvPr/>
         </p:nvSpPr>
@@ -13682,7 +13691,7 @@
       </p:sp>
       <p:sp>
         <p:nvSpPr>
-          <p:cNvPr id="34" name="Rule"/>
+          <p:cNvPr id="34" name="!!Rule fc56e7a9"/>
           <p:cNvSpPr/>
           <p:nvPr/>
         </p:nvSpPr>
@@ -13712,7 +13721,7 @@
       </p:sp>
       <p:sp>
         <p:nvSpPr>
-          <p:cNvPr id="35" name="Rule"/>
+          <p:cNvPr id="35" name="!!Rule 90ca56c0"/>
           <p:cNvSpPr/>
           <p:nvPr/>
         </p:nvSpPr>
@@ -13742,7 +13751,7 @@
       </p:sp>
       <p:sp>
         <p:nvSpPr>
-          <p:cNvPr id="36" name="span"/>
+          <p:cNvPr id="36" name="!!span fe056c79"/>
           <p:cNvSpPr/>
           <p:nvPr/>
         </p:nvSpPr>
@@ -13781,7 +13790,7 @@
       </p:sp>
       <p:pic>
         <p:nvPicPr>
-          <p:cNvPr id="37" name="Picture" descr="image.jpg"/>
+          <p:cNvPr id="37" name="!!Picture 739430f6" descr="image.jpg"/>
           <p:cNvPicPr>
             <a:picLocks noChangeAspect="1"/>
           </p:cNvPicPr>
@@ -13805,7 +13814,7 @@
       </p:pic>
       <p:sp>
         <p:nvSpPr>
-          <p:cNvPr id="38" name="Text"/>
+          <p:cNvPr id="38" name="!!T Ryan, 24"/>
           <p:cNvSpPr txBox="1"/>
           <p:nvPr/>
         </p:nvSpPr>
@@ -13850,7 +13859,7 @@
       </p:sp>
       <p:sp>
         <p:nvSpPr>
-          <p:cNvPr id="39" name="Text"/>
+          <p:cNvPr id="39" name="!!T his share held in trust, paid at"/>
           <p:cNvSpPr txBox="1"/>
           <p:nvPr/>
         </p:nvSpPr>
@@ -13895,7 +13904,7 @@
       </p:sp>
       <p:sp>
         <p:nvSpPr>
-          <p:cNvPr id="40" name="Rule"/>
+          <p:cNvPr id="40" name="!!Rule 57d8066d"/>
           <p:cNvSpPr/>
           <p:nvPr/>
         </p:nvSpPr>
@@ -13925,7 +13934,7 @@
       </p:sp>
       <p:sp>
         <p:nvSpPr>
-          <p:cNvPr id="41" name="ps-el"/>
+          <p:cNvPr id="41" name="!!ps-el 9efda5e3"/>
           <p:cNvSpPr/>
           <p:nvPr/>
         </p:nvSpPr>
@@ -13955,7 +13964,7 @@
       </p:sp>
       <p:sp>
         <p:nvSpPr>
-          <p:cNvPr id="42" name="Text"/>
+          <p:cNvPr id="42" name="!!T 2027"/>
           <p:cNvSpPr txBox="1"/>
           <p:nvPr/>
         </p:nvSpPr>
@@ -14000,7 +14009,7 @@
       </p:sp>
       <p:sp>
         <p:nvSpPr>
-          <p:cNvPr id="43" name="Text"/>
+          <p:cNvPr id="43" name="!!T 25"/>
           <p:cNvSpPr txBox="1"/>
           <p:nvPr/>
         </p:nvSpPr>
@@ -14045,7 +14054,7 @@
       </p:sp>
       <p:sp>
         <p:nvSpPr>
-          <p:cNvPr id="44" name="ps-el"/>
+          <p:cNvPr id="44" name="!!ps-el eb0ee99b"/>
           <p:cNvSpPr/>
           <p:nvPr/>
         </p:nvSpPr>
@@ -14075,7 +14084,7 @@
       </p:sp>
       <p:sp>
         <p:nvSpPr>
-          <p:cNvPr id="45" name="Text"/>
+          <p:cNvPr id="45" name="!!T 2032"/>
           <p:cNvSpPr txBox="1"/>
           <p:nvPr/>
         </p:nvSpPr>
@@ -14120,7 +14129,7 @@
       </p:sp>
       <p:sp>
         <p:nvSpPr>
-          <p:cNvPr id="46" name="Text"/>
+          <p:cNvPr id="46" name="!!T 30"/>
           <p:cNvSpPr txBox="1"/>
           <p:nvPr/>
         </p:nvSpPr>
@@ -14165,7 +14174,7 @@
       </p:sp>
       <p:sp>
         <p:nvSpPr>
-          <p:cNvPr id="47" name="ps-el"/>
+          <p:cNvPr id="47" name="!!ps-el 6319f708"/>
           <p:cNvSpPr/>
           <p:nvPr/>
         </p:nvSpPr>
@@ -14195,7 +14204,7 @@
       </p:sp>
       <p:sp>
         <p:nvSpPr>
-          <p:cNvPr id="48" name="Text"/>
+          <p:cNvPr id="48" name="!!T 2037"/>
           <p:cNvSpPr txBox="1"/>
           <p:nvPr/>
         </p:nvSpPr>
@@ -14240,7 +14249,7 @@
       </p:sp>
       <p:sp>
         <p:nvSpPr>
-          <p:cNvPr id="49" name="Text"/>
+          <p:cNvPr id="49" name="!!T 35"/>
           <p:cNvSpPr txBox="1"/>
           <p:nvPr/>
         </p:nvSpPr>
@@ -14285,7 +14294,7 @@
       </p:sp>
       <p:sp>
         <p:nvSpPr>
-          <p:cNvPr id="50" name="span"/>
+          <p:cNvPr id="50" name="!!span dfbc7a02"/>
           <p:cNvSpPr/>
           <p:nvPr/>
         </p:nvSpPr>
@@ -14324,7 +14333,7 @@
       </p:sp>
       <p:pic>
         <p:nvPicPr>
-          <p:cNvPr id="51" name="Picture" descr="image.jpg"/>
+          <p:cNvPr id="51" name="!!Picture f8ee2500" descr="image.jpg"/>
           <p:cNvPicPr>
             <a:picLocks noChangeAspect="1"/>
           </p:cNvPicPr>
@@ -14348,7 +14357,7 @@
       </p:pic>
       <p:sp>
         <p:nvSpPr>
-          <p:cNvPr id="52" name="Text"/>
+          <p:cNvPr id="52" name="!!T Chloe, 16"/>
           <p:cNvSpPr txBox="1"/>
           <p:nvPr/>
         </p:nvSpPr>
@@ -14393,7 +14402,7 @@
       </p:sp>
       <p:sp>
         <p:nvSpPr>
-          <p:cNvPr id="53" name="Text"/>
+          <p:cNvPr id="53" name="!!T a guardian until 18; her share paid at"/>
           <p:cNvSpPr txBox="1"/>
           <p:nvPr/>
         </p:nvSpPr>
@@ -14438,7 +14447,7 @@
       </p:sp>
       <p:sp>
         <p:nvSpPr>
-          <p:cNvPr id="54" name="Rule"/>
+          <p:cNvPr id="54" name="!!Rule 57d427b7"/>
           <p:cNvSpPr/>
           <p:nvPr/>
         </p:nvSpPr>
@@ -14468,7 +14477,7 @@
       </p:sp>
       <p:sp>
         <p:nvSpPr>
-          <p:cNvPr id="55" name="ps-el"/>
+          <p:cNvPr id="55" name="!!ps-el c2c751aa"/>
           <p:cNvSpPr/>
           <p:nvPr/>
         </p:nvSpPr>
@@ -14498,7 +14507,7 @@
       </p:sp>
       <p:sp>
         <p:nvSpPr>
-          <p:cNvPr id="56" name="Text"/>
+          <p:cNvPr id="56" name="!!T 2035"/>
           <p:cNvSpPr txBox="1"/>
           <p:nvPr/>
         </p:nvSpPr>
@@ -14543,7 +14552,7 @@
       </p:sp>
       <p:sp>
         <p:nvSpPr>
-          <p:cNvPr id="57" name="Text"/>
+          <p:cNvPr id="57" name="!!T 25 #2"/>
           <p:cNvSpPr txBox="1"/>
           <p:nvPr/>
         </p:nvSpPr>
@@ -14588,7 +14597,7 @@
       </p:sp>
       <p:sp>
         <p:nvSpPr>
-          <p:cNvPr id="58" name="ps-el"/>
+          <p:cNvPr id="58" name="!!ps-el f4aea058"/>
           <p:cNvSpPr/>
           <p:nvPr/>
         </p:nvSpPr>
@@ -14618,7 +14627,7 @@
       </p:sp>
       <p:sp>
         <p:nvSpPr>
-          <p:cNvPr id="59" name="Text"/>
+          <p:cNvPr id="59" name="!!T 2040"/>
           <p:cNvSpPr txBox="1"/>
           <p:nvPr/>
         </p:nvSpPr>
@@ -14663,7 +14672,7 @@
       </p:sp>
       <p:sp>
         <p:nvSpPr>
-          <p:cNvPr id="60" name="Text"/>
+          <p:cNvPr id="60" name="!!T 30 #2"/>
           <p:cNvSpPr txBox="1"/>
           <p:nvPr/>
         </p:nvSpPr>
@@ -14708,7 +14717,7 @@
       </p:sp>
       <p:sp>
         <p:nvSpPr>
-          <p:cNvPr id="61" name="ps-el"/>
+          <p:cNvPr id="61" name="!!ps-el 0f01393b"/>
           <p:cNvSpPr/>
           <p:nvPr/>
         </p:nvSpPr>
@@ -14738,7 +14747,7 @@
       </p:sp>
       <p:sp>
         <p:nvSpPr>
-          <p:cNvPr id="62" name="Text"/>
+          <p:cNvPr id="62" name="!!T 2045"/>
           <p:cNvSpPr txBox="1"/>
           <p:nvPr/>
         </p:nvSpPr>
@@ -14783,7 +14792,7 @@
       </p:sp>
       <p:sp>
         <p:nvSpPr>
-          <p:cNvPr id="63" name="Text"/>
+          <p:cNvPr id="63" name="!!T 35 #2"/>
           <p:cNvSpPr txBox="1"/>
           <p:nvPr/>
         </p:nvSpPr>
@@ -14828,7 +14837,7 @@
       </p:sp>
       <p:sp>
         <p:nvSpPr>
-          <p:cNvPr id="64" name="p"/>
+          <p:cNvPr id="64" name="!!p 7d04d5fb"/>
           <p:cNvSpPr/>
           <p:nvPr/>
         </p:nvSpPr>
@@ -14858,7 +14867,7 @@
       </p:sp>
       <p:sp>
         <p:nvSpPr>
-          <p:cNvPr id="65" name="span"/>
+          <p:cNvPr id="65" name="!!span 937dc11d"/>
           <p:cNvSpPr/>
           <p:nvPr/>
         </p:nvSpPr>
@@ -14888,7 +14897,7 @@
       </p:sp>
       <p:pic>
         <p:nvPicPr>
-          <p:cNvPr id="66" name="Drawing" descr="image.png"/>
+          <p:cNvPr id="66" name="!!Drawing d26ae75c" descr="image.png"/>
           <p:cNvPicPr>
             <a:picLocks noChangeAspect="1"/>
           </p:cNvPicPr>
@@ -14918,7 +14927,7 @@
       </p:pic>
       <p:sp>
         <p:nvSpPr>
-          <p:cNvPr id="67" name="Text"/>
+          <p:cNvPr id="67" name="!!T A legacy with purpose: about HK$30K a ye"/>
           <p:cNvSpPr txBox="1"/>
           <p:nvPr/>
         </p:nvSpPr>
@@ -15016,7 +15025,7 @@
       </p:sp>
       <p:sp>
         <p:nvSpPr>
-          <p:cNvPr id="68" name="p"/>
+          <p:cNvPr id="68" name="!!p 442bdd76"/>
           <p:cNvSpPr/>
           <p:nvPr/>
         </p:nvSpPr>
@@ -15046,7 +15055,7 @@
       </p:sp>
       <p:sp>
         <p:nvSpPr>
-          <p:cNvPr id="69" name="Text"/>
+          <p:cNvPr id="69" name="!!T Built to last: for their lifetimes, and "/>
           <p:cNvSpPr txBox="1"/>
           <p:nvPr/>
         </p:nvSpPr>
@@ -15091,7 +15100,7 @@
       </p:sp>
       <p:sp>
         <p:nvSpPr>
-          <p:cNvPr id="70" name="Text"/>
+          <p:cNvPr id="70" name="!!T Inheritance at Carmen's 89: savings and "/>
           <p:cNvSpPr txBox="1"/>
           <p:nvPr/>
         </p:nvSpPr>
@@ -15158,7 +15167,7 @@
       </p:sp>
       <p:sp>
         <p:nvSpPr>
-          <p:cNvPr id="71" name="Text"/>
+          <p:cNvPr id="71" name="!!T The problem"/>
           <p:cNvSpPr txBox="1"/>
           <p:nvPr/>
         </p:nvSpPr>
@@ -15203,7 +15212,7 @@
       </p:sp>
       <p:sp>
         <p:nvSpPr>
-          <p:cNvPr id="72" name="Text"/>
+          <p:cNvPr id="72" name="!!T The answer"/>
           <p:cNvSpPr txBox="1"/>
           <p:nvPr/>
         </p:nvSpPr>
@@ -15248,7 +15257,7 @@
       </p:sp>
       <p:sp>
         <p:nvSpPr>
-          <p:cNvPr id="73" name="Text"/>
+          <p:cNvPr id="73" name="!!T The five calls"/>
           <p:cNvSpPr txBox="1"/>
           <p:nvPr/>
         </p:nvSpPr>
@@ -15293,7 +15302,7 @@
       </p:sp>
       <p:sp>
         <p:nvSpPr>
-          <p:cNvPr id="74" name="Text"/>
+          <p:cNvPr id="74" name="!!T Will it hold"/>
           <p:cNvSpPr txBox="1"/>
           <p:nvPr/>
         </p:nvSpPr>
@@ -15338,7 +15347,7 @@
       </p:sp>
       <p:sp>
         <p:nvSpPr>
-          <p:cNvPr id="75" name="Text"/>
+          <p:cNvPr id="75" name="!!T What next"/>
           <p:cNvSpPr txBox="1"/>
           <p:nvPr/>
         </p:nvSpPr>
@@ -15383,7 +15392,7 @@
       </p:sp>
       <p:sp>
         <p:nvSpPr>
-          <p:cNvPr id="76" name="Text"/>
+          <p:cNvPr id="76" name="!!T Us"/>
           <p:cNvSpPr txBox="1"/>
           <p:nvPr/>
         </p:nvSpPr>
@@ -15428,7 +15437,7 @@
       </p:sp>
       <p:sp>
         <p:nvSpPr>
-          <p:cNvPr id="77" name="Text"/>
+          <p:cNvPr id="77" name="!!T 12 / 15"/>
           <p:cNvSpPr txBox="1"/>
           <p:nvPr/>
         </p:nvSpPr>
@@ -15476,6 +15485,9 @@
   <p:clrMapOvr>
     <a:masterClrMapping/>
   </p:clrMapOvr>
+  <p:transition>
+    <p:fade/>
+  </p:transition>
 </p:sld>
 </file>
 
@@ -15498,7 +15510,7 @@
       </p:grpSpPr>
       <p:sp>
         <p:nvSpPr>
-          <p:cNvPr id="2" name="Rule"/>
+          <p:cNvPr id="2" name="!!Rule 2286b0a1"/>
           <p:cNvSpPr/>
           <p:nvPr/>
         </p:nvSpPr>
@@ -15528,7 +15540,7 @@
       </p:sp>
       <p:sp>
         <p:nvSpPr>
-          <p:cNvPr id="3" name="Text"/>
+          <p:cNvPr id="3" name="!!T Wealth Management Connect"/>
           <p:cNvSpPr txBox="1"/>
           <p:nvPr/>
         </p:nvSpPr>
@@ -15573,7 +15585,7 @@
       </p:sp>
       <p:sp>
         <p:nvSpPr>
-          <p:cNvPr id="4" name="Text"/>
+          <p:cNvPr id="4" name="!!T The Connect is growing both ways: for th"/>
           <p:cNvSpPr txBox="1"/>
           <p:nvPr/>
         </p:nvSpPr>
@@ -15640,7 +15652,7 @@
       </p:sp>
       <p:sp>
         <p:nvSpPr>
-          <p:cNvPr id="5" name="Rule"/>
+          <p:cNvPr id="5" name="!!Rule 3c8f3311"/>
           <p:cNvSpPr/>
           <p:nvPr/>
         </p:nvSpPr>
@@ -15670,7 +15682,7 @@
       </p:sp>
       <p:sp>
         <p:nvSpPr>
-          <p:cNvPr id="6" name="Text"/>
+          <p:cNvPr id="6" name="!!T 2021"/>
           <p:cNvSpPr txBox="1"/>
           <p:nvPr/>
         </p:nvSpPr>
@@ -15715,7 +15727,7 @@
       </p:sp>
       <p:sp>
         <p:nvSpPr>
-          <p:cNvPr id="7" name="Text"/>
+          <p:cNvPr id="7" name="!!T launched across Hong Kong, Macao and nin"/>
           <p:cNvSpPr txBox="1"/>
           <p:nvPr/>
         </p:nvSpPr>
@@ -15782,7 +15794,7 @@
       </p:sp>
       <p:sp>
         <p:nvSpPr>
-          <p:cNvPr id="8" name="Rule"/>
+          <p:cNvPr id="8" name="!!Rule edb157e3"/>
           <p:cNvSpPr/>
           <p:nvPr/>
         </p:nvSpPr>
@@ -15812,7 +15824,7 @@
       </p:sp>
       <p:sp>
         <p:nvSpPr>
-          <p:cNvPr id="9" name="Text"/>
+          <p:cNvPr id="9" name="!!T RMB 3M"/>
           <p:cNvSpPr txBox="1"/>
           <p:nvPr/>
         </p:nvSpPr>
@@ -15857,7 +15869,7 @@
       </p:sp>
       <p:sp>
         <p:nvSpPr>
-          <p:cNvPr id="10" name="Text"/>
+          <p:cNvPr id="10" name="!!T each investor's limit since 2024, up fro"/>
           <p:cNvSpPr txBox="1"/>
           <p:nvPr/>
         </p:nvSpPr>
@@ -15924,7 +15936,7 @@
       </p:sp>
       <p:sp>
         <p:nvSpPr>
-          <p:cNvPr id="11" name="Rule"/>
+          <p:cNvPr id="11" name="!!Rule 06d10fa9"/>
           <p:cNvSpPr/>
           <p:nvPr/>
         </p:nvSpPr>
@@ -15954,7 +15966,7 @@
       </p:sp>
       <p:sp>
         <p:nvSpPr>
-          <p:cNvPr id="12" name="Text"/>
+          <p:cNvPr id="12" name="!!T 2024"/>
           <p:cNvSpPr txBox="1"/>
           <p:nvPr/>
         </p:nvSpPr>
@@ -15999,7 +16011,7 @@
       </p:sp>
       <p:sp>
         <p:nvSpPr>
-          <p:cNvPr id="13" name="Text"/>
+          <p:cNvPr id="13" name="!!T securities firms admitted beside the ban"/>
           <p:cNvSpPr txBox="1"/>
           <p:nvPr/>
         </p:nvSpPr>
@@ -16066,7 +16078,7 @@
       </p:sp>
       <p:pic>
         <p:nvPicPr>
-          <p:cNvPr id="14" name="Drawing" descr="image.png"/>
+          <p:cNvPr id="14" name="!!Drawing 6e2db72c" descr="image.png"/>
           <p:cNvPicPr>
             <a:picLocks noChangeAspect="1"/>
           </p:cNvPicPr>
@@ -16096,7 +16108,7 @@
       </p:pic>
       <p:sp>
         <p:nvSpPr>
-          <p:cNvPr id="15" name="p"/>
+          <p:cNvPr id="15" name="!!p 33df08eb"/>
           <p:cNvSpPr/>
           <p:nvPr/>
         </p:nvSpPr>
@@ -16137,7 +16149,7 @@
       </p:sp>
       <p:sp>
         <p:nvSpPr>
-          <p:cNvPr id="16" name="Text"/>
+          <p:cNvPr id="16" name="!!T The nine mainland cities of the Greater "/>
           <p:cNvSpPr txBox="1"/>
           <p:nvPr/>
         </p:nvSpPr>
@@ -16204,7 +16216,7 @@
       </p:sp>
       <p:sp>
         <p:nvSpPr>
-          <p:cNvPr id="17" name="p"/>
+          <p:cNvPr id="17" name="!!p b61877f1"/>
           <p:cNvSpPr/>
           <p:nvPr/>
         </p:nvSpPr>
@@ -16245,7 +16257,7 @@
       </p:sp>
       <p:sp>
         <p:nvSpPr>
-          <p:cNvPr id="18" name="Text"/>
+          <p:cNvPr id="18" name="!!T Hong Kong"/>
           <p:cNvSpPr txBox="1"/>
           <p:nvPr/>
         </p:nvSpPr>
@@ -16290,7 +16302,7 @@
       </p:sp>
       <p:sp>
         <p:nvSpPr>
-          <p:cNvPr id="19" name="p"/>
+          <p:cNvPr id="19" name="!!p dd5c34b3"/>
           <p:cNvSpPr/>
           <p:nvPr/>
         </p:nvSpPr>
@@ -16331,7 +16343,7 @@
       </p:sp>
       <p:sp>
         <p:nvSpPr>
-          <p:cNvPr id="20" name="Text"/>
+          <p:cNvPr id="20" name="!!T Macao"/>
           <p:cNvSpPr txBox="1"/>
           <p:nvPr/>
         </p:nvSpPr>
@@ -16376,7 +16388,7 @@
       </p:sp>
       <p:sp>
         <p:nvSpPr>
-          <p:cNvPr id="21" name="p"/>
+          <p:cNvPr id="21" name="!!p 442bdd76"/>
           <p:cNvSpPr/>
           <p:nvPr/>
         </p:nvSpPr>
@@ -16406,7 +16418,7 @@
       </p:sp>
       <p:sp>
         <p:nvSpPr>
-          <p:cNvPr id="22" name="Text"/>
+          <p:cNvPr id="22" name="!!T Under the Connect, an adviser's value is"/>
           <p:cNvSpPr txBox="1"/>
           <p:nvPr/>
         </p:nvSpPr>
@@ -16451,7 +16463,7 @@
       </p:sp>
       <p:sp>
         <p:nvSpPr>
-          <p:cNvPr id="23" name="Text"/>
+          <p:cNvPr id="23" name="!!T HKMA, Wealth Management Connect, Southbo"/>
           <p:cNvSpPr txBox="1"/>
           <p:nvPr/>
         </p:nvSpPr>
@@ -16518,7 +16530,7 @@
       </p:sp>
       <p:sp>
         <p:nvSpPr>
-          <p:cNvPr id="24" name="Text"/>
+          <p:cNvPr id="24" name="!!T The problem"/>
           <p:cNvSpPr txBox="1"/>
           <p:nvPr/>
         </p:nvSpPr>
@@ -16563,7 +16575,7 @@
       </p:sp>
       <p:sp>
         <p:nvSpPr>
-          <p:cNvPr id="25" name="Text"/>
+          <p:cNvPr id="25" name="!!T The answer"/>
           <p:cNvSpPr txBox="1"/>
           <p:nvPr/>
         </p:nvSpPr>
@@ -16608,7 +16620,7 @@
       </p:sp>
       <p:sp>
         <p:nvSpPr>
-          <p:cNvPr id="26" name="Text"/>
+          <p:cNvPr id="26" name="!!T The five calls"/>
           <p:cNvSpPr txBox="1"/>
           <p:nvPr/>
         </p:nvSpPr>
@@ -16653,7 +16665,7 @@
       </p:sp>
       <p:sp>
         <p:nvSpPr>
-          <p:cNvPr id="27" name="Text"/>
+          <p:cNvPr id="27" name="!!T Will it hold"/>
           <p:cNvSpPr txBox="1"/>
           <p:nvPr/>
         </p:nvSpPr>
@@ -16698,7 +16710,7 @@
       </p:sp>
       <p:sp>
         <p:nvSpPr>
-          <p:cNvPr id="28" name="Text"/>
+          <p:cNvPr id="28" name="!!T What next"/>
           <p:cNvSpPr txBox="1"/>
           <p:nvPr/>
         </p:nvSpPr>
@@ -16743,7 +16755,7 @@
       </p:sp>
       <p:sp>
         <p:nvSpPr>
-          <p:cNvPr id="29" name="Text"/>
+          <p:cNvPr id="29" name="!!T Us"/>
           <p:cNvSpPr txBox="1"/>
           <p:nvPr/>
         </p:nvSpPr>
@@ -16788,7 +16800,7 @@
       </p:sp>
       <p:sp>
         <p:nvSpPr>
-          <p:cNvPr id="30" name="Text"/>
+          <p:cNvPr id="30" name="!!T 13 / 15"/>
           <p:cNvSpPr txBox="1"/>
           <p:nvPr/>
         </p:nvSpPr>
@@ -16833,7 +16845,7 @@
       </p:sp>
       <p:sp>
         <p:nvSpPr>
-          <p:cNvPr id="31" name="Rule"/>
+          <p:cNvPr id="31" name="!!Rule 9307caaa"/>
           <p:cNvSpPr/>
           <p:nvPr/>
         </p:nvSpPr>
@@ -16863,7 +16875,7 @@
       </p:sp>
       <p:sp>
         <p:nvSpPr>
-          <p:cNvPr id="32" name="Text"/>
+          <p:cNvPr id="32" name="!!T Northbound"/>
           <p:cNvSpPr txBox="1"/>
           <p:nvPr/>
         </p:nvSpPr>
@@ -16908,7 +16920,7 @@
       </p:sp>
       <p:sp>
         <p:nvSpPr>
-          <p:cNvPr id="33" name="Text"/>
+          <p:cNvPr id="33" name="!!T Hong Kong and Macao residents buy mainla"/>
           <p:cNvSpPr txBox="1"/>
           <p:nvPr/>
         </p:nvSpPr>
@@ -17006,7 +17018,7 @@
       </p:sp>
       <p:sp>
         <p:nvSpPr>
-          <p:cNvPr id="34" name="Rule"/>
+          <p:cNvPr id="34" name="!!Rule b23448fe"/>
           <p:cNvSpPr/>
           <p:nvPr/>
         </p:nvSpPr>
@@ -17036,7 +17048,7 @@
       </p:sp>
       <p:sp>
         <p:nvSpPr>
-          <p:cNvPr id="35" name="Text"/>
+          <p:cNvPr id="35" name="!!T For the Wongs: a tool for later"/>
           <p:cNvSpPr txBox="1"/>
           <p:nvPr/>
         </p:nvSpPr>
@@ -17081,7 +17093,7 @@
       </p:sp>
       <p:sp>
         <p:nvSpPr>
-          <p:cNvPr id="36" name="Text"/>
+          <p:cNvPr id="36" name="!!T Kept out today: their home, income and b"/>
           <p:cNvSpPr txBox="1"/>
           <p:nvPr/>
         </p:nvSpPr>
@@ -17219,7 +17231,7 @@
       </p:sp>
       <p:sp>
         <p:nvSpPr>
-          <p:cNvPr id="37" name="Text"/>
+          <p:cNvPr id="37" name="!!T Southbound"/>
           <p:cNvSpPr txBox="1"/>
           <p:nvPr/>
         </p:nvSpPr>
@@ -17264,7 +17276,7 @@
       </p:sp>
       <p:sp>
         <p:nvSpPr>
-          <p:cNvPr id="38" name="Text"/>
+          <p:cNvPr id="38" name="!!T Mainland residents buy Hong Kong funds, "/>
           <p:cNvSpPr txBox="1"/>
           <p:nvPr/>
         </p:nvSpPr>
@@ -17371,7 +17383,7 @@
       </p:sp>
       <p:sp>
         <p:nvSpPr>
-          <p:cNvPr id="39" name="Rule"/>
+          <p:cNvPr id="39" name="!!Rule e8e771bd"/>
           <p:cNvSpPr/>
           <p:nvPr/>
         </p:nvSpPr>
@@ -17401,7 +17413,7 @@
       </p:sp>
       <p:sp>
         <p:nvSpPr>
-          <p:cNvPr id="40" name="Text"/>
+          <p:cNvPr id="40" name="!!T For us: the market we want to serve"/>
           <p:cNvSpPr txBox="1"/>
           <p:nvPr/>
         </p:nvSpPr>
@@ -17446,7 +17458,7 @@
       </p:sp>
       <p:sp>
         <p:nvSpPr>
-          <p:cNvPr id="41" name="Text"/>
+          <p:cNvPr id="41" name="!!T A Hong Kong bank won't solicit or recomm"/>
           <p:cNvSpPr txBox="1"/>
           <p:nvPr/>
         </p:nvSpPr>
@@ -17584,7 +17596,7 @@
       </p:sp>
       <p:pic>
         <p:nvPicPr>
-          <p:cNvPr id="42" name="Drawing" descr="image.png"/>
+          <p:cNvPr id="42" name="!!Drawing 3173ff20" descr="image.png"/>
           <p:cNvPicPr>
             <a:picLocks noChangeAspect="1"/>
           </p:cNvPicPr>
@@ -17614,7 +17626,7 @@
       </p:pic>
       <p:pic>
         <p:nvPicPr>
-          <p:cNvPr id="43" name="Drawing" descr="image.png"/>
+          <p:cNvPr id="43" name="!!Drawing 58632ecf" descr="image.png"/>
           <p:cNvPicPr>
             <a:picLocks noChangeAspect="1"/>
           </p:cNvPicPr>
@@ -17647,6 +17659,9 @@
   <p:clrMapOvr>
     <a:masterClrMapping/>
   </p:clrMapOvr>
+  <p:transition>
+    <p:fade/>
+  </p:transition>
 </p:sld>
 </file>
 
@@ -17669,7 +17684,7 @@
       </p:grpSpPr>
       <p:sp>
         <p:nvSpPr>
-          <p:cNvPr id="2" name="Rule"/>
+          <p:cNvPr id="2" name="!!Rule 6ff153ce"/>
           <p:cNvSpPr/>
           <p:nvPr/>
         </p:nvSpPr>
@@ -17699,7 +17714,7 @@
       </p:sp>
       <p:sp>
         <p:nvSpPr>
-          <p:cNvPr id="3" name="Text"/>
+          <p:cNvPr id="3" name="!!T Who we want to become"/>
           <p:cNvSpPr txBox="1"/>
           <p:nvPr/>
         </p:nvSpPr>
@@ -17744,7 +17759,7 @@
       </p:sp>
       <p:sp>
         <p:nvSpPr>
-          <p:cNvPr id="4" name="Text"/>
+          <p:cNvPr id="4" name="!!T Four planners, one aim: families like th"/>
           <p:cNvSpPr txBox="1"/>
           <p:nvPr/>
         </p:nvSpPr>
@@ -17789,7 +17804,7 @@
       </p:sp>
       <p:sp>
         <p:nvSpPr>
-          <p:cNvPr id="5" name="Rule"/>
+          <p:cNvPr id="5" name="!!Rule 3c84bd39"/>
           <p:cNvSpPr/>
           <p:nvPr/>
         </p:nvSpPr>
@@ -17819,7 +17834,7 @@
       </p:sp>
       <p:sp>
         <p:nvSpPr>
-          <p:cNvPr id="6" name="span"/>
+          <p:cNvPr id="6" name="!!span 6eca2b03"/>
           <p:cNvSpPr/>
           <p:nvPr/>
         </p:nvSpPr>
@@ -17858,7 +17873,7 @@
       </p:sp>
       <p:pic>
         <p:nvPicPr>
-          <p:cNvPr id="7" name="Picture" descr="image.jpg"/>
+          <p:cNvPr id="7" name="!!Picture 967a1172" descr="image.jpg"/>
           <p:cNvPicPr>
             <a:picLocks noChangeAspect="1"/>
           </p:cNvPicPr>
@@ -17882,7 +17897,7 @@
       </p:pic>
       <p:sp>
         <p:nvSpPr>
-          <p:cNvPr id="8" name="Text"/>
+          <p:cNvPr id="8" name="!!T Pete"/>
           <p:cNvSpPr txBox="1"/>
           <p:nvPr/>
         </p:nvSpPr>
@@ -17927,7 +17942,7 @@
       </p:sp>
       <p:sp>
         <p:nvSpPr>
-          <p:cNvPr id="9" name="Text"/>
+          <p:cNvPr id="9" name="!!T Lead adviser"/>
           <p:cNvSpPr txBox="1"/>
           <p:nvPr/>
         </p:nvSpPr>
@@ -17972,7 +17987,7 @@
       </p:sp>
       <p:sp>
         <p:nvSpPr>
-          <p:cNvPr id="10" name="Text"/>
+          <p:cNvPr id="10" name="!!T In five years"/>
           <p:cNvSpPr txBox="1"/>
           <p:nvPr/>
         </p:nvSpPr>
@@ -18017,7 +18032,7 @@
       </p:sp>
       <p:sp>
         <p:nvSpPr>
-          <p:cNvPr id="11" name="Text"/>
+          <p:cNvPr id="11" name="!!T An investment specialist in a Hong Kong "/>
           <p:cNvSpPr txBox="1"/>
           <p:nvPr/>
         </p:nvSpPr>
@@ -18106,7 +18121,7 @@
       </p:sp>
       <p:sp>
         <p:nvSpPr>
-          <p:cNvPr id="12" name="Text"/>
+          <p:cNvPr id="12" name="!!T matching each Connect client's portfolio"/>
           <p:cNvSpPr txBox="1"/>
           <p:nvPr/>
         </p:nvSpPr>
@@ -18213,7 +18228,7 @@
       </p:sp>
       <p:sp>
         <p:nvSpPr>
-          <p:cNvPr id="13" name="div"/>
+          <p:cNvPr id="13" name="!!div fd31cf9f"/>
           <p:cNvSpPr/>
           <p:nvPr/>
         </p:nvSpPr>
@@ -18243,7 +18258,7 @@
       </p:sp>
       <p:sp>
         <p:nvSpPr>
-          <p:cNvPr id="14" name="Text"/>
+          <p:cNvPr id="14" name="!!T What this plan taught me"/>
           <p:cNvSpPr txBox="1"/>
           <p:nvPr/>
         </p:nvSpPr>
@@ -18288,7 +18303,7 @@
       </p:sp>
       <p:sp>
         <p:nvSpPr>
-          <p:cNvPr id="15" name="Text"/>
+          <p:cNvPr id="15" name="!!T “Fitting the Wongs' three risk profiles "/>
           <p:cNvSpPr txBox="1"/>
           <p:nvPr/>
         </p:nvSpPr>
@@ -18377,7 +18392,7 @@
       </p:sp>
       <p:sp>
         <p:nvSpPr>
-          <p:cNvPr id="16" name="Rule"/>
+          <p:cNvPr id="16" name="!!Rule fcd5f05c"/>
           <p:cNvSpPr/>
           <p:nvPr/>
         </p:nvSpPr>
@@ -18407,7 +18422,7 @@
       </p:sp>
       <p:sp>
         <p:nvSpPr>
-          <p:cNvPr id="17" name="span"/>
+          <p:cNvPr id="17" name="!!span 2424d96d"/>
           <p:cNvSpPr/>
           <p:nvPr/>
         </p:nvSpPr>
@@ -18446,7 +18461,7 @@
       </p:sp>
       <p:pic>
         <p:nvPicPr>
-          <p:cNvPr id="18" name="Picture" descr="image.jpg"/>
+          <p:cNvPr id="18" name="!!Picture 59db1258" descr="image.jpg"/>
           <p:cNvPicPr>
             <a:picLocks noChangeAspect="1"/>
           </p:cNvPicPr>
@@ -18470,7 +18485,7 @@
       </p:pic>
       <p:sp>
         <p:nvSpPr>
-          <p:cNvPr id="19" name="Text"/>
+          <p:cNvPr id="19" name="!!T Fahtai"/>
           <p:cNvSpPr txBox="1"/>
           <p:nvPr/>
         </p:nvSpPr>
@@ -18515,7 +18530,7 @@
       </p:sp>
       <p:sp>
         <p:nvSpPr>
-          <p:cNvPr id="20" name="Text"/>
+          <p:cNvPr id="20" name="!!T Retirement"/>
           <p:cNvSpPr txBox="1"/>
           <p:nvPr/>
         </p:nvSpPr>
@@ -18560,7 +18575,7 @@
       </p:sp>
       <p:sp>
         <p:nvSpPr>
-          <p:cNvPr id="21" name="Text"/>
+          <p:cNvPr id="21" name="!!T In five years #2"/>
           <p:cNvSpPr txBox="1"/>
           <p:nvPr/>
         </p:nvSpPr>
@@ -18605,7 +18620,7 @@
       </p:sp>
       <p:sp>
         <p:nvSpPr>
-          <p:cNvPr id="22" name="Text"/>
+          <p:cNvPr id="22" name="!!T Building the data and risk models wealth"/>
           <p:cNvSpPr txBox="1"/>
           <p:nvPr/>
         </p:nvSpPr>
@@ -18694,7 +18709,7 @@
       </p:sp>
       <p:sp>
         <p:nvSpPr>
-          <p:cNvPr id="23" name="Text"/>
+          <p:cNvPr id="23" name="!!T across East and Southeast Asia; next, th"/>
           <p:cNvSpPr txBox="1"/>
           <p:nvPr/>
         </p:nvSpPr>
@@ -18792,7 +18807,7 @@
       </p:sp>
       <p:sp>
         <p:nvSpPr>
-          <p:cNvPr id="24" name="div"/>
+          <p:cNvPr id="24" name="!!div f5d9e52b"/>
           <p:cNvSpPr/>
           <p:nvPr/>
         </p:nvSpPr>
@@ -18822,7 +18837,7 @@
       </p:sp>
       <p:sp>
         <p:nvSpPr>
-          <p:cNvPr id="25" name="Text"/>
+          <p:cNvPr id="25" name="!!T What this plan taught me #2"/>
           <p:cNvSpPr txBox="1"/>
           <p:nvPr/>
         </p:nvSpPr>
@@ -18867,7 +18882,7 @@
       </p:sp>
       <p:sp>
         <p:nvSpPr>
-          <p:cNvPr id="26" name="Text"/>
+          <p:cNvPr id="26" name="!!T “A model's job is to price the trade-off"/>
           <p:cNvSpPr txBox="1"/>
           <p:nvPr/>
         </p:nvSpPr>
@@ -18956,7 +18971,7 @@
       </p:sp>
       <p:sp>
         <p:nvSpPr>
-          <p:cNvPr id="27" name="Rule"/>
+          <p:cNvPr id="27" name="!!Rule ab73177e"/>
           <p:cNvSpPr/>
           <p:nvPr/>
         </p:nvSpPr>
@@ -18986,7 +19001,7 @@
       </p:sp>
       <p:sp>
         <p:nvSpPr>
-          <p:cNvPr id="28" name="span"/>
+          <p:cNvPr id="28" name="!!span 8434223d"/>
           <p:cNvSpPr/>
           <p:nvPr/>
         </p:nvSpPr>
@@ -19025,7 +19040,7 @@
       </p:sp>
       <p:pic>
         <p:nvPicPr>
-          <p:cNvPr id="29" name="Picture" descr="image.jpg"/>
+          <p:cNvPr id="29" name="!!Picture d4927092" descr="image.jpg"/>
           <p:cNvPicPr>
             <a:picLocks noChangeAspect="1"/>
           </p:cNvPicPr>
@@ -19049,7 +19064,7 @@
       </p:pic>
       <p:sp>
         <p:nvSpPr>
-          <p:cNvPr id="30" name="Text"/>
+          <p:cNvPr id="30" name="!!T Win"/>
           <p:cNvSpPr txBox="1"/>
           <p:nvPr/>
         </p:nvSpPr>
@@ -19094,7 +19109,7 @@
       </p:sp>
       <p:sp>
         <p:nvSpPr>
-          <p:cNvPr id="31" name="Text"/>
+          <p:cNvPr id="31" name="!!T Investment"/>
           <p:cNvSpPr txBox="1"/>
           <p:nvPr/>
         </p:nvSpPr>
@@ -19139,7 +19154,7 @@
       </p:sp>
       <p:sp>
         <p:nvSpPr>
-          <p:cNvPr id="32" name="Text"/>
+          <p:cNvPr id="32" name="!!T In five years #3"/>
           <p:cNvSpPr txBox="1"/>
           <p:nvPr/>
         </p:nvSpPr>
@@ -19184,7 +19199,7 @@
       </p:sp>
       <p:sp>
         <p:nvSpPr>
-          <p:cNvPr id="33" name="Text"/>
+          <p:cNvPr id="33" name="!!T An investment strategist for family clie"/>
           <p:cNvSpPr txBox="1"/>
           <p:nvPr/>
         </p:nvSpPr>
@@ -19251,7 +19266,7 @@
       </p:sp>
       <p:sp>
         <p:nvSpPr>
-          <p:cNvPr id="34" name="Text"/>
+          <p:cNvPr id="34" name="!!T across Asia-Pacific, fitting each portfo"/>
           <p:cNvSpPr txBox="1"/>
           <p:nvPr/>
         </p:nvSpPr>
@@ -19349,7 +19364,7 @@
       </p:sp>
       <p:sp>
         <p:nvSpPr>
-          <p:cNvPr id="35" name="div"/>
+          <p:cNvPr id="35" name="!!div fb8cba3e"/>
           <p:cNvSpPr/>
           <p:nvPr/>
         </p:nvSpPr>
@@ -19380,7 +19395,7 @@
       </p:sp>
       <p:sp>
         <p:nvSpPr>
-          <p:cNvPr id="36" name="Text"/>
+          <p:cNvPr id="36" name="!!T What this plan taught me #3"/>
           <p:cNvSpPr txBox="1"/>
           <p:nvPr/>
         </p:nvSpPr>
@@ -19425,7 +19440,7 @@
       </p:sp>
       <p:sp>
         <p:nvSpPr>
-          <p:cNvPr id="37" name="Text"/>
+          <p:cNvPr id="37" name="!!T Win's line, to confirm"/>
           <p:cNvSpPr txBox="1"/>
           <p:nvPr/>
         </p:nvSpPr>
@@ -19470,7 +19485,7 @@
       </p:sp>
       <p:sp>
         <p:nvSpPr>
-          <p:cNvPr id="38" name="Rule"/>
+          <p:cNvPr id="38" name="!!Rule 6863439a"/>
           <p:cNvSpPr/>
           <p:nvPr/>
         </p:nvSpPr>
@@ -19500,7 +19515,7 @@
       </p:sp>
       <p:sp>
         <p:nvSpPr>
-          <p:cNvPr id="39" name="span"/>
+          <p:cNvPr id="39" name="!!span 79bc03e5"/>
           <p:cNvSpPr/>
           <p:nvPr/>
         </p:nvSpPr>
@@ -19547,7 +19562,7 @@
       </p:sp>
       <p:pic>
         <p:nvPicPr>
-          <p:cNvPr id="40" name="Drawing" descr="image.png"/>
+          <p:cNvPr id="40" name="!!Drawing 6bdc6dc6" descr="image.png"/>
           <p:cNvPicPr>
             <a:picLocks noChangeAspect="1"/>
           </p:cNvPicPr>
@@ -19577,7 +19592,7 @@
       </p:pic>
       <p:sp>
         <p:nvSpPr>
-          <p:cNvPr id="41" name="Text"/>
+          <p:cNvPr id="41" name="!!T Lookbua"/>
           <p:cNvSpPr txBox="1"/>
           <p:nvPr/>
         </p:nvSpPr>
@@ -19622,7 +19637,7 @@
       </p:sp>
       <p:sp>
         <p:nvSpPr>
-          <p:cNvPr id="42" name="Text"/>
+          <p:cNvPr id="42" name="!!T Protection and risk"/>
           <p:cNvSpPr txBox="1"/>
           <p:nvPr/>
         </p:nvSpPr>
@@ -19667,7 +19682,7 @@
       </p:sp>
       <p:sp>
         <p:nvSpPr>
-          <p:cNvPr id="43" name="Text"/>
+          <p:cNvPr id="43" name="!!T In five years #4"/>
           <p:cNvSpPr txBox="1"/>
           <p:nvPr/>
         </p:nvSpPr>
@@ -19712,7 +19727,7 @@
       </p:sp>
       <p:sp>
         <p:nvSpPr>
-          <p:cNvPr id="44" name="Text"/>
+          <p:cNvPr id="44" name="!!T A specialist in systems risk"/>
           <p:cNvSpPr txBox="1"/>
           <p:nvPr/>
         </p:nvSpPr>
@@ -19757,7 +19772,7 @@
       </p:sp>
       <p:sp>
         <p:nvSpPr>
-          <p:cNvPr id="45" name="Text"/>
+          <p:cNvPr id="45" name="!!T the Connect links two markets with diffe"/>
           <p:cNvSpPr txBox="1"/>
           <p:nvPr/>
         </p:nvSpPr>
@@ -19855,7 +19870,7 @@
       </p:sp>
       <p:sp>
         <p:nvSpPr>
-          <p:cNvPr id="46" name="div"/>
+          <p:cNvPr id="46" name="!!div b98891b5"/>
           <p:cNvSpPr/>
           <p:nvPr/>
         </p:nvSpPr>
@@ -19885,7 +19900,7 @@
       </p:sp>
       <p:sp>
         <p:nvSpPr>
-          <p:cNvPr id="47" name="Text"/>
+          <p:cNvPr id="47" name="!!T What this plan taught me #4"/>
           <p:cNvSpPr txBox="1"/>
           <p:nvPr/>
         </p:nvSpPr>
@@ -19930,7 +19945,7 @@
       </p:sp>
       <p:sp>
         <p:nvSpPr>
-          <p:cNvPr id="48" name="Text"/>
+          <p:cNvPr id="48" name="!!T “Every risk needs a named defence.”"/>
           <p:cNvSpPr txBox="1"/>
           <p:nvPr/>
         </p:nvSpPr>
@@ -19997,7 +20012,7 @@
       </p:sp>
       <p:sp>
         <p:nvSpPr>
-          <p:cNvPr id="49" name="p"/>
+          <p:cNvPr id="49" name="!!p 442bdd76"/>
           <p:cNvSpPr/>
           <p:nvPr/>
         </p:nvSpPr>
@@ -20027,7 +20042,7 @@
       </p:sp>
       <p:sp>
         <p:nvSpPr>
-          <p:cNvPr id="50" name="Text"/>
+          <p:cNvPr id="50" name="!!T What the Wongs taught all four of us: a "/>
           <p:cNvSpPr txBox="1"/>
           <p:nvPr/>
         </p:nvSpPr>
@@ -20072,7 +20087,7 @@
       </p:sp>
       <p:sp>
         <p:nvSpPr>
-          <p:cNvPr id="51" name="Text"/>
+          <p:cNvPr id="51" name="!!T Personal statements: written case p.14. "/>
           <p:cNvSpPr txBox="1"/>
           <p:nvPr/>
         </p:nvSpPr>
@@ -20139,7 +20154,7 @@
       </p:sp>
       <p:sp>
         <p:nvSpPr>
-          <p:cNvPr id="52" name="Text"/>
+          <p:cNvPr id="52" name="!!T The problem"/>
           <p:cNvSpPr txBox="1"/>
           <p:nvPr/>
         </p:nvSpPr>
@@ -20184,7 +20199,7 @@
       </p:sp>
       <p:sp>
         <p:nvSpPr>
-          <p:cNvPr id="53" name="Text"/>
+          <p:cNvPr id="53" name="!!T The answer"/>
           <p:cNvSpPr txBox="1"/>
           <p:nvPr/>
         </p:nvSpPr>
@@ -20229,7 +20244,7 @@
       </p:sp>
       <p:sp>
         <p:nvSpPr>
-          <p:cNvPr id="54" name="Text"/>
+          <p:cNvPr id="54" name="!!T The five calls"/>
           <p:cNvSpPr txBox="1"/>
           <p:nvPr/>
         </p:nvSpPr>
@@ -20274,7 +20289,7 @@
       </p:sp>
       <p:sp>
         <p:nvSpPr>
-          <p:cNvPr id="55" name="Text"/>
+          <p:cNvPr id="55" name="!!T Will it hold"/>
           <p:cNvSpPr txBox="1"/>
           <p:nvPr/>
         </p:nvSpPr>
@@ -20319,7 +20334,7 @@
       </p:sp>
       <p:sp>
         <p:nvSpPr>
-          <p:cNvPr id="56" name="Text"/>
+          <p:cNvPr id="56" name="!!T What next"/>
           <p:cNvSpPr txBox="1"/>
           <p:nvPr/>
         </p:nvSpPr>
@@ -20364,7 +20379,7 @@
       </p:sp>
       <p:sp>
         <p:nvSpPr>
-          <p:cNvPr id="57" name="Text"/>
+          <p:cNvPr id="57" name="!!T Us"/>
           <p:cNvSpPr txBox="1"/>
           <p:nvPr/>
         </p:nvSpPr>
@@ -20409,7 +20424,7 @@
       </p:sp>
       <p:sp>
         <p:nvSpPr>
-          <p:cNvPr id="58" name="Text"/>
+          <p:cNvPr id="58" name="!!T 14 / 15"/>
           <p:cNvSpPr txBox="1"/>
           <p:nvPr/>
         </p:nvSpPr>
@@ -20457,6 +20472,9 @@
   <p:clrMapOvr>
     <a:masterClrMapping/>
   </p:clrMapOvr>
+  <p:transition>
+    <p:fade/>
+  </p:transition>
 </p:sld>
 </file>
 
@@ -20479,7 +20497,7 @@
       </p:grpSpPr>
       <p:sp>
         <p:nvSpPr>
-          <p:cNvPr id="2" name="div"/>
+          <p:cNvPr id="2" name="!!div 86fce566"/>
           <p:cNvSpPr/>
           <p:nvPr/>
         </p:nvSpPr>
@@ -20509,7 +20527,7 @@
       </p:sp>
       <p:sp>
         <p:nvSpPr>
-          <p:cNvPr id="3" name="Text"/>
+          <p:cNvPr id="3" name="!!T Built to Last"/>
           <p:cNvSpPr txBox="1"/>
           <p:nvPr/>
         </p:nvSpPr>
@@ -20576,7 +20594,7 @@
       </p:sp>
       <p:sp>
         <p:nvSpPr>
-          <p:cNvPr id="4" name="Rule"/>
+          <p:cNvPr id="4" name="!!Rule 5b5f95ac"/>
           <p:cNvSpPr/>
           <p:nvPr/>
         </p:nvSpPr>
@@ -20606,7 +20624,7 @@
       </p:sp>
       <p:sp>
         <p:nvSpPr>
-          <p:cNvPr id="5" name="Text"/>
+          <p:cNvPr id="5" name="!!T 97%"/>
           <p:cNvSpPr txBox="1"/>
           <p:nvPr/>
         </p:nvSpPr>
@@ -20651,7 +20669,7 @@
       </p:sp>
       <p:sp>
         <p:nvSpPr>
-          <p:cNvPr id="6" name="Text"/>
+          <p:cNvPr id="6" name="!!T chance the money lasts to Carmen's 89, f"/>
           <p:cNvSpPr txBox="1"/>
           <p:nvPr/>
         </p:nvSpPr>
@@ -20740,7 +20758,7 @@
       </p:sp>
       <p:sp>
         <p:nvSpPr>
-          <p:cNvPr id="7" name="Rule"/>
+          <p:cNvPr id="7" name="!!Rule d287fa9e"/>
           <p:cNvSpPr/>
           <p:nvPr/>
         </p:nvSpPr>
@@ -20770,7 +20788,7 @@
       </p:sp>
       <p:sp>
         <p:nvSpPr>
-          <p:cNvPr id="8" name="Text"/>
+          <p:cNvPr id="8" name="!!T HK$7.7M"/>
           <p:cNvSpPr txBox="1"/>
           <p:nvPr/>
         </p:nvSpPr>
@@ -20815,7 +20833,7 @@
       </p:sp>
       <p:sp>
         <p:nvSpPr>
-          <p:cNvPr id="9" name="Text"/>
+          <p:cNvPr id="9" name="!!T left to Ryan and Chloe where their own w"/>
           <p:cNvSpPr txBox="1"/>
           <p:nvPr/>
         </p:nvSpPr>
@@ -20904,7 +20922,7 @@
       </p:sp>
       <p:sp>
         <p:nvSpPr>
-          <p:cNvPr id="10" name="Rule"/>
+          <p:cNvPr id="10" name="!!Rule ea4f3755"/>
           <p:cNvSpPr/>
           <p:nvPr/>
         </p:nvSpPr>
@@ -20934,7 +20952,7 @@
       </p:sp>
       <p:sp>
         <p:nvSpPr>
-          <p:cNvPr id="11" name="Text"/>
+          <p:cNvPr id="11" name="!!T At 65"/>
           <p:cNvSpPr txBox="1"/>
           <p:nvPr/>
         </p:nvSpPr>
@@ -20979,7 +20997,7 @@
       </p:sp>
       <p:sp>
         <p:nvSpPr>
-          <p:cNvPr id="12" name="Text"/>
+          <p:cNvPr id="12" name="!!T the home their choice, to stay or to mov"/>
           <p:cNvSpPr txBox="1"/>
           <p:nvPr/>
         </p:nvSpPr>
@@ -21068,7 +21086,7 @@
       </p:sp>
       <p:sp>
         <p:nvSpPr>
-          <p:cNvPr id="13" name="Text"/>
+          <p:cNvPr id="13" name="!!T Thank you"/>
           <p:cNvSpPr txBox="1"/>
           <p:nvPr/>
         </p:nvSpPr>
@@ -21113,7 +21131,7 @@
       </p:sp>
       <p:sp>
         <p:nvSpPr>
-          <p:cNvPr id="14" name="Text"/>
+          <p:cNvPr id="14" name="!!T Team Axis"/>
           <p:cNvSpPr txBox="1"/>
           <p:nvPr/>
         </p:nvSpPr>
@@ -21158,7 +21176,7 @@
       </p:sp>
       <p:sp>
         <p:nvSpPr>
-          <p:cNvPr id="15" name="Text"/>
+          <p:cNvPr id="15" name="!!T 2026"/>
           <p:cNvSpPr txBox="1"/>
           <p:nvPr/>
         </p:nvSpPr>
@@ -21203,7 +21221,7 @@
       </p:sp>
       <p:sp>
         <p:nvSpPr>
-          <p:cNvPr id="16" name="Text"/>
+          <p:cNvPr id="16" name="!!T Pete"/>
           <p:cNvSpPr txBox="1"/>
           <p:nvPr/>
         </p:nvSpPr>
@@ -21248,7 +21266,7 @@
       </p:sp>
       <p:sp>
         <p:nvSpPr>
-          <p:cNvPr id="17" name="Text"/>
+          <p:cNvPr id="17" name="!!T Lead adviser"/>
           <p:cNvSpPr txBox="1"/>
           <p:nvPr/>
         </p:nvSpPr>
@@ -21293,7 +21311,7 @@
       </p:sp>
       <p:sp>
         <p:nvSpPr>
-          <p:cNvPr id="18" name="Text"/>
+          <p:cNvPr id="18" name="!!T Fahtai"/>
           <p:cNvSpPr txBox="1"/>
           <p:nvPr/>
         </p:nvSpPr>
@@ -21338,7 +21356,7 @@
       </p:sp>
       <p:sp>
         <p:nvSpPr>
-          <p:cNvPr id="19" name="Text"/>
+          <p:cNvPr id="19" name="!!T Retirement"/>
           <p:cNvSpPr txBox="1"/>
           <p:nvPr/>
         </p:nvSpPr>
@@ -21383,7 +21401,7 @@
       </p:sp>
       <p:sp>
         <p:nvSpPr>
-          <p:cNvPr id="20" name="Text"/>
+          <p:cNvPr id="20" name="!!T Win"/>
           <p:cNvSpPr txBox="1"/>
           <p:nvPr/>
         </p:nvSpPr>
@@ -21428,7 +21446,7 @@
       </p:sp>
       <p:sp>
         <p:nvSpPr>
-          <p:cNvPr id="21" name="Text"/>
+          <p:cNvPr id="21" name="!!T Investment"/>
           <p:cNvSpPr txBox="1"/>
           <p:nvPr/>
         </p:nvSpPr>
@@ -21473,7 +21491,7 @@
       </p:sp>
       <p:sp>
         <p:nvSpPr>
-          <p:cNvPr id="22" name="Text"/>
+          <p:cNvPr id="22" name="!!T Lookbua"/>
           <p:cNvSpPr txBox="1"/>
           <p:nvPr/>
         </p:nvSpPr>
@@ -21518,7 +21536,7 @@
       </p:sp>
       <p:sp>
         <p:nvSpPr>
-          <p:cNvPr id="23" name="Text"/>
+          <p:cNvPr id="23" name="!!T Protection and risk"/>
           <p:cNvSpPr txBox="1"/>
           <p:nvPr/>
         </p:nvSpPr>
@@ -21563,7 +21581,7 @@
       </p:sp>
       <p:sp>
         <p:nvSpPr>
-          <p:cNvPr id="24" name="Text"/>
+          <p:cNvPr id="24" name="!!T Chance and inheritance: 10,000 simulated"/>
           <p:cNvSpPr txBox="1"/>
           <p:nvPr/>
         </p:nvSpPr>
@@ -21608,7 +21626,7 @@
       </p:sp>
       <p:sp>
         <p:nvSpPr>
-          <p:cNvPr id="25" name="div"/>
+          <p:cNvPr id="25" name="!!div 4180488b"/>
           <p:cNvSpPr/>
           <p:nvPr/>
         </p:nvSpPr>
@@ -21638,7 +21656,7 @@
       </p:sp>
       <p:pic>
         <p:nvPicPr>
-          <p:cNvPr id="26" name="Drawing" descr="image.png"/>
+          <p:cNvPr id="26" name="!!house" descr="image.png"/>
           <p:cNvPicPr>
             <a:picLocks noChangeAspect="1"/>
           </p:cNvPicPr>
@@ -21668,7 +21686,7 @@
       </p:pic>
       <p:sp>
         <p:nvSpPr>
-          <p:cNvPr id="27" name="Text"/>
+          <p:cNvPr id="27" name="!!T What passes on"/>
           <p:cNvSpPr txBox="1"/>
           <p:nvPr/>
         </p:nvSpPr>
@@ -21713,7 +21731,7 @@
       </p:sp>
       <p:sp>
         <p:nvSpPr>
-          <p:cNvPr id="28" name="Text"/>
+          <p:cNvPr id="28" name="!!T the inheritance kept"/>
           <p:cNvSpPr txBox="1"/>
           <p:nvPr/>
         </p:nvSpPr>
@@ -21758,7 +21776,7 @@
       </p:sp>
       <p:sp>
         <p:nvSpPr>
-          <p:cNvPr id="29" name="Text"/>
+          <p:cNvPr id="29" name="!!T A place for every voice"/>
           <p:cNvSpPr txBox="1"/>
           <p:nvPr/>
         </p:nvSpPr>
@@ -21803,7 +21821,7 @@
       </p:sp>
       <p:sp>
         <p:nvSpPr>
-          <p:cNvPr id="30" name="Text"/>
+          <p:cNvPr id="30" name="!!T Calls 4 and 5"/>
           <p:cNvSpPr txBox="1"/>
           <p:nvPr/>
         </p:nvSpPr>
@@ -21848,7 +21866,7 @@
       </p:sp>
       <p:sp>
         <p:nvSpPr>
-          <p:cNvPr id="31" name="Text"/>
+          <p:cNvPr id="31" name="!!T Income for life"/>
           <p:cNvSpPr txBox="1"/>
           <p:nvPr/>
         </p:nvSpPr>
@@ -21893,7 +21911,7 @@
       </p:sp>
       <p:sp>
         <p:nvSpPr>
-          <p:cNvPr id="32" name="Text"/>
+          <p:cNvPr id="32" name="!!T Calls 2 and 3"/>
           <p:cNvSpPr txBox="1"/>
           <p:nvPr/>
         </p:nvSpPr>
@@ -21938,7 +21956,7 @@
       </p:sp>
       <p:sp>
         <p:nvSpPr>
-          <p:cNvPr id="33" name="Text"/>
+          <p:cNvPr id="33" name="!!T Protected first"/>
           <p:cNvSpPr txBox="1"/>
           <p:nvPr/>
         </p:nvSpPr>
@@ -21983,7 +22001,7 @@
       </p:sp>
       <p:sp>
         <p:nvSpPr>
-          <p:cNvPr id="34" name="Text"/>
+          <p:cNvPr id="34" name="!!T Call 1"/>
           <p:cNvSpPr txBox="1"/>
           <p:nvPr/>
         </p:nvSpPr>
@@ -22031,6 +22049,9 @@
   <p:clrMapOvr>
     <a:masterClrMapping/>
   </p:clrMapOvr>
+  <p:transition>
+    <p:fade/>
+  </p:transition>
 </p:sld>
 </file>
 
@@ -22053,7 +22074,7 @@
       </p:grpSpPr>
       <p:sp>
         <p:nvSpPr>
-          <p:cNvPr id="2" name="Rule"/>
+          <p:cNvPr id="2" name="!!Rule 6ff153ce"/>
           <p:cNvSpPr/>
           <p:nvPr/>
         </p:nvSpPr>
@@ -22083,7 +22104,7 @@
       </p:sp>
       <p:sp>
         <p:nvSpPr>
-          <p:cNvPr id="3" name="Text"/>
+          <p:cNvPr id="3" name="!!T Meet the Wongs"/>
           <p:cNvSpPr txBox="1"/>
           <p:nvPr/>
         </p:nvSpPr>
@@ -22128,7 +22149,7 @@
       </p:sp>
       <p:sp>
         <p:nvSpPr>
-          <p:cNvPr id="4" name="Text"/>
+          <p:cNvPr id="4" name="!!T On paper, the Wongs are secure, for a pl"/>
           <p:cNvSpPr txBox="1"/>
           <p:nvPr/>
         </p:nvSpPr>
@@ -22173,7 +22194,7 @@
       </p:sp>
       <p:sp>
         <p:nvSpPr>
-          <p:cNvPr id="5" name="Rule"/>
+          <p:cNvPr id="5" name="!!Rule 51e91ad5"/>
           <p:cNvSpPr/>
           <p:nvPr/>
         </p:nvSpPr>
@@ -22203,7 +22224,7 @@
       </p:sp>
       <p:sp>
         <p:nvSpPr>
-          <p:cNvPr id="6" name="Text"/>
+          <p:cNvPr id="6" name="!!T What they have today…"/>
           <p:cNvSpPr txBox="1"/>
           <p:nvPr/>
         </p:nvSpPr>
@@ -22248,7 +22269,7 @@
       </p:sp>
       <p:sp>
         <p:nvSpPr>
-          <p:cNvPr id="7" name="Text"/>
+          <p:cNvPr id="7" name="!!T What they own"/>
           <p:cNvSpPr txBox="1"/>
           <p:nvPr/>
         </p:nvSpPr>
@@ -22293,7 +22314,7 @@
       </p:sp>
       <p:sp>
         <p:nvSpPr>
-          <p:cNvPr id="8" name="Text"/>
+          <p:cNvPr id="8" name="!!T HK$27.2M"/>
           <p:cNvSpPr txBox="1"/>
           <p:nvPr/>
         </p:nvSpPr>
@@ -22338,7 +22359,7 @@
       </p:sp>
       <p:sp>
         <p:nvSpPr>
-          <p:cNvPr id="9" name="i"/>
+          <p:cNvPr id="9" name="!!i 4fb58d2d"/>
           <p:cNvSpPr/>
           <p:nvPr/>
         </p:nvSpPr>
@@ -22376,7 +22397,7 @@
       </p:sp>
       <p:sp>
         <p:nvSpPr>
-          <p:cNvPr id="10" name="Text"/>
+          <p:cNvPr id="10" name="!!T The home"/>
           <p:cNvSpPr txBox="1"/>
           <p:nvPr/>
         </p:nvSpPr>
@@ -22421,7 +22442,7 @@
       </p:sp>
       <p:sp>
         <p:nvSpPr>
-          <p:cNvPr id="11" name="Text"/>
+          <p:cNvPr id="11" name="!!T HK$11.5M"/>
           <p:cNvSpPr txBox="1"/>
           <p:nvPr/>
         </p:nvSpPr>
@@ -22466,7 +22487,7 @@
       </p:sp>
       <p:sp>
         <p:nvSpPr>
-          <p:cNvPr id="12" name="i"/>
+          <p:cNvPr id="12" name="!!i 08516527"/>
           <p:cNvSpPr/>
           <p:nvPr/>
         </p:nvSpPr>
@@ -22496,7 +22517,7 @@
       </p:sp>
       <p:sp>
         <p:nvSpPr>
-          <p:cNvPr id="13" name="Rule"/>
+          <p:cNvPr id="13" name="!!Rule 029e13c9"/>
           <p:cNvSpPr/>
           <p:nvPr/>
         </p:nvSpPr>
@@ -22526,7 +22547,7 @@
       </p:sp>
       <p:sp>
         <p:nvSpPr>
-          <p:cNvPr id="14" name="Text"/>
+          <p:cNvPr id="14" name="!!T The business"/>
           <p:cNvSpPr txBox="1"/>
           <p:nvPr/>
         </p:nvSpPr>
@@ -22571,7 +22592,7 @@
       </p:sp>
       <p:sp>
         <p:nvSpPr>
-          <p:cNvPr id="15" name="Text"/>
+          <p:cNvPr id="15" name="!!T HK$5.0M"/>
           <p:cNvSpPr txBox="1"/>
           <p:nvPr/>
         </p:nvSpPr>
@@ -22616,7 +22637,7 @@
       </p:sp>
       <p:sp>
         <p:nvSpPr>
-          <p:cNvPr id="16" name="i"/>
+          <p:cNvPr id="16" name="!!i 813ebadc"/>
           <p:cNvSpPr/>
           <p:nvPr/>
         </p:nvSpPr>
@@ -22646,7 +22667,7 @@
       </p:sp>
       <p:sp>
         <p:nvSpPr>
-          <p:cNvPr id="17" name="Rule"/>
+          <p:cNvPr id="17" name="!!Rule 24d0fa7c"/>
           <p:cNvSpPr/>
           <p:nvPr/>
         </p:nvSpPr>
@@ -22676,7 +22697,7 @@
       </p:sp>
       <p:sp>
         <p:nvSpPr>
-          <p:cNvPr id="18" name="Text"/>
+          <p:cNvPr id="18" name="!!T Investments"/>
           <p:cNvSpPr txBox="1"/>
           <p:nvPr/>
         </p:nvSpPr>
@@ -22721,7 +22742,7 @@
       </p:sp>
       <p:sp>
         <p:nvSpPr>
-          <p:cNvPr id="19" name="Text"/>
+          <p:cNvPr id="19" name="!!T HK$6.1M"/>
           <p:cNvSpPr txBox="1"/>
           <p:nvPr/>
         </p:nvSpPr>
@@ -22766,7 +22787,7 @@
       </p:sp>
       <p:sp>
         <p:nvSpPr>
-          <p:cNvPr id="20" name="i"/>
+          <p:cNvPr id="20" name="!!i 41bc7407"/>
           <p:cNvSpPr/>
           <p:nvPr/>
         </p:nvSpPr>
@@ -22796,7 +22817,7 @@
       </p:sp>
       <p:sp>
         <p:nvSpPr>
-          <p:cNvPr id="21" name="Rule"/>
+          <p:cNvPr id="21" name="!!Rule 92e62bfc"/>
           <p:cNvSpPr/>
           <p:nvPr/>
         </p:nvSpPr>
@@ -22826,7 +22847,7 @@
       </p:sp>
       <p:sp>
         <p:nvSpPr>
-          <p:cNvPr id="22" name="i"/>
+          <p:cNvPr id="22" name="!!i ec5ec3db"/>
           <p:cNvSpPr/>
           <p:nvPr/>
         </p:nvSpPr>
@@ -22856,7 +22877,7 @@
       </p:sp>
       <p:sp>
         <p:nvSpPr>
-          <p:cNvPr id="23" name="Rule"/>
+          <p:cNvPr id="23" name="!!Rule 3b47d71b"/>
           <p:cNvSpPr/>
           <p:nvPr/>
         </p:nvSpPr>
@@ -22886,7 +22907,7 @@
       </p:sp>
       <p:sp>
         <p:nvSpPr>
-          <p:cNvPr id="24" name="i"/>
+          <p:cNvPr id="24" name="!!i 1e5b7260"/>
           <p:cNvSpPr/>
           <p:nvPr/>
         </p:nvSpPr>
@@ -22916,7 +22937,7 @@
       </p:sp>
       <p:sp>
         <p:nvSpPr>
-          <p:cNvPr id="25" name="Rule"/>
+          <p:cNvPr id="25" name="!!Rule 15f016e0"/>
           <p:cNvSpPr/>
           <p:nvPr/>
         </p:nvSpPr>
@@ -22946,7 +22967,7 @@
       </p:sp>
       <p:sp>
         <p:nvSpPr>
-          <p:cNvPr id="26" name="Rule"/>
+          <p:cNvPr id="26" name="!!Rule 9c54e67f"/>
           <p:cNvSpPr/>
           <p:nvPr/>
         </p:nvSpPr>
@@ -22976,7 +22997,7 @@
       </p:sp>
       <p:sp>
         <p:nvSpPr>
-          <p:cNvPr id="27" name="Text"/>
+          <p:cNvPr id="27" name="!!T MPF, HK$1.9M"/>
           <p:cNvSpPr txBox="1"/>
           <p:nvPr/>
         </p:nvSpPr>
@@ -23030,7 +23051,7 @@
       </p:sp>
       <p:sp>
         <p:nvSpPr>
-          <p:cNvPr id="28" name="Rule"/>
+          <p:cNvPr id="28" name="!!Rule 44c26aef"/>
           <p:cNvSpPr/>
           <p:nvPr/>
         </p:nvSpPr>
@@ -23060,7 +23081,7 @@
       </p:sp>
       <p:sp>
         <p:nvSpPr>
-          <p:cNvPr id="29" name="Text"/>
+          <p:cNvPr id="29" name="!!T Cash, HK$2.5M: 30 months of spending"/>
           <p:cNvSpPr txBox="1"/>
           <p:nvPr/>
         </p:nvSpPr>
@@ -23114,7 +23135,7 @@
       </p:sp>
       <p:sp>
         <p:nvSpPr>
-          <p:cNvPr id="30" name="Rule"/>
+          <p:cNvPr id="30" name="!!Rule ab87bb48"/>
           <p:cNvSpPr/>
           <p:nvPr/>
         </p:nvSpPr>
@@ -23144,7 +23165,7 @@
       </p:sp>
       <p:sp>
         <p:nvSpPr>
-          <p:cNvPr id="31" name="Text"/>
+          <p:cNvPr id="31" name="!!T HK$24.4M"/>
           <p:cNvSpPr txBox="1"/>
           <p:nvPr/>
         </p:nvSpPr>
@@ -23189,7 +23210,7 @@
       </p:sp>
       <p:sp>
         <p:nvSpPr>
-          <p:cNvPr id="32" name="Text"/>
+          <p:cNvPr id="32" name="!!T net worth today"/>
           <p:cNvSpPr txBox="1"/>
           <p:nvPr/>
         </p:nvSpPr>
@@ -23234,7 +23255,7 @@
       </p:sp>
       <p:sp>
         <p:nvSpPr>
-          <p:cNvPr id="33" name="Text"/>
+          <p:cNvPr id="33" name="!!T what they own, less what they owe"/>
           <p:cNvSpPr txBox="1"/>
           <p:nvPr/>
         </p:nvSpPr>
@@ -23279,7 +23300,7 @@
       </p:sp>
       <p:sp>
         <p:nvSpPr>
-          <p:cNvPr id="34" name="Rule"/>
+          <p:cNvPr id="34" name="!!Rule e85b9e59"/>
           <p:cNvSpPr/>
           <p:nvPr/>
         </p:nvSpPr>
@@ -23309,7 +23330,7 @@
       </p:sp>
       <p:sp>
         <p:nvSpPr>
-          <p:cNvPr id="35" name="Text"/>
+          <p:cNvPr id="35" name="!!T 41%"/>
           <p:cNvSpPr txBox="1"/>
           <p:nvPr/>
         </p:nvSpPr>
@@ -23354,7 +23375,7 @@
       </p:sp>
       <p:sp>
         <p:nvSpPr>
-          <p:cNvPr id="36" name="Text"/>
+          <p:cNvPr id="36" name="!!T of after-tax income saved each year"/>
           <p:cNvSpPr txBox="1"/>
           <p:nvPr/>
         </p:nvSpPr>
@@ -23399,7 +23420,7 @@
       </p:sp>
       <p:sp>
         <p:nvSpPr>
-          <p:cNvPr id="37" name="Text"/>
+          <p:cNvPr id="37" name="!!T What they owe"/>
           <p:cNvSpPr txBox="1"/>
           <p:nvPr/>
         </p:nvSpPr>
@@ -23444,7 +23465,7 @@
       </p:sp>
       <p:sp>
         <p:nvSpPr>
-          <p:cNvPr id="38" name="Text"/>
+          <p:cNvPr id="38" name="!!T HK$2.8M"/>
           <p:cNvSpPr txBox="1"/>
           <p:nvPr/>
         </p:nvSpPr>
@@ -23489,7 +23510,7 @@
       </p:sp>
       <p:sp>
         <p:nvSpPr>
-          <p:cNvPr id="39" name="i"/>
+          <p:cNvPr id="39" name="!!i 10cf17ab"/>
           <p:cNvSpPr/>
           <p:nvPr/>
         </p:nvSpPr>
@@ -23519,7 +23540,7 @@
       </p:sp>
       <p:sp>
         <p:nvSpPr>
-          <p:cNvPr id="40" name="i"/>
+          <p:cNvPr id="40" name="!!i 9775f138"/>
           <p:cNvSpPr/>
           <p:nvPr/>
         </p:nvSpPr>
@@ -23549,7 +23570,7 @@
       </p:sp>
       <p:sp>
         <p:nvSpPr>
-          <p:cNvPr id="41" name="Rule"/>
+          <p:cNvPr id="41" name="!!Rule 2a2f75fe"/>
           <p:cNvSpPr/>
           <p:nvPr/>
         </p:nvSpPr>
@@ -23579,7 +23600,7 @@
       </p:sp>
       <p:sp>
         <p:nvSpPr>
-          <p:cNvPr id="42" name="i"/>
+          <p:cNvPr id="42" name="!!i 34dd1154"/>
           <p:cNvSpPr/>
           <p:nvPr/>
         </p:nvSpPr>
@@ -23609,7 +23630,7 @@
       </p:sp>
       <p:sp>
         <p:nvSpPr>
-          <p:cNvPr id="43" name="Rule"/>
+          <p:cNvPr id="43" name="!!Rule 9312a44d"/>
           <p:cNvSpPr/>
           <p:nvPr/>
         </p:nvSpPr>
@@ -23639,7 +23660,7 @@
       </p:sp>
       <p:sp>
         <p:nvSpPr>
-          <p:cNvPr id="44" name="Text"/>
+          <p:cNvPr id="44" name="!!T 10% of what they own: the mortgage, a bu"/>
           <p:cNvSpPr txBox="1"/>
           <p:nvPr/>
         </p:nvSpPr>
@@ -23693,7 +23714,7 @@
       </p:sp>
       <p:sp>
         <p:nvSpPr>
-          <p:cNvPr id="45" name="Rule"/>
+          <p:cNvPr id="45" name="!!Rule 167e5300"/>
           <p:cNvSpPr/>
           <p:nvPr/>
         </p:nvSpPr>
@@ -23723,7 +23744,7 @@
       </p:sp>
       <p:sp>
         <p:nvSpPr>
-          <p:cNvPr id="46" name="Text"/>
+          <p:cNvPr id="46" name="!!T …and the forty years it has to last"/>
           <p:cNvSpPr txBox="1"/>
           <p:nvPr/>
         </p:nvSpPr>
@@ -23768,7 +23789,7 @@
       </p:sp>
       <p:sp>
         <p:nvSpPr>
-          <p:cNvPr id="47" name="i"/>
+          <p:cNvPr id="47" name="!!i 22515991"/>
           <p:cNvSpPr/>
           <p:nvPr/>
         </p:nvSpPr>
@@ -23798,7 +23819,7 @@
       </p:sp>
       <p:sp>
         <p:nvSpPr>
-          <p:cNvPr id="48" name="i"/>
+          <p:cNvPr id="48" name="!!i 91c6b93e"/>
           <p:cNvSpPr/>
           <p:nvPr/>
         </p:nvSpPr>
@@ -23828,7 +23849,7 @@
       </p:sp>
       <p:sp>
         <p:nvSpPr>
-          <p:cNvPr id="49" name="i"/>
+          <p:cNvPr id="49" name="!!i 699b56e0"/>
           <p:cNvSpPr/>
           <p:nvPr/>
         </p:nvSpPr>
@@ -23860,7 +23881,7 @@
       </p:sp>
       <p:sp>
         <p:nvSpPr>
-          <p:cNvPr id="50" name="Text"/>
+          <p:cNvPr id="50" name="!!T Both retired from 2039: 27 years paid fr"/>
           <p:cNvSpPr txBox="1"/>
           <p:nvPr/>
         </p:nvSpPr>
@@ -23923,7 +23944,7 @@
       </p:sp>
       <p:sp>
         <p:nvSpPr>
-          <p:cNvPr id="51" name="ps-el"/>
+          <p:cNvPr id="51" name="!!ps-el 8178b22b"/>
           <p:cNvSpPr/>
           <p:nvPr/>
         </p:nvSpPr>
@@ -23953,7 +23974,7 @@
       </p:sp>
       <p:sp>
         <p:nvSpPr>
-          <p:cNvPr id="52" name="span"/>
+          <p:cNvPr id="52" name="!!span 82bf619f"/>
           <p:cNvSpPr/>
           <p:nvPr/>
         </p:nvSpPr>
@@ -23990,7 +24011,7 @@
       </p:sp>
       <p:pic>
         <p:nvPicPr>
-          <p:cNvPr id="53" name="Picture" descr="image.jpg"/>
+          <p:cNvPr id="53" name="!!Picture 7161207e" descr="image.jpg"/>
           <p:cNvPicPr>
             <a:picLocks noChangeAspect="1"/>
           </p:cNvPicPr>
@@ -24014,7 +24035,7 @@
       </p:pic>
       <p:sp>
         <p:nvSpPr>
-          <p:cNvPr id="54" name="Text"/>
+          <p:cNvPr id="54" name="!!T Ryan, 24"/>
           <p:cNvSpPr txBox="1"/>
           <p:nvPr/>
         </p:nvSpPr>
@@ -24059,7 +24080,7 @@
       </p:sp>
       <p:sp>
         <p:nvSpPr>
-          <p:cNvPr id="55" name="Text"/>
+          <p:cNvPr id="55" name="!!T holds crypto; his own plan"/>
           <p:cNvSpPr txBox="1"/>
           <p:nvPr/>
         </p:nvSpPr>
@@ -24104,7 +24125,7 @@
       </p:sp>
       <p:sp>
         <p:nvSpPr>
-          <p:cNvPr id="56" name="ps-el"/>
+          <p:cNvPr id="56" name="!!ps-el 2b108506"/>
           <p:cNvSpPr/>
           <p:nvPr/>
         </p:nvSpPr>
@@ -24134,7 +24155,7 @@
       </p:sp>
       <p:sp>
         <p:nvSpPr>
-          <p:cNvPr id="57" name="ps-el"/>
+          <p:cNvPr id="57" name="!!ps-el fbd59545"/>
           <p:cNvSpPr/>
           <p:nvPr/>
         </p:nvSpPr>
@@ -24164,7 +24185,7 @@
       </p:sp>
       <p:sp>
         <p:nvSpPr>
-          <p:cNvPr id="58" name="span"/>
+          <p:cNvPr id="58" name="!!span d7eaa2f5"/>
           <p:cNvSpPr/>
           <p:nvPr/>
         </p:nvSpPr>
@@ -24201,7 +24222,7 @@
       </p:sp>
       <p:pic>
         <p:nvPicPr>
-          <p:cNvPr id="59" name="Picture" descr="image.jpg"/>
+          <p:cNvPr id="59" name="!!Picture 40d6a68f" descr="image.jpg"/>
           <p:cNvPicPr>
             <a:picLocks noChangeAspect="1"/>
           </p:cNvPicPr>
@@ -24225,7 +24246,7 @@
       </p:pic>
       <p:sp>
         <p:nvSpPr>
-          <p:cNvPr id="60" name="Text"/>
+          <p:cNvPr id="60" name="!!T Adrian, 54"/>
           <p:cNvSpPr txBox="1"/>
           <p:nvPr/>
         </p:nvSpPr>
@@ -24270,7 +24291,7 @@
       </p:sp>
       <p:sp>
         <p:nvSpPr>
-          <p:cNvPr id="61" name="Text"/>
+          <p:cNvPr id="61" name="!!T protect capital and health; retires 2037"/>
           <p:cNvSpPr txBox="1"/>
           <p:nvPr/>
         </p:nvSpPr>
@@ -24315,7 +24336,7 @@
       </p:sp>
       <p:sp>
         <p:nvSpPr>
-          <p:cNvPr id="62" name="ps-el"/>
+          <p:cNvPr id="62" name="!!ps-el bb9503de"/>
           <p:cNvSpPr/>
           <p:nvPr/>
         </p:nvSpPr>
@@ -24345,7 +24366,7 @@
       </p:sp>
       <p:sp>
         <p:nvSpPr>
-          <p:cNvPr id="63" name="ps-el"/>
+          <p:cNvPr id="63" name="!!ps-el 91281482"/>
           <p:cNvSpPr/>
           <p:nvPr/>
         </p:nvSpPr>
@@ -24375,7 +24396,7 @@
       </p:sp>
       <p:sp>
         <p:nvSpPr>
-          <p:cNvPr id="64" name="span"/>
+          <p:cNvPr id="64" name="!!span 6f50d65b"/>
           <p:cNvSpPr/>
           <p:nvPr/>
         </p:nvSpPr>
@@ -24412,7 +24433,7 @@
       </p:sp>
       <p:pic>
         <p:nvPicPr>
-          <p:cNvPr id="65" name="Picture" descr="image.jpg"/>
+          <p:cNvPr id="65" name="!!Picture fe9643a6" descr="image.jpg"/>
           <p:cNvPicPr>
             <a:picLocks noChangeAspect="1"/>
           </p:cNvPicPr>
@@ -24436,7 +24457,7 @@
       </p:pic>
       <p:sp>
         <p:nvSpPr>
-          <p:cNvPr id="66" name="Text"/>
+          <p:cNvPr id="66" name="!!T Chloe, 16"/>
           <p:cNvSpPr txBox="1"/>
           <p:nvPr/>
         </p:nvSpPr>
@@ -24481,7 +24502,7 @@
       </p:sp>
       <p:sp>
         <p:nvSpPr>
-          <p:cNvPr id="67" name="Text"/>
+          <p:cNvPr id="67" name="!!T university, 2028 to 2032"/>
           <p:cNvSpPr txBox="1"/>
           <p:nvPr/>
         </p:nvSpPr>
@@ -24526,7 +24547,7 @@
       </p:sp>
       <p:sp>
         <p:nvSpPr>
-          <p:cNvPr id="68" name="ps-el"/>
+          <p:cNvPr id="68" name="!!ps-el a15ac832"/>
           <p:cNvSpPr/>
           <p:nvPr/>
         </p:nvSpPr>
@@ -24556,7 +24577,7 @@
       </p:sp>
       <p:sp>
         <p:nvSpPr>
-          <p:cNvPr id="69" name="ps-el"/>
+          <p:cNvPr id="69" name="!!ps-el c53fa193"/>
           <p:cNvSpPr/>
           <p:nvPr/>
         </p:nvSpPr>
@@ -24586,7 +24607,7 @@
       </p:sp>
       <p:sp>
         <p:nvSpPr>
-          <p:cNvPr id="70" name="span"/>
+          <p:cNvPr id="70" name="!!span ed854b46"/>
           <p:cNvSpPr/>
           <p:nvPr/>
         </p:nvSpPr>
@@ -24623,7 +24644,7 @@
       </p:sp>
       <p:pic>
         <p:nvPicPr>
-          <p:cNvPr id="71" name="Picture" descr="image.jpg"/>
+          <p:cNvPr id="71" name="!!Picture 1bc9f370" descr="image.jpg"/>
           <p:cNvPicPr>
             <a:picLocks noChangeAspect="1"/>
           </p:cNvPicPr>
@@ -24647,7 +24668,7 @@
       </p:pic>
       <p:sp>
         <p:nvSpPr>
-          <p:cNvPr id="72" name="Text"/>
+          <p:cNvPr id="72" name="!!T Carmen, 49"/>
           <p:cNvSpPr txBox="1"/>
           <p:nvPr/>
         </p:nvSpPr>
@@ -24692,7 +24713,7 @@
       </p:sp>
       <p:sp>
         <p:nvSpPr>
-          <p:cNvPr id="73" name="Text"/>
+          <p:cNvPr id="73" name="!!T her values; retires 2039"/>
           <p:cNvSpPr txBox="1"/>
           <p:nvPr/>
         </p:nvSpPr>
@@ -24737,7 +24758,7 @@
       </p:sp>
       <p:sp>
         <p:nvSpPr>
-          <p:cNvPr id="74" name="ps-el"/>
+          <p:cNvPr id="74" name="!!ps-el f06f4fd0"/>
           <p:cNvSpPr/>
           <p:nvPr/>
         </p:nvSpPr>
@@ -24767,7 +24788,7 @@
       </p:sp>
       <p:sp>
         <p:nvSpPr>
-          <p:cNvPr id="75" name="Text"/>
+          <p:cNvPr id="75" name="!!T 2066: Carmen is 89"/>
           <p:cNvSpPr txBox="1"/>
           <p:nvPr/>
         </p:nvSpPr>
@@ -24812,7 +24833,7 @@
       </p:sp>
       <p:sp>
         <p:nvSpPr>
-          <p:cNvPr id="76" name="Text"/>
+          <p:cNvPr id="76" name="!!T the money must last to here"/>
           <p:cNvSpPr txBox="1"/>
           <p:nvPr/>
         </p:nvSpPr>
@@ -24857,7 +24878,7 @@
       </p:sp>
       <p:cxnSp>
         <p:nvCxnSpPr>
-          <p:cNvPr id="77" name="Rule"/>
+          <p:cNvPr id="77" name="!!Rule 61335b6a"/>
           <p:cNvCxnSpPr/>
           <p:nvPr/>
         </p:nvCxnSpPr>
@@ -24893,7 +24914,7 @@
       </p:cxnSp>
       <p:sp>
         <p:nvSpPr>
-          <p:cNvPr id="78" name="p"/>
+          <p:cNvPr id="78" name="!!p 442bdd76"/>
           <p:cNvSpPr/>
           <p:nvPr/>
         </p:nvSpPr>
@@ -24923,7 +24944,7 @@
       </p:sp>
       <p:sp>
         <p:nvSpPr>
-          <p:cNvPr id="79" name="Text"/>
+          <p:cNvPr id="79" name="!!T But will it last to Carmen's 89? We test"/>
           <p:cNvSpPr txBox="1"/>
           <p:nvPr/>
         </p:nvSpPr>
@@ -24968,7 +24989,7 @@
       </p:sp>
       <p:sp>
         <p:nvSpPr>
-          <p:cNvPr id="80" name="Text"/>
+          <p:cNvPr id="80" name="!!T Case: statement of assets and liabilitie"/>
           <p:cNvSpPr txBox="1"/>
           <p:nvPr/>
         </p:nvSpPr>
@@ -25035,7 +25056,7 @@
       </p:sp>
       <p:sp>
         <p:nvSpPr>
-          <p:cNvPr id="81" name="Text"/>
+          <p:cNvPr id="81" name="!!T The problem"/>
           <p:cNvSpPr txBox="1"/>
           <p:nvPr/>
         </p:nvSpPr>
@@ -25080,7 +25101,7 @@
       </p:sp>
       <p:sp>
         <p:nvSpPr>
-          <p:cNvPr id="82" name="Text"/>
+          <p:cNvPr id="82" name="!!T The answer"/>
           <p:cNvSpPr txBox="1"/>
           <p:nvPr/>
         </p:nvSpPr>
@@ -25125,7 +25146,7 @@
       </p:sp>
       <p:sp>
         <p:nvSpPr>
-          <p:cNvPr id="83" name="Text"/>
+          <p:cNvPr id="83" name="!!T The five calls"/>
           <p:cNvSpPr txBox="1"/>
           <p:nvPr/>
         </p:nvSpPr>
@@ -25170,7 +25191,7 @@
       </p:sp>
       <p:sp>
         <p:nvSpPr>
-          <p:cNvPr id="84" name="Text"/>
+          <p:cNvPr id="84" name="!!T Will it hold"/>
           <p:cNvSpPr txBox="1"/>
           <p:nvPr/>
         </p:nvSpPr>
@@ -25215,7 +25236,7 @@
       </p:sp>
       <p:sp>
         <p:nvSpPr>
-          <p:cNvPr id="85" name="Text"/>
+          <p:cNvPr id="85" name="!!T What next"/>
           <p:cNvSpPr txBox="1"/>
           <p:nvPr/>
         </p:nvSpPr>
@@ -25260,7 +25281,7 @@
       </p:sp>
       <p:sp>
         <p:nvSpPr>
-          <p:cNvPr id="86" name="Text"/>
+          <p:cNvPr id="86" name="!!T Us"/>
           <p:cNvSpPr txBox="1"/>
           <p:nvPr/>
         </p:nvSpPr>
@@ -25305,7 +25326,7 @@
       </p:sp>
       <p:sp>
         <p:nvSpPr>
-          <p:cNvPr id="87" name="Text"/>
+          <p:cNvPr id="87" name="!!T 2 / 15"/>
           <p:cNvSpPr txBox="1"/>
           <p:nvPr/>
         </p:nvSpPr>
@@ -25353,6 +25374,9 @@
   <p:clrMapOvr>
     <a:masterClrMapping/>
   </p:clrMapOvr>
+  <p:transition>
+    <p:fade/>
+  </p:transition>
 </p:sld>
 </file>
 
@@ -25375,7 +25399,7 @@
       </p:grpSpPr>
       <p:sp>
         <p:nvSpPr>
-          <p:cNvPr id="2" name="Rule"/>
+          <p:cNvPr id="2" name="!!Rule 2286b0a1"/>
           <p:cNvSpPr/>
           <p:nvPr/>
         </p:nvSpPr>
@@ -25405,7 +25429,7 @@
       </p:sp>
       <p:sp>
         <p:nvSpPr>
-          <p:cNvPr id="3" name="Text"/>
+          <p:cNvPr id="3" name="!!T Will it last?"/>
           <p:cNvSpPr txBox="1"/>
           <p:nvPr/>
         </p:nvSpPr>
@@ -25450,7 +25474,7 @@
       </p:sp>
       <p:sp>
         <p:nvSpPr>
-          <p:cNvPr id="4" name="Text"/>
+          <p:cNvPr id="4" name="!!T Their own way, Carmen is forced to sell "/>
           <p:cNvSpPr txBox="1"/>
           <p:nvPr/>
         </p:nvSpPr>
@@ -25517,7 +25541,7 @@
       </p:sp>
       <p:sp>
         <p:nvSpPr>
-          <p:cNvPr id="5" name="Rule"/>
+          <p:cNvPr id="5" name="!!Rule 9b9ff67d"/>
           <p:cNvSpPr/>
           <p:nvPr/>
         </p:nvSpPr>
@@ -25547,7 +25571,7 @@
       </p:sp>
       <p:sp>
         <p:nvSpPr>
-          <p:cNvPr id="6" name="Text"/>
+          <p:cNvPr id="6" name="!!T One typical future, managed their own wa"/>
           <p:cNvSpPr txBox="1"/>
           <p:nvPr/>
         </p:nvSpPr>
@@ -25592,7 +25616,7 @@
       </p:sp>
       <p:sp>
         <p:nvSpPr>
-          <p:cNvPr id="7" name="Text"/>
+          <p:cNvPr id="7" name="!!T Our written case measured investments al"/>
           <p:cNvSpPr txBox="1"/>
           <p:nvPr/>
         </p:nvSpPr>
@@ -25637,7 +25661,7 @@
       </p:sp>
       <p:pic>
         <p:nvPicPr>
-          <p:cNvPr id="8" name="Drawing" descr="image.png"/>
+          <p:cNvPr id="8" name="!!Drawing 963910ab" descr="image.png"/>
           <p:cNvPicPr>
             <a:picLocks noChangeAspect="1"/>
           </p:cNvPicPr>
@@ -25667,7 +25691,7 @@
       </p:pic>
       <p:sp>
         <p:nvSpPr>
-          <p:cNvPr id="9" name="Rule"/>
+          <p:cNvPr id="9" name="!!Rule 66f615e2"/>
           <p:cNvSpPr/>
           <p:nvPr/>
         </p:nvSpPr>
@@ -25697,7 +25721,7 @@
       </p:sp>
       <p:sp>
         <p:nvSpPr>
-          <p:cNvPr id="10" name="Text"/>
+          <p:cNvPr id="10" name="!!T Carmen 49"/>
           <p:cNvSpPr txBox="1"/>
           <p:nvPr/>
         </p:nvSpPr>
@@ -25742,7 +25766,7 @@
       </p:sp>
       <p:sp>
         <p:nvSpPr>
-          <p:cNvPr id="11" name="Text"/>
+          <p:cNvPr id="11" name="!!T 2026"/>
           <p:cNvSpPr txBox="1"/>
           <p:nvPr/>
         </p:nvSpPr>
@@ -25787,7 +25811,7 @@
       </p:sp>
       <p:sp>
         <p:nvSpPr>
-          <p:cNvPr id="12" name="Text"/>
+          <p:cNvPr id="12" name="!!T Adrian retires"/>
           <p:cNvSpPr txBox="1"/>
           <p:nvPr/>
         </p:nvSpPr>
@@ -25832,7 +25856,7 @@
       </p:sp>
       <p:sp>
         <p:nvSpPr>
-          <p:cNvPr id="13" name="Text"/>
+          <p:cNvPr id="13" name="!!T 2037"/>
           <p:cNvSpPr txBox="1"/>
           <p:nvPr/>
         </p:nvSpPr>
@@ -25877,7 +25901,7 @@
       </p:sp>
       <p:sp>
         <p:nvSpPr>
-          <p:cNvPr id="14" name="Text"/>
+          <p:cNvPr id="14" name="!!T Carmen 69"/>
           <p:cNvSpPr txBox="1"/>
           <p:nvPr/>
         </p:nvSpPr>
@@ -25922,7 +25946,7 @@
       </p:sp>
       <p:sp>
         <p:nvSpPr>
-          <p:cNvPr id="15" name="Text"/>
+          <p:cNvPr id="15" name="!!T 2046"/>
           <p:cNvSpPr txBox="1"/>
           <p:nvPr/>
         </p:nvSpPr>
@@ -25967,7 +25991,7 @@
       </p:sp>
       <p:sp>
         <p:nvSpPr>
-          <p:cNvPr id="16" name="Text"/>
+          <p:cNvPr id="16" name="!!T Adrian dies"/>
           <p:cNvSpPr txBox="1"/>
           <p:nvPr/>
         </p:nvSpPr>
@@ -26012,7 +26036,7 @@
       </p:sp>
       <p:sp>
         <p:nvSpPr>
-          <p:cNvPr id="17" name="Text"/>
+          <p:cNvPr id="17" name="!!T 2056"/>
           <p:cNvSpPr txBox="1"/>
           <p:nvPr/>
         </p:nvSpPr>
@@ -26057,7 +26081,7 @@
       </p:sp>
       <p:sp>
         <p:nvSpPr>
-          <p:cNvPr id="18" name="Text"/>
+          <p:cNvPr id="18" name="!!T Carmen 89"/>
           <p:cNvSpPr txBox="1"/>
           <p:nvPr/>
         </p:nvSpPr>
@@ -26102,7 +26126,7 @@
       </p:sp>
       <p:sp>
         <p:nvSpPr>
-          <p:cNvPr id="19" name="Text"/>
+          <p:cNvPr id="19" name="!!T 2066"/>
           <p:cNvSpPr txBox="1"/>
           <p:nvPr/>
         </p:nvSpPr>
@@ -26147,7 +26171,7 @@
       </p:sp>
       <p:sp>
         <p:nvSpPr>
-          <p:cNvPr id="20" name="Rule"/>
+          <p:cNvPr id="20" name="!!Rule d1bf885b"/>
           <p:cNvSpPr/>
           <p:nvPr/>
         </p:nvSpPr>
@@ -26177,7 +26201,7 @@
       </p:sp>
       <p:sp>
         <p:nvSpPr>
-          <p:cNvPr id="21" name="Text"/>
+          <p:cNvPr id="21" name="!!T …and across 10,000 futures"/>
           <p:cNvSpPr txBox="1"/>
           <p:nvPr/>
         </p:nvSpPr>
@@ -26222,7 +26246,7 @@
       </p:sp>
       <p:sp>
         <p:nvSpPr>
-          <p:cNvPr id="22" name="Text"/>
+          <p:cNvPr id="22" name="!!T The same test in every simulated market "/>
           <p:cNvSpPr txBox="1"/>
           <p:nvPr/>
         </p:nvSpPr>
@@ -26267,7 +26291,7 @@
       </p:sp>
       <p:sp>
         <p:nvSpPr>
-          <p:cNvPr id="23" name="Text"/>
+          <p:cNvPr id="23" name="!!T 51%"/>
           <p:cNvSpPr txBox="1"/>
           <p:nvPr/>
         </p:nvSpPr>
@@ -26312,7 +26336,7 @@
       </p:sp>
       <p:sp>
         <p:nvSpPr>
-          <p:cNvPr id="24" name="Text"/>
+          <p:cNvPr id="24" name="!!T of futures are forced to sell the home"/>
           <p:cNvSpPr txBox="1"/>
           <p:nvPr/>
         </p:nvSpPr>
@@ -26357,7 +26381,7 @@
       </p:sp>
       <p:sp>
         <p:nvSpPr>
-          <p:cNvPr id="25" name="div"/>
+          <p:cNvPr id="25" name="!!div c65726d5"/>
           <p:cNvSpPr/>
           <p:nvPr/>
         </p:nvSpPr>
@@ -26405,7 +26429,7 @@
       </p:sp>
       <p:sp>
         <p:nvSpPr>
-          <p:cNvPr id="26" name="i"/>
+          <p:cNvPr id="26" name="!!i 314b411a"/>
           <p:cNvSpPr/>
           <p:nvPr/>
         </p:nvSpPr>
@@ -26443,7 +26467,7 @@
       </p:sp>
       <p:sp>
         <p:nvSpPr>
-          <p:cNvPr id="27" name="Text"/>
+          <p:cNvPr id="27" name="!!T Sold"/>
           <p:cNvSpPr txBox="1"/>
           <p:nvPr/>
         </p:nvSpPr>
@@ -26488,7 +26512,7 @@
       </p:sp>
       <p:sp>
         <p:nvSpPr>
-          <p:cNvPr id="28" name="Text"/>
+          <p:cNvPr id="28" name="!!T Kept"/>
           <p:cNvSpPr txBox="1"/>
           <p:nvPr/>
         </p:nvSpPr>
@@ -26533,7 +26557,7 @@
       </p:sp>
       <p:sp>
         <p:nvSpPr>
-          <p:cNvPr id="29" name="Text"/>
+          <p:cNvPr id="29" name="!!T when the money runs out, Carmen about 83"/>
           <p:cNvSpPr txBox="1"/>
           <p:nvPr/>
         </p:nvSpPr>
@@ -26578,7 +26602,7 @@
       </p:sp>
       <p:sp>
         <p:nvSpPr>
-          <p:cNvPr id="30" name="Rule"/>
+          <p:cNvPr id="30" name="!!Rule f80cebdf"/>
           <p:cNvSpPr/>
           <p:nvPr/>
         </p:nvSpPr>
@@ -26608,7 +26632,7 @@
       </p:sp>
       <p:sp>
         <p:nvSpPr>
-          <p:cNvPr id="31" name="Text"/>
+          <p:cNvPr id="31" name="!!T What Ryan and Chloe inherit, where it is"/>
           <p:cNvSpPr txBox="1"/>
           <p:nvPr/>
         </p:nvSpPr>
@@ -26653,7 +26677,7 @@
       </p:sp>
       <p:sp>
         <p:nvSpPr>
-          <p:cNvPr id="32" name="Text"/>
+          <p:cNvPr id="32" name="!!T Today"/>
           <p:cNvSpPr txBox="1"/>
           <p:nvPr/>
         </p:nvSpPr>
@@ -26698,7 +26722,7 @@
       </p:sp>
       <p:sp>
         <p:nvSpPr>
-          <p:cNvPr id="33" name="i"/>
+          <p:cNvPr id="33" name="!!i 5100283d"/>
           <p:cNvSpPr/>
           <p:nvPr/>
         </p:nvSpPr>
@@ -26736,7 +26760,7 @@
       </p:sp>
       <p:sp>
         <p:nvSpPr>
-          <p:cNvPr id="34" name="Text"/>
+          <p:cNvPr id="34" name="!!T HK$24.4M"/>
           <p:cNvSpPr txBox="1"/>
           <p:nvPr/>
         </p:nvSpPr>
@@ -26781,7 +26805,7 @@
       </p:sp>
       <p:sp>
         <p:nvSpPr>
-          <p:cNvPr id="35" name="Text"/>
+          <p:cNvPr id="35" name="!!T Left to them"/>
           <p:cNvSpPr txBox="1"/>
           <p:nvPr/>
         </p:nvSpPr>
@@ -26826,7 +26850,7 @@
       </p:sp>
       <p:sp>
         <p:nvSpPr>
-          <p:cNvPr id="36" name="i"/>
+          <p:cNvPr id="36" name="!!i 65ee91bf"/>
           <p:cNvSpPr/>
           <p:nvPr/>
         </p:nvSpPr>
@@ -26864,7 +26888,7 @@
       </p:sp>
       <p:sp>
         <p:nvSpPr>
-          <p:cNvPr id="37" name="Text"/>
+          <p:cNvPr id="37" name="!!T HK$2.3M"/>
           <p:cNvSpPr txBox="1"/>
           <p:nvPr/>
         </p:nvSpPr>
@@ -26909,7 +26933,7 @@
       </p:sp>
       <p:sp>
         <p:nvSpPr>
-          <p:cNvPr id="38" name="p"/>
+          <p:cNvPr id="38" name="!!p 442bdd76"/>
           <p:cNvSpPr/>
           <p:nvPr/>
         </p:nvSpPr>
@@ -26939,7 +26963,7 @@
       </p:sp>
       <p:sp>
         <p:nvSpPr>
-          <p:cNvPr id="39" name="Text"/>
+          <p:cNvPr id="39" name="!!T Their wealth will pay for their retireme"/>
           <p:cNvSpPr txBox="1"/>
           <p:nvPr/>
         </p:nvSpPr>
@@ -26984,7 +27008,7 @@
       </p:sp>
       <p:sp>
         <p:nvSpPr>
-          <p:cNvPr id="40" name="Text"/>
+          <p:cNvPr id="40" name="!!T Their own way: the business sold; the fl"/>
           <p:cNvSpPr txBox="1"/>
           <p:nvPr/>
         </p:nvSpPr>
@@ -27051,7 +27075,7 @@
       </p:sp>
       <p:sp>
         <p:nvSpPr>
-          <p:cNvPr id="41" name="Text"/>
+          <p:cNvPr id="41" name="!!T The problem"/>
           <p:cNvSpPr txBox="1"/>
           <p:nvPr/>
         </p:nvSpPr>
@@ -27096,7 +27120,7 @@
       </p:sp>
       <p:sp>
         <p:nvSpPr>
-          <p:cNvPr id="42" name="Text"/>
+          <p:cNvPr id="42" name="!!T The answer"/>
           <p:cNvSpPr txBox="1"/>
           <p:nvPr/>
         </p:nvSpPr>
@@ -27141,7 +27165,7 @@
       </p:sp>
       <p:sp>
         <p:nvSpPr>
-          <p:cNvPr id="43" name="Text"/>
+          <p:cNvPr id="43" name="!!T The five calls"/>
           <p:cNvSpPr txBox="1"/>
           <p:nvPr/>
         </p:nvSpPr>
@@ -27186,7 +27210,7 @@
       </p:sp>
       <p:sp>
         <p:nvSpPr>
-          <p:cNvPr id="44" name="Text"/>
+          <p:cNvPr id="44" name="!!T Will it hold"/>
           <p:cNvSpPr txBox="1"/>
           <p:nvPr/>
         </p:nvSpPr>
@@ -27231,7 +27255,7 @@
       </p:sp>
       <p:sp>
         <p:nvSpPr>
-          <p:cNvPr id="45" name="Text"/>
+          <p:cNvPr id="45" name="!!T What next"/>
           <p:cNvSpPr txBox="1"/>
           <p:nvPr/>
         </p:nvSpPr>
@@ -27276,7 +27300,7 @@
       </p:sp>
       <p:sp>
         <p:nvSpPr>
-          <p:cNvPr id="46" name="Text"/>
+          <p:cNvPr id="46" name="!!T Us"/>
           <p:cNvSpPr txBox="1"/>
           <p:nvPr/>
         </p:nvSpPr>
@@ -27321,7 +27345,7 @@
       </p:sp>
       <p:sp>
         <p:nvSpPr>
-          <p:cNvPr id="47" name="Text"/>
+          <p:cNvPr id="47" name="!!T 3 / 15"/>
           <p:cNvSpPr txBox="1"/>
           <p:nvPr/>
         </p:nvSpPr>
@@ -27366,7 +27390,7 @@
       </p:sp>
       <p:sp>
         <p:nvSpPr>
-          <p:cNvPr id="48" name="Text"/>
+          <p:cNvPr id="48" name="!!T Savings, investments and MPF"/>
           <p:cNvSpPr txBox="1"/>
           <p:nvPr/>
         </p:nvSpPr>
@@ -27411,7 +27435,7 @@
       </p:sp>
       <p:sp>
         <p:nvSpPr>
-          <p:cNvPr id="49" name="Text"/>
+          <p:cNvPr id="49" name="!!T since 2015, where Ryan and Chloe grew up"/>
           <p:cNvSpPr txBox="1"/>
           <p:nvPr/>
         </p:nvSpPr>
@@ -27458,7 +27482,7 @@
       </p:sp>
       <p:sp>
         <p:nvSpPr>
-          <p:cNvPr id="50" name="Text"/>
+          <p:cNvPr id="50" name="!!T The home"/>
           <p:cNvSpPr txBox="1"/>
           <p:nvPr/>
         </p:nvSpPr>
@@ -27503,7 +27527,7 @@
       </p:sp>
       <p:sp>
         <p:nvSpPr>
-          <p:cNvPr id="51" name="Rule"/>
+          <p:cNvPr id="51" name="!!Rule 77250185"/>
           <p:cNvSpPr/>
           <p:nvPr/>
         </p:nvSpPr>
@@ -27533,7 +27557,7 @@
       </p:sp>
       <p:sp>
         <p:nvSpPr>
-          <p:cNvPr id="52" name="Rule"/>
+          <p:cNvPr id="52" name="!!Rule 25973030"/>
           <p:cNvSpPr/>
           <p:nvPr/>
         </p:nvSpPr>
@@ -27563,7 +27587,7 @@
       </p:sp>
       <p:sp>
         <p:nvSpPr>
-          <p:cNvPr id="53" name="Text"/>
+          <p:cNvPr id="53" name="!!T HK$10M"/>
           <p:cNvSpPr txBox="1"/>
           <p:nvPr/>
         </p:nvSpPr>
@@ -27608,7 +27632,7 @@
       </p:sp>
       <p:sp>
         <p:nvSpPr>
-          <p:cNvPr id="54" name="Rule"/>
+          <p:cNvPr id="54" name="!!Rule 852397c8"/>
           <p:cNvSpPr/>
           <p:nvPr/>
         </p:nvSpPr>
@@ -27638,7 +27662,7 @@
       </p:sp>
       <p:sp>
         <p:nvSpPr>
-          <p:cNvPr id="55" name="Text"/>
+          <p:cNvPr id="55" name="!!T HK$20M"/>
           <p:cNvSpPr txBox="1"/>
           <p:nvPr/>
         </p:nvSpPr>
@@ -27683,7 +27707,7 @@
       </p:sp>
       <p:sp>
         <p:nvSpPr>
-          <p:cNvPr id="56" name="Rule"/>
+          <p:cNvPr id="56" name="!!Rule 5f683f82"/>
           <p:cNvSpPr/>
           <p:nvPr/>
         </p:nvSpPr>
@@ -27713,7 +27737,7 @@
       </p:sp>
       <p:sp>
         <p:nvSpPr>
-          <p:cNvPr id="57" name="Text"/>
+          <p:cNvPr id="57" name="!!T HK$30M"/>
           <p:cNvSpPr txBox="1"/>
           <p:nvPr/>
         </p:nvSpPr>
@@ -27758,7 +27782,7 @@
       </p:sp>
       <p:sp>
         <p:nvSpPr>
-          <p:cNvPr id="58" name="Rule"/>
+          <p:cNvPr id="58" name="!!Rule a4756d25"/>
           <p:cNvSpPr/>
           <p:nvPr/>
         </p:nvSpPr>
@@ -27788,7 +27812,7 @@
       </p:sp>
       <p:sp>
         <p:nvSpPr>
-          <p:cNvPr id="59" name="Text"/>
+          <p:cNvPr id="59" name="!!T The flat is sold, Carmen 83 when her sav"/>
           <p:cNvSpPr txBox="1"/>
           <p:nvPr/>
         </p:nvSpPr>
@@ -27855,7 +27879,7 @@
       </p:sp>
       <p:sp>
         <p:nvSpPr>
-          <p:cNvPr id="60" name="ps-el"/>
+          <p:cNvPr id="60" name="!!ps-el 90d010ca"/>
           <p:cNvSpPr/>
           <p:nvPr/>
         </p:nvSpPr>
@@ -27894,7 +27918,7 @@
       </p:sp>
       <p:sp>
         <p:nvSpPr>
-          <p:cNvPr id="61" name="Rule"/>
+          <p:cNvPr id="61" name="!!Rule fa57db72"/>
           <p:cNvSpPr/>
           <p:nvPr/>
         </p:nvSpPr>
@@ -27924,7 +27948,7 @@
       </p:sp>
       <p:sp>
         <p:nvSpPr>
-          <p:cNvPr id="62" name="Text"/>
+          <p:cNvPr id="62" name="!!T Runs out again, Carmen 86 then unpaid bi"/>
           <p:cNvSpPr txBox="1"/>
           <p:nvPr/>
         </p:nvSpPr>
@@ -27991,7 +28015,7 @@
       </p:sp>
       <p:sp>
         <p:nvSpPr>
-          <p:cNvPr id="63" name="ps-el"/>
+          <p:cNvPr id="63" name="!!ps-el f1f15a2e"/>
           <p:cNvSpPr/>
           <p:nvPr/>
         </p:nvSpPr>
@@ -28033,12 +28057,39 @@
   <p:clrMapOvr>
     <a:masterClrMapping/>
   </p:clrMapOvr>
+  <p:transition>
+    <p:fade/>
+  </p:transition>
 </p:sld>
 </file>
 
 <file path=ppt/slides/slide4.xml><?xml version="1.0" encoding="utf-8"?>
 <p:sld xmlns:a="http://schemas.openxmlformats.org/drawingml/2006/main" xmlns:r="http://schemas.openxmlformats.org/officeDocument/2006/relationships" xmlns:p="http://schemas.openxmlformats.org/presentationml/2006/main">
   <p:cSld name="Five calls make their wealth last, on their terms">
+    <p:bg>
+      <p:bgPr>
+        <a:gradFill rotWithShape="0">
+          <a:gsLst>
+            <a:gs pos="0">
+              <a:srgbClr val="BB1626"/>
+            </a:gs>
+            <a:gs pos="40000">
+              <a:srgbClr val="971320"/>
+            </a:gs>
+            <a:gs pos="72000">
+              <a:srgbClr val="700E19"/>
+            </a:gs>
+            <a:gs pos="100000">
+              <a:srgbClr val="500911"/>
+            </a:gs>
+          </a:gsLst>
+          <a:path path="circle">
+            <a:fillToRect l="50000" t="50000" r="50000" b="50000"/>
+          </a:path>
+        </a:gradFill>
+        <a:effectLst/>
+      </p:bgPr>
+    </p:bg>
     <p:spTree>
       <p:nvGrpSpPr>
         <p:cNvPr id="1" name=""/>
@@ -28055,53 +28106,7 @@
       </p:grpSpPr>
       <p:sp>
         <p:nvSpPr>
-          <p:cNvPr id="2" name="section"/>
-          <p:cNvSpPr/>
-          <p:nvPr/>
-        </p:nvSpPr>
-        <p:spPr>
-          <a:xfrm>
-            <a:off x="0" y="0"/>
-            <a:ext cx="12192000" cy="6858000"/>
-          </a:xfrm>
-          <a:prstGeom prst="rect">
-            <a:avLst/>
-          </a:prstGeom>
-          <a:gradFill rotWithShape="0">
-            <a:gsLst>
-              <a:gs pos="0">
-                <a:srgbClr val="BB1626"/>
-              </a:gs>
-              <a:gs pos="40000">
-                <a:srgbClr val="971320"/>
-              </a:gs>
-              <a:gs pos="72000">
-                <a:srgbClr val="700E19"/>
-              </a:gs>
-              <a:gs pos="100000">
-                <a:srgbClr val="500911"/>
-              </a:gs>
-            </a:gsLst>
-            <a:path path="circle">
-              <a:fillToRect l="50000" t="50000" r="50000" b="50000"/>
-            </a:path>
-          </a:gradFill>
-          <a:ln>
-            <a:noFill/>
-          </a:ln>
-        </p:spPr>
-        <p:txBody>
-          <a:bodyPr rtlCol="0" anchor="ctr"/>
-          <a:lstStyle/>
-          <a:p>
-            <a:pPr algn="ctr"/>
-            <a:endParaRPr/>
-          </a:p>
-        </p:txBody>
-      </p:sp>
-      <p:sp>
-        <p:nvSpPr>
-          <p:cNvPr id="3" name="Rule"/>
+          <p:cNvPr id="2" name="!!Rule f39879af"/>
           <p:cNvSpPr/>
           <p:nvPr/>
         </p:nvSpPr>
@@ -28131,7 +28136,7 @@
       </p:sp>
       <p:sp>
         <p:nvSpPr>
-          <p:cNvPr id="4" name="Text"/>
+          <p:cNvPr id="3" name="!!T Our answer"/>
           <p:cNvSpPr txBox="1"/>
           <p:nvPr/>
         </p:nvSpPr>
@@ -28176,7 +28181,7 @@
       </p:sp>
       <p:sp>
         <p:nvSpPr>
-          <p:cNvPr id="5" name="Text"/>
+          <p:cNvPr id="4" name="!!T Five calls make their wealth last, on th"/>
           <p:cNvSpPr txBox="1"/>
           <p:nvPr/>
         </p:nvSpPr>
@@ -28221,7 +28226,7 @@
       </p:sp>
       <p:pic>
         <p:nvPicPr>
-          <p:cNvPr id="6" name="Drawing" descr="image.png"/>
+          <p:cNvPr id="5" name="!!house" descr="image.png"/>
           <p:cNvPicPr>
             <a:picLocks noChangeAspect="1"/>
           </p:cNvPicPr>
@@ -28251,7 +28256,7 @@
       </p:pic>
       <p:sp>
         <p:nvSpPr>
-          <p:cNvPr id="7" name="span"/>
+          <p:cNvPr id="6" name="!!span e0dd8d9d"/>
           <p:cNvSpPr/>
           <p:nvPr/>
         </p:nvSpPr>
@@ -28283,7 +28288,7 @@
       </p:sp>
       <p:pic>
         <p:nvPicPr>
-          <p:cNvPr id="8" name="Drawing" descr="image.png"/>
+          <p:cNvPr id="7" name="!!Drawing c6008aec" descr="image.png"/>
           <p:cNvPicPr>
             <a:picLocks noChangeAspect="1"/>
           </p:cNvPicPr>
@@ -28313,7 +28318,7 @@
       </p:pic>
       <p:sp>
         <p:nvSpPr>
-          <p:cNvPr id="9" name="Text"/>
+          <p:cNvPr id="8" name="!!T What passes on"/>
           <p:cNvSpPr txBox="1"/>
           <p:nvPr/>
         </p:nvSpPr>
@@ -28358,7 +28363,7 @@
       </p:sp>
       <p:sp>
         <p:nvSpPr>
-          <p:cNvPr id="10" name="Text"/>
+          <p:cNvPr id="9" name="!!T the inheritance kept, passed on in stage"/>
           <p:cNvSpPr txBox="1"/>
           <p:nvPr/>
         </p:nvSpPr>
@@ -28403,7 +28408,7 @@
       </p:sp>
       <p:sp>
         <p:nvSpPr>
-          <p:cNvPr id="11" name="span"/>
+          <p:cNvPr id="10" name="!!span 6f83397d"/>
           <p:cNvSpPr/>
           <p:nvPr/>
         </p:nvSpPr>
@@ -28435,7 +28440,7 @@
       </p:sp>
       <p:pic>
         <p:nvPicPr>
-          <p:cNvPr id="12" name="Drawing" descr="image.png"/>
+          <p:cNvPr id="11" name="!!Drawing 74fde013" descr="image.png"/>
           <p:cNvPicPr>
             <a:picLocks noChangeAspect="1"/>
           </p:cNvPicPr>
@@ -28465,7 +28470,7 @@
       </p:pic>
       <p:sp>
         <p:nvSpPr>
-          <p:cNvPr id="13" name="Text"/>
+          <p:cNvPr id="12" name="!!T 5 Values and crypto, with guardrails"/>
           <p:cNvSpPr txBox="1"/>
           <p:nvPr/>
         </p:nvSpPr>
@@ -28519,7 +28524,7 @@
       </p:sp>
       <p:sp>
         <p:nvSpPr>
-          <p:cNvPr id="14" name="Text"/>
+          <p:cNvPr id="13" name="!!T ESG at 25%; crypto sized per person"/>
           <p:cNvSpPr txBox="1"/>
           <p:nvPr/>
         </p:nvSpPr>
@@ -28564,7 +28569,7 @@
       </p:sp>
       <p:sp>
         <p:nvSpPr>
-          <p:cNvPr id="15" name="span"/>
+          <p:cNvPr id="14" name="!!span f1a92dc0"/>
           <p:cNvSpPr/>
           <p:nvPr/>
         </p:nvSpPr>
@@ -28596,7 +28601,7 @@
       </p:sp>
       <p:pic>
         <p:nvPicPr>
-          <p:cNvPr id="16" name="Drawing" descr="image.png"/>
+          <p:cNvPr id="15" name="!!Drawing 62cade5f" descr="image.png"/>
           <p:cNvPicPr>
             <a:picLocks noChangeAspect="1"/>
           </p:cNvPicPr>
@@ -28626,7 +28631,7 @@
       </p:pic>
       <p:sp>
         <p:nvSpPr>
-          <p:cNvPr id="17" name="Text"/>
+          <p:cNvPr id="16" name="!!T 3 Fix the cost the budget ignores"/>
           <p:cNvSpPr txBox="1"/>
           <p:nvPr/>
         </p:nvSpPr>
@@ -28680,7 +28685,7 @@
       </p:sp>
       <p:sp>
         <p:nvSpPr>
-          <p:cNvPr id="18" name="Text"/>
+          <p:cNvPr id="17" name="!!T a medical review at 75; spending rules"/>
           <p:cNvSpPr txBox="1"/>
           <p:nvPr/>
         </p:nvSpPr>
@@ -28725,7 +28730,7 @@
       </p:sp>
       <p:sp>
         <p:nvSpPr>
-          <p:cNvPr id="19" name="Text"/>
+          <p:cNvPr id="18" name="!!T 4 A plan for each person"/>
           <p:cNvSpPr txBox="1"/>
           <p:nvPr/>
         </p:nvSpPr>
@@ -28779,7 +28784,7 @@
       </p:sp>
       <p:sp>
         <p:nvSpPr>
-          <p:cNvPr id="20" name="Text"/>
+          <p:cNvPr id="19" name="!!T Chloe funded; HK$45K a year less in fees"/>
           <p:cNvSpPr txBox="1"/>
           <p:nvPr/>
         </p:nvSpPr>
@@ -28824,7 +28829,7 @@
       </p:sp>
       <p:sp>
         <p:nvSpPr>
-          <p:cNvPr id="21" name="span"/>
+          <p:cNvPr id="20" name="!!span 4b2f7298"/>
           <p:cNvSpPr/>
           <p:nvPr/>
         </p:nvSpPr>
@@ -28856,7 +28861,7 @@
       </p:sp>
       <p:pic>
         <p:nvPicPr>
-          <p:cNvPr id="22" name="Drawing" descr="image.png"/>
+          <p:cNvPr id="21" name="!!Drawing a173ee14" descr="image.png"/>
           <p:cNvPicPr>
             <a:picLocks noChangeAspect="1"/>
           </p:cNvPicPr>
@@ -28886,7 +28891,7 @@
       </p:pic>
       <p:sp>
         <p:nvSpPr>
-          <p:cNvPr id="23" name="Text"/>
+          <p:cNvPr id="22" name="!!T 2 The home and the business"/>
           <p:cNvSpPr txBox="1"/>
           <p:nvPr/>
         </p:nvSpPr>
@@ -28940,7 +28945,7 @@
       </p:sp>
       <p:sp>
         <p:nvSpPr>
-          <p:cNvPr id="24" name="Text"/>
+          <p:cNvPr id="23" name="!!T decided at 65, not forced at 83"/>
           <p:cNvSpPr txBox="1"/>
           <p:nvPr/>
         </p:nvSpPr>
@@ -28985,7 +28990,7 @@
       </p:sp>
       <p:sp>
         <p:nvSpPr>
-          <p:cNvPr id="25" name="span"/>
+          <p:cNvPr id="24" name="!!span b4dc1599"/>
           <p:cNvSpPr/>
           <p:nvPr/>
         </p:nvSpPr>
@@ -29017,7 +29022,7 @@
       </p:sp>
       <p:pic>
         <p:nvPicPr>
-          <p:cNvPr id="26" name="Drawing" descr="image.png"/>
+          <p:cNvPr id="25" name="!!Drawing 4c54ffc9" descr="image.png"/>
           <p:cNvPicPr>
             <a:picLocks noChangeAspect="1"/>
           </p:cNvPicPr>
@@ -29047,7 +29052,7 @@
       </p:pic>
       <p:sp>
         <p:nvSpPr>
-          <p:cNvPr id="27" name="Text"/>
+          <p:cNvPr id="26" name="!!T 1 Insure the income, not the life"/>
           <p:cNvSpPr txBox="1"/>
           <p:nvPr/>
         </p:nvSpPr>
@@ -29101,7 +29106,7 @@
       </p:sp>
       <p:sp>
         <p:nvSpPr>
-          <p:cNvPr id="28" name="Text"/>
+          <p:cNvPr id="27" name="!!T about HK$100K a year closes every gap"/>
           <p:cNvSpPr txBox="1"/>
           <p:nvPr/>
         </p:nvSpPr>
@@ -29146,7 +29151,7 @@
       </p:sp>
       <p:sp>
         <p:nvSpPr>
-          <p:cNvPr id="29" name="span"/>
+          <p:cNvPr id="28" name="!!span e19914a2"/>
           <p:cNvSpPr/>
           <p:nvPr/>
         </p:nvSpPr>
@@ -29178,7 +29183,7 @@
       </p:sp>
       <p:pic>
         <p:nvPicPr>
-          <p:cNvPr id="30" name="Drawing" descr="image.png"/>
+          <p:cNvPr id="29" name="!!Drawing b195c741" descr="image.png"/>
           <p:cNvPicPr>
             <a:picLocks noChangeAspect="1"/>
           </p:cNvPicPr>
@@ -29208,7 +29213,7 @@
       </p:pic>
       <p:sp>
         <p:nvSpPr>
-          <p:cNvPr id="31" name="div"/>
+          <p:cNvPr id="30" name="!!div eeaa2451"/>
           <p:cNvSpPr/>
           <p:nvPr/>
         </p:nvSpPr>
@@ -29244,7 +29249,7 @@
       </p:sp>
       <p:sp>
         <p:nvSpPr>
-          <p:cNvPr id="32" name="Text"/>
+          <p:cNvPr id="31" name="!!T Chance the money lasts to Carmen's 89"/>
           <p:cNvSpPr txBox="1"/>
           <p:nvPr/>
         </p:nvSpPr>
@@ -29311,7 +29316,7 @@
       </p:sp>
       <p:sp>
         <p:nvSpPr>
-          <p:cNvPr id="33" name="Text"/>
+          <p:cNvPr id="32" name="!!T 62%"/>
           <p:cNvSpPr txBox="1"/>
           <p:nvPr/>
         </p:nvSpPr>
@@ -29356,7 +29361,7 @@
       </p:sp>
       <p:sp>
         <p:nvSpPr>
-          <p:cNvPr id="34" name="Text"/>
+          <p:cNvPr id="33" name="!!T their own way"/>
           <p:cNvSpPr txBox="1"/>
           <p:nvPr/>
         </p:nvSpPr>
@@ -29401,7 +29406,7 @@
       </p:sp>
       <p:sp>
         <p:nvSpPr>
-          <p:cNvPr id="35" name="Text"/>
+          <p:cNvPr id="34" name="!!T →"/>
           <p:cNvSpPr txBox="1"/>
           <p:nvPr/>
         </p:nvSpPr>
@@ -29446,7 +29451,7 @@
       </p:sp>
       <p:sp>
         <p:nvSpPr>
-          <p:cNvPr id="36" name="Text"/>
+          <p:cNvPr id="35" name="!!T 97%"/>
           <p:cNvSpPr txBox="1"/>
           <p:nvPr/>
         </p:nvSpPr>
@@ -29491,7 +29496,7 @@
       </p:sp>
       <p:sp>
         <p:nvSpPr>
-          <p:cNvPr id="37" name="Text"/>
+          <p:cNvPr id="36" name="!!T with the five calls"/>
           <p:cNvSpPr txBox="1"/>
           <p:nvPr/>
         </p:nvSpPr>
@@ -29536,7 +29541,7 @@
       </p:sp>
       <p:sp>
         <p:nvSpPr>
-          <p:cNvPr id="38" name="Text"/>
+          <p:cNvPr id="37" name="!!T Chance the money lasts to Carmen's 89, 1"/>
           <p:cNvSpPr txBox="1"/>
           <p:nvPr/>
         </p:nvSpPr>
@@ -29603,7 +29608,7 @@
       </p:sp>
       <p:sp>
         <p:nvSpPr>
-          <p:cNvPr id="39" name="Text"/>
+          <p:cNvPr id="38" name="!!T The problem"/>
           <p:cNvSpPr txBox="1"/>
           <p:nvPr/>
         </p:nvSpPr>
@@ -29648,7 +29653,7 @@
       </p:sp>
       <p:sp>
         <p:nvSpPr>
-          <p:cNvPr id="40" name="Text"/>
+          <p:cNvPr id="39" name="!!T The answer"/>
           <p:cNvSpPr txBox="1"/>
           <p:nvPr/>
         </p:nvSpPr>
@@ -29693,7 +29698,7 @@
       </p:sp>
       <p:sp>
         <p:nvSpPr>
-          <p:cNvPr id="41" name="Text"/>
+          <p:cNvPr id="40" name="!!T The five calls"/>
           <p:cNvSpPr txBox="1"/>
           <p:nvPr/>
         </p:nvSpPr>
@@ -29738,7 +29743,7 @@
       </p:sp>
       <p:sp>
         <p:nvSpPr>
-          <p:cNvPr id="42" name="Text"/>
+          <p:cNvPr id="41" name="!!T Will it hold"/>
           <p:cNvSpPr txBox="1"/>
           <p:nvPr/>
         </p:nvSpPr>
@@ -29783,7 +29788,7 @@
       </p:sp>
       <p:sp>
         <p:nvSpPr>
-          <p:cNvPr id="43" name="Text"/>
+          <p:cNvPr id="42" name="!!T What next"/>
           <p:cNvSpPr txBox="1"/>
           <p:nvPr/>
         </p:nvSpPr>
@@ -29828,7 +29833,7 @@
       </p:sp>
       <p:sp>
         <p:nvSpPr>
-          <p:cNvPr id="44" name="Text"/>
+          <p:cNvPr id="43" name="!!T Us"/>
           <p:cNvSpPr txBox="1"/>
           <p:nvPr/>
         </p:nvSpPr>
@@ -29873,7 +29878,7 @@
       </p:sp>
       <p:sp>
         <p:nvSpPr>
-          <p:cNvPr id="45" name="Text"/>
+          <p:cNvPr id="44" name="!!T 4 / 15"/>
           <p:cNvSpPr txBox="1"/>
           <p:nvPr/>
         </p:nvSpPr>
@@ -29921,6 +29926,9 @@
   <p:clrMapOvr>
     <a:masterClrMapping/>
   </p:clrMapOvr>
+  <p:transition>
+    <p:fade/>
+  </p:transition>
 </p:sld>
 </file>
 
@@ -29943,7 +29951,7 @@
       </p:grpSpPr>
       <p:sp>
         <p:nvSpPr>
-          <p:cNvPr id="2" name="Rule"/>
+          <p:cNvPr id="2" name="!!Rule 6ff153ce"/>
           <p:cNvSpPr/>
           <p:nvPr/>
         </p:nvSpPr>
@@ -29973,7 +29981,7 @@
       </p:sp>
       <p:pic>
         <p:nvPicPr>
-          <p:cNvPr id="3" name="Drawing" descr="image.png"/>
+          <p:cNvPr id="3" name="!!house" descr="image.png"/>
           <p:cNvPicPr>
             <a:picLocks noChangeAspect="1"/>
           </p:cNvPicPr>
@@ -30003,7 +30011,7 @@
       </p:pic>
       <p:sp>
         <p:nvSpPr>
-          <p:cNvPr id="4" name="Text"/>
+          <p:cNvPr id="4" name="!!T Call 1: Protection"/>
           <p:cNvSpPr txBox="1"/>
           <p:nvPr/>
         </p:nvSpPr>
@@ -30048,7 +30056,7 @@
       </p:sp>
       <p:sp>
         <p:nvSpPr>
-          <p:cNvPr id="5" name="Text"/>
+          <p:cNvPr id="5" name="!!T Insure the income, not the life: about H"/>
           <p:cNvSpPr txBox="1"/>
           <p:nvPr/>
         </p:nvSpPr>
@@ -30093,7 +30101,7 @@
       </p:sp>
       <p:sp>
         <p:nvSpPr>
-          <p:cNvPr id="6" name="Rule"/>
+          <p:cNvPr id="6" name="!!Rule 1e94dd1f"/>
           <p:cNvSpPr/>
           <p:nvPr/>
         </p:nvSpPr>
@@ -30123,7 +30131,7 @@
       </p:sp>
       <p:sp>
         <p:nvSpPr>
-          <p:cNvPr id="7" name="Text"/>
+          <p:cNvPr id="7" name="!!T If Adrian couldn't work tomorrow…"/>
           <p:cNvSpPr txBox="1"/>
           <p:nvPr/>
         </p:nvSpPr>
@@ -30168,7 +30176,7 @@
       </p:sp>
       <p:sp>
         <p:nvSpPr>
-          <p:cNvPr id="8" name="Text"/>
+          <p:cNvPr id="8" name="!!T The household's money each month, agains"/>
           <p:cNvSpPr txBox="1"/>
           <p:nvPr/>
         </p:nvSpPr>
@@ -30213,7 +30221,7 @@
       </p:sp>
       <p:sp>
         <p:nvSpPr>
-          <p:cNvPr id="9" name="Rule"/>
+          <p:cNvPr id="9" name="!!Rule c85e5f45"/>
           <p:cNvSpPr/>
           <p:nvPr/>
         </p:nvSpPr>
@@ -30243,7 +30251,7 @@
       </p:sp>
       <p:sp>
         <p:nvSpPr>
-          <p:cNvPr id="10" name="Text"/>
+          <p:cNvPr id="10" name="!!T Why not more life cover?"/>
           <p:cNvSpPr txBox="1"/>
           <p:nvPr/>
         </p:nvSpPr>
@@ -30288,7 +30296,7 @@
       </p:sp>
       <p:sp>
         <p:nvSpPr>
-          <p:cNvPr id="11" name="Text"/>
+          <p:cNvPr id="11" name="!!T His HK$2.0M whole-life policy pays only "/>
           <p:cNvSpPr txBox="1"/>
           <p:nvPr/>
         </p:nvSpPr>
@@ -30377,7 +30385,7 @@
       </p:sp>
       <p:sp>
         <p:nvSpPr>
-          <p:cNvPr id="12" name="Rule"/>
+          <p:cNvPr id="12" name="!!Rule 16cb8604"/>
           <p:cNvSpPr/>
           <p:nvPr/>
         </p:nvSpPr>
@@ -30407,7 +30415,7 @@
       </p:sp>
       <p:sp>
         <p:nvSpPr>
-          <p:cNvPr id="13" name="Text"/>
+          <p:cNvPr id="13" name="!!T …so we insure the income first"/>
           <p:cNvSpPr txBox="1"/>
           <p:nvPr/>
         </p:nvSpPr>
@@ -30452,7 +30460,7 @@
       </p:sp>
       <p:sp>
         <p:nvSpPr>
-          <p:cNvPr id="14" name="Text"/>
+          <p:cNvPr id="14" name="!!T HK$100K"/>
           <p:cNvSpPr txBox="1"/>
           <p:nvPr/>
         </p:nvSpPr>
@@ -30497,7 +30505,7 @@
       </p:sp>
       <p:sp>
         <p:nvSpPr>
-          <p:cNvPr id="15" name="Text"/>
+          <p:cNvPr id="15" name="!!T a year for four new covers, 14% of their"/>
           <p:cNvSpPr txBox="1"/>
           <p:nvPr/>
         </p:nvSpPr>
@@ -30564,7 +30572,7 @@
       </p:sp>
       <p:pic>
         <p:nvPicPr>
-          <p:cNvPr id="16" name="Drawing" descr="image.png"/>
+          <p:cNvPr id="16" name="!!Drawing fcca67e8" descr="image.png"/>
           <p:cNvPicPr>
             <a:picLocks noChangeAspect="1"/>
           </p:cNvPicPr>
@@ -30594,7 +30602,7 @@
       </p:pic>
       <p:sp>
         <p:nvSpPr>
-          <p:cNvPr id="17" name="Text"/>
+          <p:cNvPr id="17" name="!!T Disability"/>
           <p:cNvSpPr txBox="1"/>
           <p:nvPr/>
         </p:nvSpPr>
@@ -30639,7 +30647,7 @@
       </p:sp>
       <p:sp>
         <p:nvSpPr>
-          <p:cNvPr id="18" name="Text"/>
+          <p:cNvPr id="18" name="!!T 65% of pay, to retirement"/>
           <p:cNvSpPr txBox="1"/>
           <p:nvPr/>
         </p:nvSpPr>
@@ -30684,7 +30692,7 @@
       </p:sp>
       <p:sp>
         <p:nvSpPr>
-          <p:cNvPr id="19" name="Text"/>
+          <p:cNvPr id="19" name="!!T HK$37K"/>
           <p:cNvSpPr txBox="1"/>
           <p:nvPr/>
         </p:nvSpPr>
@@ -30729,7 +30737,7 @@
       </p:sp>
       <p:sp>
         <p:nvSpPr>
-          <p:cNvPr id="20" name="div"/>
+          <p:cNvPr id="20" name="!!div 01249f82"/>
           <p:cNvSpPr/>
           <p:nvPr/>
         </p:nvSpPr>
@@ -30762,7 +30770,7 @@
       </p:sp>
       <p:sp>
         <p:nvSpPr>
-          <p:cNvPr id="21" name="i"/>
+          <p:cNvPr id="21" name="!!i 44ec0c80"/>
           <p:cNvSpPr/>
           <p:nvPr/>
         </p:nvSpPr>
@@ -30803,7 +30811,7 @@
       </p:sp>
       <p:pic>
         <p:nvPicPr>
-          <p:cNvPr id="22" name="Drawing" descr="image.png"/>
+          <p:cNvPr id="22" name="!!Drawing cd5d0bb6" descr="image.png"/>
           <p:cNvPicPr>
             <a:picLocks noChangeAspect="1"/>
           </p:cNvPicPr>
@@ -30833,7 +30841,7 @@
       </p:pic>
       <p:sp>
         <p:nvSpPr>
-          <p:cNvPr id="23" name="Text"/>
+          <p:cNvPr id="23" name="!!T Critical illness"/>
           <p:cNvSpPr txBox="1"/>
           <p:nvPr/>
         </p:nvSpPr>
@@ -30878,7 +30886,7 @@
       </p:sp>
       <p:sp>
         <p:nvSpPr>
-          <p:cNvPr id="24" name="Text"/>
+          <p:cNvPr id="24" name="!!T HK$1.5M each"/>
           <p:cNvSpPr txBox="1"/>
           <p:nvPr/>
         </p:nvSpPr>
@@ -30923,7 +30931,7 @@
       </p:sp>
       <p:sp>
         <p:nvSpPr>
-          <p:cNvPr id="25" name="Text"/>
+          <p:cNvPr id="25" name="!!T HK$41K"/>
           <p:cNvSpPr txBox="1"/>
           <p:nvPr/>
         </p:nvSpPr>
@@ -30968,7 +30976,7 @@
       </p:sp>
       <p:sp>
         <p:nvSpPr>
-          <p:cNvPr id="26" name="div"/>
+          <p:cNvPr id="26" name="!!div 791b9660"/>
           <p:cNvSpPr/>
           <p:nvPr/>
         </p:nvSpPr>
@@ -31001,7 +31009,7 @@
       </p:sp>
       <p:sp>
         <p:nvSpPr>
-          <p:cNvPr id="27" name="i"/>
+          <p:cNvPr id="27" name="!!i 8aa10e2c"/>
           <p:cNvSpPr/>
           <p:nvPr/>
         </p:nvSpPr>
@@ -31042,7 +31050,7 @@
       </p:sp>
       <p:pic>
         <p:nvPicPr>
-          <p:cNvPr id="28" name="Drawing" descr="image.png"/>
+          <p:cNvPr id="28" name="!!Drawing 7f659e60" descr="image.png"/>
           <p:cNvPicPr>
             <a:picLocks noChangeAspect="1"/>
           </p:cNvPicPr>
@@ -31072,7 +31080,7 @@
       </p:pic>
       <p:sp>
         <p:nvSpPr>
-          <p:cNvPr id="29" name="Text"/>
+          <p:cNvPr id="29" name="!!T Medical of their own"/>
           <p:cNvSpPr txBox="1"/>
           <p:nvPr/>
         </p:nvSpPr>
@@ -31117,7 +31125,7 @@
       </p:sp>
       <p:sp>
         <p:nvSpPr>
-          <p:cNvPr id="30" name="Text"/>
+          <p:cNvPr id="30" name="!!T before group cover ends"/>
           <p:cNvSpPr txBox="1"/>
           <p:nvPr/>
         </p:nvSpPr>
@@ -31162,7 +31170,7 @@
       </p:sp>
       <p:sp>
         <p:nvSpPr>
-          <p:cNvPr id="31" name="Text"/>
+          <p:cNvPr id="31" name="!!T HK$15K"/>
           <p:cNvSpPr txBox="1"/>
           <p:nvPr/>
         </p:nvSpPr>
@@ -31207,7 +31215,7 @@
       </p:sp>
       <p:sp>
         <p:nvSpPr>
-          <p:cNvPr id="32" name="div"/>
+          <p:cNvPr id="32" name="!!div 95ce908c"/>
           <p:cNvSpPr/>
           <p:nvPr/>
         </p:nvSpPr>
@@ -31240,7 +31248,7 @@
       </p:sp>
       <p:sp>
         <p:nvSpPr>
-          <p:cNvPr id="33" name="i"/>
+          <p:cNvPr id="33" name="!!i 128e5ccd"/>
           <p:cNvSpPr/>
           <p:nvPr/>
         </p:nvSpPr>
@@ -31281,7 +31289,7 @@
       </p:sp>
       <p:pic>
         <p:nvPicPr>
-          <p:cNvPr id="34" name="Drawing" descr="image.png"/>
+          <p:cNvPr id="34" name="!!Drawing 32c15cc9" descr="image.png"/>
           <p:cNvPicPr>
             <a:picLocks noChangeAspect="1"/>
           </p:cNvPicPr>
@@ -31311,7 +31319,7 @@
       </p:pic>
       <p:sp>
         <p:nvSpPr>
-          <p:cNvPr id="35" name="Text"/>
+          <p:cNvPr id="35" name="!!T Term-life top-up"/>
           <p:cNvSpPr txBox="1"/>
           <p:nvPr/>
         </p:nvSpPr>
@@ -31356,7 +31364,7 @@
       </p:sp>
       <p:sp>
         <p:nvSpPr>
-          <p:cNvPr id="36" name="Text"/>
+          <p:cNvPr id="36" name="!!T to 65 and 62"/>
           <p:cNvSpPr txBox="1"/>
           <p:nvPr/>
         </p:nvSpPr>
@@ -31401,7 +31409,7 @@
       </p:sp>
       <p:sp>
         <p:nvSpPr>
-          <p:cNvPr id="37" name="Text"/>
+          <p:cNvPr id="37" name="!!T HK$7K"/>
           <p:cNvSpPr txBox="1"/>
           <p:nvPr/>
         </p:nvSpPr>
@@ -31446,7 +31454,7 @@
       </p:sp>
       <p:sp>
         <p:nvSpPr>
-          <p:cNvPr id="38" name="div"/>
+          <p:cNvPr id="38" name="!!div da278d09"/>
           <p:cNvSpPr/>
           <p:nvPr/>
         </p:nvSpPr>
@@ -31479,7 +31487,7 @@
       </p:sp>
       <p:sp>
         <p:nvSpPr>
-          <p:cNvPr id="39" name="i"/>
+          <p:cNvPr id="39" name="!!i b6d0b23b"/>
           <p:cNvSpPr/>
           <p:nvPr/>
         </p:nvSpPr>
@@ -31520,7 +31528,7 @@
       </p:sp>
       <p:sp>
         <p:nvSpPr>
-          <p:cNvPr id="40" name="p"/>
+          <p:cNvPr id="40" name="!!p 0104df3e"/>
           <p:cNvSpPr/>
           <p:nvPr/>
         </p:nvSpPr>
@@ -31550,7 +31558,7 @@
       </p:sp>
       <p:sp>
         <p:nvSpPr>
-          <p:cNvPr id="41" name="Text"/>
+          <p:cNvPr id="41" name="!!T The price: term cover lapses at 65 and 6"/>
           <p:cNvSpPr txBox="1"/>
           <p:nvPr/>
         </p:nvSpPr>
@@ -31626,7 +31634,7 @@
       </p:sp>
       <p:sp>
         <p:nvSpPr>
-          <p:cNvPr id="42" name="Rule"/>
+          <p:cNvPr id="42" name="!!Rule 597dee39"/>
           <p:cNvSpPr/>
           <p:nvPr/>
         </p:nvSpPr>
@@ -31656,7 +31664,7 @@
       </p:sp>
       <p:sp>
         <p:nvSpPr>
-          <p:cNvPr id="43" name="Text"/>
+          <p:cNvPr id="43" name="!!T And within three months, under HK$25K: w"/>
           <p:cNvSpPr txBox="1"/>
           <p:nvPr/>
         </p:nvSpPr>
@@ -31732,7 +31740,7 @@
       </p:sp>
       <p:sp>
         <p:nvSpPr>
-          <p:cNvPr id="44" name="p"/>
+          <p:cNvPr id="44" name="!!p 442bdd76"/>
           <p:cNvSpPr/>
           <p:nvPr/>
         </p:nvSpPr>
@@ -31762,7 +31770,7 @@
       </p:sp>
       <p:sp>
         <p:nvSpPr>
-          <p:cNvPr id="45" name="Text"/>
+          <p:cNvPr id="45" name="!!T Protected first: now the plan can turn w"/>
           <p:cNvSpPr txBox="1"/>
           <p:nvPr/>
         </p:nvSpPr>
@@ -31807,7 +31815,7 @@
       </p:sp>
       <p:sp>
         <p:nvSpPr>
-          <p:cNvPr id="46" name="Text"/>
+          <p:cNvPr id="46" name="!!T Year-1 premiums from 2026 rate cards and"/>
           <p:cNvSpPr txBox="1"/>
           <p:nvPr/>
         </p:nvSpPr>
@@ -31874,7 +31882,7 @@
       </p:sp>
       <p:sp>
         <p:nvSpPr>
-          <p:cNvPr id="47" name="Text"/>
+          <p:cNvPr id="47" name="!!T The problem"/>
           <p:cNvSpPr txBox="1"/>
           <p:nvPr/>
         </p:nvSpPr>
@@ -31919,7 +31927,7 @@
       </p:sp>
       <p:sp>
         <p:nvSpPr>
-          <p:cNvPr id="48" name="Text"/>
+          <p:cNvPr id="48" name="!!T The answer"/>
           <p:cNvSpPr txBox="1"/>
           <p:nvPr/>
         </p:nvSpPr>
@@ -31964,7 +31972,7 @@
       </p:sp>
       <p:sp>
         <p:nvSpPr>
-          <p:cNvPr id="49" name="Text"/>
+          <p:cNvPr id="49" name="!!T The five calls"/>
           <p:cNvSpPr txBox="1"/>
           <p:nvPr/>
         </p:nvSpPr>
@@ -32009,7 +32017,7 @@
       </p:sp>
       <p:sp>
         <p:nvSpPr>
-          <p:cNvPr id="50" name="Text"/>
+          <p:cNvPr id="50" name="!!T Will it hold"/>
           <p:cNvSpPr txBox="1"/>
           <p:nvPr/>
         </p:nvSpPr>
@@ -32054,7 +32062,7 @@
       </p:sp>
       <p:sp>
         <p:nvSpPr>
-          <p:cNvPr id="51" name="Text"/>
+          <p:cNvPr id="51" name="!!T What next"/>
           <p:cNvSpPr txBox="1"/>
           <p:nvPr/>
         </p:nvSpPr>
@@ -32099,7 +32107,7 @@
       </p:sp>
       <p:sp>
         <p:nvSpPr>
-          <p:cNvPr id="52" name="Text"/>
+          <p:cNvPr id="52" name="!!T Us"/>
           <p:cNvSpPr txBox="1"/>
           <p:nvPr/>
         </p:nvSpPr>
@@ -32144,7 +32152,7 @@
       </p:sp>
       <p:sp>
         <p:nvSpPr>
-          <p:cNvPr id="53" name="Text"/>
+          <p:cNvPr id="53" name="!!T 5 / 15"/>
           <p:cNvSpPr txBox="1"/>
           <p:nvPr/>
         </p:nvSpPr>
@@ -32189,7 +32197,7 @@
       </p:sp>
       <p:sp>
         <p:nvSpPr>
-          <p:cNvPr id="54" name="i"/>
+          <p:cNvPr id="54" name="!!i b93e70e6"/>
           <p:cNvSpPr/>
           <p:nvPr/>
         </p:nvSpPr>
@@ -32222,7 +32230,7 @@
       </p:sp>
       <p:cxnSp>
         <p:nvCxnSpPr>
-          <p:cNvPr id="55" name="Rule"/>
+          <p:cNvPr id="55" name="!!Rule ede3e6c2"/>
           <p:cNvCxnSpPr/>
           <p:nvPr/>
         </p:nvCxnSpPr>
@@ -32258,7 +32266,7 @@
       </p:cxnSp>
       <p:cxnSp>
         <p:nvCxnSpPr>
-          <p:cNvPr id="56" name="Rule"/>
+          <p:cNvPr id="56" name="!!Rule a75b2edc"/>
           <p:cNvCxnSpPr/>
           <p:nvPr/>
         </p:nvCxnSpPr>
@@ -32294,7 +32302,7 @@
       </p:cxnSp>
       <p:cxnSp>
         <p:nvCxnSpPr>
-          <p:cNvPr id="57" name="Rule"/>
+          <p:cNvPr id="57" name="!!Rule 6f3a42d9"/>
           <p:cNvCxnSpPr/>
           <p:nvPr/>
         </p:nvCxnSpPr>
@@ -32330,7 +32338,7 @@
       </p:cxnSp>
       <p:sp>
         <p:nvSpPr>
-          <p:cNvPr id="58" name="Text"/>
+          <p:cNvPr id="58" name="!!T HK$22K short"/>
           <p:cNvSpPr txBox="1"/>
           <p:nvPr/>
         </p:nvSpPr>
@@ -32375,7 +32383,7 @@
       </p:sp>
       <p:sp>
         <p:nvSpPr>
-          <p:cNvPr id="59" name="Text"/>
+          <p:cNvPr id="59" name="!!T every month"/>
           <p:cNvSpPr txBox="1"/>
           <p:nvPr/>
         </p:nvSpPr>
@@ -32420,7 +32428,7 @@
       </p:sp>
       <p:sp>
         <p:nvSpPr>
-          <p:cNvPr id="60" name="i"/>
+          <p:cNvPr id="60" name="!!i da042ed0"/>
           <p:cNvSpPr/>
           <p:nvPr/>
         </p:nvSpPr>
@@ -32458,7 +32466,7 @@
       </p:sp>
       <p:sp>
         <p:nvSpPr>
-          <p:cNvPr id="61" name="Text"/>
+          <p:cNvPr id="61" name="!!T Carmen's pay HK$60K"/>
           <p:cNvSpPr txBox="1"/>
           <p:nvPr/>
         </p:nvSpPr>
@@ -32525,7 +32533,7 @@
       </p:sp>
       <p:sp>
         <p:nvSpPr>
-          <p:cNvPr id="62" name="Text"/>
+          <p:cNvPr id="62" name="!!T Today"/>
           <p:cNvSpPr txBox="1"/>
           <p:nvPr/>
         </p:nvSpPr>
@@ -32570,7 +32578,7 @@
       </p:sp>
       <p:sp>
         <p:nvSpPr>
-          <p:cNvPr id="63" name="i"/>
+          <p:cNvPr id="63" name="!!i 8cb27814"/>
           <p:cNvSpPr/>
           <p:nvPr/>
         </p:nvSpPr>
@@ -32611,7 +32619,7 @@
       </p:sp>
       <p:sp>
         <p:nvSpPr>
-          <p:cNvPr id="64" name="Text"/>
+          <p:cNvPr id="64" name="!!T Adrian's cover HK$65K"/>
           <p:cNvSpPr txBox="1"/>
           <p:nvPr/>
         </p:nvSpPr>
@@ -32678,7 +32686,7 @@
       </p:sp>
       <p:sp>
         <p:nvSpPr>
-          <p:cNvPr id="65" name="i"/>
+          <p:cNvPr id="65" name="!!i 47b1027d"/>
           <p:cNvSpPr/>
           <p:nvPr/>
         </p:nvSpPr>
@@ -32716,7 +32724,7 @@
       </p:sp>
       <p:sp>
         <p:nvSpPr>
-          <p:cNvPr id="66" name="Text"/>
+          <p:cNvPr id="66" name="!!T Carmen's pay HK$60K #2"/>
           <p:cNvSpPr txBox="1"/>
           <p:nvPr/>
         </p:nvSpPr>
@@ -32783,7 +32791,7 @@
       </p:sp>
       <p:sp>
         <p:nvSpPr>
-          <p:cNvPr id="67" name="Text"/>
+          <p:cNvPr id="67" name="!!T With the plan"/>
           <p:cNvSpPr txBox="1"/>
           <p:nvPr/>
         </p:nvSpPr>
@@ -32828,7 +32836,7 @@
       </p:sp>
       <p:sp>
         <p:nvSpPr>
-          <p:cNvPr id="68" name="Rule"/>
+          <p:cNvPr id="68" name="!!Rule a9c7ea31"/>
           <p:cNvSpPr/>
           <p:nvPr/>
         </p:nvSpPr>
@@ -32858,7 +32866,7 @@
       </p:sp>
       <p:sp>
         <p:nvSpPr>
-          <p:cNvPr id="69" name="Text"/>
+          <p:cNvPr id="69" name="!!T HK$82K a month of bills"/>
           <p:cNvSpPr txBox="1"/>
           <p:nvPr/>
         </p:nvSpPr>
@@ -32912,7 +32920,7 @@
       </p:sp>
       <p:sp>
         <p:nvSpPr>
-          <p:cNvPr id="70" name="Rule"/>
+          <p:cNvPr id="70" name="!!Rule d22ec9fe"/>
           <p:cNvSpPr/>
           <p:nvPr/>
         </p:nvSpPr>
@@ -32942,7 +32950,7 @@
       </p:sp>
       <p:sp>
         <p:nvSpPr>
-          <p:cNvPr id="71" name="Rule"/>
+          <p:cNvPr id="71" name="!!Rule dedcf2c7"/>
           <p:cNvSpPr/>
           <p:nvPr/>
         </p:nvSpPr>
@@ -32972,7 +32980,7 @@
       </p:sp>
       <p:sp>
         <p:nvSpPr>
-          <p:cNvPr id="72" name="Rule"/>
+          <p:cNvPr id="72" name="!!Rule f549748b"/>
           <p:cNvSpPr/>
           <p:nvPr/>
         </p:nvSpPr>
@@ -33002,7 +33010,7 @@
       </p:sp>
       <p:sp>
         <p:nvSpPr>
-          <p:cNvPr id="73" name="Text"/>
+          <p:cNvPr id="73" name="!!T 65% of his pay, until 65"/>
           <p:cNvSpPr txBox="1"/>
           <p:nvPr/>
         </p:nvSpPr>
@@ -33047,7 +33055,7 @@
       </p:sp>
       <p:sp>
         <p:nvSpPr>
-          <p:cNvPr id="74" name="Text"/>
+          <p:cNvPr id="74" name="!!T Carmen's own cover: HK$39K a month, unti"/>
           <p:cNvSpPr txBox="1"/>
           <p:nvPr/>
         </p:nvSpPr>
@@ -33117,6 +33125,18 @@
   <p:clrMapOvr>
     <a:masterClrMapping/>
   </p:clrMapOvr>
+  <mc:AlternateContent xmlns:mc="http://schemas.openxmlformats.org/markup-compatibility/2006" xmlns:p159="http://schemas.microsoft.com/office/powerpoint/2015/09/main">
+    <mc:Choice Requires="p159">
+      <p:transition xmlns:p14="http://schemas.microsoft.com/office/powerpoint/2010/main" spd="slow" p14:dur="900">
+        <p159:morph option="byObject"/>
+      </p:transition>
+    </mc:Choice>
+    <mc:Fallback xmlns="">
+      <p:transition spd="fast">
+        <p:fade/>
+      </p:transition>
+    </mc:Fallback>
+  </mc:AlternateContent>
 </p:sld>
 </file>
 
@@ -33139,7 +33159,7 @@
       </p:grpSpPr>
       <p:sp>
         <p:nvSpPr>
-          <p:cNvPr id="2" name="Rule"/>
+          <p:cNvPr id="2" name="!!Rule 2286b0a1"/>
           <p:cNvSpPr/>
           <p:nvPr/>
         </p:nvSpPr>
@@ -33169,7 +33189,7 @@
       </p:sp>
       <p:pic>
         <p:nvPicPr>
-          <p:cNvPr id="3" name="Drawing" descr="image.png"/>
+          <p:cNvPr id="3" name="!!house" descr="image.png"/>
           <p:cNvPicPr>
             <a:picLocks noChangeAspect="1"/>
           </p:cNvPicPr>
@@ -33199,7 +33219,7 @@
       </p:pic>
       <p:sp>
         <p:nvSpPr>
-          <p:cNvPr id="4" name="Text"/>
+          <p:cNvPr id="4" name="!!T Call 2: The home and the business"/>
           <p:cNvSpPr txBox="1"/>
           <p:nvPr/>
         </p:nvSpPr>
@@ -33244,7 +33264,7 @@
       </p:sp>
       <p:sp>
         <p:nvSpPr>
-          <p:cNvPr id="5" name="Text"/>
+          <p:cNvPr id="5" name="!!T Decide now, not at 83: four decisions on"/>
           <p:cNvSpPr txBox="1"/>
           <p:nvPr/>
         </p:nvSpPr>
@@ -33311,7 +33331,7 @@
       </p:sp>
       <p:sp>
         <p:nvSpPr>
-          <p:cNvPr id="6" name="Text"/>
+          <p:cNvPr id="6" name="!!T What they own and spend"/>
           <p:cNvSpPr txBox="1"/>
           <p:nvPr/>
         </p:nvSpPr>
@@ -33356,7 +33376,7 @@
       </p:sp>
       <p:sp>
         <p:nvSpPr>
-          <p:cNvPr id="7" name="Text"/>
+          <p:cNvPr id="7" name="!!T What each becomes, decided now"/>
           <p:cNvSpPr txBox="1"/>
           <p:nvPr/>
         </p:nvSpPr>
@@ -33401,7 +33421,7 @@
       </p:sp>
       <p:sp>
         <p:nvSpPr>
-          <p:cNvPr id="8" name="Text"/>
+          <p:cNvPr id="8" name="!!T What it gives them"/>
           <p:cNvSpPr txBox="1"/>
           <p:nvPr/>
         </p:nvSpPr>
@@ -33446,7 +33466,7 @@
       </p:sp>
       <p:pic>
         <p:nvPicPr>
-          <p:cNvPr id="9" name="Drawing" descr="image.png"/>
+          <p:cNvPr id="9" name="!!Drawing dd791c66" descr="image.png"/>
           <p:cNvPicPr>
             <a:picLocks noChangeAspect="1"/>
           </p:cNvPicPr>
@@ -33476,7 +33496,7 @@
       </p:pic>
       <p:sp>
         <p:nvSpPr>
-          <p:cNvPr id="10" name="span"/>
+          <p:cNvPr id="10" name="!!span 0325418c"/>
           <p:cNvSpPr/>
           <p:nvPr/>
         </p:nvSpPr>
@@ -33506,7 +33526,7 @@
       </p:sp>
       <p:pic>
         <p:nvPicPr>
-          <p:cNvPr id="11" name="Drawing" descr="image.png"/>
+          <p:cNvPr id="11" name="!!Drawing 020f3b01" descr="image.png"/>
           <p:cNvPicPr>
             <a:picLocks noChangeAspect="1"/>
           </p:cNvPicPr>
@@ -33536,7 +33556,7 @@
       </p:pic>
       <p:sp>
         <p:nvSpPr>
-          <p:cNvPr id="12" name="Text"/>
+          <p:cNvPr id="12" name="!!T The flat"/>
           <p:cNvSpPr txBox="1"/>
           <p:nvPr/>
         </p:nvSpPr>
@@ -33581,7 +33601,7 @@
       </p:sp>
       <p:sp>
         <p:nvSpPr>
-          <p:cNvPr id="13" name="Text"/>
+          <p:cNvPr id="13" name="!!T HK$11.5M"/>
           <p:cNvSpPr txBox="1"/>
           <p:nvPr/>
         </p:nvSpPr>
@@ -33626,7 +33646,7 @@
       </p:sp>
       <p:sp>
         <p:nvSpPr>
-          <p:cNvPr id="14" name="span"/>
+          <p:cNvPr id="14" name="!!span fb5756a0"/>
           <p:cNvSpPr/>
           <p:nvPr/>
         </p:nvSpPr>
@@ -33656,7 +33676,7 @@
       </p:sp>
       <p:pic>
         <p:nvPicPr>
-          <p:cNvPr id="15" name="Drawing" descr="image.png"/>
+          <p:cNvPr id="15" name="!!Drawing ce055081" descr="image.png"/>
           <p:cNvPicPr>
             <a:picLocks noChangeAspect="1"/>
           </p:cNvPicPr>
@@ -33686,7 +33706,7 @@
       </p:pic>
       <p:sp>
         <p:nvSpPr>
-          <p:cNvPr id="16" name="Text"/>
+          <p:cNvPr id="16" name="!!T The MPF"/>
           <p:cNvSpPr txBox="1"/>
           <p:nvPr/>
         </p:nvSpPr>
@@ -33731,7 +33751,7 @@
       </p:sp>
       <p:sp>
         <p:nvSpPr>
-          <p:cNvPr id="17" name="Text"/>
+          <p:cNvPr id="17" name="!!T HK$1.7M"/>
           <p:cNvSpPr txBox="1"/>
           <p:nvPr/>
         </p:nvSpPr>
@@ -33776,7 +33796,7 @@
       </p:sp>
       <p:sp>
         <p:nvSpPr>
-          <p:cNvPr id="18" name="span"/>
+          <p:cNvPr id="18" name="!!span 44d22ef7"/>
           <p:cNvSpPr/>
           <p:nvPr/>
         </p:nvSpPr>
@@ -33806,7 +33826,7 @@
       </p:sp>
       <p:pic>
         <p:nvPicPr>
-          <p:cNvPr id="19" name="Drawing" descr="image.png"/>
+          <p:cNvPr id="19" name="!!Drawing 3ad79f74" descr="image.png"/>
           <p:cNvPicPr>
             <a:picLocks noChangeAspect="1"/>
           </p:cNvPicPr>
@@ -33836,7 +33856,7 @@
       </p:pic>
       <p:sp>
         <p:nvSpPr>
-          <p:cNvPr id="20" name="Text"/>
+          <p:cNvPr id="20" name="!!T The business"/>
           <p:cNvSpPr txBox="1"/>
           <p:nvPr/>
         </p:nvSpPr>
@@ -33881,7 +33901,7 @@
       </p:sp>
       <p:sp>
         <p:nvSpPr>
-          <p:cNvPr id="21" name="Text"/>
+          <p:cNvPr id="21" name="!!T HK$5.0M"/>
           <p:cNvSpPr txBox="1"/>
           <p:nvPr/>
         </p:nvSpPr>
@@ -33926,7 +33946,7 @@
       </p:sp>
       <p:sp>
         <p:nvSpPr>
-          <p:cNvPr id="22" name="span"/>
+          <p:cNvPr id="22" name="!!span 55acadb4"/>
           <p:cNvSpPr/>
           <p:nvPr/>
         </p:nvSpPr>
@@ -33956,7 +33976,7 @@
       </p:sp>
       <p:pic>
         <p:nvPicPr>
-          <p:cNvPr id="23" name="Drawing" descr="image.png"/>
+          <p:cNvPr id="23" name="!!Drawing 30bf0ab2" descr="image.png"/>
           <p:cNvPicPr>
             <a:picLocks noChangeAspect="1"/>
           </p:cNvPicPr>
@@ -33986,7 +34006,7 @@
       </p:pic>
       <p:sp>
         <p:nvSpPr>
-          <p:cNvPr id="24" name="Text"/>
+          <p:cNvPr id="24" name="!!T Their budget"/>
           <p:cNvSpPr txBox="1"/>
           <p:nvPr/>
         </p:nvSpPr>
@@ -34031,7 +34051,7 @@
       </p:sp>
       <p:sp>
         <p:nvSpPr>
-          <p:cNvPr id="25" name="Text"/>
+          <p:cNvPr id="25" name="!!T HK$780K a year"/>
           <p:cNvSpPr txBox="1"/>
           <p:nvPr/>
         </p:nvSpPr>
@@ -34076,7 +34096,7 @@
       </p:sp>
       <p:sp>
         <p:nvSpPr>
-          <p:cNvPr id="26" name="Text"/>
+          <p:cNvPr id="26" name="!!T HK$230K a year for life, from 2037"/>
           <p:cNvSpPr txBox="1"/>
           <p:nvPr/>
         </p:nvSpPr>
@@ -34121,7 +34141,7 @@
       </p:sp>
       <p:sp>
         <p:nvSpPr>
-          <p:cNvPr id="27" name="Text"/>
+          <p:cNvPr id="27" name="!!T they stay, with a reverse mortgage, or d"/>
           <p:cNvSpPr txBox="1"/>
           <p:nvPr/>
         </p:nvSpPr>
@@ -34166,7 +34186,7 @@
       </p:sp>
       <p:sp>
         <p:nvSpPr>
-          <p:cNvPr id="28" name="Text"/>
+          <p:cNvPr id="28" name="!!T HK$268K a year for life"/>
           <p:cNvSpPr txBox="1"/>
           <p:nvPr/>
         </p:nvSpPr>
@@ -34211,7 +34231,7 @@
       </p:sp>
       <p:sp>
         <p:nvSpPr>
-          <p:cNvPr id="29" name="Text"/>
+          <p:cNvPr id="29" name="!!T two HKMC annuities, bought at 65 and 62"/>
           <p:cNvSpPr txBox="1"/>
           <p:nvPr/>
         </p:nvSpPr>
@@ -34256,7 +34276,7 @@
       </p:sp>
       <p:sp>
         <p:nvSpPr>
-          <p:cNvPr id="30" name="Text"/>
+          <p:cNvPr id="30" name="!!T Sold in stages, 2035–39"/>
           <p:cNvSpPr txBox="1"/>
           <p:nvPr/>
         </p:nvSpPr>
@@ -34301,7 +34321,7 @@
       </p:sp>
       <p:sp>
         <p:nvSpPr>
-          <p:cNvPr id="31" name="Text"/>
+          <p:cNvPr id="31" name="!!T to her co-founder and managers; their ow"/>
           <p:cNvSpPr txBox="1"/>
           <p:nvPr/>
         </p:nvSpPr>
@@ -34346,7 +34366,7 @@
       </p:sp>
       <p:sp>
         <p:nvSpPr>
-          <p:cNvPr id="32" name="Text"/>
+          <p:cNvPr id="32" name="!!T Planned now, for a survivor"/>
           <p:cNvSpPr txBox="1"/>
           <p:nvPr/>
         </p:nvSpPr>
@@ -34391,7 +34411,7 @@
       </p:sp>
       <p:sp>
         <p:nvSpPr>
-          <p:cNvPr id="33" name="Text"/>
+          <p:cNvPr id="33" name="!!T for the years after the first death"/>
           <p:cNvSpPr txBox="1"/>
           <p:nvPr/>
         </p:nvSpPr>
@@ -34436,7 +34456,7 @@
       </p:sp>
       <p:sp>
         <p:nvSpPr>
-          <p:cNvPr id="34" name="div"/>
+          <p:cNvPr id="34" name="!!div 211d27bd"/>
           <p:cNvSpPr/>
           <p:nvPr/>
         </p:nvSpPr>
@@ -34473,7 +34493,7 @@
       </p:sp>
       <p:sp>
         <p:nvSpPr>
-          <p:cNvPr id="35" name="Rule"/>
+          <p:cNvPr id="35" name="!!Rule 155f7c8d"/>
           <p:cNvSpPr/>
           <p:nvPr/>
         </p:nvSpPr>
@@ -34503,7 +34523,7 @@
       </p:sp>
       <p:sp>
         <p:nvSpPr>
-          <p:cNvPr id="36" name="Text"/>
+          <p:cNvPr id="36" name="!!T Guaranteed income, for life"/>
           <p:cNvSpPr txBox="1"/>
           <p:nvPr/>
         </p:nvSpPr>
@@ -34548,7 +34568,7 @@
       </p:sp>
       <p:sp>
         <p:nvSpPr>
-          <p:cNvPr id="37" name="Text"/>
+          <p:cNvPr id="37" name="!!T 116%"/>
           <p:cNvSpPr txBox="1"/>
           <p:nvPr/>
         </p:nvSpPr>
@@ -34593,7 +34613,7 @@
       </p:sp>
       <p:sp>
         <p:nvSpPr>
-          <p:cNvPr id="38" name="Text"/>
+          <p:cNvPr id="38" name="!!T of their essential bills, covered in 203"/>
           <p:cNvSpPr txBox="1"/>
           <p:nvPr/>
         </p:nvSpPr>
@@ -34638,7 +34658,7 @@
       </p:sp>
       <p:sp>
         <p:nvSpPr>
-          <p:cNvPr id="39" name="div"/>
+          <p:cNvPr id="39" name="!!div 92cc769e"/>
           <p:cNvSpPr/>
           <p:nvPr/>
         </p:nvSpPr>
@@ -34675,7 +34695,7 @@
       </p:sp>
       <p:sp>
         <p:nvSpPr>
-          <p:cNvPr id="40" name="Rule"/>
+          <p:cNvPr id="40" name="!!Rule 419b12c9"/>
           <p:cNvSpPr/>
           <p:nvPr/>
         </p:nvSpPr>
@@ -34705,7 +34725,7 @@
       </p:sp>
       <p:sp>
         <p:nvSpPr>
-          <p:cNvPr id="41" name="Text"/>
+          <p:cNvPr id="41" name="!!T HK$3.0M"/>
           <p:cNvSpPr txBox="1"/>
           <p:nvPr/>
         </p:nvSpPr>
@@ -34750,7 +34770,7 @@
       </p:sp>
       <p:sp>
         <p:nvSpPr>
-          <p:cNvPr id="42" name="Text"/>
+          <p:cNvPr id="42" name="!!T into savings"/>
           <p:cNvSpPr txBox="1"/>
           <p:nvPr/>
         </p:nvSpPr>
@@ -34795,7 +34815,7 @@
       </p:sp>
       <p:sp>
         <p:nvSpPr>
-          <p:cNvPr id="43" name="Text"/>
+          <p:cNvPr id="43" name="!!T counted low, of HK$5.0M"/>
           <p:cNvSpPr txBox="1"/>
           <p:nvPr/>
         </p:nvSpPr>
@@ -34840,7 +34860,7 @@
       </p:sp>
       <p:sp>
         <p:nvSpPr>
-          <p:cNvPr id="44" name="div"/>
+          <p:cNvPr id="44" name="!!div 717b085c"/>
           <p:cNvSpPr/>
           <p:nvPr/>
         </p:nvSpPr>
@@ -34877,7 +34897,7 @@
       </p:sp>
       <p:sp>
         <p:nvSpPr>
-          <p:cNvPr id="45" name="Rule"/>
+          <p:cNvPr id="45" name="!!Rule 8c609223"/>
           <p:cNvSpPr/>
           <p:nvPr/>
         </p:nvSpPr>
@@ -34907,7 +34927,7 @@
       </p:sp>
       <p:sp>
         <p:nvSpPr>
-          <p:cNvPr id="46" name="Text"/>
+          <p:cNvPr id="46" name="!!T 70%"/>
           <p:cNvSpPr txBox="1"/>
           <p:nvPr/>
         </p:nvSpPr>
@@ -34952,7 +34972,7 @@
       </p:sp>
       <p:sp>
         <p:nvSpPr>
-          <p:cNvPr id="47" name="Text"/>
+          <p:cNvPr id="47" name="!!T of today's budget"/>
           <p:cNvSpPr txBox="1"/>
           <p:nvPr/>
         </p:nvSpPr>
@@ -34997,7 +35017,7 @@
       </p:sp>
       <p:sp>
         <p:nvSpPr>
-          <p:cNvPr id="48" name="Text"/>
+          <p:cNvPr id="48" name="!!T for the one who survives"/>
           <p:cNvSpPr txBox="1"/>
           <p:nvPr/>
         </p:nvSpPr>
@@ -35042,7 +35062,7 @@
       </p:sp>
       <p:sp>
         <p:nvSpPr>
-          <p:cNvPr id="49" name="Rule"/>
+          <p:cNvPr id="49" name="!!Rule 3d09e2fc"/>
           <p:cNvSpPr/>
           <p:nvPr/>
         </p:nvSpPr>
@@ -35072,7 +35092,7 @@
       </p:sp>
       <p:sp>
         <p:nvSpPr>
-          <p:cNvPr id="50" name="Text"/>
+          <p:cNvPr id="50" name="!!T Chance the money lasts to Carmen's 89"/>
           <p:cNvSpPr txBox="1"/>
           <p:nvPr/>
         </p:nvSpPr>
@@ -35139,7 +35159,7 @@
       </p:sp>
       <p:sp>
         <p:nvSpPr>
-          <p:cNvPr id="51" name="i"/>
+          <p:cNvPr id="51" name="!!i ac1db153"/>
           <p:cNvSpPr/>
           <p:nvPr/>
         </p:nvSpPr>
@@ -35172,7 +35192,7 @@
       </p:sp>
       <p:sp>
         <p:nvSpPr>
-          <p:cNvPr id="52" name="i"/>
+          <p:cNvPr id="52" name="!!i 997b076d"/>
           <p:cNvSpPr/>
           <p:nvPr/>
         </p:nvSpPr>
@@ -35210,7 +35230,7 @@
       </p:sp>
       <p:sp>
         <p:nvSpPr>
-          <p:cNvPr id="53" name="i"/>
+          <p:cNvPr id="53" name="!!i 4c2d5999"/>
           <p:cNvSpPr/>
           <p:nvPr/>
         </p:nvSpPr>
@@ -35240,7 +35260,7 @@
       </p:sp>
       <p:sp>
         <p:nvSpPr>
-          <p:cNvPr id="54" name="Text"/>
+          <p:cNvPr id="54" name="!!T four decisions, taken now"/>
           <p:cNvSpPr txBox="1"/>
           <p:nvPr/>
         </p:nvSpPr>
@@ -35285,7 +35305,7 @@
       </p:sp>
       <p:sp>
         <p:nvSpPr>
-          <p:cNvPr id="55" name="Text"/>
+          <p:cNvPr id="55" name="!!T 83%"/>
           <p:cNvSpPr txBox="1"/>
           <p:nvPr/>
         </p:nvSpPr>
@@ -35330,7 +35350,7 @@
       </p:sp>
       <p:sp>
         <p:nvSpPr>
-          <p:cNvPr id="56" name="Text"/>
+          <p:cNvPr id="56" name="!!T their own way 62%"/>
           <p:cNvSpPr txBox="1"/>
           <p:nvPr/>
         </p:nvSpPr>
@@ -35384,7 +35404,7 @@
       </p:sp>
       <p:sp>
         <p:nvSpPr>
-          <p:cNvPr id="57" name="Text"/>
+          <p:cNvPr id="57" name="!!T with Call 3, next 97%"/>
           <p:cNvSpPr txBox="1"/>
           <p:nvPr/>
         </p:nvSpPr>
@@ -35438,7 +35458,7 @@
       </p:sp>
       <p:sp>
         <p:nvSpPr>
-          <p:cNvPr id="58" name="Text"/>
+          <p:cNvPr id="58" name="!!T The price: staying in the home leaves HK"/>
           <p:cNvSpPr txBox="1"/>
           <p:nvPr/>
         </p:nvSpPr>
@@ -35492,7 +35512,7 @@
       </p:sp>
       <p:sp>
         <p:nvSpPr>
-          <p:cNvPr id="59" name="p"/>
+          <p:cNvPr id="59" name="!!p 442bdd76"/>
           <p:cNvSpPr/>
           <p:nvPr/>
         </p:nvSpPr>
@@ -35522,7 +35542,7 @@
       </p:sp>
       <p:sp>
         <p:nvSpPr>
-          <p:cNvPr id="60" name="Text"/>
+          <p:cNvPr id="60" name="!!T Decided now, four decisions close most o"/>
           <p:cNvSpPr txBox="1"/>
           <p:nvPr/>
         </p:nvSpPr>
@@ -35567,7 +35587,7 @@
       </p:sp>
       <p:sp>
         <p:nvSpPr>
-          <p:cNvPr id="61" name="Text"/>
+          <p:cNvPr id="61" name="!!T Chance the money lasts to Carmen's 89, 1"/>
           <p:cNvSpPr txBox="1"/>
           <p:nvPr/>
         </p:nvSpPr>
@@ -35634,7 +35654,7 @@
       </p:sp>
       <p:sp>
         <p:nvSpPr>
-          <p:cNvPr id="62" name="Text"/>
+          <p:cNvPr id="62" name="!!T The problem"/>
           <p:cNvSpPr txBox="1"/>
           <p:nvPr/>
         </p:nvSpPr>
@@ -35679,7 +35699,7 @@
       </p:sp>
       <p:sp>
         <p:nvSpPr>
-          <p:cNvPr id="63" name="Text"/>
+          <p:cNvPr id="63" name="!!T The answer"/>
           <p:cNvSpPr txBox="1"/>
           <p:nvPr/>
         </p:nvSpPr>
@@ -35724,7 +35744,7 @@
       </p:sp>
       <p:sp>
         <p:nvSpPr>
-          <p:cNvPr id="64" name="Text"/>
+          <p:cNvPr id="64" name="!!T The five calls"/>
           <p:cNvSpPr txBox="1"/>
           <p:nvPr/>
         </p:nvSpPr>
@@ -35769,7 +35789,7 @@
       </p:sp>
       <p:sp>
         <p:nvSpPr>
-          <p:cNvPr id="65" name="Text"/>
+          <p:cNvPr id="65" name="!!T Will it hold"/>
           <p:cNvSpPr txBox="1"/>
           <p:nvPr/>
         </p:nvSpPr>
@@ -35814,7 +35834,7 @@
       </p:sp>
       <p:sp>
         <p:nvSpPr>
-          <p:cNvPr id="66" name="Text"/>
+          <p:cNvPr id="66" name="!!T What next"/>
           <p:cNvSpPr txBox="1"/>
           <p:nvPr/>
         </p:nvSpPr>
@@ -35859,7 +35879,7 @@
       </p:sp>
       <p:sp>
         <p:nvSpPr>
-          <p:cNvPr id="67" name="Text"/>
+          <p:cNvPr id="67" name="!!T Us"/>
           <p:cNvSpPr txBox="1"/>
           <p:nvPr/>
         </p:nvSpPr>
@@ -35904,7 +35924,7 @@
       </p:sp>
       <p:sp>
         <p:nvSpPr>
-          <p:cNvPr id="68" name="Text"/>
+          <p:cNvPr id="68" name="!!T 6 / 15"/>
           <p:cNvSpPr txBox="1"/>
           <p:nvPr/>
         </p:nvSpPr>
@@ -35952,6 +35972,18 @@
   <p:clrMapOvr>
     <a:masterClrMapping/>
   </p:clrMapOvr>
+  <mc:AlternateContent xmlns:mc="http://schemas.openxmlformats.org/markup-compatibility/2006" xmlns:p159="http://schemas.microsoft.com/office/powerpoint/2015/09/main">
+    <mc:Choice Requires="p159">
+      <p:transition xmlns:p14="http://schemas.microsoft.com/office/powerpoint/2010/main" spd="slow" p14:dur="900">
+        <p159:morph option="byObject"/>
+      </p:transition>
+    </mc:Choice>
+    <mc:Fallback xmlns="">
+      <p:transition spd="fast">
+        <p:fade/>
+      </p:transition>
+    </mc:Fallback>
+  </mc:AlternateContent>
 </p:sld>
 </file>
 
@@ -35974,7 +36006,7 @@
       </p:grpSpPr>
       <p:sp>
         <p:nvSpPr>
-          <p:cNvPr id="2" name="Rule"/>
+          <p:cNvPr id="2" name="!!Rule 2286b0a1"/>
           <p:cNvSpPr/>
           <p:nvPr/>
         </p:nvSpPr>
@@ -36004,7 +36036,7 @@
       </p:sp>
       <p:pic>
         <p:nvPicPr>
-          <p:cNvPr id="3" name="Drawing" descr="image.png"/>
+          <p:cNvPr id="3" name="!!house" descr="image.png"/>
           <p:cNvPicPr>
             <a:picLocks noChangeAspect="1"/>
           </p:cNvPicPr>
@@ -36034,7 +36066,7 @@
       </p:pic>
       <p:sp>
         <p:nvSpPr>
-          <p:cNvPr id="4" name="Text"/>
+          <p:cNvPr id="4" name="!!T Call 3: Retirement"/>
           <p:cNvSpPr txBox="1"/>
           <p:nvPr/>
         </p:nvSpPr>
@@ -36079,7 +36111,7 @@
       </p:sp>
       <p:sp>
         <p:nvSpPr>
-          <p:cNvPr id="5" name="Text"/>
+          <p:cNvPr id="5" name="!!T Fix the cost the budget ignores: in that"/>
           <p:cNvSpPr txBox="1"/>
           <p:nvPr/>
         </p:nvSpPr>
@@ -36146,7 +36178,7 @@
       </p:sp>
       <p:sp>
         <p:nvSpPr>
-          <p:cNvPr id="6" name="Rule"/>
+          <p:cNvPr id="6" name="!!Rule 7f333516"/>
           <p:cNvSpPr/>
           <p:nvPr/>
         </p:nvSpPr>
@@ -36176,7 +36208,7 @@
       </p:sp>
       <p:sp>
         <p:nvSpPr>
-          <p:cNvPr id="7" name="Text"/>
+          <p:cNvPr id="7" name="!!T Two fixes for what the budget leaves out"/>
           <p:cNvSpPr txBox="1"/>
           <p:nvPr/>
         </p:nvSpPr>
@@ -36221,7 +36253,7 @@
       </p:sp>
       <p:sp>
         <p:nvSpPr>
-          <p:cNvPr id="8" name="i"/>
+          <p:cNvPr id="8" name="!!i 4accf51d"/>
           <p:cNvSpPr/>
           <p:nvPr/>
         </p:nvSpPr>
@@ -36251,7 +36283,7 @@
       </p:sp>
       <p:sp>
         <p:nvSpPr>
-          <p:cNvPr id="9" name="Text"/>
+          <p:cNvPr id="9" name="!!T 1"/>
           <p:cNvSpPr txBox="1"/>
           <p:nvPr/>
         </p:nvSpPr>
@@ -36296,7 +36328,7 @@
       </p:sp>
       <p:sp>
         <p:nvSpPr>
-          <p:cNvPr id="10" name="Text"/>
+          <p:cNvPr id="10" name="!!T Review the medical plan at Adrian's 75"/>
           <p:cNvSpPr txBox="1"/>
           <p:nvPr/>
         </p:nvSpPr>
@@ -36341,7 +36373,7 @@
       </p:sp>
       <p:sp>
         <p:nvSpPr>
-          <p:cNvPr id="11" name="Text"/>
+          <p:cNvPr id="11" name="!!T Medical premiums a year, above the HK$65"/>
           <p:cNvSpPr txBox="1"/>
           <p:nvPr/>
         </p:nvSpPr>
@@ -36386,7 +36418,7 @@
       </p:sp>
       <p:pic>
         <p:nvPicPr>
-          <p:cNvPr id="12" name="Drawing" descr="image.png"/>
+          <p:cNvPr id="12" name="!!Drawing d15b4eef" descr="image.png"/>
           <p:cNvPicPr>
             <a:picLocks noChangeAspect="1"/>
           </p:cNvPicPr>
@@ -36416,7 +36448,7 @@
       </p:pic>
       <p:sp>
         <p:nvSpPr>
-          <p:cNvPr id="13" name="Rule"/>
+          <p:cNvPr id="13" name="!!Rule d5bedfbf"/>
           <p:cNvSpPr/>
           <p:nvPr/>
         </p:nvSpPr>
@@ -36446,7 +36478,7 @@
       </p:sp>
       <p:sp>
         <p:nvSpPr>
-          <p:cNvPr id="14" name="Text"/>
+          <p:cNvPr id="14" name="!!T Review at 75"/>
           <p:cNvSpPr txBox="1"/>
           <p:nvPr/>
         </p:nvSpPr>
@@ -36491,7 +36523,7 @@
       </p:sp>
       <p:cxnSp>
         <p:nvCxnSpPr>
-          <p:cNvPr id="15" name="Rule"/>
+          <p:cNvPr id="15" name="!!Rule 36e5641e"/>
           <p:cNvCxnSpPr/>
           <p:nvPr/>
         </p:nvCxnSpPr>
@@ -36527,7 +36559,7 @@
       </p:cxnSp>
       <p:sp>
         <p:nvSpPr>
-          <p:cNvPr id="16" name="Text"/>
+          <p:cNvPr id="16" name="!!T HK$375K"/>
           <p:cNvSpPr txBox="1"/>
           <p:nvPr/>
         </p:nvSpPr>
@@ -36572,7 +36604,7 @@
       </p:sp>
       <p:sp>
         <p:nvSpPr>
-          <p:cNvPr id="17" name="Text"/>
+          <p:cNvPr id="17" name="!!T saves about two-thirds"/>
           <p:cNvSpPr txBox="1"/>
           <p:nvPr/>
         </p:nvSpPr>
@@ -36639,7 +36671,7 @@
       </p:sp>
       <p:sp>
         <p:nvSpPr>
-          <p:cNvPr id="18" name="Text"/>
+          <p:cNvPr id="18" name="!!T Flexi for life"/>
           <p:cNvSpPr txBox="1"/>
           <p:nvPr/>
         </p:nvSpPr>
@@ -36706,7 +36738,7 @@
       </p:sp>
       <p:sp>
         <p:nvSpPr>
-          <p:cNvPr id="19" name="Text"/>
+          <p:cNvPr id="19" name="!!T Standard, after review"/>
           <p:cNvSpPr txBox="1"/>
           <p:nvPr/>
         </p:nvSpPr>
@@ -36773,7 +36805,7 @@
       </p:sp>
       <p:sp>
         <p:nvSpPr>
-          <p:cNvPr id="20" name="Rule"/>
+          <p:cNvPr id="20" name="!!Rule e8553401"/>
           <p:cNvSpPr/>
           <p:nvPr/>
         </p:nvSpPr>
@@ -36803,7 +36835,7 @@
       </p:sp>
       <p:sp>
         <p:nvSpPr>
-          <p:cNvPr id="21" name="Text"/>
+          <p:cNvPr id="21" name="!!T 2037"/>
           <p:cNvSpPr txBox="1"/>
           <p:nvPr/>
         </p:nvSpPr>
@@ -36848,7 +36880,7 @@
       </p:sp>
       <p:sp>
         <p:nvSpPr>
-          <p:cNvPr id="22" name="Text"/>
+          <p:cNvPr id="22" name="!!T 2047"/>
           <p:cNvSpPr txBox="1"/>
           <p:nvPr/>
         </p:nvSpPr>
@@ -36893,7 +36925,7 @@
       </p:sp>
       <p:sp>
         <p:nvSpPr>
-          <p:cNvPr id="23" name="Text"/>
+          <p:cNvPr id="23" name="!!T Adrian dies"/>
           <p:cNvSpPr txBox="1"/>
           <p:nvPr/>
         </p:nvSpPr>
@@ -36938,7 +36970,7 @@
       </p:sp>
       <p:sp>
         <p:nvSpPr>
-          <p:cNvPr id="24" name="Text"/>
+          <p:cNvPr id="24" name="!!T 2066"/>
           <p:cNvSpPr txBox="1"/>
           <p:nvPr/>
         </p:nvSpPr>
@@ -36983,7 +37015,7 @@
       </p:sp>
       <p:sp>
         <p:nvSpPr>
-          <p:cNvPr id="25" name="Text"/>
+          <p:cNvPr id="25" name="!!T The price: lower limits and fewer privat"/>
           <p:cNvSpPr txBox="1"/>
           <p:nvPr/>
         </p:nvSpPr>
@@ -37037,7 +37069,7 @@
       </p:sp>
       <p:sp>
         <p:nvSpPr>
-          <p:cNvPr id="26" name="Rule"/>
+          <p:cNvPr id="26" name="!!Rule eb012fc9"/>
           <p:cNvSpPr/>
           <p:nvPr/>
         </p:nvSpPr>
@@ -37067,7 +37099,7 @@
       </p:sp>
       <p:sp>
         <p:nvSpPr>
-          <p:cNvPr id="27" name="i"/>
+          <p:cNvPr id="27" name="!!i e4531eee"/>
           <p:cNvSpPr/>
           <p:nvPr/>
         </p:nvSpPr>
@@ -37097,7 +37129,7 @@
       </p:sp>
       <p:sp>
         <p:nvSpPr>
-          <p:cNvPr id="28" name="Text"/>
+          <p:cNvPr id="28" name="!!T 2"/>
           <p:cNvSpPr txBox="1"/>
           <p:nvPr/>
         </p:nvSpPr>
@@ -37142,7 +37174,7 @@
       </p:sp>
       <p:sp>
         <p:nvSpPr>
-          <p:cNvPr id="29" name="Text"/>
+          <p:cNvPr id="29" name="!!T From 2039, spending rules for the bad ye"/>
           <p:cNvSpPr txBox="1"/>
           <p:nvPr/>
         </p:nvSpPr>
@@ -37187,7 +37219,7 @@
       </p:sp>
       <p:sp>
         <p:nvSpPr>
-          <p:cNvPr id="30" name="span"/>
+          <p:cNvPr id="30" name="!!span 248105c7"/>
           <p:cNvSpPr/>
           <p:nvPr/>
         </p:nvSpPr>
@@ -37217,7 +37249,7 @@
       </p:sp>
       <p:pic>
         <p:nvPicPr>
-          <p:cNvPr id="31" name="Drawing" descr="image.png"/>
+          <p:cNvPr id="31" name="!!Drawing cbb9bc4c" descr="image.png"/>
           <p:cNvPicPr>
             <a:picLocks noChangeAspect="1"/>
           </p:cNvPicPr>
@@ -37247,7 +37279,7 @@
       </p:pic>
       <p:sp>
         <p:nvSpPr>
-          <p:cNvPr id="32" name="Text"/>
+          <p:cNvPr id="32" name="!!T No raise after a market fall"/>
           <p:cNvSpPr txBox="1"/>
           <p:nvPr/>
         </p:nvSpPr>
@@ -37314,7 +37346,7 @@
       </p:sp>
       <p:sp>
         <p:nvSpPr>
-          <p:cNvPr id="33" name="span"/>
+          <p:cNvPr id="33" name="!!span 9f365eb7"/>
           <p:cNvSpPr/>
           <p:nvPr/>
         </p:nvSpPr>
@@ -37344,7 +37376,7 @@
       </p:sp>
       <p:pic>
         <p:nvPicPr>
-          <p:cNvPr id="34" name="Drawing" descr="image.png"/>
+          <p:cNvPr id="34" name="!!Drawing d0dd7bd5" descr="image.png"/>
           <p:cNvPicPr>
             <a:picLocks noChangeAspect="1"/>
           </p:cNvPicPr>
@@ -37374,7 +37406,7 @@
       </p:pic>
       <p:sp>
         <p:nvSpPr>
-          <p:cNvPr id="35" name="Text"/>
+          <p:cNvPr id="35" name="!!T A 10% trim if drawing too fast"/>
           <p:cNvSpPr txBox="1"/>
           <p:nvPr/>
         </p:nvSpPr>
@@ -37441,7 +37473,7 @@
       </p:sp>
       <p:sp>
         <p:nvSpPr>
-          <p:cNvPr id="36" name="span"/>
+          <p:cNvPr id="36" name="!!span c26916ad"/>
           <p:cNvSpPr/>
           <p:nvPr/>
         </p:nvSpPr>
@@ -37471,7 +37503,7 @@
       </p:sp>
       <p:pic>
         <p:nvPicPr>
-          <p:cNvPr id="37" name="Drawing" descr="image.png"/>
+          <p:cNvPr id="37" name="!!Drawing b2f63dd1" descr="image.png"/>
           <p:cNvPicPr>
             <a:picLocks noChangeAspect="1"/>
           </p:cNvPicPr>
@@ -37501,7 +37533,7 @@
       </p:pic>
       <p:sp>
         <p:nvSpPr>
-          <p:cNvPr id="38" name="Text"/>
+          <p:cNvPr id="38" name="!!T Essentials are never cut"/>
           <p:cNvSpPr txBox="1"/>
           <p:nvPr/>
         </p:nvSpPr>
@@ -37568,7 +37600,7 @@
       </p:sp>
       <p:sp>
         <p:nvSpPr>
-          <p:cNvPr id="39" name="Text"/>
+          <p:cNvPr id="39" name="!!T The price: typical spending about HK$41K"/>
           <p:cNvSpPr txBox="1"/>
           <p:nvPr/>
         </p:nvSpPr>
@@ -37622,7 +37654,7 @@
       </p:sp>
       <p:sp>
         <p:nvSpPr>
-          <p:cNvPr id="40" name="Rule"/>
+          <p:cNvPr id="40" name="!!Rule 48d4bd77"/>
           <p:cNvSpPr/>
           <p:nvPr/>
         </p:nvSpPr>
@@ -37652,7 +37684,7 @@
       </p:sp>
       <p:sp>
         <p:nvSpPr>
-          <p:cNvPr id="41" name="Text"/>
+          <p:cNvPr id="41" name="!!T …so the future that ran out at 86 now re"/>
           <p:cNvSpPr txBox="1"/>
           <p:nvPr/>
         </p:nvSpPr>
@@ -37697,7 +37729,7 @@
       </p:sp>
       <p:pic>
         <p:nvPicPr>
-          <p:cNvPr id="42" name="Drawing" descr="image.png"/>
+          <p:cNvPr id="42" name="!!Drawing e269f31d" descr="image.png"/>
           <p:cNvPicPr>
             <a:picLocks noChangeAspect="1"/>
           </p:cNvPicPr>
@@ -37727,7 +37759,7 @@
       </p:pic>
       <p:sp>
         <p:nvSpPr>
-          <p:cNvPr id="43" name="Text"/>
+          <p:cNvPr id="43" name="!!T HK$8.9M"/>
           <p:cNvSpPr txBox="1"/>
           <p:nvPr/>
         </p:nvSpPr>
@@ -37772,7 +37804,7 @@
       </p:sp>
       <p:sp>
         <p:nvSpPr>
-          <p:cNvPr id="44" name="Text"/>
+          <p:cNvPr id="44" name="!!T left at 89"/>
           <p:cNvSpPr txBox="1"/>
           <p:nvPr/>
         </p:nvSpPr>
@@ -37817,7 +37849,7 @@
       </p:sp>
       <p:sp>
         <p:nvSpPr>
-          <p:cNvPr id="45" name="Rule"/>
+          <p:cNvPr id="45" name="!!Rule 519a1fb2"/>
           <p:cNvSpPr/>
           <p:nvPr/>
         </p:nvSpPr>
@@ -37847,7 +37879,7 @@
       </p:sp>
       <p:sp>
         <p:nvSpPr>
-          <p:cNvPr id="46" name="Text"/>
+          <p:cNvPr id="46" name="!!T Carmen 49"/>
           <p:cNvSpPr txBox="1"/>
           <p:nvPr/>
         </p:nvSpPr>
@@ -37892,7 +37924,7 @@
       </p:sp>
       <p:sp>
         <p:nvSpPr>
-          <p:cNvPr id="47" name="Text"/>
+          <p:cNvPr id="47" name="!!T 2026"/>
           <p:cNvSpPr txBox="1"/>
           <p:nvPr/>
         </p:nvSpPr>
@@ -37937,7 +37969,7 @@
       </p:sp>
       <p:sp>
         <p:nvSpPr>
-          <p:cNvPr id="48" name="Text"/>
+          <p:cNvPr id="48" name="!!T Adrian retires"/>
           <p:cNvSpPr txBox="1"/>
           <p:nvPr/>
         </p:nvSpPr>
@@ -37982,7 +38014,7 @@
       </p:sp>
       <p:sp>
         <p:nvSpPr>
-          <p:cNvPr id="49" name="Text"/>
+          <p:cNvPr id="49" name="!!T 2037 #2"/>
           <p:cNvSpPr txBox="1"/>
           <p:nvPr/>
         </p:nvSpPr>
@@ -38027,7 +38059,7 @@
       </p:sp>
       <p:sp>
         <p:nvSpPr>
-          <p:cNvPr id="50" name="Text"/>
+          <p:cNvPr id="50" name="!!T Carmen 69"/>
           <p:cNvSpPr txBox="1"/>
           <p:nvPr/>
         </p:nvSpPr>
@@ -38072,7 +38104,7 @@
       </p:sp>
       <p:sp>
         <p:nvSpPr>
-          <p:cNvPr id="51" name="Text"/>
+          <p:cNvPr id="51" name="!!T 2046"/>
           <p:cNvSpPr txBox="1"/>
           <p:nvPr/>
         </p:nvSpPr>
@@ -38117,7 +38149,7 @@
       </p:sp>
       <p:sp>
         <p:nvSpPr>
-          <p:cNvPr id="52" name="Text"/>
+          <p:cNvPr id="52" name="!!T Adrian dies #2"/>
           <p:cNvSpPr txBox="1"/>
           <p:nvPr/>
         </p:nvSpPr>
@@ -38162,7 +38194,7 @@
       </p:sp>
       <p:sp>
         <p:nvSpPr>
-          <p:cNvPr id="53" name="Text"/>
+          <p:cNvPr id="53" name="!!T 2056"/>
           <p:cNvSpPr txBox="1"/>
           <p:nvPr/>
         </p:nvSpPr>
@@ -38207,7 +38239,7 @@
       </p:sp>
       <p:sp>
         <p:nvSpPr>
-          <p:cNvPr id="54" name="Text"/>
+          <p:cNvPr id="54" name="!!T Carmen 89"/>
           <p:cNvSpPr txBox="1"/>
           <p:nvPr/>
         </p:nvSpPr>
@@ -38252,7 +38284,7 @@
       </p:sp>
       <p:sp>
         <p:nvSpPr>
-          <p:cNvPr id="55" name="Text"/>
+          <p:cNvPr id="55" name="!!T 2066 #2"/>
           <p:cNvSpPr txBox="1"/>
           <p:nvPr/>
         </p:nvSpPr>
@@ -38297,7 +38329,7 @@
       </p:sp>
       <p:sp>
         <p:nvSpPr>
-          <p:cNvPr id="56" name="Rule"/>
+          <p:cNvPr id="56" name="!!Rule 1f890f9e"/>
           <p:cNvSpPr/>
           <p:nvPr/>
         </p:nvSpPr>
@@ -38327,7 +38359,7 @@
       </p:sp>
       <p:sp>
         <p:nvSpPr>
-          <p:cNvPr id="57" name="Text"/>
+          <p:cNvPr id="57" name="!!T In 10,000 futures: 83% → 97% last to 89 "/>
           <p:cNvSpPr txBox="1"/>
           <p:nvPr/>
         </p:nvSpPr>
@@ -38408,7 +38440,7 @@
       </p:sp>
       <p:sp>
         <p:nvSpPr>
-          <p:cNvPr id="58" name="p"/>
+          <p:cNvPr id="58" name="!!p 442bdd76"/>
           <p:cNvSpPr/>
           <p:nvPr/>
         </p:nvSpPr>
@@ -38438,7 +38470,7 @@
       </p:sp>
       <p:sp>
         <p:nvSpPr>
-          <p:cNvPr id="59" name="Text"/>
+          <p:cNvPr id="59" name="!!T Will it last? In almost every future: th"/>
           <p:cNvSpPr txBox="1"/>
           <p:nvPr/>
         </p:nvSpPr>
@@ -38483,7 +38515,7 @@
       </p:sp>
       <p:sp>
         <p:nvSpPr>
-          <p:cNvPr id="60" name="Text"/>
+          <p:cNvPr id="60" name="!!T Slide 3's future, same markets, today's "/>
           <p:cNvSpPr txBox="1"/>
           <p:nvPr/>
         </p:nvSpPr>
@@ -38550,7 +38582,7 @@
       </p:sp>
       <p:sp>
         <p:nvSpPr>
-          <p:cNvPr id="61" name="Text"/>
+          <p:cNvPr id="61" name="!!T The problem"/>
           <p:cNvSpPr txBox="1"/>
           <p:nvPr/>
         </p:nvSpPr>
@@ -38595,7 +38627,7 @@
       </p:sp>
       <p:sp>
         <p:nvSpPr>
-          <p:cNvPr id="62" name="Text"/>
+          <p:cNvPr id="62" name="!!T The answer"/>
           <p:cNvSpPr txBox="1"/>
           <p:nvPr/>
         </p:nvSpPr>
@@ -38640,7 +38672,7 @@
       </p:sp>
       <p:sp>
         <p:nvSpPr>
-          <p:cNvPr id="63" name="Text"/>
+          <p:cNvPr id="63" name="!!T The five calls"/>
           <p:cNvSpPr txBox="1"/>
           <p:nvPr/>
         </p:nvSpPr>
@@ -38685,7 +38717,7 @@
       </p:sp>
       <p:sp>
         <p:nvSpPr>
-          <p:cNvPr id="64" name="Text"/>
+          <p:cNvPr id="64" name="!!T Will it hold"/>
           <p:cNvSpPr txBox="1"/>
           <p:nvPr/>
         </p:nvSpPr>
@@ -38730,7 +38762,7 @@
       </p:sp>
       <p:sp>
         <p:nvSpPr>
-          <p:cNvPr id="65" name="Text"/>
+          <p:cNvPr id="65" name="!!T What next"/>
           <p:cNvSpPr txBox="1"/>
           <p:nvPr/>
         </p:nvSpPr>
@@ -38775,7 +38807,7 @@
       </p:sp>
       <p:sp>
         <p:nvSpPr>
-          <p:cNvPr id="66" name="Text"/>
+          <p:cNvPr id="66" name="!!T Us"/>
           <p:cNvSpPr txBox="1"/>
           <p:nvPr/>
         </p:nvSpPr>
@@ -38820,7 +38852,7 @@
       </p:sp>
       <p:sp>
         <p:nvSpPr>
-          <p:cNvPr id="67" name="Text"/>
+          <p:cNvPr id="67" name="!!T 7 / 15"/>
           <p:cNvSpPr txBox="1"/>
           <p:nvPr/>
         </p:nvSpPr>
@@ -38865,7 +38897,7 @@
       </p:sp>
       <p:sp>
         <p:nvSpPr>
-          <p:cNvPr id="68" name="Text"/>
+          <p:cNvPr id="68" name="!!T Savings with the four decisions"/>
           <p:cNvSpPr txBox="1"/>
           <p:nvPr/>
         </p:nvSpPr>
@@ -38910,7 +38942,7 @@
       </p:sp>
       <p:sp>
         <p:nvSpPr>
-          <p:cNvPr id="69" name="Text"/>
+          <p:cNvPr id="69" name="!!T their own way"/>
           <p:cNvSpPr txBox="1"/>
           <p:nvPr/>
         </p:nvSpPr>
@@ -38955,7 +38987,7 @@
       </p:sp>
       <p:sp>
         <p:nvSpPr>
-          <p:cNvPr id="70" name="Text"/>
+          <p:cNvPr id="70" name="!!T a reverse mortgage pays HK$230K a year f"/>
           <p:cNvSpPr txBox="1"/>
           <p:nvPr/>
         </p:nvSpPr>
@@ -39002,7 +39034,7 @@
       </p:sp>
       <p:sp>
         <p:nvSpPr>
-          <p:cNvPr id="71" name="Text"/>
+          <p:cNvPr id="71" name="!!T The home: still theirs"/>
           <p:cNvSpPr txBox="1"/>
           <p:nvPr/>
         </p:nvSpPr>
@@ -39047,7 +39079,7 @@
       </p:sp>
       <p:sp>
         <p:nvSpPr>
-          <p:cNvPr id="72" name="Rule"/>
+          <p:cNvPr id="72" name="!!Rule f438ee99"/>
           <p:cNvSpPr/>
           <p:nvPr/>
         </p:nvSpPr>
@@ -39077,7 +39109,7 @@
       </p:sp>
       <p:sp>
         <p:nvSpPr>
-          <p:cNvPr id="73" name="Rule"/>
+          <p:cNvPr id="73" name="!!Rule 89edf20e"/>
           <p:cNvSpPr/>
           <p:nvPr/>
         </p:nvSpPr>
@@ -39107,7 +39139,7 @@
       </p:sp>
       <p:sp>
         <p:nvSpPr>
-          <p:cNvPr id="74" name="Text"/>
+          <p:cNvPr id="74" name="!!T HK$10M"/>
           <p:cNvSpPr txBox="1"/>
           <p:nvPr/>
         </p:nvSpPr>
@@ -39152,7 +39184,7 @@
       </p:sp>
       <p:sp>
         <p:nvSpPr>
-          <p:cNvPr id="75" name="Rule"/>
+          <p:cNvPr id="75" name="!!Rule d540d1aa"/>
           <p:cNvSpPr/>
           <p:nvPr/>
         </p:nvSpPr>
@@ -39182,7 +39214,7 @@
       </p:sp>
       <p:sp>
         <p:nvSpPr>
-          <p:cNvPr id="76" name="Text"/>
+          <p:cNvPr id="76" name="!!T HK$20M"/>
           <p:cNvSpPr txBox="1"/>
           <p:nvPr/>
         </p:nvSpPr>
@@ -39227,7 +39259,7 @@
       </p:sp>
       <p:sp>
         <p:nvSpPr>
-          <p:cNvPr id="77" name="Rule"/>
+          <p:cNvPr id="77" name="!!Rule 1b780f79"/>
           <p:cNvSpPr/>
           <p:nvPr/>
         </p:nvSpPr>
@@ -39257,7 +39289,7 @@
       </p:sp>
       <p:sp>
         <p:nvSpPr>
-          <p:cNvPr id="78" name="Text"/>
+          <p:cNvPr id="78" name="!!T HK$30M"/>
           <p:cNvSpPr txBox="1"/>
           <p:nvPr/>
         </p:nvSpPr>
@@ -39302,7 +39334,7 @@
       </p:sp>
       <p:sp>
         <p:nvSpPr>
-          <p:cNvPr id="79" name="Rule"/>
+          <p:cNvPr id="79" name="!!Rule 0e3790a1"/>
           <p:cNvSpPr/>
           <p:nvPr/>
         </p:nvSpPr>
@@ -39332,7 +39364,7 @@
       </p:sp>
       <p:sp>
         <p:nvSpPr>
-          <p:cNvPr id="80" name="Text"/>
+          <p:cNvPr id="80" name="!!T Added by Call 3"/>
           <p:cNvSpPr txBox="1"/>
           <p:nvPr/>
         </p:nvSpPr>
@@ -39377,7 +39409,7 @@
       </p:sp>
       <p:sp>
         <p:nvSpPr>
-          <p:cNvPr id="81" name="ps-el"/>
+          <p:cNvPr id="81" name="!!ps-el b6b14bbc"/>
           <p:cNvSpPr/>
           <p:nvPr/>
         </p:nvSpPr>
@@ -39419,6 +39451,18 @@
   <p:clrMapOvr>
     <a:masterClrMapping/>
   </p:clrMapOvr>
+  <mc:AlternateContent xmlns:mc="http://schemas.openxmlformats.org/markup-compatibility/2006" xmlns:p159="http://schemas.microsoft.com/office/powerpoint/2015/09/main">
+    <mc:Choice Requires="p159">
+      <p:transition xmlns:p14="http://schemas.microsoft.com/office/powerpoint/2010/main" spd="slow" p14:dur="900">
+        <p159:morph option="byObject"/>
+      </p:transition>
+    </mc:Choice>
+    <mc:Fallback xmlns="">
+      <p:transition spd="fast">
+        <p:fade/>
+      </p:transition>
+    </mc:Fallback>
+  </mc:AlternateContent>
 </p:sld>
 </file>
 
@@ -39441,7 +39485,7 @@
       </p:grpSpPr>
       <p:sp>
         <p:nvSpPr>
-          <p:cNvPr id="2" name="Rule"/>
+          <p:cNvPr id="2" name="!!Rule 6ff153ce"/>
           <p:cNvSpPr/>
           <p:nvPr/>
         </p:nvSpPr>
@@ -39471,7 +39515,7 @@
       </p:sp>
       <p:pic>
         <p:nvPicPr>
-          <p:cNvPr id="3" name="Drawing" descr="image.png"/>
+          <p:cNvPr id="3" name="!!house" descr="image.png"/>
           <p:cNvPicPr>
             <a:picLocks noChangeAspect="1"/>
           </p:cNvPicPr>
@@ -39501,7 +39545,7 @@
       </p:pic>
       <p:sp>
         <p:nvSpPr>
-          <p:cNvPr id="4" name="Text"/>
+          <p:cNvPr id="4" name="!!T Call 4: Each person"/>
           <p:cNvSpPr txBox="1"/>
           <p:nvPr/>
         </p:nvSpPr>
@@ -39546,7 +39590,7 @@
       </p:sp>
       <p:sp>
         <p:nvSpPr>
-          <p:cNvPr id="5" name="Text"/>
+          <p:cNvPr id="5" name="!!T One family policy, a plan for each perso"/>
           <p:cNvSpPr txBox="1"/>
           <p:nvPr/>
         </p:nvSpPr>
@@ -39591,7 +39635,7 @@
       </p:sp>
       <p:sp>
         <p:nvSpPr>
-          <p:cNvPr id="6" name="Text"/>
+          <p:cNvPr id="6" name="!!T one pot that fits nobody"/>
           <p:cNvSpPr txBox="1"/>
           <p:nvPr/>
         </p:nvSpPr>
@@ -39658,7 +39702,7 @@
       </p:sp>
       <p:sp>
         <p:nvSpPr>
-          <p:cNvPr id="7" name="Text"/>
+          <p:cNvPr id="7" name="!!T Today"/>
           <p:cNvSpPr txBox="1"/>
           <p:nvPr/>
         </p:nvSpPr>
@@ -39703,7 +39747,7 @@
       </p:sp>
       <p:sp>
         <p:nvSpPr>
-          <p:cNvPr id="8" name="div"/>
+          <p:cNvPr id="8" name="!!div d70dd71c"/>
           <p:cNvSpPr/>
           <p:nvPr/>
         </p:nvSpPr>
@@ -39733,7 +39777,7 @@
       </p:sp>
       <p:sp>
         <p:nvSpPr>
-          <p:cNvPr id="9" name="Text"/>
+          <p:cNvPr id="9" name="!!T HK$2.5M"/>
           <p:cNvSpPr txBox="1"/>
           <p:nvPr/>
         </p:nvSpPr>
@@ -39778,7 +39822,7 @@
       </p:sp>
       <p:sp>
         <p:nvSpPr>
-          <p:cNvPr id="10" name="Text"/>
+          <p:cNvPr id="10" name="!!T Cash and deposits"/>
           <p:cNvSpPr txBox="1"/>
           <p:nvPr/>
         </p:nvSpPr>
@@ -39823,7 +39867,7 @@
       </p:sp>
       <p:sp>
         <p:nvSpPr>
-          <p:cNvPr id="11" name="Text"/>
+          <p:cNvPr id="11" name="!!T 30 months of spending, idle"/>
           <p:cNvSpPr txBox="1"/>
           <p:nvPr/>
         </p:nvSpPr>
@@ -39868,7 +39912,7 @@
       </p:sp>
       <p:sp>
         <p:nvSpPr>
-          <p:cNvPr id="12" name="div"/>
+          <p:cNvPr id="12" name="!!div a409e7dc"/>
           <p:cNvSpPr/>
           <p:nvPr/>
         </p:nvSpPr>
@@ -39898,7 +39942,7 @@
       </p:sp>
       <p:sp>
         <p:nvSpPr>
-          <p:cNvPr id="13" name="Text"/>
+          <p:cNvPr id="13" name="!!T HK$1.35M"/>
           <p:cNvSpPr txBox="1"/>
           <p:nvPr/>
         </p:nvSpPr>
@@ -39943,7 +39987,7 @@
       </p:sp>
       <p:sp>
         <p:nvSpPr>
-          <p:cNvPr id="14" name="Text"/>
+          <p:cNvPr id="14" name="!!T Bond funds"/>
           <p:cNvSpPr txBox="1"/>
           <p:nvPr/>
         </p:nvSpPr>
@@ -39988,7 +40032,7 @@
       </p:sp>
       <p:sp>
         <p:nvSpPr>
-          <p:cNvPr id="15" name="div"/>
+          <p:cNvPr id="15" name="!!div 6e93a39f"/>
           <p:cNvSpPr/>
           <p:nvPr/>
         </p:nvSpPr>
@@ -40018,7 +40062,7 @@
       </p:sp>
       <p:sp>
         <p:nvSpPr>
-          <p:cNvPr id="16" name="Text"/>
+          <p:cNvPr id="16" name="!!T HK$3.85M"/>
           <p:cNvSpPr txBox="1"/>
           <p:nvPr/>
         </p:nvSpPr>
@@ -40063,7 +40107,7 @@
       </p:sp>
       <p:sp>
         <p:nvSpPr>
-          <p:cNvPr id="17" name="Text"/>
+          <p:cNvPr id="17" name="!!T Equity funds"/>
           <p:cNvSpPr txBox="1"/>
           <p:nvPr/>
         </p:nvSpPr>
@@ -40108,7 +40152,7 @@
       </p:sp>
       <p:sp>
         <p:nvSpPr>
-          <p:cNvPr id="18" name="Text"/>
+          <p:cNvPr id="18" name="!!T about 1.5% a year in fees; more risk tha"/>
           <p:cNvSpPr txBox="1"/>
           <p:nvPr/>
         </p:nvSpPr>
@@ -40153,7 +40197,7 @@
       </p:sp>
       <p:sp>
         <p:nvSpPr>
-          <p:cNvPr id="19" name="ps-el"/>
+          <p:cNvPr id="19" name="!!ps-el 69bdd481"/>
           <p:cNvSpPr/>
           <p:nvPr/>
         </p:nvSpPr>
@@ -40183,7 +40227,7 @@
       </p:sp>
       <p:sp>
         <p:nvSpPr>
-          <p:cNvPr id="20" name="Text"/>
+          <p:cNvPr id="20" name="!!T The same HK$7.7M, with a job for each pa"/>
           <p:cNvSpPr txBox="1"/>
           <p:nvPr/>
         </p:nvSpPr>
@@ -40228,7 +40272,7 @@
       </p:sp>
       <p:sp>
         <p:nvSpPr>
-          <p:cNvPr id="21" name="Text"/>
+          <p:cNvPr id="21" name="!!T a job and an owner for each"/>
           <p:cNvSpPr txBox="1"/>
           <p:nvPr/>
         </p:nvSpPr>
@@ -40295,7 +40339,7 @@
       </p:sp>
       <p:sp>
         <p:nvSpPr>
-          <p:cNvPr id="22" name="Text"/>
+          <p:cNvPr id="22" name="!!T With the plan"/>
           <p:cNvSpPr txBox="1"/>
           <p:nvPr/>
         </p:nvSpPr>
@@ -40340,7 +40384,7 @@
       </p:sp>
       <p:sp>
         <p:nvSpPr>
-          <p:cNvPr id="23" name="div"/>
+          <p:cNvPr id="23" name="!!div 1609de8e"/>
           <p:cNvSpPr/>
           <p:nvPr/>
         </p:nvSpPr>
@@ -40377,7 +40421,7 @@
       </p:sp>
       <p:sp>
         <p:nvSpPr>
-          <p:cNvPr id="24" name="Text"/>
+          <p:cNvPr id="24" name="!!T HK$1.0M"/>
           <p:cNvSpPr txBox="1"/>
           <p:nvPr/>
         </p:nvSpPr>
@@ -40422,7 +40466,7 @@
       </p:sp>
       <p:sp>
         <p:nvSpPr>
-          <p:cNvPr id="25" name="Text"/>
+          <p:cNvPr id="25" name="!!T Reserve"/>
           <p:cNvSpPr txBox="1"/>
           <p:nvPr/>
         </p:nvSpPr>
@@ -40467,7 +40511,7 @@
       </p:sp>
       <p:sp>
         <p:nvSpPr>
-          <p:cNvPr id="26" name="Text"/>
+          <p:cNvPr id="26" name="!!T 12 months"/>
           <p:cNvSpPr txBox="1"/>
           <p:nvPr/>
         </p:nvSpPr>
@@ -40514,7 +40558,7 @@
       </p:sp>
       <p:sp>
         <p:nvSpPr>
-          <p:cNvPr id="27" name="div"/>
+          <p:cNvPr id="27" name="!!div 3cbab694"/>
           <p:cNvSpPr/>
           <p:nvPr/>
         </p:nvSpPr>
@@ -40559,7 +40603,7 @@
       </p:sp>
       <p:sp>
         <p:nvSpPr>
-          <p:cNvPr id="28" name="span"/>
+          <p:cNvPr id="28" name="!!span 553aebb3"/>
           <p:cNvSpPr/>
           <p:nvPr/>
         </p:nvSpPr>
@@ -40602,7 +40646,7 @@
       </p:sp>
       <p:pic>
         <p:nvPicPr>
-          <p:cNvPr id="29" name="Picture" descr="image.jpg"/>
+          <p:cNvPr id="29" name="!!Picture c19efb08" descr="image.jpg"/>
           <p:cNvPicPr>
             <a:picLocks noChangeAspect="1"/>
           </p:cNvPicPr>
@@ -40628,7 +40672,7 @@
       </p:pic>
       <p:sp>
         <p:nvSpPr>
-          <p:cNvPr id="30" name="Text"/>
+          <p:cNvPr id="30" name="!!T HK$2.57M"/>
           <p:cNvSpPr txBox="1"/>
           <p:nvPr/>
         </p:nvSpPr>
@@ -40673,7 +40717,7 @@
       </p:sp>
       <p:sp>
         <p:nvSpPr>
-          <p:cNvPr id="31" name="Text"/>
+          <p:cNvPr id="31" name="!!T Chloe's degree"/>
           <p:cNvSpPr txBox="1"/>
           <p:nvPr/>
         </p:nvSpPr>
@@ -40718,7 +40762,7 @@
       </p:sp>
       <p:sp>
         <p:nvSpPr>
-          <p:cNvPr id="32" name="Text"/>
+          <p:cNvPr id="32" name="!!T funded today, wherever she goes"/>
           <p:cNvSpPr txBox="1"/>
           <p:nvPr/>
         </p:nvSpPr>
@@ -40765,7 +40809,7 @@
       </p:sp>
       <p:sp>
         <p:nvSpPr>
-          <p:cNvPr id="33" name="div"/>
+          <p:cNvPr id="33" name="!!div 75edbf39"/>
           <p:cNvSpPr/>
           <p:nvPr/>
         </p:nvSpPr>
@@ -40810,7 +40854,7 @@
       </p:sp>
       <p:sp>
         <p:nvSpPr>
-          <p:cNvPr id="34" name="span"/>
+          <p:cNvPr id="34" name="!!span 92b2adcd"/>
           <p:cNvSpPr/>
           <p:nvPr/>
         </p:nvSpPr>
@@ -40853,7 +40897,7 @@
       </p:sp>
       <p:pic>
         <p:nvPicPr>
-          <p:cNvPr id="35" name="Picture" descr="image.jpg"/>
+          <p:cNvPr id="35" name="!!Picture 877e281b" descr="image.jpg"/>
           <p:cNvPicPr>
             <a:picLocks noChangeAspect="1"/>
           </p:cNvPicPr>
@@ -40879,7 +40923,7 @@
       </p:pic>
       <p:sp>
         <p:nvSpPr>
-          <p:cNvPr id="36" name="Text"/>
+          <p:cNvPr id="36" name="!!T HK$2.07M"/>
           <p:cNvSpPr txBox="1"/>
           <p:nvPr/>
         </p:nvSpPr>
@@ -40924,7 +40968,7 @@
       </p:sp>
       <p:sp>
         <p:nvSpPr>
-          <p:cNvPr id="37" name="Text"/>
+          <p:cNvPr id="37" name="!!T Adrian's portfolio"/>
           <p:cNvSpPr txBox="1"/>
           <p:nvPr/>
         </p:nvSpPr>
@@ -40969,7 +41013,7 @@
       </p:sp>
       <p:sp>
         <p:nvSpPr>
-          <p:cNvPr id="38" name="Text"/>
+          <p:cNvPr id="38" name="!!T 40% shares, 55% bonds; Treasuries from 2"/>
           <p:cNvSpPr txBox="1"/>
           <p:nvPr/>
         </p:nvSpPr>
@@ -41040,7 +41084,7 @@
       </p:sp>
       <p:sp>
         <p:nvSpPr>
-          <p:cNvPr id="39" name="div"/>
+          <p:cNvPr id="39" name="!!div 94fcd239"/>
           <p:cNvSpPr/>
           <p:nvPr/>
         </p:nvSpPr>
@@ -41085,7 +41129,7 @@
       </p:sp>
       <p:sp>
         <p:nvSpPr>
-          <p:cNvPr id="40" name="span"/>
+          <p:cNvPr id="40" name="!!span 8fc03cfa"/>
           <p:cNvSpPr/>
           <p:nvPr/>
         </p:nvSpPr>
@@ -41128,7 +41172,7 @@
       </p:sp>
       <p:pic>
         <p:nvPicPr>
-          <p:cNvPr id="41" name="Picture" descr="image.jpg"/>
+          <p:cNvPr id="41" name="!!Picture a6c5f4f8" descr="image.jpg"/>
           <p:cNvPicPr>
             <a:picLocks noChangeAspect="1"/>
           </p:cNvPicPr>
@@ -41154,7 +41198,7 @@
       </p:pic>
       <p:sp>
         <p:nvSpPr>
-          <p:cNvPr id="42" name="Text"/>
+          <p:cNvPr id="42" name="!!T HK$2.07M #2"/>
           <p:cNvSpPr txBox="1"/>
           <p:nvPr/>
         </p:nvSpPr>
@@ -41199,7 +41243,7 @@
       </p:sp>
       <p:sp>
         <p:nvSpPr>
-          <p:cNvPr id="43" name="Text"/>
+          <p:cNvPr id="43" name="!!T Carmen's portfolio"/>
           <p:cNvSpPr txBox="1"/>
           <p:nvPr/>
         </p:nvSpPr>
@@ -41244,7 +41288,7 @@
       </p:sp>
       <p:sp>
         <p:nvSpPr>
-          <p:cNvPr id="44" name="Text"/>
+          <p:cNvPr id="44" name="!!T 60% shares, 35% bonds; led by ESG funds"/>
           <p:cNvSpPr txBox="1"/>
           <p:nvPr/>
         </p:nvSpPr>
@@ -41315,7 +41359,7 @@
       </p:sp>
       <p:sp>
         <p:nvSpPr>
-          <p:cNvPr id="45" name="div"/>
+          <p:cNvPr id="45" name="!!div 1790d185"/>
           <p:cNvSpPr/>
           <p:nvPr/>
         </p:nvSpPr>
@@ -41346,7 +41390,7 @@
       </p:sp>
       <p:sp>
         <p:nvSpPr>
-          <p:cNvPr id="46" name="span"/>
+          <p:cNvPr id="46" name="!!span 404f1cc1"/>
           <p:cNvSpPr/>
           <p:nvPr/>
         </p:nvSpPr>
@@ -41383,7 +41427,7 @@
       </p:sp>
       <p:pic>
         <p:nvPicPr>
-          <p:cNvPr id="47" name="Picture" descr="image.jpg"/>
+          <p:cNvPr id="47" name="!!Picture c1787d32" descr="image.jpg"/>
           <p:cNvPicPr>
             <a:picLocks noChangeAspect="1"/>
           </p:cNvPicPr>
@@ -41407,7 +41451,7 @@
       </p:pic>
       <p:sp>
         <p:nvSpPr>
-          <p:cNvPr id="48" name="Text"/>
+          <p:cNvPr id="48" name="!!T Ryan's own plan: he saves 30% of his pay"/>
           <p:cNvSpPr txBox="1"/>
           <p:nvPr/>
         </p:nvSpPr>
@@ -41483,7 +41527,7 @@
       </p:sp>
       <p:sp>
         <p:nvSpPr>
-          <p:cNvPr id="49" name="div"/>
+          <p:cNvPr id="49" name="!!div bbe2cafb"/>
           <p:cNvSpPr/>
           <p:nvPr/>
         </p:nvSpPr>
@@ -41514,7 +41558,7 @@
       </p:sp>
       <p:sp>
         <p:nvSpPr>
-          <p:cNvPr id="50" name="Text"/>
+          <p:cNvPr id="50" name="!!T HK$45K"/>
           <p:cNvSpPr txBox="1"/>
           <p:nvPr/>
         </p:nvSpPr>
@@ -41559,7 +41603,7 @@
       </p:sp>
       <p:sp>
         <p:nvSpPr>
-          <p:cNvPr id="51" name="Text"/>
+          <p:cNvPr id="51" name="!!T a year less in fees: broad index funds i"/>
           <p:cNvSpPr txBox="1"/>
           <p:nvPr/>
         </p:nvSpPr>
@@ -41635,7 +41679,7 @@
       </p:sp>
       <p:sp>
         <p:nvSpPr>
-          <p:cNvPr id="52" name="Text"/>
+          <p:cNvPr id="52" name="!!T The price: Chloe's HK$2.57M stays in dep"/>
           <p:cNvSpPr txBox="1"/>
           <p:nvPr/>
         </p:nvSpPr>
@@ -41689,7 +41733,7 @@
       </p:sp>
       <p:sp>
         <p:nvSpPr>
-          <p:cNvPr id="53" name="p"/>
+          <p:cNvPr id="53" name="!!p 442bdd76"/>
           <p:cNvSpPr/>
           <p:nvPr/>
         </p:nvSpPr>
@@ -41719,7 +41763,7 @@
       </p:sp>
       <p:sp>
         <p:nvSpPr>
-          <p:cNvPr id="54" name="Text"/>
+          <p:cNvPr id="54" name="!!T Chloe's degree is funded today, and each"/>
           <p:cNvSpPr txBox="1"/>
           <p:nvPr/>
         </p:nvSpPr>
@@ -41764,7 +41808,7 @@
       </p:sp>
       <p:sp>
         <p:nvSpPr>
-          <p:cNvPr id="55" name="Text"/>
+          <p:cNvPr id="55" name="!!T Today: the case's statement. The plan: w"/>
           <p:cNvSpPr txBox="1"/>
           <p:nvPr/>
         </p:nvSpPr>
@@ -41831,7 +41875,7 @@
       </p:sp>
       <p:sp>
         <p:nvSpPr>
-          <p:cNvPr id="56" name="Text"/>
+          <p:cNvPr id="56" name="!!T The problem"/>
           <p:cNvSpPr txBox="1"/>
           <p:nvPr/>
         </p:nvSpPr>
@@ -41876,7 +41920,7 @@
       </p:sp>
       <p:sp>
         <p:nvSpPr>
-          <p:cNvPr id="57" name="Text"/>
+          <p:cNvPr id="57" name="!!T The answer"/>
           <p:cNvSpPr txBox="1"/>
           <p:nvPr/>
         </p:nvSpPr>
@@ -41921,7 +41965,7 @@
       </p:sp>
       <p:sp>
         <p:nvSpPr>
-          <p:cNvPr id="58" name="Text"/>
+          <p:cNvPr id="58" name="!!T The five calls"/>
           <p:cNvSpPr txBox="1"/>
           <p:nvPr/>
         </p:nvSpPr>
@@ -41966,7 +42010,7 @@
       </p:sp>
       <p:sp>
         <p:nvSpPr>
-          <p:cNvPr id="59" name="Text"/>
+          <p:cNvPr id="59" name="!!T Will it hold"/>
           <p:cNvSpPr txBox="1"/>
           <p:nvPr/>
         </p:nvSpPr>
@@ -42011,7 +42055,7 @@
       </p:sp>
       <p:sp>
         <p:nvSpPr>
-          <p:cNvPr id="60" name="Text"/>
+          <p:cNvPr id="60" name="!!T What next"/>
           <p:cNvSpPr txBox="1"/>
           <p:nvPr/>
         </p:nvSpPr>
@@ -42056,7 +42100,7 @@
       </p:sp>
       <p:sp>
         <p:nvSpPr>
-          <p:cNvPr id="61" name="Text"/>
+          <p:cNvPr id="61" name="!!T Us"/>
           <p:cNvSpPr txBox="1"/>
           <p:nvPr/>
         </p:nvSpPr>
@@ -42101,7 +42145,7 @@
       </p:sp>
       <p:sp>
         <p:nvSpPr>
-          <p:cNvPr id="62" name="Text"/>
+          <p:cNvPr id="62" name="!!T 8 / 15"/>
           <p:cNvSpPr txBox="1"/>
           <p:nvPr/>
         </p:nvSpPr>
@@ -42149,6 +42193,18 @@
   <p:clrMapOvr>
     <a:masterClrMapping/>
   </p:clrMapOvr>
+  <mc:AlternateContent xmlns:mc="http://schemas.openxmlformats.org/markup-compatibility/2006" xmlns:p159="http://schemas.microsoft.com/office/powerpoint/2015/09/main">
+    <mc:Choice Requires="p159">
+      <p:transition xmlns:p14="http://schemas.microsoft.com/office/powerpoint/2010/main" spd="slow" p14:dur="900">
+        <p159:morph option="byObject"/>
+      </p:transition>
+    </mc:Choice>
+    <mc:Fallback xmlns="">
+      <p:transition spd="fast">
+        <p:fade/>
+      </p:transition>
+    </mc:Fallback>
+  </mc:AlternateContent>
 </p:sld>
 </file>
 
@@ -42171,7 +42227,7 @@
       </p:grpSpPr>
       <p:sp>
         <p:nvSpPr>
-          <p:cNvPr id="2" name="Rule"/>
+          <p:cNvPr id="2" name="!!Rule 2286b0a1"/>
           <p:cNvSpPr/>
           <p:nvPr/>
         </p:nvSpPr>
@@ -42201,7 +42257,7 @@
       </p:sp>
       <p:pic>
         <p:nvPicPr>
-          <p:cNvPr id="3" name="Drawing" descr="image.png"/>
+          <p:cNvPr id="3" name="!!house" descr="image.png"/>
           <p:cNvPicPr>
             <a:picLocks noChangeAspect="1"/>
           </p:cNvPicPr>
@@ -42231,7 +42287,7 @@
       </p:pic>
       <p:sp>
         <p:nvSpPr>
-          <p:cNvPr id="4" name="Text"/>
+          <p:cNvPr id="4" name="!!T Call 5: Values and innovation"/>
           <p:cNvSpPr txBox="1"/>
           <p:nvPr/>
         </p:nvSpPr>
@@ -42276,7 +42332,7 @@
       </p:sp>
       <p:sp>
         <p:nvSpPr>
-          <p:cNvPr id="5" name="Text"/>
+          <p:cNvPr id="5" name="!!T Values and innovation, with guardrails: "/>
           <p:cNvSpPr txBox="1"/>
           <p:nvPr/>
         </p:nvSpPr>
@@ -42343,7 +42399,7 @@
       </p:sp>
       <p:sp>
         <p:nvSpPr>
-          <p:cNvPr id="6" name="Rule"/>
+          <p:cNvPr id="6" name="!!Rule 173d024c"/>
           <p:cNvSpPr/>
           <p:nvPr/>
         </p:nvSpPr>
@@ -42373,7 +42429,7 @@
       </p:sp>
       <p:sp>
         <p:nvSpPr>
-          <p:cNvPr id="7" name="Text"/>
+          <p:cNvPr id="7" name="!!T Carmen's values: ESG from 11% to 25%…"/>
           <p:cNvSpPr txBox="1"/>
           <p:nvPr/>
         </p:nvSpPr>
@@ -42418,7 +42474,7 @@
       </p:sp>
       <p:sp>
         <p:nvSpPr>
-          <p:cNvPr id="8" name="div"/>
+          <p:cNvPr id="8" name="!!div 99ab30da"/>
           <p:cNvSpPr/>
           <p:nvPr/>
         </p:nvSpPr>
@@ -42448,7 +42504,7 @@
       </p:sp>
       <p:cxnSp>
         <p:nvCxnSpPr>
-          <p:cNvPr id="9" name="Rule"/>
+          <p:cNvPr id="9" name="!!Rule 0be4d14a"/>
           <p:cNvCxnSpPr/>
           <p:nvPr/>
         </p:nvCxnSpPr>
@@ -42484,7 +42540,7 @@
       </p:cxnSp>
       <p:cxnSp>
         <p:nvCxnSpPr>
-          <p:cNvPr id="10" name="Rule"/>
+          <p:cNvPr id="10" name="!!Rule 38eb5f99"/>
           <p:cNvCxnSpPr/>
           <p:nvPr/>
         </p:nvCxnSpPr>
@@ -42520,7 +42576,7 @@
       </p:cxnSp>
       <p:sp>
         <p:nvSpPr>
-          <p:cNvPr id="11" name="Text"/>
+          <p:cNvPr id="11" name="!!T their goal, 20–25% (case)"/>
           <p:cNvSpPr txBox="1"/>
           <p:nvPr/>
         </p:nvSpPr>
@@ -42574,7 +42630,7 @@
       </p:sp>
       <p:sp>
         <p:nvSpPr>
-          <p:cNvPr id="12" name="i"/>
+          <p:cNvPr id="12" name="!!i cd32b6e5"/>
           <p:cNvSpPr/>
           <p:nvPr/>
         </p:nvSpPr>
@@ -42612,7 +42668,7 @@
       </p:sp>
       <p:sp>
         <p:nvSpPr>
-          <p:cNvPr id="13" name="Text"/>
+          <p:cNvPr id="13" name="!!T World ESG index"/>
           <p:cNvSpPr txBox="1"/>
           <p:nvPr/>
         </p:nvSpPr>
@@ -42657,7 +42713,7 @@
       </p:sp>
       <p:sp>
         <p:nvSpPr>
-          <p:cNvPr id="14" name="Text"/>
+          <p:cNvPr id="14" name="!!T HK$1.49M"/>
           <p:cNvSpPr txBox="1"/>
           <p:nvPr/>
         </p:nvSpPr>
@@ -42702,7 +42758,7 @@
       </p:sp>
       <p:sp>
         <p:nvSpPr>
-          <p:cNvPr id="15" name="Text"/>
+          <p:cNvPr id="15" name="!!T the global shares core"/>
           <p:cNvSpPr txBox="1"/>
           <p:nvPr/>
         </p:nvSpPr>
@@ -42747,7 +42803,7 @@
       </p:sp>
       <p:sp>
         <p:nvSpPr>
-          <p:cNvPr id="16" name="i"/>
+          <p:cNvPr id="16" name="!!i d02be6ea"/>
           <p:cNvSpPr/>
           <p:nvPr/>
         </p:nvSpPr>
@@ -42777,7 +42833,7 @@
       </p:sp>
       <p:sp>
         <p:nvSpPr>
-          <p:cNvPr id="17" name="Text"/>
+          <p:cNvPr id="17" name="!!T MPF low-carbon"/>
           <p:cNvSpPr txBox="1"/>
           <p:nvPr/>
         </p:nvSpPr>
@@ -42822,7 +42878,7 @@
       </p:sp>
       <p:sp>
         <p:nvSpPr>
-          <p:cNvPr id="18" name="Text"/>
+          <p:cNvPr id="18" name="!!T HK$0.84M"/>
           <p:cNvSpPr txBox="1"/>
           <p:nvPr/>
         </p:nvSpPr>
@@ -42867,7 +42923,7 @@
       </p:sp>
       <p:sp>
         <p:nvSpPr>
-          <p:cNvPr id="19" name="Text"/>
+          <p:cNvPr id="19" name="!!T half of each parent's MPF"/>
           <p:cNvSpPr txBox="1"/>
           <p:nvPr/>
         </p:nvSpPr>
@@ -42912,7 +42968,7 @@
       </p:sp>
       <p:sp>
         <p:nvSpPr>
-          <p:cNvPr id="20" name="i"/>
+          <p:cNvPr id="20" name="!!i 7dd6fabf"/>
           <p:cNvSpPr/>
           <p:nvPr/>
         </p:nvSpPr>
@@ -42942,7 +42998,7 @@
       </p:sp>
       <p:sp>
         <p:nvSpPr>
-          <p:cNvPr id="21" name="Text"/>
+          <p:cNvPr id="21" name="!!T Green bonds"/>
           <p:cNvSpPr txBox="1"/>
           <p:nvPr/>
         </p:nvSpPr>
@@ -42987,7 +43043,7 @@
       </p:sp>
       <p:sp>
         <p:nvSpPr>
-          <p:cNvPr id="22" name="Text"/>
+          <p:cNvPr id="22" name="!!T HK$0.31M"/>
           <p:cNvSpPr txBox="1"/>
           <p:nvPr/>
         </p:nvSpPr>
@@ -43032,7 +43088,7 @@
       </p:sp>
       <p:sp>
         <p:nvSpPr>
-          <p:cNvPr id="23" name="Text"/>
+          <p:cNvPr id="23" name="!!T part of the bonds"/>
           <p:cNvSpPr txBox="1"/>
           <p:nvPr/>
         </p:nvSpPr>
@@ -43077,7 +43133,7 @@
       </p:sp>
       <p:sp>
         <p:nvSpPr>
-          <p:cNvPr id="24" name="Rule"/>
+          <p:cNvPr id="24" name="!!Rule 718fc31f"/>
           <p:cNvSpPr/>
           <p:nvPr/>
         </p:nvSpPr>
@@ -43107,7 +43163,7 @@
       </p:sp>
       <p:sp>
         <p:nvSpPr>
-          <p:cNvPr id="25" name="Text"/>
+          <p:cNvPr id="25" name="!!T Like for like, not a new bet: each fund "/>
           <p:cNvSpPr txBox="1"/>
           <p:nvPr/>
         </p:nvSpPr>
@@ -43183,7 +43239,7 @@
       </p:sp>
       <p:sp>
         <p:nvSpPr>
-          <p:cNvPr id="26" name="Text"/>
+          <p:cNvPr id="26" name="!!T The price: slightly higher fees, a narro"/>
           <p:cNvSpPr txBox="1"/>
           <p:nvPr/>
         </p:nvSpPr>
@@ -43237,7 +43293,7 @@
       </p:sp>
       <p:sp>
         <p:nvSpPr>
-          <p:cNvPr id="27" name="Rule"/>
+          <p:cNvPr id="27" name="!!Rule 4a241af8"/>
           <p:cNvSpPr/>
           <p:nvPr/>
         </p:nvSpPr>
@@ -43267,7 +43323,7 @@
       </p:sp>
       <p:sp>
         <p:nvSpPr>
-          <p:cNvPr id="28" name="Text"/>
+          <p:cNvPr id="28" name="!!T Tested, not trusted: two ESG ratings per"/>
           <p:cNvSpPr txBox="1"/>
           <p:nvPr/>
         </p:nvSpPr>
@@ -43321,7 +43377,7 @@
       </p:sp>
       <p:sp>
         <p:nvSpPr>
-          <p:cNvPr id="29" name="Rule"/>
+          <p:cNvPr id="29" name="!!Rule a93b9485"/>
           <p:cNvSpPr/>
           <p:nvPr/>
         </p:nvSpPr>
@@ -43351,7 +43407,7 @@
       </p:sp>
       <p:sp>
         <p:nvSpPr>
-          <p:cNvPr id="30" name="Text"/>
+          <p:cNvPr id="30" name="!!T …and Ryan's conviction: kept, and sized "/>
           <p:cNvSpPr txBox="1"/>
           <p:nvPr/>
         </p:nvSpPr>
@@ -43396,7 +43452,7 @@
       </p:sp>
       <p:sp>
         <p:nvSpPr>
-          <p:cNvPr id="31" name="Rule"/>
+          <p:cNvPr id="31" name="!!Rule ed7c4c64"/>
           <p:cNvSpPr/>
           <p:nvPr/>
         </p:nvSpPr>
@@ -43426,7 +43482,7 @@
       </p:sp>
       <p:sp>
         <p:nvSpPr>
-          <p:cNvPr id="32" name="span"/>
+          <p:cNvPr id="32" name="!!span fae6ebcc"/>
           <p:cNvSpPr/>
           <p:nvPr/>
         </p:nvSpPr>
@@ -43463,7 +43519,7 @@
       </p:sp>
       <p:pic>
         <p:nvPicPr>
-          <p:cNvPr id="33" name="Picture" descr="image.jpg"/>
+          <p:cNvPr id="33" name="!!Picture fb16abc7" descr="image.jpg"/>
           <p:cNvPicPr>
             <a:picLocks noChangeAspect="1"/>
           </p:cNvPicPr>
@@ -43487,7 +43543,7 @@
       </p:pic>
       <p:sp>
         <p:nvSpPr>
-          <p:cNvPr id="34" name="Text"/>
+          <p:cNvPr id="34" name="!!T Adrian"/>
           <p:cNvSpPr txBox="1"/>
           <p:nvPr/>
         </p:nvSpPr>
@@ -43532,7 +43588,7 @@
       </p:sp>
       <p:sp>
         <p:nvSpPr>
-          <p:cNvPr id="35" name="Text"/>
+          <p:cNvPr id="35" name="!!T none"/>
           <p:cNvSpPr txBox="1"/>
           <p:nvPr/>
         </p:nvSpPr>
@@ -43577,7 +43633,7 @@
       </p:sp>
       <p:sp>
         <p:nvSpPr>
-          <p:cNvPr id="36" name="span"/>
+          <p:cNvPr id="36" name="!!span 3a0d92bb"/>
           <p:cNvSpPr/>
           <p:nvPr/>
         </p:nvSpPr>
@@ -43614,7 +43670,7 @@
       </p:sp>
       <p:pic>
         <p:nvPicPr>
-          <p:cNvPr id="37" name="Picture" descr="image.jpg"/>
+          <p:cNvPr id="37" name="!!Picture 4cfdd03f" descr="image.jpg"/>
           <p:cNvPicPr>
             <a:picLocks noChangeAspect="1"/>
           </p:cNvPicPr>
@@ -43638,7 +43694,7 @@
       </p:pic>
       <p:sp>
         <p:nvSpPr>
-          <p:cNvPr id="38" name="Text"/>
+          <p:cNvPr id="38" name="!!T Carmen"/>
           <p:cNvSpPr txBox="1"/>
           <p:nvPr/>
         </p:nvSpPr>
@@ -43683,7 +43739,7 @@
       </p:sp>
       <p:sp>
         <p:nvSpPr>
-          <p:cNvPr id="39" name="Text"/>
+          <p:cNvPr id="39" name="!!T up to 2% (ETF)"/>
           <p:cNvSpPr txBox="1"/>
           <p:nvPr/>
         </p:nvSpPr>
@@ -43728,7 +43784,7 @@
       </p:sp>
       <p:sp>
         <p:nvSpPr>
-          <p:cNvPr id="40" name="span"/>
+          <p:cNvPr id="40" name="!!span 7b9465b8"/>
           <p:cNvSpPr/>
           <p:nvPr/>
         </p:nvSpPr>
@@ -43765,7 +43821,7 @@
       </p:sp>
       <p:pic>
         <p:nvPicPr>
-          <p:cNvPr id="41" name="Picture" descr="image.jpg"/>
+          <p:cNvPr id="41" name="!!Picture a8c1f83f" descr="image.jpg"/>
           <p:cNvPicPr>
             <a:picLocks noChangeAspect="1"/>
           </p:cNvPicPr>
@@ -43789,7 +43845,7 @@
       </p:pic>
       <p:sp>
         <p:nvSpPr>
-          <p:cNvPr id="42" name="Text"/>
+          <p:cNvPr id="42" name="!!T Chloe"/>
           <p:cNvSpPr txBox="1"/>
           <p:nvPr/>
         </p:nvSpPr>
@@ -43834,7 +43890,7 @@
       </p:sp>
       <p:sp>
         <p:nvSpPr>
-          <p:cNvPr id="43" name="Text"/>
+          <p:cNvPr id="43" name="!!T none #2"/>
           <p:cNvSpPr txBox="1"/>
           <p:nvPr/>
         </p:nvSpPr>
@@ -43879,7 +43935,7 @@
       </p:sp>
       <p:sp>
         <p:nvSpPr>
-          <p:cNvPr id="44" name="span"/>
+          <p:cNvPr id="44" name="!!span 6b6ef7e3"/>
           <p:cNvSpPr/>
           <p:nvPr/>
         </p:nvSpPr>
@@ -43916,7 +43972,7 @@
       </p:sp>
       <p:pic>
         <p:nvPicPr>
-          <p:cNvPr id="45" name="Picture" descr="image.jpg"/>
+          <p:cNvPr id="45" name="!!Picture 4be40bb6" descr="image.jpg"/>
           <p:cNvPicPr>
             <a:picLocks noChangeAspect="1"/>
           </p:cNvPicPr>
@@ -43940,7 +43996,7 @@
       </p:pic>
       <p:sp>
         <p:nvSpPr>
-          <p:cNvPr id="46" name="Text"/>
+          <p:cNvPr id="46" name="!!T Ryan keeps his HK$500K: nothing sold, no"/>
           <p:cNvSpPr txBox="1"/>
           <p:nvPr/>
         </p:nvSpPr>
@@ -43985,7 +44041,7 @@
       </p:sp>
       <p:sp>
         <p:nvSpPr>
-          <p:cNvPr id="47" name="Text"/>
+          <p:cNvPr id="47" name="!!T His savings go into a world index fund, "/>
           <p:cNvSpPr txBox="1"/>
           <p:nvPr/>
         </p:nvSpPr>
@@ -44114,7 +44170,7 @@
       </p:sp>
       <p:sp>
         <p:nvSpPr>
-          <p:cNvPr id="48" name="Text"/>
+          <p:cNvPr id="48" name="!!T The price: a 70% fall would cost him HK$"/>
           <p:cNvSpPr txBox="1"/>
           <p:nvPr/>
         </p:nvSpPr>
@@ -44190,7 +44246,7 @@
       </p:sp>
       <p:sp>
         <p:nvSpPr>
-          <p:cNvPr id="49" name="Text"/>
+          <p:cNvPr id="49" name="!!T 74%"/>
           <p:cNvSpPr txBox="1"/>
           <p:nvPr/>
         </p:nvSpPr>
@@ -44235,7 +44291,7 @@
       </p:sp>
       <p:sp>
         <p:nvSpPr>
-          <p:cNvPr id="50" name="i"/>
+          <p:cNvPr id="50" name="!!i a93c3177"/>
           <p:cNvSpPr/>
           <p:nvPr/>
         </p:nvSpPr>
@@ -44273,7 +44329,7 @@
       </p:sp>
       <p:sp>
         <p:nvSpPr>
-          <p:cNvPr id="51" name="i"/>
+          <p:cNvPr id="51" name="!!i 0a7c20da"/>
           <p:cNvSpPr/>
           <p:nvPr/>
         </p:nvSpPr>
@@ -44311,7 +44367,7 @@
       </p:sp>
       <p:sp>
         <p:nvSpPr>
-          <p:cNvPr id="52" name="Text"/>
+          <p:cNvPr id="52" name="!!T HK$500K"/>
           <p:cNvSpPr txBox="1"/>
           <p:nvPr/>
         </p:nvSpPr>
@@ -44356,7 +44412,7 @@
       </p:sp>
       <p:sp>
         <p:nvSpPr>
-          <p:cNvPr id="53" name="Text"/>
+          <p:cNvPr id="53" name="!!T today, 24"/>
           <p:cNvSpPr txBox="1"/>
           <p:nvPr/>
         </p:nvSpPr>
@@ -44401,7 +44457,7 @@
       </p:sp>
       <p:sp>
         <p:nvSpPr>
-          <p:cNvPr id="54" name="Text"/>
+          <p:cNvPr id="54" name="!!T 32%"/>
           <p:cNvSpPr txBox="1"/>
           <p:nvPr/>
         </p:nvSpPr>
@@ -44446,7 +44502,7 @@
       </p:sp>
       <p:sp>
         <p:nvSpPr>
-          <p:cNvPr id="55" name="i"/>
+          <p:cNvPr id="55" name="!!i 8ffb7adc"/>
           <p:cNvSpPr/>
           <p:nvPr/>
         </p:nvSpPr>
@@ -44484,7 +44540,7 @@
       </p:sp>
       <p:sp>
         <p:nvSpPr>
-          <p:cNvPr id="56" name="i"/>
+          <p:cNvPr id="56" name="!!i a93bfba9"/>
           <p:cNvSpPr/>
           <p:nvPr/>
         </p:nvSpPr>
@@ -44522,7 +44578,7 @@
       </p:sp>
       <p:sp>
         <p:nvSpPr>
-          <p:cNvPr id="57" name="Text"/>
+          <p:cNvPr id="57" name="!!T at 30"/>
           <p:cNvSpPr txBox="1"/>
           <p:nvPr/>
         </p:nvSpPr>
@@ -44567,7 +44623,7 @@
       </p:sp>
       <p:sp>
         <p:nvSpPr>
-          <p:cNvPr id="58" name="Text"/>
+          <p:cNvPr id="58" name="!!T 20%"/>
           <p:cNvSpPr txBox="1"/>
           <p:nvPr/>
         </p:nvSpPr>
@@ -44612,7 +44668,7 @@
       </p:sp>
       <p:sp>
         <p:nvSpPr>
-          <p:cNvPr id="59" name="i"/>
+          <p:cNvPr id="59" name="!!i 0b45516c"/>
           <p:cNvSpPr/>
           <p:nvPr/>
         </p:nvSpPr>
@@ -44650,7 +44706,7 @@
       </p:sp>
       <p:sp>
         <p:nvSpPr>
-          <p:cNvPr id="60" name="i"/>
+          <p:cNvPr id="60" name="!!i 746a5785"/>
           <p:cNvSpPr/>
           <p:nvPr/>
         </p:nvSpPr>
@@ -44688,7 +44744,7 @@
       </p:sp>
       <p:sp>
         <p:nvSpPr>
-          <p:cNvPr id="61" name="Text"/>
+          <p:cNvPr id="61" name="!!T at 35"/>
           <p:cNvSpPr txBox="1"/>
           <p:nvPr/>
         </p:nvSpPr>
@@ -44733,7 +44789,7 @@
       </p:sp>
       <p:sp>
         <p:nvSpPr>
-          <p:cNvPr id="62" name="Text"/>
+          <p:cNvPr id="62" name="!!T The dark block: his HK$500K, the same at"/>
           <p:cNvSpPr txBox="1"/>
           <p:nvPr/>
         </p:nvSpPr>
@@ -44844,7 +44900,7 @@
       </p:sp>
       <p:sp>
         <p:nvSpPr>
-          <p:cNvPr id="63" name="Rule"/>
+          <p:cNvPr id="63" name="!!Rule 6437bdcf"/>
           <p:cNvSpPr/>
           <p:nvPr/>
         </p:nvSpPr>
@@ -44874,7 +44930,7 @@
       </p:sp>
       <p:sp>
         <p:nvSpPr>
-          <p:cNvPr id="64" name="Text"/>
+          <p:cNvPr id="64" name="!!T Held where a regulator watches: HKEX-lis"/>
           <p:cNvSpPr txBox="1"/>
           <p:nvPr/>
         </p:nvSpPr>
@@ -44950,7 +45006,7 @@
       </p:sp>
       <p:sp>
         <p:nvSpPr>
-          <p:cNvPr id="65" name="p"/>
+          <p:cNvPr id="65" name="!!p 442bdd76"/>
           <p:cNvSpPr/>
           <p:nvPr/>
         </p:nvSpPr>
@@ -44980,7 +45036,7 @@
       </p:sp>
       <p:sp>
         <p:nvSpPr>
-          <p:cNvPr id="66" name="Text"/>
+          <p:cNvPr id="66" name="!!T Their values and Ryan's conviction both "/>
           <p:cNvSpPr txBox="1"/>
           <p:nvPr/>
         </p:nvSpPr>
@@ -45025,7 +45081,7 @@
       </p:sp>
       <p:sp>
         <p:nvSpPr>
-          <p:cNvPr id="67" name="Text"/>
+          <p:cNvPr id="67" name="!!T ESG: written case §6, Figure 16; raters:"/>
           <p:cNvSpPr txBox="1"/>
           <p:nvPr/>
         </p:nvSpPr>
@@ -45092,7 +45148,7 @@
       </p:sp>
       <p:sp>
         <p:nvSpPr>
-          <p:cNvPr id="68" name="Text"/>
+          <p:cNvPr id="68" name="!!T The problem"/>
           <p:cNvSpPr txBox="1"/>
           <p:nvPr/>
         </p:nvSpPr>
@@ -45137,7 +45193,7 @@
       </p:sp>
       <p:sp>
         <p:nvSpPr>
-          <p:cNvPr id="69" name="Text"/>
+          <p:cNvPr id="69" name="!!T The answer"/>
           <p:cNvSpPr txBox="1"/>
           <p:nvPr/>
         </p:nvSpPr>
@@ -45182,7 +45238,7 @@
       </p:sp>
       <p:sp>
         <p:nvSpPr>
-          <p:cNvPr id="70" name="Text"/>
+          <p:cNvPr id="70" name="!!T The five calls"/>
           <p:cNvSpPr txBox="1"/>
           <p:nvPr/>
         </p:nvSpPr>
@@ -45227,7 +45283,7 @@
       </p:sp>
       <p:sp>
         <p:nvSpPr>
-          <p:cNvPr id="71" name="Text"/>
+          <p:cNvPr id="71" name="!!T Will it hold"/>
           <p:cNvSpPr txBox="1"/>
           <p:nvPr/>
         </p:nvSpPr>
@@ -45272,7 +45328,7 @@
       </p:sp>
       <p:sp>
         <p:nvSpPr>
-          <p:cNvPr id="72" name="Text"/>
+          <p:cNvPr id="72" name="!!T What next"/>
           <p:cNvSpPr txBox="1"/>
           <p:nvPr/>
         </p:nvSpPr>
@@ -45317,7 +45373,7 @@
       </p:sp>
       <p:sp>
         <p:nvSpPr>
-          <p:cNvPr id="73" name="Text"/>
+          <p:cNvPr id="73" name="!!T Us"/>
           <p:cNvSpPr txBox="1"/>
           <p:nvPr/>
         </p:nvSpPr>
@@ -45362,7 +45418,7 @@
       </p:sp>
       <p:sp>
         <p:nvSpPr>
-          <p:cNvPr id="74" name="Text"/>
+          <p:cNvPr id="74" name="!!T 9 / 15"/>
           <p:cNvSpPr txBox="1"/>
           <p:nvPr/>
         </p:nvSpPr>
@@ -45407,7 +45463,7 @@
       </p:sp>
       <p:sp>
         <p:nvSpPr>
-          <p:cNvPr id="75" name="Text"/>
+          <p:cNvPr id="75" name="!!T Today"/>
           <p:cNvSpPr txBox="1"/>
           <p:nvPr/>
         </p:nvSpPr>
@@ -45452,7 +45508,7 @@
       </p:sp>
       <p:sp>
         <p:nvSpPr>
-          <p:cNvPr id="76" name="i"/>
+          <p:cNvPr id="76" name="!!i 76ed0f65"/>
           <p:cNvSpPr/>
           <p:nvPr/>
         </p:nvSpPr>
@@ -45482,7 +45538,7 @@
       </p:sp>
       <p:sp>
         <p:nvSpPr>
-          <p:cNvPr id="77" name="Text"/>
+          <p:cNvPr id="77" name="!!T 11%"/>
           <p:cNvSpPr txBox="1"/>
           <p:nvPr/>
         </p:nvSpPr>
@@ -45527,7 +45583,7 @@
       </p:sp>
       <p:sp>
         <p:nvSpPr>
-          <p:cNvPr id="78" name="Text"/>
+          <p:cNvPr id="78" name="!!T With the plan"/>
           <p:cNvSpPr txBox="1"/>
           <p:nvPr/>
         </p:nvSpPr>
@@ -45572,7 +45628,7 @@
       </p:sp>
       <p:sp>
         <p:nvSpPr>
-          <p:cNvPr id="79" name="i"/>
+          <p:cNvPr id="79" name="!!i 2c43a45c"/>
           <p:cNvSpPr/>
           <p:nvPr/>
         </p:nvSpPr>
@@ -45610,7 +45666,7 @@
       </p:sp>
       <p:sp>
         <p:nvSpPr>
-          <p:cNvPr id="80" name="i"/>
+          <p:cNvPr id="80" name="!!i 44256b8a"/>
           <p:cNvSpPr/>
           <p:nvPr/>
         </p:nvSpPr>
@@ -45640,7 +45696,7 @@
       </p:sp>
       <p:sp>
         <p:nvSpPr>
-          <p:cNvPr id="81" name="i"/>
+          <p:cNvPr id="81" name="!!i 33b7d3a1"/>
           <p:cNvSpPr/>
           <p:nvPr/>
         </p:nvSpPr>
@@ -45670,7 +45726,7 @@
       </p:sp>
       <p:sp>
         <p:nvSpPr>
-          <p:cNvPr id="82" name="Text"/>
+          <p:cNvPr id="82" name="!!T 25%"/>
           <p:cNvSpPr txBox="1"/>
           <p:nvPr/>
         </p:nvSpPr>
@@ -45715,7 +45771,7 @@
       </p:sp>
       <p:cxnSp>
         <p:nvCxnSpPr>
-          <p:cNvPr id="83" name="Rule"/>
+          <p:cNvPr id="83" name="!!Rule 86aa8b7b"/>
           <p:cNvCxnSpPr/>
           <p:nvPr/>
         </p:nvCxnSpPr>
@@ -45751,7 +45807,7 @@
       </p:cxnSp>
       <p:sp>
         <p:nvSpPr>
-          <p:cNvPr id="84" name="Rule"/>
+          <p:cNvPr id="84" name="!!Rule 2df83914"/>
           <p:cNvSpPr/>
           <p:nvPr/>
         </p:nvSpPr>
@@ -45781,7 +45837,7 @@
       </p:sp>
       <p:sp>
         <p:nvSpPr>
-          <p:cNvPr id="85" name="Text"/>
+          <p:cNvPr id="85" name="!!T +14 points"/>
           <p:cNvSpPr txBox="1"/>
           <p:nvPr/>
         </p:nvSpPr>
@@ -45826,7 +45882,7 @@
       </p:sp>
       <p:sp>
         <p:nvSpPr>
-          <p:cNvPr id="86" name="Arrowhead"/>
+          <p:cNvPr id="86" name="!!Arrowhead 823caef2"/>
           <p:cNvSpPr/>
           <p:nvPr/>
         </p:nvSpPr>
@@ -45859,6 +45915,18 @@
   <p:clrMapOvr>
     <a:masterClrMapping/>
   </p:clrMapOvr>
+  <mc:AlternateContent xmlns:mc="http://schemas.openxmlformats.org/markup-compatibility/2006" xmlns:p159="http://schemas.microsoft.com/office/powerpoint/2015/09/main">
+    <mc:Choice Requires="p159">
+      <p:transition xmlns:p14="http://schemas.microsoft.com/office/powerpoint/2010/main" spd="slow" p14:dur="900">
+        <p159:morph option="byObject"/>
+      </p:transition>
+    </mc:Choice>
+    <mc:Fallback xmlns="">
+      <p:transition spd="fast">
+        <p:fade/>
+      </p:transition>
+    </mc:Fallback>
+  </mc:AlternateContent>
 </p:sld>
 </file>
 

--- a/round2/Axis.pptx
+++ b/round2/Axis.pptx
@@ -139,23 +139,23 @@
   <p:extLst>
     <p:ext uri="{521415D9-36F7-43E2-AB2F-B90AF26B5E84}">
       <p14:sectionLst xmlns:p14="http://schemas.microsoft.com/office/powerpoint/2010/main">
-        <p14:section name="Cover" id="{A51F3274-C6D8-4CC7-B1C8-7879F99C7AEA}">
+        <p14:section name="Cover" id="{9321C5E2-89CE-4CFC-A994-CC066B61392A}">
           <p14:sldIdLst>
             <p14:sldId id="256"/>
           </p14:sldIdLst>
         </p14:section>
-        <p14:section name="The problem" id="{24F0F80F-E5B0-4FA9-95EB-7CD8D059BCBA}">
+        <p14:section name="The problem" id="{D4F771E1-4EA3-4336-B6DA-7DB755AB7A46}">
           <p14:sldIdLst>
             <p14:sldId id="257"/>
             <p14:sldId id="258"/>
           </p14:sldIdLst>
         </p14:section>
-        <p14:section name="The answer" id="{DAB36994-4E1C-4ADD-BDCB-67B54966F9F2}">
+        <p14:section name="The answer" id="{03AAD265-7E18-4518-9306-EC22F2B0359D}">
           <p14:sldIdLst>
             <p14:sldId id="259"/>
           </p14:sldIdLst>
         </p14:section>
-        <p14:section name="The five calls" id="{D6132812-9CF1-4AA1-AE5B-9878FCEB414E}">
+        <p14:section name="The five calls" id="{AA0E7B54-B786-4B2E-966D-760C1E45653E}">
           <p14:sldIdLst>
             <p14:sldId id="260"/>
             <p14:sldId id="261"/>
@@ -164,24 +164,24 @@
             <p14:sldId id="264"/>
           </p14:sldIdLst>
         </p14:section>
-        <p14:section name="Will it hold" id="{3E582B87-30B0-4BB5-AF3E-202879F717A1}">
+        <p14:section name="Will it hold" id="{6F0AFBA2-C7D9-4128-9836-D4285419D073}">
           <p14:sldIdLst>
             <p14:sldId id="265"/>
           </p14:sldIdLst>
         </p14:section>
-        <p14:section name="What next" id="{DB546855-8D15-4EC6-B059-4B7EB544973A}">
+        <p14:section name="What next" id="{1E6BC120-FE7A-403E-A384-81A1DA6F56F2}">
           <p14:sldIdLst>
             <p14:sldId id="266"/>
             <p14:sldId id="267"/>
           </p14:sldIdLst>
         </p14:section>
-        <p14:section name="Us" id="{B0C18B8A-A580-4F94-8368-057315AB9B0E}">
+        <p14:section name="Us" id="{5C9F4454-BB95-4FD6-87CA-C615C350A411}">
           <p14:sldIdLst>
             <p14:sldId id="268"/>
             <p14:sldId id="269"/>
           </p14:sldIdLst>
         </p14:section>
-        <p14:section name="Close" id="{FDFBEA0C-6C7A-447F-B8EF-6DB218777EB7}">
+        <p14:section name="Close" id="{FA6F6607-0C42-4432-91F0-0BF36BE60521}">
           <p14:sldIdLst>
             <p14:sldId id="270"/>
           </p14:sldIdLst>
@@ -231,7 +231,7 @@
     </p:spTree>
     <p:extLst>
       <p:ext uri="{BB962C8B-B14F-4D97-AF65-F5344CB8AC3E}">
-        <p14:creationId xmlns:p14="http://schemas.microsoft.com/office/powerpoint/2010/main" val="192233609"/>
+        <p14:creationId xmlns:p14="http://schemas.microsoft.com/office/powerpoint/2010/main" val="1750843937"/>
       </p:ext>
     </p:extLst>
   </p:cSld>
@@ -5182,9 +5182,6 @@
   <p:clrMapOvr>
     <a:masterClrMapping/>
   </p:clrMapOvr>
-  <p:transition>
-    <p:fade/>
-  </p:transition>
 </p:sld>
 </file>
 
@@ -8768,9 +8765,6 @@
   <p:clrMapOvr>
     <a:masterClrMapping/>
   </p:clrMapOvr>
-  <p:transition>
-    <p:fade/>
-  </p:transition>
 </p:sld>
 </file>
 
@@ -12362,9 +12356,6 @@
   <p:clrMapOvr>
     <a:masterClrMapping/>
   </p:clrMapOvr>
-  <p:transition>
-    <p:fade/>
-  </p:transition>
 </p:sld>
 </file>
 
@@ -15485,9 +15476,6 @@
   <p:clrMapOvr>
     <a:masterClrMapping/>
   </p:clrMapOvr>
-  <p:transition>
-    <p:fade/>
-  </p:transition>
 </p:sld>
 </file>
 
@@ -17659,9 +17647,6 @@
   <p:clrMapOvr>
     <a:masterClrMapping/>
   </p:clrMapOvr>
-  <p:transition>
-    <p:fade/>
-  </p:transition>
 </p:sld>
 </file>
 
@@ -20472,9 +20457,6 @@
   <p:clrMapOvr>
     <a:masterClrMapping/>
   </p:clrMapOvr>
-  <p:transition>
-    <p:fade/>
-  </p:transition>
 </p:sld>
 </file>
 
@@ -22049,9 +22031,6 @@
   <p:clrMapOvr>
     <a:masterClrMapping/>
   </p:clrMapOvr>
-  <p:transition>
-    <p:fade/>
-  </p:transition>
 </p:sld>
 </file>
 
@@ -25374,9 +25353,6 @@
   <p:clrMapOvr>
     <a:masterClrMapping/>
   </p:clrMapOvr>
-  <p:transition>
-    <p:fade/>
-  </p:transition>
 </p:sld>
 </file>
 
@@ -28057,9 +28033,6 @@
   <p:clrMapOvr>
     <a:masterClrMapping/>
   </p:clrMapOvr>
-  <p:transition>
-    <p:fade/>
-  </p:transition>
 </p:sld>
 </file>
 
@@ -29926,9 +29899,6 @@
   <p:clrMapOvr>
     <a:masterClrMapping/>
   </p:clrMapOvr>
-  <p:transition>
-    <p:fade/>
-  </p:transition>
 </p:sld>
 </file>
 

--- a/round2/Axis.pptx
+++ b/round2/Axis.pptx
@@ -139,23 +139,23 @@
   <p:extLst>
     <p:ext uri="{521415D9-36F7-43E2-AB2F-B90AF26B5E84}">
       <p14:sectionLst xmlns:p14="http://schemas.microsoft.com/office/powerpoint/2010/main">
-        <p14:section name="Cover" id="{9321C5E2-89CE-4CFC-A994-CC066B61392A}">
+        <p14:section name="Cover" id="{9CE0B77E-E670-4EA4-82CE-BD1F4EF43F5B}">
           <p14:sldIdLst>
             <p14:sldId id="256"/>
           </p14:sldIdLst>
         </p14:section>
-        <p14:section name="The problem" id="{D4F771E1-4EA3-4336-B6DA-7DB755AB7A46}">
+        <p14:section name="The problem" id="{C058EAEE-E277-48D0-8B29-171270A3544B}">
           <p14:sldIdLst>
             <p14:sldId id="257"/>
             <p14:sldId id="258"/>
           </p14:sldIdLst>
         </p14:section>
-        <p14:section name="The answer" id="{03AAD265-7E18-4518-9306-EC22F2B0359D}">
+        <p14:section name="The answer" id="{99BF1773-0216-4DBC-A6CB-F876E17578ED}">
           <p14:sldIdLst>
             <p14:sldId id="259"/>
           </p14:sldIdLst>
         </p14:section>
-        <p14:section name="The five calls" id="{AA0E7B54-B786-4B2E-966D-760C1E45653E}">
+        <p14:section name="The five calls" id="{6136F35F-6C78-4486-ABCB-B043699B5157}">
           <p14:sldIdLst>
             <p14:sldId id="260"/>
             <p14:sldId id="261"/>
@@ -164,24 +164,24 @@
             <p14:sldId id="264"/>
           </p14:sldIdLst>
         </p14:section>
-        <p14:section name="Will it hold" id="{6F0AFBA2-C7D9-4128-9836-D4285419D073}">
+        <p14:section name="Will it hold" id="{9F5277C4-8072-45CB-8EB1-466EF69B2FD7}">
           <p14:sldIdLst>
             <p14:sldId id="265"/>
           </p14:sldIdLst>
         </p14:section>
-        <p14:section name="What next" id="{1E6BC120-FE7A-403E-A384-81A1DA6F56F2}">
+        <p14:section name="What next" id="{08A1CB09-CB48-4148-B684-836D250B32B6}">
           <p14:sldIdLst>
             <p14:sldId id="266"/>
             <p14:sldId id="267"/>
           </p14:sldIdLst>
         </p14:section>
-        <p14:section name="Us" id="{5C9F4454-BB95-4FD6-87CA-C615C350A411}">
+        <p14:section name="Us" id="{BD68B797-A3C2-4D76-9CF9-C818874E22D4}">
           <p14:sldIdLst>
             <p14:sldId id="268"/>
             <p14:sldId id="269"/>
           </p14:sldIdLst>
         </p14:section>
-        <p14:section name="Close" id="{FA6F6607-0C42-4432-91F0-0BF36BE60521}">
+        <p14:section name="Close" id="{39D44F7F-4E51-449A-B236-98988BD02B3A}">
           <p14:sldIdLst>
             <p14:sldId id="270"/>
           </p14:sldIdLst>
@@ -231,7 +231,7 @@
     </p:spTree>
     <p:extLst>
       <p:ext uri="{BB962C8B-B14F-4D97-AF65-F5344CB8AC3E}">
-        <p14:creationId xmlns:p14="http://schemas.microsoft.com/office/powerpoint/2010/main" val="1750843937"/>
+        <p14:creationId xmlns:p14="http://schemas.microsoft.com/office/powerpoint/2010/main" val="4002544855"/>
       </p:ext>
     </p:extLst>
   </p:cSld>
@@ -901,7 +901,7 @@
           <a:lstStyle/>
           <a:p>
             <a:r>
-              <a:t>Pete: Meet the Wongs. Adrian, 54, wants his capital, retirement and health protected. Carmen, 49, runs a business and wants money that reflects her values. Ryan, 24, holds crypto. Chloe, 16, starts university in 2028. On paper, they're secure: HK$24.4 million. The parents want to retire at 65 and 62, on HK$780K a year. But will it last to Carmen's 89? We tested it in 10,000 futures.</a:t>
+              <a:t>Pete: Meet the Wongs. On paper, they're secure: HK$24.4 million, but most of it is their home and Carmen's business. And it must last forty years. Ryan, 24, holds crypto and wants his own plan. Chloe, 16, may study here or abroad. Adrian, 54, wants capital and health protected; he retires at 65. Carmen, 49, wants money that reflects her values; she retires at 62. Then 27 years on HK$780K a year. Will it last to Carmen's 89? We tested it in 10,000 futures.</a:t>
             </a:r>
           </a:p>
         </p:txBody>

--- a/round2/Axis.pptx
+++ b/round2/Axis.pptx
@@ -139,23 +139,23 @@
   <p:extLst>
     <p:ext uri="{521415D9-36F7-43E2-AB2F-B90AF26B5E84}">
       <p14:sectionLst xmlns:p14="http://schemas.microsoft.com/office/powerpoint/2010/main">
-        <p14:section name="Cover" id="{9CE0B77E-E670-4EA4-82CE-BD1F4EF43F5B}">
+        <p14:section name="Cover" id="{302C5F62-4522-41A4-8FF0-BDBB2A78EBEE}">
           <p14:sldIdLst>
             <p14:sldId id="256"/>
           </p14:sldIdLst>
         </p14:section>
-        <p14:section name="The problem" id="{C058EAEE-E277-48D0-8B29-171270A3544B}">
+        <p14:section name="The problem" id="{AF7942FC-9731-4212-92C8-29B2BAD8FDC1}">
           <p14:sldIdLst>
             <p14:sldId id="257"/>
             <p14:sldId id="258"/>
           </p14:sldIdLst>
         </p14:section>
-        <p14:section name="The answer" id="{99BF1773-0216-4DBC-A6CB-F876E17578ED}">
+        <p14:section name="The answer" id="{D2654892-0012-490F-8990-2F8C5238DEB4}">
           <p14:sldIdLst>
             <p14:sldId id="259"/>
           </p14:sldIdLst>
         </p14:section>
-        <p14:section name="The five calls" id="{6136F35F-6C78-4486-ABCB-B043699B5157}">
+        <p14:section name="The five calls" id="{E5C06E21-CC49-4B03-A6F0-86EB970EA179}">
           <p14:sldIdLst>
             <p14:sldId id="260"/>
             <p14:sldId id="261"/>
@@ -164,24 +164,24 @@
             <p14:sldId id="264"/>
           </p14:sldIdLst>
         </p14:section>
-        <p14:section name="Will it hold" id="{9F5277C4-8072-45CB-8EB1-466EF69B2FD7}">
+        <p14:section name="Will it hold" id="{B6B10935-F245-4DB5-8B41-8B0E17B545D4}">
           <p14:sldIdLst>
             <p14:sldId id="265"/>
           </p14:sldIdLst>
         </p14:section>
-        <p14:section name="What next" id="{08A1CB09-CB48-4148-B684-836D250B32B6}">
+        <p14:section name="What next" id="{8AD3AA04-64B1-4461-A53B-AB28A58E1108}">
           <p14:sldIdLst>
             <p14:sldId id="266"/>
             <p14:sldId id="267"/>
           </p14:sldIdLst>
         </p14:section>
-        <p14:section name="Us" id="{BD68B797-A3C2-4D76-9CF9-C818874E22D4}">
+        <p14:section name="Us" id="{9933B526-C076-46EA-8662-A51B6775E76D}">
           <p14:sldIdLst>
             <p14:sldId id="268"/>
             <p14:sldId id="269"/>
           </p14:sldIdLst>
         </p14:section>
-        <p14:section name="Close" id="{39D44F7F-4E51-449A-B236-98988BD02B3A}">
+        <p14:section name="Close" id="{DCBDB06B-A024-469C-BC23-4040E7B477C7}">
           <p14:sldIdLst>
             <p14:sldId id="270"/>
           </p14:sldIdLst>
@@ -231,7 +231,7 @@
     </p:spTree>
     <p:extLst>
       <p:ext uri="{BB962C8B-B14F-4D97-AF65-F5344CB8AC3E}">
-        <p14:creationId xmlns:p14="http://schemas.microsoft.com/office/powerpoint/2010/main" val="4002544855"/>
+        <p14:creationId xmlns:p14="http://schemas.microsoft.com/office/powerpoint/2010/main" val="1643087477"/>
       </p:ext>
     </p:extLst>
   </p:cSld>
@@ -1251,7 +1251,7 @@
           <a:lstStyle/>
           <a:p>
             <a:r>
-              <a:t>Fahtai: Call three: the cost the budget ignores. Kept on Flexi for life, medical premiums climb to HK$375K a year, close to half the budget. So at Adrian's 75 they review the tier: the Standard plan costs a third as much, with lower limits. And from 2039, two spending rules for the bad years; essentials are never cut. Remember that future? Now the money lasts to 89, and the home stays theirs: 97% with the review, almost every future with the rules. Win.</a:t>
+              <a:t>Fahtai: Call three: the cost the budget ignores. Kept on Flexi for life, medical premiums climb to HK$375K a year, close to half the budget. So at Adrian's 75 they review the tier: the Standard plan costs a third as much, with lower limits. And from 2039, two spending rules for the bad years; essentials are never cut. Remember that future? Now the money lasts to 89, and they stay in their home: 97% with the review, almost every future with the rules. Win.</a:t>
             </a:r>
           </a:p>
         </p:txBody>
@@ -35959,7 +35959,7 @@
 
 <file path=ppt/slides/slide7.xml><?xml version="1.0" encoding="utf-8"?>
 <p:sld xmlns:a="http://schemas.openxmlformats.org/drawingml/2006/main" xmlns:r="http://schemas.openxmlformats.org/officeDocument/2006/relationships" xmlns:p="http://schemas.openxmlformats.org/presentationml/2006/main">
-  <p:cSld name="Fix the cost the budget ignores: in that same future, the money now lasts to 89 and the home stays theirs">
+  <p:cSld name="Fix the cost the budget ignores: in that same future, the money now lasts to 89 and they stay in their home">
     <p:spTree>
       <p:nvGrpSpPr>
         <p:cNvPr id="1" name=""/>
@@ -36088,7 +36088,7 @@
         <p:spPr>
           <a:xfrm>
             <a:off x="638175" y="529852"/>
-            <a:ext cx="7193524" cy="640699"/>
+            <a:ext cx="7353648" cy="640699"/>
           </a:xfrm>
           <a:prstGeom prst="rect">
             <a:avLst/>
@@ -36141,7 +36141,7 @@
                 </a:solidFill>
                 <a:latin typeface="Plus Jakarta Sans"/>
               </a:rPr>
-              <a:t>the money now lasts to 89 and the home stays theirs</a:t>
+              <a:t>the money now lasts to 89 and they stay in their home</a:t>
             </a:r>
           </a:p>
         </p:txBody>
@@ -38446,8 +38446,8 @@
         </p:nvSpPr>
         <p:spPr>
           <a:xfrm>
-            <a:off x="1405981" y="5984558"/>
-            <a:ext cx="9379890" cy="247650"/>
+            <a:off x="1282925" y="5984558"/>
+            <a:ext cx="9626150" cy="247650"/>
           </a:xfrm>
           <a:prstGeom prst="rect">
             <a:avLst/>
@@ -38478,7 +38478,7 @@
                 </a:solidFill>
                 <a:latin typeface="Plus Jakarta Sans SemiBold"/>
               </a:rPr>
-              <a:t>Will it last? In almost every future: they retire on time, keep the way they live, and keep the home.</a:t>
+              <a:t>Will it last? In almost every future: they retire on time, keep the way they live, and stay in their home.</a:t>
             </a:r>
           </a:p>
         </p:txBody>
@@ -39004,14 +39004,14 @@
       </p:sp>
       <p:sp>
         <p:nvSpPr>
-          <p:cNvPr id="71" name="!!T The home: still theirs"/>
+          <p:cNvPr id="71" name="!!T Their home, for life"/>
           <p:cNvSpPr txBox="1"/>
           <p:nvPr/>
         </p:nvSpPr>
         <p:spPr>
           <a:xfrm>
             <a:off x="5918150" y="4365998"/>
-            <a:ext cx="1492472" cy="173355"/>
+            <a:ext cx="1364531" cy="173355"/>
           </a:xfrm>
           <a:prstGeom prst="rect">
             <a:avLst/>
@@ -39042,7 +39042,7 @@
                 </a:solidFill>
                 <a:latin typeface="Plus Jakarta Sans SemiBold"/>
               </a:rPr>
-              <a:t>The home: still theirs</a:t>
+              <a:t>Their home, for life</a:t>
             </a:r>
           </a:p>
         </p:txBody>

--- a/round2/Axis.pptx
+++ b/round2/Axis.pptx
@@ -139,23 +139,23 @@
   <p:extLst>
     <p:ext uri="{521415D9-36F7-43E2-AB2F-B90AF26B5E84}">
       <p14:sectionLst xmlns:p14="http://schemas.microsoft.com/office/powerpoint/2010/main">
-        <p14:section name="Cover" id="{302C5F62-4522-41A4-8FF0-BDBB2A78EBEE}">
+        <p14:section name="Cover" id="{117C613F-BBA4-48EA-863F-219F49BD6FCA}">
           <p14:sldIdLst>
             <p14:sldId id="256"/>
           </p14:sldIdLst>
         </p14:section>
-        <p14:section name="The problem" id="{AF7942FC-9731-4212-92C8-29B2BAD8FDC1}">
+        <p14:section name="The problem" id="{60FDA589-71E3-4FE3-88BF-5398580A73CA}">
           <p14:sldIdLst>
             <p14:sldId id="257"/>
             <p14:sldId id="258"/>
           </p14:sldIdLst>
         </p14:section>
-        <p14:section name="The answer" id="{D2654892-0012-490F-8990-2F8C5238DEB4}">
+        <p14:section name="The answer" id="{4748D0A9-9A2E-419D-96F3-4D45CBEA8E05}">
           <p14:sldIdLst>
             <p14:sldId id="259"/>
           </p14:sldIdLst>
         </p14:section>
-        <p14:section name="The five calls" id="{E5C06E21-CC49-4B03-A6F0-86EB970EA179}">
+        <p14:section name="The five calls" id="{9125EF4D-61A0-425E-988F-F178DEF254C2}">
           <p14:sldIdLst>
             <p14:sldId id="260"/>
             <p14:sldId id="261"/>
@@ -164,24 +164,28 @@
             <p14:sldId id="264"/>
           </p14:sldIdLst>
         </p14:section>
-        <p14:section name="Will it hold" id="{B6B10935-F245-4DB5-8B41-8B0E17B545D4}">
+        <p14:section name="Will it hold" id="{337A42FD-C64C-4F97-8D6A-8951D0C05FD2}">
           <p14:sldIdLst>
             <p14:sldId id="265"/>
           </p14:sldIdLst>
         </p14:section>
-        <p14:section name="What next" id="{8AD3AA04-64B1-4461-A53B-AB28A58E1108}">
+        <p14:section name="What next" id="{B1BC32A4-39B4-484E-9338-9F85264CDDD2}">
           <p14:sldIdLst>
             <p14:sldId id="266"/>
+          </p14:sldIdLst>
+        </p14:section>
+        <p14:section name="What passes on" id="{1D0DE826-4371-4985-ABCC-683E86D36E1E}">
+          <p14:sldIdLst>
             <p14:sldId id="267"/>
           </p14:sldIdLst>
         </p14:section>
-        <p14:section name="Us" id="{9933B526-C076-46EA-8662-A51B6775E76D}">
+        <p14:section name="Us" id="{36EBF91A-183C-45A4-AC37-A25D88A9FCAD}">
           <p14:sldIdLst>
             <p14:sldId id="268"/>
             <p14:sldId id="269"/>
           </p14:sldIdLst>
         </p14:section>
-        <p14:section name="Close" id="{DCBDB06B-A024-469C-BC23-4040E7B477C7}">
+        <p14:section name="Close" id="{A30E27C5-924D-4499-B7EF-5AA95D27B62E}">
           <p14:sldIdLst>
             <p14:sldId id="270"/>
           </p14:sldIdLst>
@@ -231,7 +235,7 @@
     </p:spTree>
     <p:extLst>
       <p:ext uri="{BB962C8B-B14F-4D97-AF65-F5344CB8AC3E}">
-        <p14:creationId xmlns:p14="http://schemas.microsoft.com/office/powerpoint/2010/main" val="1643087477"/>
+        <p14:creationId xmlns:p14="http://schemas.microsoft.com/office/powerpoint/2010/main" val="1425537822"/>
       </p:ext>
     </p:extLst>
   </p:cSld>
@@ -601,7 +605,7 @@
           <a:lstStyle/>
           <a:p>
             <a:r>
-              <a:t>Pete: The legacy the case is named for: in the futures where Carmen had to sell, the plan leaves Ryan and Chloe HK$7.7M, not HK$2.3M. If a parent dies early, the wills name Chloe's guardian and hold each child's share in trust, paid at 25, 30 and 35. And a scholarship in sustainable design joins Carmen's mission to Chloe's interest.</a:t>
+              <a:t>Pete: The legacy the case is named for: in the futures where Carmen had to sell, the plan leaves Ryan and Chloe HK$7.7M, not HK$2.3M. If a parent dies early, the wills name Chloe's guardian and hold each child's share in trust, paid at 25, 30 and 35. And a scholarship in sustainable design, for the education and environmental causes they asked to support. Built to last: for their lifetimes, and after.</a:t>
             </a:r>
           </a:p>
         </p:txBody>
@@ -671,7 +675,7 @@
           <a:lstStyle/>
           <a:p>
             <a:r>
-              <a:t>Pete: Since 2021, Wealth Management Connect has let residents of Hong Kong, Macao and nine mainland cities invest across the boundary, now up to three million renminbi each. For the Wongs, Northbound is a tool for later: their home, income and business are all in Hong Kong. For us, Southbound is the market we want to serve: a Hong Kong bank won't solicit or recommend across the boundary unless the client asks, so an adviser's value is a clear, suitable answer.</a:t>
+              <a:t>Pete: The Wongs are one family; on both sides of the boundary there are many more like them. Since 2021, Wealth Management Connect has let residents of Hong Kong, Macao and nine mainland cities invest across it, now up to three million renminbi each. For the Wongs, Northbound is a tool for later: their home, income and business are all in Hong Kong. For us, Southbound is the market we want to serve: a Hong Kong bank won't solicit or recommend across the boundary unless the client asks, so an adviser's value is a clear, suitable answer.</a:t>
             </a:r>
           </a:p>
         </p:txBody>
@@ -1041,7 +1045,7 @@
           <a:lstStyle/>
           <a:p>
             <a:r>
-              <a:t>Pete: They asked for a plan that's innovative yet prudent. Our answer: five calls. Insure the income, not the life. Put the home and the business to work, on their terms. Fix the cost the budget ignores. Give each person a plan of their own. And make room for their values and Ryan's crypto, with guardrails. Done their own way, the money lasts to Carmen's 89 in 62%; the five calls lift it to 97%, and the home becomes their choice, not their last resort. Lookbua.</a:t>
+              <a:t>Pete: It doesn't have to end that way. Our answer: five calls. Insure the income, not the life. Put the home and the business to work, on their terms. Fix the cost the budget ignores. Give each person a plan of their own. And make room for their values and Ryan's crypto, with guardrails. Done their own way, the money lasts to Carmen's 89 in 62%; the five calls lift it to 97%, and the home becomes their choice, not their last resort. Lookbua.</a:t>
             </a:r>
           </a:p>
         </p:txBody>
@@ -8387,7 +8391,7 @@
         <p:spPr>
           <a:xfrm>
             <a:off x="457200" y="6452104"/>
-            <a:ext cx="6252025" cy="297120"/>
+            <a:ext cx="5675736" cy="297120"/>
           </a:xfrm>
           <a:prstGeom prst="rect">
             <a:avLst/>
@@ -8418,7 +8422,7 @@
                 </a:solidFill>
                 <a:latin typeface="Plus Jakarta Sans"/>
               </a:rPr>
-              <a:t>Chance the money lasts to Carmen's 89 (95 in the last test), 10,000 simulated markets (measured): decisions</a:t>
+              <a:t>Chance the money lasts to Carmen's 89 (95 in the last test), 10,000 simulated markets (measured):</a:t>
             </a:r>
           </a:p>
           <a:p>
@@ -8440,7 +8444,7 @@
                 </a:solidFill>
                 <a:latin typeface="Plus Jakarta Sans"/>
               </a:rPr>
-              <a:t>compared in the same markets, not forecasts. Written case §11, Figure 26, A1.</a:t>
+              <a:t>decisions compared in the same markets, not forecasts. Written case §11, Figure 26, A1.</a:t>
             </a:r>
           </a:p>
         </p:txBody>
@@ -8453,7 +8457,7 @@
         </p:nvSpPr>
         <p:spPr>
           <a:xfrm>
-            <a:off x="6608862" y="6536246"/>
+            <a:off x="6028432" y="6536246"/>
             <a:ext cx="895201" cy="123825"/>
           </a:xfrm>
           <a:prstGeom prst="rect">
@@ -8498,7 +8502,7 @@
         </p:nvSpPr>
         <p:spPr>
           <a:xfrm>
-            <a:off x="7555111" y="6536246"/>
+            <a:off x="6888956" y="6536246"/>
             <a:ext cx="804017" cy="123825"/>
           </a:xfrm>
           <a:prstGeom prst="rect">
@@ -8543,7 +8547,7 @@
         </p:nvSpPr>
         <p:spPr>
           <a:xfrm>
-            <a:off x="8415338" y="6536246"/>
+            <a:off x="7663458" y="6536246"/>
             <a:ext cx="885262" cy="123825"/>
           </a:xfrm>
           <a:prstGeom prst="rect">
@@ -8588,7 +8592,7 @@
         </p:nvSpPr>
         <p:spPr>
           <a:xfrm>
-            <a:off x="9352211" y="6536246"/>
+            <a:off x="8514606" y="6536246"/>
             <a:ext cx="757163" cy="123825"/>
           </a:xfrm>
           <a:prstGeom prst="rect">
@@ -8633,7 +8637,7 @@
         </p:nvSpPr>
         <p:spPr>
           <a:xfrm>
-            <a:off x="10168235" y="6536246"/>
+            <a:off x="9244905" y="6536246"/>
             <a:ext cx="735235" cy="123825"/>
           </a:xfrm>
           <a:prstGeom prst="rect">
@@ -8672,13 +8676,58 @@
       </p:sp>
       <p:sp>
         <p:nvSpPr>
-          <p:cNvPr id="86" name="!!T Us"/>
-          <p:cNvSpPr txBox="1"/>
-          <p:nvPr/>
-        </p:nvSpPr>
-        <p:spPr>
-          <a:xfrm>
-            <a:off x="10963573" y="6536246"/>
+          <p:cNvPr id="86" name="!!T What passes on"/>
+          <p:cNvSpPr txBox="1"/>
+          <p:nvPr/>
+        </p:nvSpPr>
+        <p:spPr>
+          <a:xfrm>
+            <a:off x="9954518" y="6536246"/>
+            <a:ext cx="1093029" cy="123825"/>
+          </a:xfrm>
+          <a:prstGeom prst="rect">
+            <a:avLst/>
+          </a:prstGeom>
+          <a:noFill/>
+        </p:spPr>
+        <p:txBody>
+          <a:bodyPr wrap="none" lIns="0" tIns="0" rIns="0" bIns="0" anchor="t">
+            <a:noAutofit/>
+          </a:bodyPr>
+          <a:lstStyle/>
+          <a:p>
+            <a:pPr algn="l">
+              <a:lnSpc>
+                <a:spcPts val="975"/>
+              </a:lnSpc>
+              <a:spcBef>
+                <a:spcPts val="0"/>
+              </a:spcBef>
+              <a:spcAft>
+                <a:spcPts val="0"/>
+              </a:spcAft>
+            </a:pPr>
+            <a:r>
+              <a:rPr sz="975" b="0" i="0" kern="100">
+                <a:solidFill>
+                  <a:srgbClr val="B5979D"/>
+                </a:solidFill>
+                <a:latin typeface="Plus Jakarta Sans"/>
+              </a:rPr>
+              <a:t>What passes on</a:t>
+            </a:r>
+          </a:p>
+        </p:txBody>
+      </p:sp>
+      <p:sp>
+        <p:nvSpPr>
+          <p:cNvPr id="87" name="!!T Us"/>
+          <p:cNvSpPr txBox="1"/>
+          <p:nvPr/>
+        </p:nvSpPr>
+        <p:spPr>
+          <a:xfrm>
+            <a:off x="11001673" y="6536246"/>
             <a:ext cx="273004" cy="123825"/>
           </a:xfrm>
           <a:prstGeom prst="rect">
@@ -8717,7 +8766,7 @@
       </p:sp>
       <p:sp>
         <p:nvSpPr>
-          <p:cNvPr id="87" name="!!T 10 / 15"/>
+          <p:cNvPr id="88" name="!!T 10 / 15"/>
           <p:cNvSpPr txBox="1"/>
           <p:nvPr/>
         </p:nvSpPr>
@@ -11676,7 +11725,7 @@
         </p:nvSpPr>
         <p:spPr>
           <a:xfrm>
-            <a:off x="6652617" y="6536246"/>
+            <a:off x="6072188" y="6536246"/>
             <a:ext cx="895201" cy="123825"/>
           </a:xfrm>
           <a:prstGeom prst="rect">
@@ -11721,7 +11770,7 @@
         </p:nvSpPr>
         <p:spPr>
           <a:xfrm>
-            <a:off x="7598866" y="6536246"/>
+            <a:off x="6932712" y="6536246"/>
             <a:ext cx="804017" cy="123825"/>
           </a:xfrm>
           <a:prstGeom prst="rect">
@@ -11766,7 +11815,7 @@
         </p:nvSpPr>
         <p:spPr>
           <a:xfrm>
-            <a:off x="8459093" y="6536246"/>
+            <a:off x="7707213" y="6536246"/>
             <a:ext cx="885262" cy="123825"/>
           </a:xfrm>
           <a:prstGeom prst="rect">
@@ -11811,7 +11860,7 @@
         </p:nvSpPr>
         <p:spPr>
           <a:xfrm>
-            <a:off x="9395966" y="6536246"/>
+            <a:off x="8558361" y="6536246"/>
             <a:ext cx="738074" cy="123825"/>
           </a:xfrm>
           <a:prstGeom prst="rect">
@@ -11856,7 +11905,7 @@
         </p:nvSpPr>
         <p:spPr>
           <a:xfrm>
-            <a:off x="10193982" y="6536246"/>
+            <a:off x="9270653" y="6536246"/>
             <a:ext cx="753692" cy="123825"/>
           </a:xfrm>
           <a:prstGeom prst="rect">
@@ -11895,13 +11944,58 @@
       </p:sp>
       <p:sp>
         <p:nvSpPr>
-          <p:cNvPr id="75" name="!!T Us"/>
-          <p:cNvSpPr txBox="1"/>
-          <p:nvPr/>
-        </p:nvSpPr>
-        <p:spPr>
-          <a:xfrm>
-            <a:off x="11006733" y="6536246"/>
+          <p:cNvPr id="75" name="!!T What passes on"/>
+          <p:cNvSpPr txBox="1"/>
+          <p:nvPr/>
+        </p:nvSpPr>
+        <p:spPr>
+          <a:xfrm>
+            <a:off x="9997678" y="6536246"/>
+            <a:ext cx="1093029" cy="123825"/>
+          </a:xfrm>
+          <a:prstGeom prst="rect">
+            <a:avLst/>
+          </a:prstGeom>
+          <a:noFill/>
+        </p:spPr>
+        <p:txBody>
+          <a:bodyPr wrap="none" lIns="0" tIns="0" rIns="0" bIns="0" anchor="t">
+            <a:noAutofit/>
+          </a:bodyPr>
+          <a:lstStyle/>
+          <a:p>
+            <a:pPr algn="l">
+              <a:lnSpc>
+                <a:spcPts val="975"/>
+              </a:lnSpc>
+              <a:spcBef>
+                <a:spcPts val="0"/>
+              </a:spcBef>
+              <a:spcAft>
+                <a:spcPts val="0"/>
+              </a:spcAft>
+            </a:pPr>
+            <a:r>
+              <a:rPr sz="975" b="0" i="0" kern="100">
+                <a:solidFill>
+                  <a:srgbClr val="B5979D"/>
+                </a:solidFill>
+                <a:latin typeface="Plus Jakarta Sans"/>
+              </a:rPr>
+              <a:t>What passes on</a:t>
+            </a:r>
+          </a:p>
+        </p:txBody>
+      </p:sp>
+      <p:sp>
+        <p:nvSpPr>
+          <p:cNvPr id="76" name="!!T Us"/>
+          <p:cNvSpPr txBox="1"/>
+          <p:nvPr/>
+        </p:nvSpPr>
+        <p:spPr>
+          <a:xfrm>
+            <a:off x="11044833" y="6536246"/>
             <a:ext cx="273004" cy="123825"/>
           </a:xfrm>
           <a:prstGeom prst="rect">
@@ -11940,7 +12034,7 @@
       </p:sp>
       <p:sp>
         <p:nvSpPr>
-          <p:cNvPr id="76" name="!!T 11 / 15"/>
+          <p:cNvPr id="77" name="!!T 11 / 15"/>
           <p:cNvSpPr txBox="1"/>
           <p:nvPr/>
         </p:nvSpPr>
@@ -11985,7 +12079,7 @@
       </p:sp>
       <p:sp>
         <p:nvSpPr>
-          <p:cNvPr id="77" name="!!Ring 4877fa0e"/>
+          <p:cNvPr id="78" name="!!Ring 4877fa0e"/>
           <p:cNvSpPr/>
           <p:nvPr/>
         </p:nvSpPr>
@@ -12015,7 +12109,7 @@
       </p:sp>
       <p:sp>
         <p:nvSpPr>
-          <p:cNvPr id="78" name="!!span 625ab906"/>
+          <p:cNvPr id="79" name="!!span 625ab906"/>
           <p:cNvSpPr/>
           <p:nvPr/>
         </p:nvSpPr>
@@ -12053,7 +12147,7 @@
       </p:sp>
       <p:pic>
         <p:nvPicPr>
-          <p:cNvPr id="79" name="!!Drawing d47f8ea3" descr="image.png"/>
+          <p:cNvPr id="80" name="!!Drawing d47f8ea3" descr="image.png"/>
           <p:cNvPicPr>
             <a:picLocks noChangeAspect="1"/>
           </p:cNvPicPr>
@@ -12083,7 +12177,7 @@
       </p:pic>
       <p:sp>
         <p:nvSpPr>
-          <p:cNvPr id="80" name="!!Ring dd7cb4d9"/>
+          <p:cNvPr id="81" name="!!Ring dd7cb4d9"/>
           <p:cNvSpPr/>
           <p:nvPr/>
         </p:nvSpPr>
@@ -12113,7 +12207,7 @@
       </p:sp>
       <p:sp>
         <p:nvSpPr>
-          <p:cNvPr id="81" name="!!span 2d0c4856"/>
+          <p:cNvPr id="82" name="!!span 2d0c4856"/>
           <p:cNvSpPr/>
           <p:nvPr/>
         </p:nvSpPr>
@@ -12143,7 +12237,7 @@
       </p:sp>
       <p:pic>
         <p:nvPicPr>
-          <p:cNvPr id="82" name="!!Drawing b078a87f" descr="image.png"/>
+          <p:cNvPr id="83" name="!!Drawing b078a87f" descr="image.png"/>
           <p:cNvPicPr>
             <a:picLocks noChangeAspect="1"/>
           </p:cNvPicPr>
@@ -12173,7 +12267,7 @@
       </p:pic>
       <p:sp>
         <p:nvSpPr>
-          <p:cNvPr id="83" name="!!Ring 55aecc8e"/>
+          <p:cNvPr id="84" name="!!Ring 55aecc8e"/>
           <p:cNvSpPr/>
           <p:nvPr/>
         </p:nvSpPr>
@@ -12203,7 +12297,7 @@
       </p:sp>
       <p:sp>
         <p:nvSpPr>
-          <p:cNvPr id="84" name="!!span cbd59824"/>
+          <p:cNvPr id="85" name="!!span cbd59824"/>
           <p:cNvSpPr/>
           <p:nvPr/>
         </p:nvSpPr>
@@ -12233,7 +12327,7 @@
       </p:sp>
       <p:pic>
         <p:nvPicPr>
-          <p:cNvPr id="85" name="!!Drawing bd0f25c0" descr="image.png"/>
+          <p:cNvPr id="86" name="!!Drawing bd0f25c0" descr="image.png"/>
           <p:cNvPicPr>
             <a:picLocks noChangeAspect="1"/>
           </p:cNvPicPr>
@@ -12263,7 +12357,7 @@
       </p:pic>
       <p:sp>
         <p:nvSpPr>
-          <p:cNvPr id="86" name="!!Ring 6d8a1c38"/>
+          <p:cNvPr id="87" name="!!Ring 6d8a1c38"/>
           <p:cNvSpPr/>
           <p:nvPr/>
         </p:nvSpPr>
@@ -12293,7 +12387,7 @@
       </p:sp>
       <p:sp>
         <p:nvSpPr>
-          <p:cNvPr id="87" name="!!span d0d204da"/>
+          <p:cNvPr id="88" name="!!span d0d204da"/>
           <p:cNvSpPr/>
           <p:nvPr/>
         </p:nvSpPr>
@@ -12323,7 +12417,7 @@
       </p:sp>
       <p:pic>
         <p:nvPicPr>
-          <p:cNvPr id="88" name="!!Drawing 9d1c2717" descr="image.png"/>
+          <p:cNvPr id="89" name="!!Drawing 9d1c2717" descr="image.png"/>
           <p:cNvPicPr>
             <a:picLocks noChangeAspect="1"/>
           </p:cNvPicPr>
@@ -15098,7 +15192,7 @@
         <p:spPr>
           <a:xfrm>
             <a:off x="457200" y="6452104"/>
-            <a:ext cx="5978000" cy="297120"/>
+            <a:ext cx="5524920" cy="297120"/>
           </a:xfrm>
           <a:prstGeom prst="rect">
             <a:avLst/>
@@ -15129,7 +15223,7 @@
                 </a:solidFill>
                 <a:latin typeface="Plus Jakarta Sans"/>
               </a:rPr>
-              <a:t>Inheritance at Carmen's 89: savings and home equity, less unpaid bills, today's money; the same 10,000</a:t>
+              <a:t>Inheritance at Carmen's 89: savings and home equity, less unpaid bills, today's money; the same</a:t>
             </a:r>
           </a:p>
           <a:p>
@@ -15151,7 +15245,7 @@
                 </a:solidFill>
                 <a:latin typeface="Plus Jakarta Sans"/>
               </a:rPr>
-              <a:t>markets (measured). Succession: written case §9, Figure 22.</a:t>
+              <a:t>10,000 markets (measured). Succession: written case §9, Figure 22.</a:t>
             </a:r>
           </a:p>
         </p:txBody>
@@ -15164,7 +15258,7 @@
         </p:nvSpPr>
         <p:spPr>
           <a:xfrm>
-            <a:off x="6625233" y="6536246"/>
+            <a:off x="6050161" y="6536246"/>
             <a:ext cx="895201" cy="123825"/>
           </a:xfrm>
           <a:prstGeom prst="rect">
@@ -15209,7 +15303,7 @@
         </p:nvSpPr>
         <p:spPr>
           <a:xfrm>
-            <a:off x="7571482" y="6536246"/>
+            <a:off x="6910685" y="6536246"/>
             <a:ext cx="804017" cy="123825"/>
           </a:xfrm>
           <a:prstGeom prst="rect">
@@ -15254,7 +15348,7 @@
         </p:nvSpPr>
         <p:spPr>
           <a:xfrm>
-            <a:off x="8431709" y="6536246"/>
+            <a:off x="7685187" y="6536246"/>
             <a:ext cx="885262" cy="123825"/>
           </a:xfrm>
           <a:prstGeom prst="rect">
@@ -15299,7 +15393,7 @@
         </p:nvSpPr>
         <p:spPr>
           <a:xfrm>
-            <a:off x="9368582" y="6536246"/>
+            <a:off x="8536335" y="6536246"/>
             <a:ext cx="738074" cy="123825"/>
           </a:xfrm>
           <a:prstGeom prst="rect">
@@ -15344,8 +15438,8 @@
         </p:nvSpPr>
         <p:spPr>
           <a:xfrm>
-            <a:off x="10166598" y="6536246"/>
-            <a:ext cx="753692" cy="123825"/>
+            <a:off x="9248626" y="6536246"/>
+            <a:ext cx="735235" cy="123825"/>
           </a:xfrm>
           <a:prstGeom prst="rect">
             <a:avLst/>
@@ -15372,24 +15466,69 @@
             <a:r>
               <a:rPr sz="975" b="0" i="0" kern="100">
                 <a:solidFill>
+                  <a:srgbClr val="B5979D"/>
+                </a:solidFill>
+                <a:latin typeface="Plus Jakarta Sans"/>
+              </a:rPr>
+              <a:t>What next</a:t>
+            </a:r>
+          </a:p>
+        </p:txBody>
+      </p:sp>
+      <p:sp>
+        <p:nvSpPr>
+          <p:cNvPr id="76" name="!!T What passes on #2"/>
+          <p:cNvSpPr txBox="1"/>
+          <p:nvPr/>
+        </p:nvSpPr>
+        <p:spPr>
+          <a:xfrm>
+            <a:off x="9958239" y="6536246"/>
+            <a:ext cx="1105808" cy="123825"/>
+          </a:xfrm>
+          <a:prstGeom prst="rect">
+            <a:avLst/>
+          </a:prstGeom>
+          <a:noFill/>
+        </p:spPr>
+        <p:txBody>
+          <a:bodyPr wrap="none" lIns="0" tIns="0" rIns="0" bIns="0" anchor="t">
+            <a:noAutofit/>
+          </a:bodyPr>
+          <a:lstStyle/>
+          <a:p>
+            <a:pPr algn="l">
+              <a:lnSpc>
+                <a:spcPts val="975"/>
+              </a:lnSpc>
+              <a:spcBef>
+                <a:spcPts val="0"/>
+              </a:spcBef>
+              <a:spcAft>
+                <a:spcPts val="0"/>
+              </a:spcAft>
+            </a:pPr>
+            <a:r>
+              <a:rPr sz="975" b="0" i="0" kern="100">
+                <a:solidFill>
                   <a:srgbClr val="1B1716"/>
                 </a:solidFill>
                 <a:latin typeface="Plus Jakarta Sans SemiBold"/>
               </a:rPr>
-              <a:t>What next</a:t>
-            </a:r>
-          </a:p>
-        </p:txBody>
-      </p:sp>
-      <p:sp>
-        <p:nvSpPr>
-          <p:cNvPr id="76" name="!!T Us"/>
-          <p:cNvSpPr txBox="1"/>
-          <p:nvPr/>
-        </p:nvSpPr>
-        <p:spPr>
-          <a:xfrm>
-            <a:off x="10979348" y="6536246"/>
+              <a:t>What passes on</a:t>
+            </a:r>
+          </a:p>
+        </p:txBody>
+      </p:sp>
+      <p:sp>
+        <p:nvSpPr>
+          <p:cNvPr id="77" name="!!T Us"/>
+          <p:cNvSpPr txBox="1"/>
+          <p:nvPr/>
+        </p:nvSpPr>
+        <p:spPr>
+          <a:xfrm>
+            <a:off x="11017448" y="6536246"/>
             <a:ext cx="273004" cy="123825"/>
           </a:xfrm>
           <a:prstGeom prst="rect">
@@ -15428,7 +15567,7 @@
       </p:sp>
       <p:sp>
         <p:nvSpPr>
-          <p:cNvPr id="77" name="!!T 12 / 15"/>
+          <p:cNvPr id="78" name="!!T 12 / 15"/>
           <p:cNvSpPr txBox="1"/>
           <p:nvPr/>
         </p:nvSpPr>
@@ -16451,14 +16590,14 @@
       </p:sp>
       <p:sp>
         <p:nvSpPr>
-          <p:cNvPr id="23" name="!!T HKMA, Wealth Management Connect, Southbo"/>
+          <p:cNvPr id="23" name="!!T HKMA, WMC Southbound Scheme (page revise"/>
           <p:cNvSpPr txBox="1"/>
           <p:nvPr/>
         </p:nvSpPr>
         <p:spPr>
           <a:xfrm>
             <a:off x="457200" y="6452104"/>
-            <a:ext cx="6378863" cy="297120"/>
+            <a:ext cx="5786482" cy="297120"/>
           </a:xfrm>
           <a:prstGeom prst="rect">
             <a:avLst/>
@@ -16489,7 +16628,7 @@
                 </a:solidFill>
                 <a:latin typeface="Plus Jakarta Sans"/>
               </a:rPr>
-              <a:t>HKMA, Wealth Management Connect, Southbound Scheme (page revised 11 May 2026, checked 24 Oct 2026):</a:t>
+              <a:t>HKMA, WMC Southbound Scheme (page revised 11 May 2026, checked 24 Oct 2026): quota, eligible</a:t>
             </a:r>
           </a:p>
           <a:p>
@@ -16511,7 +16650,7 @@
                 </a:solidFill>
                 <a:latin typeface="Plus Jakarta Sans"/>
               </a:rPr>
-              <a:t>the quota, the eligible funds, the solicitation rule (sourced). Map: geoBoundaries, OCHA/HDX (CC BY 3.0 IGO).</a:t>
+              <a:t>funds, solicitation rule (sourced). Map: geoBoundaries, OCHA/HDX (CC BY 3.0 IGO).</a:t>
             </a:r>
           </a:p>
         </p:txBody>
@@ -16524,7 +16663,7 @@
         </p:nvSpPr>
         <p:spPr>
           <a:xfrm>
-            <a:off x="6638925" y="6536246"/>
+            <a:off x="6058495" y="6536246"/>
             <a:ext cx="895201" cy="123825"/>
           </a:xfrm>
           <a:prstGeom prst="rect">
@@ -16569,7 +16708,7 @@
         </p:nvSpPr>
         <p:spPr>
           <a:xfrm>
-            <a:off x="7585174" y="6536246"/>
+            <a:off x="6919020" y="6536246"/>
             <a:ext cx="804017" cy="123825"/>
           </a:xfrm>
           <a:prstGeom prst="rect">
@@ -16614,7 +16753,7 @@
         </p:nvSpPr>
         <p:spPr>
           <a:xfrm>
-            <a:off x="8445401" y="6536246"/>
+            <a:off x="7693521" y="6536246"/>
             <a:ext cx="885262" cy="123825"/>
           </a:xfrm>
           <a:prstGeom prst="rect">
@@ -16659,7 +16798,7 @@
         </p:nvSpPr>
         <p:spPr>
           <a:xfrm>
-            <a:off x="9382274" y="6536246"/>
+            <a:off x="8544669" y="6536246"/>
             <a:ext cx="738074" cy="123825"/>
           </a:xfrm>
           <a:prstGeom prst="rect">
@@ -16704,7 +16843,7 @@
         </p:nvSpPr>
         <p:spPr>
           <a:xfrm>
-            <a:off x="10180290" y="6536246"/>
+            <a:off x="9256961" y="6536246"/>
             <a:ext cx="735235" cy="123825"/>
           </a:xfrm>
           <a:prstGeom prst="rect">
@@ -16743,13 +16882,58 @@
       </p:sp>
       <p:sp>
         <p:nvSpPr>
-          <p:cNvPr id="29" name="!!T Us"/>
-          <p:cNvSpPr txBox="1"/>
-          <p:nvPr/>
-        </p:nvSpPr>
-        <p:spPr>
-          <a:xfrm>
-            <a:off x="10975628" y="6536246"/>
+          <p:cNvPr id="29" name="!!T What passes on"/>
+          <p:cNvSpPr txBox="1"/>
+          <p:nvPr/>
+        </p:nvSpPr>
+        <p:spPr>
+          <a:xfrm>
+            <a:off x="9966573" y="6536246"/>
+            <a:ext cx="1093029" cy="123825"/>
+          </a:xfrm>
+          <a:prstGeom prst="rect">
+            <a:avLst/>
+          </a:prstGeom>
+          <a:noFill/>
+        </p:spPr>
+        <p:txBody>
+          <a:bodyPr wrap="none" lIns="0" tIns="0" rIns="0" bIns="0" anchor="t">
+            <a:noAutofit/>
+          </a:bodyPr>
+          <a:lstStyle/>
+          <a:p>
+            <a:pPr algn="l">
+              <a:lnSpc>
+                <a:spcPts val="975"/>
+              </a:lnSpc>
+              <a:spcBef>
+                <a:spcPts val="0"/>
+              </a:spcBef>
+              <a:spcAft>
+                <a:spcPts val="0"/>
+              </a:spcAft>
+            </a:pPr>
+            <a:r>
+              <a:rPr sz="975" b="0" i="0" kern="100">
+                <a:solidFill>
+                  <a:srgbClr val="B5979D"/>
+                </a:solidFill>
+                <a:latin typeface="Plus Jakarta Sans"/>
+              </a:rPr>
+              <a:t>What passes on</a:t>
+            </a:r>
+          </a:p>
+        </p:txBody>
+      </p:sp>
+      <p:sp>
+        <p:nvSpPr>
+          <p:cNvPr id="30" name="!!T Us"/>
+          <p:cNvSpPr txBox="1"/>
+          <p:nvPr/>
+        </p:nvSpPr>
+        <p:spPr>
+          <a:xfrm>
+            <a:off x="11013728" y="6536246"/>
             <a:ext cx="275055" cy="123825"/>
           </a:xfrm>
           <a:prstGeom prst="rect">
@@ -16788,7 +16972,7 @@
       </p:sp>
       <p:sp>
         <p:nvSpPr>
-          <p:cNvPr id="30" name="!!T 13 / 15"/>
+          <p:cNvPr id="31" name="!!T 13 / 15"/>
           <p:cNvSpPr txBox="1"/>
           <p:nvPr/>
         </p:nvSpPr>
@@ -16833,7 +17017,7 @@
       </p:sp>
       <p:sp>
         <p:nvSpPr>
-          <p:cNvPr id="31" name="!!Rule 9307caaa"/>
+          <p:cNvPr id="32" name="!!Rule 9307caaa"/>
           <p:cNvSpPr/>
           <p:nvPr/>
         </p:nvSpPr>
@@ -16863,7 +17047,7 @@
       </p:sp>
       <p:sp>
         <p:nvSpPr>
-          <p:cNvPr id="32" name="!!T Northbound"/>
+          <p:cNvPr id="33" name="!!T Northbound"/>
           <p:cNvSpPr txBox="1"/>
           <p:nvPr/>
         </p:nvSpPr>
@@ -16908,7 +17092,7 @@
       </p:sp>
       <p:sp>
         <p:nvSpPr>
-          <p:cNvPr id="33" name="!!T Hong Kong and Macao residents buy mainla"/>
+          <p:cNvPr id="34" name="!!T Hong Kong and Macao residents buy mainla"/>
           <p:cNvSpPr txBox="1"/>
           <p:nvPr/>
         </p:nvSpPr>
@@ -17006,7 +17190,7 @@
       </p:sp>
       <p:sp>
         <p:nvSpPr>
-          <p:cNvPr id="34" name="!!Rule b23448fe"/>
+          <p:cNvPr id="35" name="!!Rule b23448fe"/>
           <p:cNvSpPr/>
           <p:nvPr/>
         </p:nvSpPr>
@@ -17036,7 +17220,7 @@
       </p:sp>
       <p:sp>
         <p:nvSpPr>
-          <p:cNvPr id="35" name="!!T For the Wongs: a tool for later"/>
+          <p:cNvPr id="36" name="!!T For the Wongs: a tool for later"/>
           <p:cNvSpPr txBox="1"/>
           <p:nvPr/>
         </p:nvSpPr>
@@ -17081,7 +17265,7 @@
       </p:sp>
       <p:sp>
         <p:nvSpPr>
-          <p:cNvPr id="36" name="!!T Kept out today: their home, income and b"/>
+          <p:cNvPr id="37" name="!!T Kept out today: their home, income and b"/>
           <p:cNvSpPr txBox="1"/>
           <p:nvPr/>
         </p:nvSpPr>
@@ -17219,7 +17403,7 @@
       </p:sp>
       <p:sp>
         <p:nvSpPr>
-          <p:cNvPr id="37" name="!!T Southbound"/>
+          <p:cNvPr id="38" name="!!T Southbound"/>
           <p:cNvSpPr txBox="1"/>
           <p:nvPr/>
         </p:nvSpPr>
@@ -17264,7 +17448,7 @@
       </p:sp>
       <p:sp>
         <p:nvSpPr>
-          <p:cNvPr id="38" name="!!T Mainland residents buy Hong Kong funds, "/>
+          <p:cNvPr id="39" name="!!T Mainland residents buy Hong Kong funds, "/>
           <p:cNvSpPr txBox="1"/>
           <p:nvPr/>
         </p:nvSpPr>
@@ -17371,7 +17555,7 @@
       </p:sp>
       <p:sp>
         <p:nvSpPr>
-          <p:cNvPr id="39" name="!!Rule e8e771bd"/>
+          <p:cNvPr id="40" name="!!Rule e8e771bd"/>
           <p:cNvSpPr/>
           <p:nvPr/>
         </p:nvSpPr>
@@ -17401,7 +17585,7 @@
       </p:sp>
       <p:sp>
         <p:nvSpPr>
-          <p:cNvPr id="40" name="!!T For us: the market we want to serve"/>
+          <p:cNvPr id="41" name="!!T For us: the market we want to serve"/>
           <p:cNvSpPr txBox="1"/>
           <p:nvPr/>
         </p:nvSpPr>
@@ -17446,7 +17630,7 @@
       </p:sp>
       <p:sp>
         <p:nvSpPr>
-          <p:cNvPr id="41" name="!!T A Hong Kong bank won't solicit or recomm"/>
+          <p:cNvPr id="42" name="!!T A Hong Kong bank won't solicit or recomm"/>
           <p:cNvSpPr txBox="1"/>
           <p:nvPr/>
         </p:nvSpPr>
@@ -17584,7 +17768,7 @@
       </p:sp>
       <p:pic>
         <p:nvPicPr>
-          <p:cNvPr id="42" name="!!Drawing 3173ff20" descr="image.png"/>
+          <p:cNvPr id="43" name="!!Drawing 3173ff20" descr="image.png"/>
           <p:cNvPicPr>
             <a:picLocks noChangeAspect="1"/>
           </p:cNvPicPr>
@@ -17614,7 +17798,7 @@
       </p:pic>
       <p:pic>
         <p:nvPicPr>
-          <p:cNvPr id="43" name="!!Drawing 58632ecf" descr="image.png"/>
+          <p:cNvPr id="44" name="!!Drawing 58632ecf" descr="image.png"/>
           <p:cNvPicPr>
             <a:picLocks noChangeAspect="1"/>
           </p:cNvPicPr>
@@ -20079,7 +20263,7 @@
         <p:spPr>
           <a:xfrm>
             <a:off x="457200" y="6452104"/>
-            <a:ext cx="6082751" cy="297120"/>
+            <a:ext cx="5701135" cy="297120"/>
           </a:xfrm>
           <a:prstGeom prst="rect">
             <a:avLst/>
@@ -20110,7 +20294,7 @@
                 </a:solidFill>
                 <a:latin typeface="Plus Jakarta Sans"/>
               </a:rPr>
-              <a:t>Personal statements: written case p.14. Win's line is a draft for Win to confirm; Lookbua's edited line needs</a:t>
+              <a:t>Personal statements: written case p.14. Win's line is a draft for Win to confirm; Lookbua's edited line</a:t>
             </a:r>
           </a:p>
           <a:p>
@@ -20132,7 +20316,7 @@
                 </a:solidFill>
                 <a:latin typeface="Plus Jakarta Sans"/>
               </a:rPr>
-              <a:t>his OK.</a:t>
+              <a:t>needs his OK.</a:t>
             </a:r>
           </a:p>
         </p:txBody>
@@ -20145,7 +20329,7 @@
         </p:nvSpPr>
         <p:spPr>
           <a:xfrm>
-            <a:off x="6634311" y="6536246"/>
+            <a:off x="6053882" y="6536246"/>
             <a:ext cx="895201" cy="123825"/>
           </a:xfrm>
           <a:prstGeom prst="rect">
@@ -20190,7 +20374,7 @@
         </p:nvSpPr>
         <p:spPr>
           <a:xfrm>
-            <a:off x="7580561" y="6536246"/>
+            <a:off x="6914406" y="6536246"/>
             <a:ext cx="804017" cy="123825"/>
           </a:xfrm>
           <a:prstGeom prst="rect">
@@ -20235,7 +20419,7 @@
         </p:nvSpPr>
         <p:spPr>
           <a:xfrm>
-            <a:off x="8440787" y="6536246"/>
+            <a:off x="7688907" y="6536246"/>
             <a:ext cx="885262" cy="123825"/>
           </a:xfrm>
           <a:prstGeom prst="rect">
@@ -20280,7 +20464,7 @@
         </p:nvSpPr>
         <p:spPr>
           <a:xfrm>
-            <a:off x="9377660" y="6536246"/>
+            <a:off x="8540055" y="6536246"/>
             <a:ext cx="738074" cy="123825"/>
           </a:xfrm>
           <a:prstGeom prst="rect">
@@ -20325,7 +20509,7 @@
         </p:nvSpPr>
         <p:spPr>
           <a:xfrm>
-            <a:off x="10175677" y="6536246"/>
+            <a:off x="9252347" y="6536246"/>
             <a:ext cx="735235" cy="123825"/>
           </a:xfrm>
           <a:prstGeom prst="rect">
@@ -20364,13 +20548,58 @@
       </p:sp>
       <p:sp>
         <p:nvSpPr>
-          <p:cNvPr id="57" name="!!T Us"/>
-          <p:cNvSpPr txBox="1"/>
-          <p:nvPr/>
-        </p:nvSpPr>
-        <p:spPr>
-          <a:xfrm>
-            <a:off x="10971014" y="6536246"/>
+          <p:cNvPr id="57" name="!!T What passes on"/>
+          <p:cNvSpPr txBox="1"/>
+          <p:nvPr/>
+        </p:nvSpPr>
+        <p:spPr>
+          <a:xfrm>
+            <a:off x="9961959" y="6536246"/>
+            <a:ext cx="1093029" cy="123825"/>
+          </a:xfrm>
+          <a:prstGeom prst="rect">
+            <a:avLst/>
+          </a:prstGeom>
+          <a:noFill/>
+        </p:spPr>
+        <p:txBody>
+          <a:bodyPr wrap="none" lIns="0" tIns="0" rIns="0" bIns="0" anchor="t">
+            <a:noAutofit/>
+          </a:bodyPr>
+          <a:lstStyle/>
+          <a:p>
+            <a:pPr algn="l">
+              <a:lnSpc>
+                <a:spcPts val="975"/>
+              </a:lnSpc>
+              <a:spcBef>
+                <a:spcPts val="0"/>
+              </a:spcBef>
+              <a:spcAft>
+                <a:spcPts val="0"/>
+              </a:spcAft>
+            </a:pPr>
+            <a:r>
+              <a:rPr sz="975" b="0" i="0" kern="100">
+                <a:solidFill>
+                  <a:srgbClr val="B5979D"/>
+                </a:solidFill>
+                <a:latin typeface="Plus Jakarta Sans"/>
+              </a:rPr>
+              <a:t>What passes on</a:t>
+            </a:r>
+          </a:p>
+        </p:txBody>
+      </p:sp>
+      <p:sp>
+        <p:nvSpPr>
+          <p:cNvPr id="58" name="!!T Us"/>
+          <p:cNvSpPr txBox="1"/>
+          <p:nvPr/>
+        </p:nvSpPr>
+        <p:spPr>
+          <a:xfrm>
+            <a:off x="11009114" y="6536246"/>
             <a:ext cx="275055" cy="123825"/>
           </a:xfrm>
           <a:prstGeom prst="rect">
@@ -20409,7 +20638,7 @@
       </p:sp>
       <p:sp>
         <p:nvSpPr>
-          <p:cNvPr id="58" name="!!T 14 / 15"/>
+          <p:cNvPr id="59" name="!!T 14 / 15"/>
           <p:cNvSpPr txBox="1"/>
           <p:nvPr/>
         </p:nvSpPr>
@@ -24975,7 +25204,7 @@
         <p:spPr>
           <a:xfrm>
             <a:off x="457200" y="6452104"/>
-            <a:ext cx="6374919" cy="297120"/>
+            <a:ext cx="5829866" cy="297120"/>
           </a:xfrm>
           <a:prstGeom prst="rect">
             <a:avLst/>
@@ -25006,7 +25235,7 @@
                 </a:solidFill>
                 <a:latin typeface="Plus Jakarta Sans"/>
               </a:rPr>
-              <a:t>Case: statement of assets and liabilities (investments: funds, stocks, crypto, policy cash values; the last sliver, a</a:t>
+              <a:t>Case: statement of assets and liabilities (investments: funds, stocks, crypto, policy cash values; the</a:t>
             </a:r>
           </a:p>
           <a:p>
@@ -25028,7 +25257,7 @@
                 </a:solidFill>
                 <a:latin typeface="Plus Jakarta Sans"/>
               </a:rPr>
-              <a:t>car, HK$0.2M); savings after tax and MPF (written case §2). Portraits: illustrations, fictional.</a:t>
+              <a:t>last sliver, a car, HK$0.2M); savings after tax and MPF (written case §2). Portraits: illustrations, fictional.</a:t>
             </a:r>
           </a:p>
         </p:txBody>
@@ -25041,7 +25270,7 @@
         </p:nvSpPr>
         <p:spPr>
           <a:xfrm>
-            <a:off x="6683871" y="6536246"/>
+            <a:off x="6103441" y="6536246"/>
             <a:ext cx="906875" cy="123825"/>
           </a:xfrm>
           <a:prstGeom prst="rect">
@@ -25086,7 +25315,7 @@
         </p:nvSpPr>
         <p:spPr>
           <a:xfrm>
-            <a:off x="7641134" y="6536246"/>
+            <a:off x="6974979" y="6536246"/>
             <a:ext cx="804017" cy="123825"/>
           </a:xfrm>
           <a:prstGeom prst="rect">
@@ -25131,7 +25360,7 @@
         </p:nvSpPr>
         <p:spPr>
           <a:xfrm>
-            <a:off x="8501360" y="6536246"/>
+            <a:off x="7749480" y="6536246"/>
             <a:ext cx="885262" cy="123825"/>
           </a:xfrm>
           <a:prstGeom prst="rect">
@@ -25176,7 +25405,7 @@
         </p:nvSpPr>
         <p:spPr>
           <a:xfrm>
-            <a:off x="9438233" y="6536246"/>
+            <a:off x="8600629" y="6536246"/>
             <a:ext cx="738074" cy="123825"/>
           </a:xfrm>
           <a:prstGeom prst="rect">
@@ -25221,7 +25450,7 @@
         </p:nvSpPr>
         <p:spPr>
           <a:xfrm>
-            <a:off x="10236250" y="6536246"/>
+            <a:off x="9312920" y="6536246"/>
             <a:ext cx="735235" cy="123825"/>
           </a:xfrm>
           <a:prstGeom prst="rect">
@@ -25260,13 +25489,58 @@
       </p:sp>
       <p:sp>
         <p:nvSpPr>
-          <p:cNvPr id="86" name="!!T Us"/>
-          <p:cNvSpPr txBox="1"/>
-          <p:nvPr/>
-        </p:nvSpPr>
-        <p:spPr>
-          <a:xfrm>
-            <a:off x="11031587" y="6536246"/>
+          <p:cNvPr id="86" name="!!T What passes on"/>
+          <p:cNvSpPr txBox="1"/>
+          <p:nvPr/>
+        </p:nvSpPr>
+        <p:spPr>
+          <a:xfrm>
+            <a:off x="10022532" y="6536246"/>
+            <a:ext cx="1093029" cy="123825"/>
+          </a:xfrm>
+          <a:prstGeom prst="rect">
+            <a:avLst/>
+          </a:prstGeom>
+          <a:noFill/>
+        </p:spPr>
+        <p:txBody>
+          <a:bodyPr wrap="none" lIns="0" tIns="0" rIns="0" bIns="0" anchor="t">
+            <a:noAutofit/>
+          </a:bodyPr>
+          <a:lstStyle/>
+          <a:p>
+            <a:pPr algn="l">
+              <a:lnSpc>
+                <a:spcPts val="975"/>
+              </a:lnSpc>
+              <a:spcBef>
+                <a:spcPts val="0"/>
+              </a:spcBef>
+              <a:spcAft>
+                <a:spcPts val="0"/>
+              </a:spcAft>
+            </a:pPr>
+            <a:r>
+              <a:rPr sz="975" b="0" i="0" kern="100">
+                <a:solidFill>
+                  <a:srgbClr val="B5979D"/>
+                </a:solidFill>
+                <a:latin typeface="Plus Jakarta Sans"/>
+              </a:rPr>
+              <a:t>What passes on</a:t>
+            </a:r>
+          </a:p>
+        </p:txBody>
+      </p:sp>
+      <p:sp>
+        <p:nvSpPr>
+          <p:cNvPr id="87" name="!!T Us"/>
+          <p:cNvSpPr txBox="1"/>
+          <p:nvPr/>
+        </p:nvSpPr>
+        <p:spPr>
+          <a:xfrm>
+            <a:off x="11069687" y="6536246"/>
             <a:ext cx="273004" cy="123825"/>
           </a:xfrm>
           <a:prstGeom prst="rect">
@@ -25305,7 +25579,7 @@
       </p:sp>
       <p:sp>
         <p:nvSpPr>
-          <p:cNvPr id="87" name="!!T 2 / 15"/>
+          <p:cNvPr id="88" name="!!T 2 / 15"/>
           <p:cNvSpPr txBox="1"/>
           <p:nvPr/>
         </p:nvSpPr>
@@ -26991,7 +27265,7 @@
         <p:spPr>
           <a:xfrm>
             <a:off x="457200" y="6452104"/>
-            <a:ext cx="6060823" cy="297120"/>
+            <a:ext cx="5607743" cy="297120"/>
           </a:xfrm>
           <a:prstGeom prst="rect">
             <a:avLst/>
@@ -27022,7 +27296,7 @@
                 </a:solidFill>
                 <a:latin typeface="Plus Jakarta Sans"/>
               </a:rPr>
-              <a:t>Their own way: the business sold; the flat sold only when the money runs out. One typical future of 10,000</a:t>
+              <a:t>Their own way: the business sold; the flat sold only when the money runs out. One typical future of</a:t>
             </a:r>
           </a:p>
           <a:p>
@@ -27044,7 +27318,7 @@
                 </a:solidFill>
                 <a:latin typeface="Plus Jakarta Sans"/>
               </a:rPr>
-              <a:t>simulated markets, in today's money: an illustration, not a forecast.</a:t>
+              <a:t>10,000 simulated markets, in today's money: an illustration, not a forecast.</a:t>
             </a:r>
           </a:p>
         </p:txBody>
@@ -27057,7 +27331,7 @@
         </p:nvSpPr>
         <p:spPr>
           <a:xfrm>
-            <a:off x="6682085" y="6536246"/>
+            <a:off x="6101655" y="6536246"/>
             <a:ext cx="906875" cy="123825"/>
           </a:xfrm>
           <a:prstGeom prst="rect">
@@ -27102,7 +27376,7 @@
         </p:nvSpPr>
         <p:spPr>
           <a:xfrm>
-            <a:off x="7639348" y="6536246"/>
+            <a:off x="6973193" y="6536246"/>
             <a:ext cx="804017" cy="123825"/>
           </a:xfrm>
           <a:prstGeom prst="rect">
@@ -27147,7 +27421,7 @@
         </p:nvSpPr>
         <p:spPr>
           <a:xfrm>
-            <a:off x="8499574" y="6536246"/>
+            <a:off x="7747695" y="6536246"/>
             <a:ext cx="885262" cy="123825"/>
           </a:xfrm>
           <a:prstGeom prst="rect">
@@ -27192,7 +27466,7 @@
         </p:nvSpPr>
         <p:spPr>
           <a:xfrm>
-            <a:off x="9436447" y="6536246"/>
+            <a:off x="8598843" y="6536246"/>
             <a:ext cx="738074" cy="123825"/>
           </a:xfrm>
           <a:prstGeom prst="rect">
@@ -27237,7 +27511,7 @@
         </p:nvSpPr>
         <p:spPr>
           <a:xfrm>
-            <a:off x="10234464" y="6536246"/>
+            <a:off x="9311134" y="6536246"/>
             <a:ext cx="735235" cy="123825"/>
           </a:xfrm>
           <a:prstGeom prst="rect">
@@ -27276,13 +27550,58 @@
       </p:sp>
       <p:sp>
         <p:nvSpPr>
-          <p:cNvPr id="46" name="!!T Us"/>
-          <p:cNvSpPr txBox="1"/>
-          <p:nvPr/>
-        </p:nvSpPr>
-        <p:spPr>
-          <a:xfrm>
-            <a:off x="11029801" y="6536246"/>
+          <p:cNvPr id="46" name="!!T What passes on"/>
+          <p:cNvSpPr txBox="1"/>
+          <p:nvPr/>
+        </p:nvSpPr>
+        <p:spPr>
+          <a:xfrm>
+            <a:off x="10020746" y="6536246"/>
+            <a:ext cx="1093029" cy="123825"/>
+          </a:xfrm>
+          <a:prstGeom prst="rect">
+            <a:avLst/>
+          </a:prstGeom>
+          <a:noFill/>
+        </p:spPr>
+        <p:txBody>
+          <a:bodyPr wrap="none" lIns="0" tIns="0" rIns="0" bIns="0" anchor="t">
+            <a:noAutofit/>
+          </a:bodyPr>
+          <a:lstStyle/>
+          <a:p>
+            <a:pPr algn="l">
+              <a:lnSpc>
+                <a:spcPts val="975"/>
+              </a:lnSpc>
+              <a:spcBef>
+                <a:spcPts val="0"/>
+              </a:spcBef>
+              <a:spcAft>
+                <a:spcPts val="0"/>
+              </a:spcAft>
+            </a:pPr>
+            <a:r>
+              <a:rPr sz="975" b="0" i="0" kern="100">
+                <a:solidFill>
+                  <a:srgbClr val="B5979D"/>
+                </a:solidFill>
+                <a:latin typeface="Plus Jakarta Sans"/>
+              </a:rPr>
+              <a:t>What passes on</a:t>
+            </a:r>
+          </a:p>
+        </p:txBody>
+      </p:sp>
+      <p:sp>
+        <p:nvSpPr>
+          <p:cNvPr id="47" name="!!T Us"/>
+          <p:cNvSpPr txBox="1"/>
+          <p:nvPr/>
+        </p:nvSpPr>
+        <p:spPr>
+          <a:xfrm>
+            <a:off x="11067901" y="6536246"/>
             <a:ext cx="273004" cy="123825"/>
           </a:xfrm>
           <a:prstGeom prst="rect">
@@ -27321,7 +27640,7 @@
       </p:sp>
       <p:sp>
         <p:nvSpPr>
-          <p:cNvPr id="47" name="!!T 3 / 15"/>
+          <p:cNvPr id="48" name="!!T 3 / 15"/>
           <p:cNvSpPr txBox="1"/>
           <p:nvPr/>
         </p:nvSpPr>
@@ -27366,7 +27685,7 @@
       </p:sp>
       <p:sp>
         <p:nvSpPr>
-          <p:cNvPr id="48" name="!!T Savings, investments and MPF"/>
+          <p:cNvPr id="49" name="!!T Savings, investments and MPF"/>
           <p:cNvSpPr txBox="1"/>
           <p:nvPr/>
         </p:nvSpPr>
@@ -27411,7 +27730,7 @@
       </p:sp>
       <p:sp>
         <p:nvSpPr>
-          <p:cNvPr id="49" name="!!T since 2015, where Ryan and Chloe grew up"/>
+          <p:cNvPr id="50" name="!!T since 2015, where Ryan and Chloe grew up"/>
           <p:cNvSpPr txBox="1"/>
           <p:nvPr/>
         </p:nvSpPr>
@@ -27458,7 +27777,7 @@
       </p:sp>
       <p:sp>
         <p:nvSpPr>
-          <p:cNvPr id="50" name="!!T The home"/>
+          <p:cNvPr id="51" name="!!T The home"/>
           <p:cNvSpPr txBox="1"/>
           <p:nvPr/>
         </p:nvSpPr>
@@ -27503,7 +27822,7 @@
       </p:sp>
       <p:sp>
         <p:nvSpPr>
-          <p:cNvPr id="51" name="!!Rule 77250185"/>
+          <p:cNvPr id="52" name="!!Rule 77250185"/>
           <p:cNvSpPr/>
           <p:nvPr/>
         </p:nvSpPr>
@@ -27533,7 +27852,7 @@
       </p:sp>
       <p:sp>
         <p:nvSpPr>
-          <p:cNvPr id="52" name="!!Rule 25973030"/>
+          <p:cNvPr id="53" name="!!Rule 25973030"/>
           <p:cNvSpPr/>
           <p:nvPr/>
         </p:nvSpPr>
@@ -27563,7 +27882,7 @@
       </p:sp>
       <p:sp>
         <p:nvSpPr>
-          <p:cNvPr id="53" name="!!T HK$10M"/>
+          <p:cNvPr id="54" name="!!T HK$10M"/>
           <p:cNvSpPr txBox="1"/>
           <p:nvPr/>
         </p:nvSpPr>
@@ -27608,7 +27927,7 @@
       </p:sp>
       <p:sp>
         <p:nvSpPr>
-          <p:cNvPr id="54" name="!!Rule 852397c8"/>
+          <p:cNvPr id="55" name="!!Rule 852397c8"/>
           <p:cNvSpPr/>
           <p:nvPr/>
         </p:nvSpPr>
@@ -27638,7 +27957,7 @@
       </p:sp>
       <p:sp>
         <p:nvSpPr>
-          <p:cNvPr id="55" name="!!T HK$20M"/>
+          <p:cNvPr id="56" name="!!T HK$20M"/>
           <p:cNvSpPr txBox="1"/>
           <p:nvPr/>
         </p:nvSpPr>
@@ -27683,7 +28002,7 @@
       </p:sp>
       <p:sp>
         <p:nvSpPr>
-          <p:cNvPr id="56" name="!!Rule 5f683f82"/>
+          <p:cNvPr id="57" name="!!Rule 5f683f82"/>
           <p:cNvSpPr/>
           <p:nvPr/>
         </p:nvSpPr>
@@ -27713,7 +28032,7 @@
       </p:sp>
       <p:sp>
         <p:nvSpPr>
-          <p:cNvPr id="57" name="!!T HK$30M"/>
+          <p:cNvPr id="58" name="!!T HK$30M"/>
           <p:cNvSpPr txBox="1"/>
           <p:nvPr/>
         </p:nvSpPr>
@@ -27758,7 +28077,7 @@
       </p:sp>
       <p:sp>
         <p:nvSpPr>
-          <p:cNvPr id="58" name="!!Rule a4756d25"/>
+          <p:cNvPr id="59" name="!!Rule a4756d25"/>
           <p:cNvSpPr/>
           <p:nvPr/>
         </p:nvSpPr>
@@ -27788,7 +28107,7 @@
       </p:sp>
       <p:sp>
         <p:nvSpPr>
-          <p:cNvPr id="59" name="!!T The flat is sold, Carmen 83 when her sav"/>
+          <p:cNvPr id="60" name="!!T The flat is sold, Carmen 83 when her sav"/>
           <p:cNvSpPr txBox="1"/>
           <p:nvPr/>
         </p:nvSpPr>
@@ -27855,7 +28174,7 @@
       </p:sp>
       <p:sp>
         <p:nvSpPr>
-          <p:cNvPr id="60" name="!!ps-el 90d010ca"/>
+          <p:cNvPr id="61" name="!!ps-el 90d010ca"/>
           <p:cNvSpPr/>
           <p:nvPr/>
         </p:nvSpPr>
@@ -27894,7 +28213,7 @@
       </p:sp>
       <p:sp>
         <p:nvSpPr>
-          <p:cNvPr id="61" name="!!Rule fa57db72"/>
+          <p:cNvPr id="62" name="!!Rule fa57db72"/>
           <p:cNvSpPr/>
           <p:nvPr/>
         </p:nvSpPr>
@@ -27924,7 +28243,7 @@
       </p:sp>
       <p:sp>
         <p:nvSpPr>
-          <p:cNvPr id="62" name="!!T Runs out again, Carmen 86 then unpaid bi"/>
+          <p:cNvPr id="63" name="!!T Runs out again, Carmen 86 then unpaid bi"/>
           <p:cNvSpPr txBox="1"/>
           <p:nvPr/>
         </p:nvSpPr>
@@ -27991,7 +28310,7 @@
       </p:sp>
       <p:sp>
         <p:nvSpPr>
-          <p:cNvPr id="63" name="!!ps-el f1f15a2e"/>
+          <p:cNvPr id="64" name="!!ps-el f1f15a2e"/>
           <p:cNvSpPr/>
           <p:nvPr/>
         </p:nvSpPr>
@@ -29521,7 +29840,7 @@
         <p:spPr>
           <a:xfrm>
             <a:off x="457200" y="6452104"/>
-            <a:ext cx="6414043" cy="297120"/>
+            <a:ext cx="5670846" cy="297120"/>
           </a:xfrm>
           <a:prstGeom prst="rect">
             <a:avLst/>
@@ -29552,7 +29871,7 @@
                 </a:solidFill>
                 <a:latin typeface="Plus Jakarta Sans"/>
               </a:rPr>
-              <a:t>Chance the money lasts to Carmen's 89, 10,000 simulated markets (measured); with the spending rules, almost</a:t>
+              <a:t>Chance the money lasts to Carmen's 89, 10,000 simulated markets (measured); with the spending</a:t>
             </a:r>
           </a:p>
           <a:p>
@@ -29574,7 +29893,7 @@
                 </a:solidFill>
                 <a:latin typeface="Plus Jakarta Sans"/>
               </a:rPr>
-              <a:t>every future. Their own way: the business sold, the flat sold when the money runs out.</a:t>
+              <a:t>rules, almost every future. Their own way: the business sold, the flat sold when the money runs out.</a:t>
             </a:r>
           </a:p>
         </p:txBody>
@@ -29587,7 +29906,7 @@
         </p:nvSpPr>
         <p:spPr>
           <a:xfrm>
-            <a:off x="6671370" y="6536246"/>
+            <a:off x="6090940" y="6536246"/>
             <a:ext cx="895201" cy="123825"/>
           </a:xfrm>
           <a:prstGeom prst="rect">
@@ -29632,7 +29951,7 @@
         </p:nvSpPr>
         <p:spPr>
           <a:xfrm>
-            <a:off x="7617619" y="6536246"/>
+            <a:off x="6951464" y="6536246"/>
             <a:ext cx="822159" cy="123825"/>
           </a:xfrm>
           <a:prstGeom prst="rect">
@@ -29677,7 +29996,7 @@
         </p:nvSpPr>
         <p:spPr>
           <a:xfrm>
-            <a:off x="8494961" y="6536246"/>
+            <a:off x="7743081" y="6536246"/>
             <a:ext cx="885262" cy="123825"/>
           </a:xfrm>
           <a:prstGeom prst="rect">
@@ -29722,7 +30041,7 @@
         </p:nvSpPr>
         <p:spPr>
           <a:xfrm>
-            <a:off x="9431834" y="6536246"/>
+            <a:off x="8594229" y="6536246"/>
             <a:ext cx="738074" cy="123825"/>
           </a:xfrm>
           <a:prstGeom prst="rect">
@@ -29767,7 +30086,7 @@
         </p:nvSpPr>
         <p:spPr>
           <a:xfrm>
-            <a:off x="10229850" y="6536246"/>
+            <a:off x="9306520" y="6536246"/>
             <a:ext cx="735235" cy="123825"/>
           </a:xfrm>
           <a:prstGeom prst="rect">
@@ -29806,13 +30125,58 @@
       </p:sp>
       <p:sp>
         <p:nvSpPr>
-          <p:cNvPr id="43" name="!!T Us"/>
-          <p:cNvSpPr txBox="1"/>
-          <p:nvPr/>
-        </p:nvSpPr>
-        <p:spPr>
-          <a:xfrm>
-            <a:off x="11025188" y="6536246"/>
+          <p:cNvPr id="43" name="!!T What passes on #2"/>
+          <p:cNvSpPr txBox="1"/>
+          <p:nvPr/>
+        </p:nvSpPr>
+        <p:spPr>
+          <a:xfrm>
+            <a:off x="10016133" y="6536246"/>
+            <a:ext cx="1093029" cy="123825"/>
+          </a:xfrm>
+          <a:prstGeom prst="rect">
+            <a:avLst/>
+          </a:prstGeom>
+          <a:noFill/>
+        </p:spPr>
+        <p:txBody>
+          <a:bodyPr wrap="none" lIns="0" tIns="0" rIns="0" bIns="0" anchor="t">
+            <a:noAutofit/>
+          </a:bodyPr>
+          <a:lstStyle/>
+          <a:p>
+            <a:pPr algn="l">
+              <a:lnSpc>
+                <a:spcPts val="975"/>
+              </a:lnSpc>
+              <a:spcBef>
+                <a:spcPts val="0"/>
+              </a:spcBef>
+              <a:spcAft>
+                <a:spcPts val="0"/>
+              </a:spcAft>
+            </a:pPr>
+            <a:r>
+              <a:rPr sz="975" b="0" i="0" kern="100">
+                <a:solidFill>
+                  <a:srgbClr val="A9858B"/>
+                </a:solidFill>
+                <a:latin typeface="Plus Jakarta Sans"/>
+              </a:rPr>
+              <a:t>What passes on</a:t>
+            </a:r>
+          </a:p>
+        </p:txBody>
+      </p:sp>
+      <p:sp>
+        <p:nvSpPr>
+          <p:cNvPr id="44" name="!!T Us"/>
+          <p:cNvSpPr txBox="1"/>
+          <p:nvPr/>
+        </p:nvSpPr>
+        <p:spPr>
+          <a:xfrm>
+            <a:off x="11063288" y="6536246"/>
             <a:ext cx="273004" cy="123825"/>
           </a:xfrm>
           <a:prstGeom prst="rect">
@@ -29851,7 +30215,7 @@
       </p:sp>
       <p:sp>
         <p:nvSpPr>
-          <p:cNvPr id="44" name="!!T 4 / 15"/>
+          <p:cNvPr id="45" name="!!T 4 / 15"/>
           <p:cNvSpPr txBox="1"/>
           <p:nvPr/>
         </p:nvSpPr>
@@ -31792,7 +32156,7 @@
         <p:spPr>
           <a:xfrm>
             <a:off x="457200" y="6452104"/>
-            <a:ext cx="6214479" cy="297120"/>
+            <a:ext cx="5599066" cy="297120"/>
           </a:xfrm>
           <a:prstGeom prst="rect">
             <a:avLst/>
@@ -31823,7 +32187,7 @@
                 </a:solidFill>
                 <a:latin typeface="Plus Jakarta Sans"/>
               </a:rPr>
-              <a:t>Year-1 premiums from 2026 rate cards and the market range for disability cover; quotes to follow (estimated</a:t>
+              <a:t>Year-1 premiums from 2026 rate cards and the market range for disability cover; quotes to follow.</a:t>
             </a:r>
           </a:p>
           <a:p>
@@ -31845,7 +32209,7 @@
                 </a:solidFill>
                 <a:latin typeface="Plus Jakarta Sans"/>
               </a:rPr>
-              <a:t>from market range and rate cards). Surplus: HK$718K a year after tax and MPF (written case §2).</a:t>
+              <a:t>Surplus: HK$718K a year after tax and MPF (written case §2).</a:t>
             </a:r>
           </a:p>
         </p:txBody>
@@ -31858,7 +32222,7 @@
         </p:nvSpPr>
         <p:spPr>
           <a:xfrm>
-            <a:off x="6673900" y="6536246"/>
+            <a:off x="6093470" y="6536246"/>
             <a:ext cx="895201" cy="123825"/>
           </a:xfrm>
           <a:prstGeom prst="rect">
@@ -31903,7 +32267,7 @@
         </p:nvSpPr>
         <p:spPr>
           <a:xfrm>
-            <a:off x="7620149" y="6536246"/>
+            <a:off x="6953994" y="6536246"/>
             <a:ext cx="804017" cy="123825"/>
           </a:xfrm>
           <a:prstGeom prst="rect">
@@ -31948,7 +32312,7 @@
         </p:nvSpPr>
         <p:spPr>
           <a:xfrm>
-            <a:off x="8480375" y="6536246"/>
+            <a:off x="7728496" y="6536246"/>
             <a:ext cx="905140" cy="123825"/>
           </a:xfrm>
           <a:prstGeom prst="rect">
@@ -31993,7 +32357,7 @@
         </p:nvSpPr>
         <p:spPr>
           <a:xfrm>
-            <a:off x="9436001" y="6536246"/>
+            <a:off x="8598396" y="6536246"/>
             <a:ext cx="738074" cy="123825"/>
           </a:xfrm>
           <a:prstGeom prst="rect">
@@ -32038,7 +32402,7 @@
         </p:nvSpPr>
         <p:spPr>
           <a:xfrm>
-            <a:off x="10234017" y="6536246"/>
+            <a:off x="9310688" y="6536246"/>
             <a:ext cx="735235" cy="123825"/>
           </a:xfrm>
           <a:prstGeom prst="rect">
@@ -32077,13 +32441,58 @@
       </p:sp>
       <p:sp>
         <p:nvSpPr>
-          <p:cNvPr id="52" name="!!T Us"/>
-          <p:cNvSpPr txBox="1"/>
-          <p:nvPr/>
-        </p:nvSpPr>
-        <p:spPr>
-          <a:xfrm>
-            <a:off x="11029355" y="6536246"/>
+          <p:cNvPr id="52" name="!!T What passes on"/>
+          <p:cNvSpPr txBox="1"/>
+          <p:nvPr/>
+        </p:nvSpPr>
+        <p:spPr>
+          <a:xfrm>
+            <a:off x="10020300" y="6536246"/>
+            <a:ext cx="1093029" cy="123825"/>
+          </a:xfrm>
+          <a:prstGeom prst="rect">
+            <a:avLst/>
+          </a:prstGeom>
+          <a:noFill/>
+        </p:spPr>
+        <p:txBody>
+          <a:bodyPr wrap="none" lIns="0" tIns="0" rIns="0" bIns="0" anchor="t">
+            <a:noAutofit/>
+          </a:bodyPr>
+          <a:lstStyle/>
+          <a:p>
+            <a:pPr algn="l">
+              <a:lnSpc>
+                <a:spcPts val="975"/>
+              </a:lnSpc>
+              <a:spcBef>
+                <a:spcPts val="0"/>
+              </a:spcBef>
+              <a:spcAft>
+                <a:spcPts val="0"/>
+              </a:spcAft>
+            </a:pPr>
+            <a:r>
+              <a:rPr sz="975" b="0" i="0" kern="100">
+                <a:solidFill>
+                  <a:srgbClr val="B5979D"/>
+                </a:solidFill>
+                <a:latin typeface="Plus Jakarta Sans"/>
+              </a:rPr>
+              <a:t>What passes on</a:t>
+            </a:r>
+          </a:p>
+        </p:txBody>
+      </p:sp>
+      <p:sp>
+        <p:nvSpPr>
+          <p:cNvPr id="53" name="!!T Us"/>
+          <p:cNvSpPr txBox="1"/>
+          <p:nvPr/>
+        </p:nvSpPr>
+        <p:spPr>
+          <a:xfrm>
+            <a:off x="11067455" y="6536246"/>
             <a:ext cx="273004" cy="123825"/>
           </a:xfrm>
           <a:prstGeom prst="rect">
@@ -32122,7 +32531,7 @@
       </p:sp>
       <p:sp>
         <p:nvSpPr>
-          <p:cNvPr id="53" name="!!T 5 / 15"/>
+          <p:cNvPr id="54" name="!!T 5 / 15"/>
           <p:cNvSpPr txBox="1"/>
           <p:nvPr/>
         </p:nvSpPr>
@@ -32167,7 +32576,7 @@
       </p:sp>
       <p:sp>
         <p:nvSpPr>
-          <p:cNvPr id="54" name="!!i b93e70e6"/>
+          <p:cNvPr id="55" name="!!i b93e70e6"/>
           <p:cNvSpPr/>
           <p:nvPr/>
         </p:nvSpPr>
@@ -32200,7 +32609,7 @@
       </p:sp>
       <p:cxnSp>
         <p:nvCxnSpPr>
-          <p:cNvPr id="55" name="!!Rule ede3e6c2"/>
+          <p:cNvPr id="56" name="!!Rule ede3e6c2"/>
           <p:cNvCxnSpPr/>
           <p:nvPr/>
         </p:nvCxnSpPr>
@@ -32236,7 +32645,7 @@
       </p:cxnSp>
       <p:cxnSp>
         <p:nvCxnSpPr>
-          <p:cNvPr id="56" name="!!Rule a75b2edc"/>
+          <p:cNvPr id="57" name="!!Rule a75b2edc"/>
           <p:cNvCxnSpPr/>
           <p:nvPr/>
         </p:nvCxnSpPr>
@@ -32272,7 +32681,7 @@
       </p:cxnSp>
       <p:cxnSp>
         <p:nvCxnSpPr>
-          <p:cNvPr id="57" name="!!Rule 6f3a42d9"/>
+          <p:cNvPr id="58" name="!!Rule 6f3a42d9"/>
           <p:cNvCxnSpPr/>
           <p:nvPr/>
         </p:nvCxnSpPr>
@@ -32308,7 +32717,7 @@
       </p:cxnSp>
       <p:sp>
         <p:nvSpPr>
-          <p:cNvPr id="58" name="!!T HK$22K short"/>
+          <p:cNvPr id="59" name="!!T HK$22K short"/>
           <p:cNvSpPr txBox="1"/>
           <p:nvPr/>
         </p:nvSpPr>
@@ -32353,7 +32762,7 @@
       </p:sp>
       <p:sp>
         <p:nvSpPr>
-          <p:cNvPr id="59" name="!!T every month"/>
+          <p:cNvPr id="60" name="!!T every month"/>
           <p:cNvSpPr txBox="1"/>
           <p:nvPr/>
         </p:nvSpPr>
@@ -32398,7 +32807,7 @@
       </p:sp>
       <p:sp>
         <p:nvSpPr>
-          <p:cNvPr id="60" name="!!i da042ed0"/>
+          <p:cNvPr id="61" name="!!i da042ed0"/>
           <p:cNvSpPr/>
           <p:nvPr/>
         </p:nvSpPr>
@@ -32436,7 +32845,7 @@
       </p:sp>
       <p:sp>
         <p:nvSpPr>
-          <p:cNvPr id="61" name="!!T Carmen's pay HK$60K"/>
+          <p:cNvPr id="62" name="!!T Carmen's pay HK$60K"/>
           <p:cNvSpPr txBox="1"/>
           <p:nvPr/>
         </p:nvSpPr>
@@ -32503,7 +32912,7 @@
       </p:sp>
       <p:sp>
         <p:nvSpPr>
-          <p:cNvPr id="62" name="!!T Today"/>
+          <p:cNvPr id="63" name="!!T Today"/>
           <p:cNvSpPr txBox="1"/>
           <p:nvPr/>
         </p:nvSpPr>
@@ -32548,7 +32957,7 @@
       </p:sp>
       <p:sp>
         <p:nvSpPr>
-          <p:cNvPr id="63" name="!!i 8cb27814"/>
+          <p:cNvPr id="64" name="!!i 8cb27814"/>
           <p:cNvSpPr/>
           <p:nvPr/>
         </p:nvSpPr>
@@ -32589,7 +32998,7 @@
       </p:sp>
       <p:sp>
         <p:nvSpPr>
-          <p:cNvPr id="64" name="!!T Adrian's cover HK$65K"/>
+          <p:cNvPr id="65" name="!!T Adrian's cover HK$65K"/>
           <p:cNvSpPr txBox="1"/>
           <p:nvPr/>
         </p:nvSpPr>
@@ -32656,7 +33065,7 @@
       </p:sp>
       <p:sp>
         <p:nvSpPr>
-          <p:cNvPr id="65" name="!!i 47b1027d"/>
+          <p:cNvPr id="66" name="!!i 47b1027d"/>
           <p:cNvSpPr/>
           <p:nvPr/>
         </p:nvSpPr>
@@ -32694,7 +33103,7 @@
       </p:sp>
       <p:sp>
         <p:nvSpPr>
-          <p:cNvPr id="66" name="!!T Carmen's pay HK$60K #2"/>
+          <p:cNvPr id="67" name="!!T Carmen's pay HK$60K #2"/>
           <p:cNvSpPr txBox="1"/>
           <p:nvPr/>
         </p:nvSpPr>
@@ -32761,7 +33170,7 @@
       </p:sp>
       <p:sp>
         <p:nvSpPr>
-          <p:cNvPr id="67" name="!!T With the plan"/>
+          <p:cNvPr id="68" name="!!T With the plan"/>
           <p:cNvSpPr txBox="1"/>
           <p:nvPr/>
         </p:nvSpPr>
@@ -32806,7 +33215,7 @@
       </p:sp>
       <p:sp>
         <p:nvSpPr>
-          <p:cNvPr id="68" name="!!Rule a9c7ea31"/>
+          <p:cNvPr id="69" name="!!Rule a9c7ea31"/>
           <p:cNvSpPr/>
           <p:nvPr/>
         </p:nvSpPr>
@@ -32836,7 +33245,7 @@
       </p:sp>
       <p:sp>
         <p:nvSpPr>
-          <p:cNvPr id="69" name="!!T HK$82K a month of bills"/>
+          <p:cNvPr id="70" name="!!T HK$82K a month of bills"/>
           <p:cNvSpPr txBox="1"/>
           <p:nvPr/>
         </p:nvSpPr>
@@ -32890,7 +33299,7 @@
       </p:sp>
       <p:sp>
         <p:nvSpPr>
-          <p:cNvPr id="70" name="!!Rule d22ec9fe"/>
+          <p:cNvPr id="71" name="!!Rule d22ec9fe"/>
           <p:cNvSpPr/>
           <p:nvPr/>
         </p:nvSpPr>
@@ -32920,7 +33329,7 @@
       </p:sp>
       <p:sp>
         <p:nvSpPr>
-          <p:cNvPr id="71" name="!!Rule dedcf2c7"/>
+          <p:cNvPr id="72" name="!!Rule dedcf2c7"/>
           <p:cNvSpPr/>
           <p:nvPr/>
         </p:nvSpPr>
@@ -32950,7 +33359,7 @@
       </p:sp>
       <p:sp>
         <p:nvSpPr>
-          <p:cNvPr id="72" name="!!Rule f549748b"/>
+          <p:cNvPr id="73" name="!!Rule f549748b"/>
           <p:cNvSpPr/>
           <p:nvPr/>
         </p:nvSpPr>
@@ -32980,7 +33389,7 @@
       </p:sp>
       <p:sp>
         <p:nvSpPr>
-          <p:cNvPr id="73" name="!!T 65% of his pay, until 65"/>
+          <p:cNvPr id="74" name="!!T 65% of his pay, until 65"/>
           <p:cNvSpPr txBox="1"/>
           <p:nvPr/>
         </p:nvSpPr>
@@ -33025,7 +33434,7 @@
       </p:sp>
       <p:sp>
         <p:nvSpPr>
-          <p:cNvPr id="74" name="!!T Carmen's own cover: HK$39K a month, unti"/>
+          <p:cNvPr id="75" name="!!T Carmen's own cover: HK$39K a month, unti"/>
           <p:cNvSpPr txBox="1"/>
           <p:nvPr/>
         </p:nvSpPr>
@@ -35564,7 +35973,7 @@
         <p:spPr>
           <a:xfrm>
             <a:off x="457200" y="6452104"/>
-            <a:ext cx="6349520" cy="297120"/>
+            <a:ext cx="5753826" cy="297120"/>
           </a:xfrm>
           <a:prstGeom prst="rect">
             <a:avLst/>
@@ -35595,7 +36004,7 @@
                 </a:solidFill>
                 <a:latin typeface="Plus Jakarta Sans"/>
               </a:rPr>
-              <a:t>Chance the money lasts to Carmen's 89, 10,000 simulated markets (measured); both ways pay Flexi premiums</a:t>
+              <a:t>Chance the money lasts to Carmen's 89, 10,000 simulated markets (measured); both ways pay Flexi</a:t>
             </a:r>
           </a:p>
           <a:p>
@@ -35617,7 +36026,7 @@
                 </a:solidFill>
                 <a:latin typeface="Plus Jakarta Sans"/>
               </a:rPr>
-              <a:t>for life. Assets: case; the business counted at HK$3.0M, as in the written case.</a:t>
+              <a:t>premiums for life. Assets: case; the business counted at HK$3.0M, as in the written case.</a:t>
             </a:r>
           </a:p>
         </p:txBody>
@@ -35630,7 +36039,7 @@
         </p:nvSpPr>
         <p:spPr>
           <a:xfrm>
-            <a:off x="6675686" y="6536246"/>
+            <a:off x="6095256" y="6536246"/>
             <a:ext cx="895201" cy="123825"/>
           </a:xfrm>
           <a:prstGeom prst="rect">
@@ -35675,7 +36084,7 @@
         </p:nvSpPr>
         <p:spPr>
           <a:xfrm>
-            <a:off x="7621935" y="6536246"/>
+            <a:off x="6955780" y="6536246"/>
             <a:ext cx="804017" cy="123825"/>
           </a:xfrm>
           <a:prstGeom prst="rect">
@@ -35720,7 +36129,7 @@
         </p:nvSpPr>
         <p:spPr>
           <a:xfrm>
-            <a:off x="8482161" y="6536246"/>
+            <a:off x="7730282" y="6536246"/>
             <a:ext cx="905140" cy="123825"/>
           </a:xfrm>
           <a:prstGeom prst="rect">
@@ -35765,7 +36174,7 @@
         </p:nvSpPr>
         <p:spPr>
           <a:xfrm>
-            <a:off x="9437787" y="6536246"/>
+            <a:off x="8600182" y="6536246"/>
             <a:ext cx="738074" cy="123825"/>
           </a:xfrm>
           <a:prstGeom prst="rect">
@@ -35810,7 +36219,7 @@
         </p:nvSpPr>
         <p:spPr>
           <a:xfrm>
-            <a:off x="10235803" y="6536246"/>
+            <a:off x="9312473" y="6536246"/>
             <a:ext cx="735235" cy="123825"/>
           </a:xfrm>
           <a:prstGeom prst="rect">
@@ -35849,13 +36258,58 @@
       </p:sp>
       <p:sp>
         <p:nvSpPr>
-          <p:cNvPr id="67" name="!!T Us"/>
-          <p:cNvSpPr txBox="1"/>
-          <p:nvPr/>
-        </p:nvSpPr>
-        <p:spPr>
-          <a:xfrm>
-            <a:off x="11031141" y="6536246"/>
+          <p:cNvPr id="67" name="!!T What passes on"/>
+          <p:cNvSpPr txBox="1"/>
+          <p:nvPr/>
+        </p:nvSpPr>
+        <p:spPr>
+          <a:xfrm>
+            <a:off x="10022086" y="6536246"/>
+            <a:ext cx="1093029" cy="123825"/>
+          </a:xfrm>
+          <a:prstGeom prst="rect">
+            <a:avLst/>
+          </a:prstGeom>
+          <a:noFill/>
+        </p:spPr>
+        <p:txBody>
+          <a:bodyPr wrap="none" lIns="0" tIns="0" rIns="0" bIns="0" anchor="t">
+            <a:noAutofit/>
+          </a:bodyPr>
+          <a:lstStyle/>
+          <a:p>
+            <a:pPr algn="l">
+              <a:lnSpc>
+                <a:spcPts val="975"/>
+              </a:lnSpc>
+              <a:spcBef>
+                <a:spcPts val="0"/>
+              </a:spcBef>
+              <a:spcAft>
+                <a:spcPts val="0"/>
+              </a:spcAft>
+            </a:pPr>
+            <a:r>
+              <a:rPr sz="975" b="0" i="0" kern="100">
+                <a:solidFill>
+                  <a:srgbClr val="B5979D"/>
+                </a:solidFill>
+                <a:latin typeface="Plus Jakarta Sans"/>
+              </a:rPr>
+              <a:t>What passes on</a:t>
+            </a:r>
+          </a:p>
+        </p:txBody>
+      </p:sp>
+      <p:sp>
+        <p:nvSpPr>
+          <p:cNvPr id="68" name="!!T Us"/>
+          <p:cNvSpPr txBox="1"/>
+          <p:nvPr/>
+        </p:nvSpPr>
+        <p:spPr>
+          <a:xfrm>
+            <a:off x="11069241" y="6536246"/>
             <a:ext cx="273004" cy="123825"/>
           </a:xfrm>
           <a:prstGeom prst="rect">
@@ -35894,7 +36348,7 @@
       </p:sp>
       <p:sp>
         <p:nvSpPr>
-          <p:cNvPr id="68" name="!!T 6 / 15"/>
+          <p:cNvPr id="69" name="!!T 6 / 15"/>
           <p:cNvSpPr txBox="1"/>
           <p:nvPr/>
         </p:nvSpPr>
@@ -38492,7 +38946,7 @@
         <p:spPr>
           <a:xfrm>
             <a:off x="457200" y="6452104"/>
-            <a:ext cx="6358670" cy="297120"/>
+            <a:ext cx="5600486" cy="297120"/>
           </a:xfrm>
           <a:prstGeom prst="rect">
             <a:avLst/>
@@ -38523,7 +38977,7 @@
                 </a:solidFill>
                 <a:latin typeface="Plus Jakarta Sans"/>
               </a:rPr>
-              <a:t>Slide 3's future, same markets, today's money: an illustration, not a forecast. Premiums: individual cover by age</a:t>
+              <a:t>Slide 3's future, same markets, today's money: an illustration, not a forecast. Premiums: individual</a:t>
             </a:r>
           </a:p>
           <a:p>
@@ -38545,7 +38999,7 @@
                 </a:solidFill>
                 <a:latin typeface="Plus Jakarta Sans"/>
               </a:rPr>
-              <a:t>and medical inflation; one policy from 2057 (Adrian's life expectancy, 84).</a:t>
+              <a:t>cover by age and medical inflation; one policy from 2057 (Adrian's life expectancy, 84).</a:t>
             </a:r>
           </a:p>
         </p:txBody>
@@ -38558,7 +39012,7 @@
         </p:nvSpPr>
         <p:spPr>
           <a:xfrm>
-            <a:off x="6681936" y="6536246"/>
+            <a:off x="6101507" y="6536246"/>
             <a:ext cx="895201" cy="123825"/>
           </a:xfrm>
           <a:prstGeom prst="rect">
@@ -38603,7 +39057,7 @@
         </p:nvSpPr>
         <p:spPr>
           <a:xfrm>
-            <a:off x="7628186" y="6536246"/>
+            <a:off x="6962031" y="6536246"/>
             <a:ext cx="804017" cy="123825"/>
           </a:xfrm>
           <a:prstGeom prst="rect">
@@ -38648,7 +39102,7 @@
         </p:nvSpPr>
         <p:spPr>
           <a:xfrm>
-            <a:off x="8488412" y="6536246"/>
+            <a:off x="7736532" y="6536246"/>
             <a:ext cx="905140" cy="123825"/>
           </a:xfrm>
           <a:prstGeom prst="rect">
@@ -38693,7 +39147,7 @@
         </p:nvSpPr>
         <p:spPr>
           <a:xfrm>
-            <a:off x="9444038" y="6536246"/>
+            <a:off x="8606433" y="6536246"/>
             <a:ext cx="738074" cy="123825"/>
           </a:xfrm>
           <a:prstGeom prst="rect">
@@ -38738,7 +39192,7 @@
         </p:nvSpPr>
         <p:spPr>
           <a:xfrm>
-            <a:off x="10242054" y="6536246"/>
+            <a:off x="9318724" y="6536246"/>
             <a:ext cx="735235" cy="123825"/>
           </a:xfrm>
           <a:prstGeom prst="rect">
@@ -38777,13 +39231,58 @@
       </p:sp>
       <p:sp>
         <p:nvSpPr>
-          <p:cNvPr id="66" name="!!T Us"/>
-          <p:cNvSpPr txBox="1"/>
-          <p:nvPr/>
-        </p:nvSpPr>
-        <p:spPr>
-          <a:xfrm>
-            <a:off x="11037391" y="6536246"/>
+          <p:cNvPr id="66" name="!!T What passes on"/>
+          <p:cNvSpPr txBox="1"/>
+          <p:nvPr/>
+        </p:nvSpPr>
+        <p:spPr>
+          <a:xfrm>
+            <a:off x="10028337" y="6536246"/>
+            <a:ext cx="1093029" cy="123825"/>
+          </a:xfrm>
+          <a:prstGeom prst="rect">
+            <a:avLst/>
+          </a:prstGeom>
+          <a:noFill/>
+        </p:spPr>
+        <p:txBody>
+          <a:bodyPr wrap="none" lIns="0" tIns="0" rIns="0" bIns="0" anchor="t">
+            <a:noAutofit/>
+          </a:bodyPr>
+          <a:lstStyle/>
+          <a:p>
+            <a:pPr algn="l">
+              <a:lnSpc>
+                <a:spcPts val="975"/>
+              </a:lnSpc>
+              <a:spcBef>
+                <a:spcPts val="0"/>
+              </a:spcBef>
+              <a:spcAft>
+                <a:spcPts val="0"/>
+              </a:spcAft>
+            </a:pPr>
+            <a:r>
+              <a:rPr sz="975" b="0" i="0" kern="100">
+                <a:solidFill>
+                  <a:srgbClr val="B5979D"/>
+                </a:solidFill>
+                <a:latin typeface="Plus Jakarta Sans"/>
+              </a:rPr>
+              <a:t>What passes on</a:t>
+            </a:r>
+          </a:p>
+        </p:txBody>
+      </p:sp>
+      <p:sp>
+        <p:nvSpPr>
+          <p:cNvPr id="67" name="!!T Us"/>
+          <p:cNvSpPr txBox="1"/>
+          <p:nvPr/>
+        </p:nvSpPr>
+        <p:spPr>
+          <a:xfrm>
+            <a:off x="11075491" y="6536246"/>
             <a:ext cx="273004" cy="123825"/>
           </a:xfrm>
           <a:prstGeom prst="rect">
@@ -38822,7 +39321,7 @@
       </p:sp>
       <p:sp>
         <p:nvSpPr>
-          <p:cNvPr id="67" name="!!T 7 / 15"/>
+          <p:cNvPr id="68" name="!!T 7 / 15"/>
           <p:cNvSpPr txBox="1"/>
           <p:nvPr/>
         </p:nvSpPr>
@@ -38867,7 +39366,7 @@
       </p:sp>
       <p:sp>
         <p:nvSpPr>
-          <p:cNvPr id="68" name="!!T Savings with the four decisions"/>
+          <p:cNvPr id="69" name="!!T Savings with the four decisions"/>
           <p:cNvSpPr txBox="1"/>
           <p:nvPr/>
         </p:nvSpPr>
@@ -38912,7 +39411,7 @@
       </p:sp>
       <p:sp>
         <p:nvSpPr>
-          <p:cNvPr id="69" name="!!T their own way"/>
+          <p:cNvPr id="70" name="!!T their own way"/>
           <p:cNvSpPr txBox="1"/>
           <p:nvPr/>
         </p:nvSpPr>
@@ -38957,7 +39456,7 @@
       </p:sp>
       <p:sp>
         <p:nvSpPr>
-          <p:cNvPr id="70" name="!!T a reverse mortgage pays HK$230K a year f"/>
+          <p:cNvPr id="71" name="!!T a reverse mortgage pays HK$230K a year f"/>
           <p:cNvSpPr txBox="1"/>
           <p:nvPr/>
         </p:nvSpPr>
@@ -39004,7 +39503,7 @@
       </p:sp>
       <p:sp>
         <p:nvSpPr>
-          <p:cNvPr id="71" name="!!T Their home, for life"/>
+          <p:cNvPr id="72" name="!!T Their home, for life"/>
           <p:cNvSpPr txBox="1"/>
           <p:nvPr/>
         </p:nvSpPr>
@@ -39049,7 +39548,7 @@
       </p:sp>
       <p:sp>
         <p:nvSpPr>
-          <p:cNvPr id="72" name="!!Rule f438ee99"/>
+          <p:cNvPr id="73" name="!!Rule f438ee99"/>
           <p:cNvSpPr/>
           <p:nvPr/>
         </p:nvSpPr>
@@ -39079,7 +39578,7 @@
       </p:sp>
       <p:sp>
         <p:nvSpPr>
-          <p:cNvPr id="73" name="!!Rule 89edf20e"/>
+          <p:cNvPr id="74" name="!!Rule 89edf20e"/>
           <p:cNvSpPr/>
           <p:nvPr/>
         </p:nvSpPr>
@@ -39109,7 +39608,7 @@
       </p:sp>
       <p:sp>
         <p:nvSpPr>
-          <p:cNvPr id="74" name="!!T HK$10M"/>
+          <p:cNvPr id="75" name="!!T HK$10M"/>
           <p:cNvSpPr txBox="1"/>
           <p:nvPr/>
         </p:nvSpPr>
@@ -39154,7 +39653,7 @@
       </p:sp>
       <p:sp>
         <p:nvSpPr>
-          <p:cNvPr id="75" name="!!Rule d540d1aa"/>
+          <p:cNvPr id="76" name="!!Rule d540d1aa"/>
           <p:cNvSpPr/>
           <p:nvPr/>
         </p:nvSpPr>
@@ -39184,7 +39683,7 @@
       </p:sp>
       <p:sp>
         <p:nvSpPr>
-          <p:cNvPr id="76" name="!!T HK$20M"/>
+          <p:cNvPr id="77" name="!!T HK$20M"/>
           <p:cNvSpPr txBox="1"/>
           <p:nvPr/>
         </p:nvSpPr>
@@ -39229,7 +39728,7 @@
       </p:sp>
       <p:sp>
         <p:nvSpPr>
-          <p:cNvPr id="77" name="!!Rule 1b780f79"/>
+          <p:cNvPr id="78" name="!!Rule 1b780f79"/>
           <p:cNvSpPr/>
           <p:nvPr/>
         </p:nvSpPr>
@@ -39259,7 +39758,7 @@
       </p:sp>
       <p:sp>
         <p:nvSpPr>
-          <p:cNvPr id="78" name="!!T HK$30M"/>
+          <p:cNvPr id="79" name="!!T HK$30M"/>
           <p:cNvSpPr txBox="1"/>
           <p:nvPr/>
         </p:nvSpPr>
@@ -39304,7 +39803,7 @@
       </p:sp>
       <p:sp>
         <p:nvSpPr>
-          <p:cNvPr id="79" name="!!Rule 0e3790a1"/>
+          <p:cNvPr id="80" name="!!Rule 0e3790a1"/>
           <p:cNvSpPr/>
           <p:nvPr/>
         </p:nvSpPr>
@@ -39334,7 +39833,7 @@
       </p:sp>
       <p:sp>
         <p:nvSpPr>
-          <p:cNvPr id="80" name="!!T Added by Call 3"/>
+          <p:cNvPr id="81" name="!!T Added by Call 3"/>
           <p:cNvSpPr txBox="1"/>
           <p:nvPr/>
         </p:nvSpPr>
@@ -39379,7 +39878,7 @@
       </p:sp>
       <p:sp>
         <p:nvSpPr>
-          <p:cNvPr id="81" name="!!ps-el b6b14bbc"/>
+          <p:cNvPr id="82" name="!!ps-el b6b14bbc"/>
           <p:cNvSpPr/>
           <p:nvPr/>
         </p:nvSpPr>
@@ -41785,7 +42284,7 @@
         <p:spPr>
           <a:xfrm>
             <a:off x="457200" y="6452104"/>
-            <a:ext cx="6417513" cy="297120"/>
+            <a:ext cx="5543693" cy="297120"/>
           </a:xfrm>
           <a:prstGeom prst="rect">
             <a:avLst/>
@@ -41816,7 +42315,7 @@
                 </a:solidFill>
                 <a:latin typeface="Plus Jakarta Sans"/>
               </a:rPr>
-              <a:t>Today: the case's statement. The plan: written case §4 and §5 (Adrian 40/55/5, Carmen 60/35/5, Figure 14); fees</a:t>
+              <a:t>Today: the case's statement. The plan: written case §4 and §5 (Adrian 40/55/5, Carmen 60/35/5,</a:t>
             </a:r>
           </a:p>
           <a:p>
@@ -41838,7 +42337,7 @@
                 </a:solidFill>
                 <a:latin typeface="Plus Jakarta Sans"/>
               </a:rPr>
-              <a:t>about 1.5% today against about 0.5% in index funds.</a:t>
+              <a:t>Figure 14); fees about 1.5% today against about 0.5% in index funds.</a:t>
             </a:r>
           </a:p>
         </p:txBody>
@@ -41851,7 +42350,7 @@
         </p:nvSpPr>
         <p:spPr>
           <a:xfrm>
-            <a:off x="6671667" y="6536246"/>
+            <a:off x="6091238" y="6536246"/>
             <a:ext cx="895201" cy="123825"/>
           </a:xfrm>
           <a:prstGeom prst="rect">
@@ -41896,7 +42395,7 @@
         </p:nvSpPr>
         <p:spPr>
           <a:xfrm>
-            <a:off x="7617916" y="6536246"/>
+            <a:off x="6951762" y="6536246"/>
             <a:ext cx="804017" cy="123825"/>
           </a:xfrm>
           <a:prstGeom prst="rect">
@@ -41941,7 +42440,7 @@
         </p:nvSpPr>
         <p:spPr>
           <a:xfrm>
-            <a:off x="8478143" y="6536246"/>
+            <a:off x="7726263" y="6536246"/>
             <a:ext cx="905140" cy="123825"/>
           </a:xfrm>
           <a:prstGeom prst="rect">
@@ -41986,7 +42485,7 @@
         </p:nvSpPr>
         <p:spPr>
           <a:xfrm>
-            <a:off x="9433768" y="6536246"/>
+            <a:off x="8596164" y="6536246"/>
             <a:ext cx="738074" cy="123825"/>
           </a:xfrm>
           <a:prstGeom prst="rect">
@@ -42031,7 +42530,7 @@
         </p:nvSpPr>
         <p:spPr>
           <a:xfrm>
-            <a:off x="10231785" y="6536246"/>
+            <a:off x="9308455" y="6536246"/>
             <a:ext cx="735235" cy="123825"/>
           </a:xfrm>
           <a:prstGeom prst="rect">
@@ -42070,13 +42569,58 @@
       </p:sp>
       <p:sp>
         <p:nvSpPr>
-          <p:cNvPr id="61" name="!!T Us"/>
-          <p:cNvSpPr txBox="1"/>
-          <p:nvPr/>
-        </p:nvSpPr>
-        <p:spPr>
-          <a:xfrm>
-            <a:off x="11027122" y="6536246"/>
+          <p:cNvPr id="61" name="!!T What passes on"/>
+          <p:cNvSpPr txBox="1"/>
+          <p:nvPr/>
+        </p:nvSpPr>
+        <p:spPr>
+          <a:xfrm>
+            <a:off x="10018068" y="6536246"/>
+            <a:ext cx="1093029" cy="123825"/>
+          </a:xfrm>
+          <a:prstGeom prst="rect">
+            <a:avLst/>
+          </a:prstGeom>
+          <a:noFill/>
+        </p:spPr>
+        <p:txBody>
+          <a:bodyPr wrap="none" lIns="0" tIns="0" rIns="0" bIns="0" anchor="t">
+            <a:noAutofit/>
+          </a:bodyPr>
+          <a:lstStyle/>
+          <a:p>
+            <a:pPr algn="l">
+              <a:lnSpc>
+                <a:spcPts val="975"/>
+              </a:lnSpc>
+              <a:spcBef>
+                <a:spcPts val="0"/>
+              </a:spcBef>
+              <a:spcAft>
+                <a:spcPts val="0"/>
+              </a:spcAft>
+            </a:pPr>
+            <a:r>
+              <a:rPr sz="975" b="0" i="0" kern="100">
+                <a:solidFill>
+                  <a:srgbClr val="B5979D"/>
+                </a:solidFill>
+                <a:latin typeface="Plus Jakarta Sans"/>
+              </a:rPr>
+              <a:t>What passes on</a:t>
+            </a:r>
+          </a:p>
+        </p:txBody>
+      </p:sp>
+      <p:sp>
+        <p:nvSpPr>
+          <p:cNvPr id="62" name="!!T Us"/>
+          <p:cNvSpPr txBox="1"/>
+          <p:nvPr/>
+        </p:nvSpPr>
+        <p:spPr>
+          <a:xfrm>
+            <a:off x="11065222" y="6536246"/>
             <a:ext cx="273004" cy="123825"/>
           </a:xfrm>
           <a:prstGeom prst="rect">
@@ -42115,7 +42659,7 @@
       </p:sp>
       <p:sp>
         <p:nvSpPr>
-          <p:cNvPr id="62" name="!!T 8 / 15"/>
+          <p:cNvPr id="63" name="!!T 8 / 15"/>
           <p:cNvSpPr txBox="1"/>
           <p:nvPr/>
         </p:nvSpPr>
@@ -45058,7 +45602,7 @@
         <p:spPr>
           <a:xfrm>
             <a:off x="457200" y="6452104"/>
-            <a:ext cx="6393850" cy="297120"/>
+            <a:ext cx="5747989" cy="297120"/>
           </a:xfrm>
           <a:prstGeom prst="rect">
             <a:avLst/>
@@ -45089,7 +45633,7 @@
                 </a:solidFill>
                 <a:latin typeface="Plus Jakarta Sans"/>
               </a:rPr>
-              <a:t>ESG: written case §6, Figure 16; raters: Berg, Kölbel and Rigobon (2022). Crypto: §7, Figures 17–18: Ryan's wealth</a:t>
+              <a:t>ESG: written case §6, Figure 16; raters: Berg, Kölbel and Rigobon (2022). Crypto: §7, Figures 17–18 (all</a:t>
             </a:r>
           </a:p>
           <a:p>
@@ -45111,7 +45655,7 @@
                 </a:solidFill>
                 <a:latin typeface="Plus Jakarta Sans"/>
               </a:rPr>
-              <a:t>sized from his crypto share, if all HK$500K is crypto, prices held flat, saving 30% of his pay.</a:t>
+              <a:t>HK$500K treated as crypto, prices flat, 30% of his pay saved).</a:t>
             </a:r>
           </a:p>
         </p:txBody>
@@ -45124,7 +45668,7 @@
         </p:nvSpPr>
         <p:spPr>
           <a:xfrm>
-            <a:off x="6675686" y="6536246"/>
+            <a:off x="6095256" y="6536246"/>
             <a:ext cx="895201" cy="123825"/>
           </a:xfrm>
           <a:prstGeom prst="rect">
@@ -45169,7 +45713,7 @@
         </p:nvSpPr>
         <p:spPr>
           <a:xfrm>
-            <a:off x="7621935" y="6536246"/>
+            <a:off x="6955780" y="6536246"/>
             <a:ext cx="804017" cy="123825"/>
           </a:xfrm>
           <a:prstGeom prst="rect">
@@ -45214,7 +45758,7 @@
         </p:nvSpPr>
         <p:spPr>
           <a:xfrm>
-            <a:off x="8482161" y="6536246"/>
+            <a:off x="7730282" y="6536246"/>
             <a:ext cx="905140" cy="123825"/>
           </a:xfrm>
           <a:prstGeom prst="rect">
@@ -45259,7 +45803,7 @@
         </p:nvSpPr>
         <p:spPr>
           <a:xfrm>
-            <a:off x="9437787" y="6536246"/>
+            <a:off x="8600182" y="6536246"/>
             <a:ext cx="738074" cy="123825"/>
           </a:xfrm>
           <a:prstGeom prst="rect">
@@ -45304,7 +45848,7 @@
         </p:nvSpPr>
         <p:spPr>
           <a:xfrm>
-            <a:off x="10235803" y="6536246"/>
+            <a:off x="9312473" y="6536246"/>
             <a:ext cx="735235" cy="123825"/>
           </a:xfrm>
           <a:prstGeom prst="rect">
@@ -45343,13 +45887,58 @@
       </p:sp>
       <p:sp>
         <p:nvSpPr>
-          <p:cNvPr id="73" name="!!T Us"/>
-          <p:cNvSpPr txBox="1"/>
-          <p:nvPr/>
-        </p:nvSpPr>
-        <p:spPr>
-          <a:xfrm>
-            <a:off x="11031141" y="6536246"/>
+          <p:cNvPr id="73" name="!!T What passes on"/>
+          <p:cNvSpPr txBox="1"/>
+          <p:nvPr/>
+        </p:nvSpPr>
+        <p:spPr>
+          <a:xfrm>
+            <a:off x="10022086" y="6536246"/>
+            <a:ext cx="1093029" cy="123825"/>
+          </a:xfrm>
+          <a:prstGeom prst="rect">
+            <a:avLst/>
+          </a:prstGeom>
+          <a:noFill/>
+        </p:spPr>
+        <p:txBody>
+          <a:bodyPr wrap="none" lIns="0" tIns="0" rIns="0" bIns="0" anchor="t">
+            <a:noAutofit/>
+          </a:bodyPr>
+          <a:lstStyle/>
+          <a:p>
+            <a:pPr algn="l">
+              <a:lnSpc>
+                <a:spcPts val="975"/>
+              </a:lnSpc>
+              <a:spcBef>
+                <a:spcPts val="0"/>
+              </a:spcBef>
+              <a:spcAft>
+                <a:spcPts val="0"/>
+              </a:spcAft>
+            </a:pPr>
+            <a:r>
+              <a:rPr sz="975" b="0" i="0" kern="100">
+                <a:solidFill>
+                  <a:srgbClr val="B5979D"/>
+                </a:solidFill>
+                <a:latin typeface="Plus Jakarta Sans"/>
+              </a:rPr>
+              <a:t>What passes on</a:t>
+            </a:r>
+          </a:p>
+        </p:txBody>
+      </p:sp>
+      <p:sp>
+        <p:nvSpPr>
+          <p:cNvPr id="74" name="!!T Us"/>
+          <p:cNvSpPr txBox="1"/>
+          <p:nvPr/>
+        </p:nvSpPr>
+        <p:spPr>
+          <a:xfrm>
+            <a:off x="11069241" y="6536246"/>
             <a:ext cx="273004" cy="123825"/>
           </a:xfrm>
           <a:prstGeom prst="rect">
@@ -45388,7 +45977,7 @@
       </p:sp>
       <p:sp>
         <p:nvSpPr>
-          <p:cNvPr id="74" name="!!T 9 / 15"/>
+          <p:cNvPr id="75" name="!!T 9 / 15"/>
           <p:cNvSpPr txBox="1"/>
           <p:nvPr/>
         </p:nvSpPr>
@@ -45433,7 +46022,7 @@
       </p:sp>
       <p:sp>
         <p:nvSpPr>
-          <p:cNvPr id="75" name="!!T Today"/>
+          <p:cNvPr id="76" name="!!T Today"/>
           <p:cNvSpPr txBox="1"/>
           <p:nvPr/>
         </p:nvSpPr>
@@ -45478,7 +46067,7 @@
       </p:sp>
       <p:sp>
         <p:nvSpPr>
-          <p:cNvPr id="76" name="!!i 76ed0f65"/>
+          <p:cNvPr id="77" name="!!i 76ed0f65"/>
           <p:cNvSpPr/>
           <p:nvPr/>
         </p:nvSpPr>
@@ -45508,7 +46097,7 @@
       </p:sp>
       <p:sp>
         <p:nvSpPr>
-          <p:cNvPr id="77" name="!!T 11%"/>
+          <p:cNvPr id="78" name="!!T 11%"/>
           <p:cNvSpPr txBox="1"/>
           <p:nvPr/>
         </p:nvSpPr>
@@ -45553,7 +46142,7 @@
       </p:sp>
       <p:sp>
         <p:nvSpPr>
-          <p:cNvPr id="78" name="!!T With the plan"/>
+          <p:cNvPr id="79" name="!!T With the plan"/>
           <p:cNvSpPr txBox="1"/>
           <p:nvPr/>
         </p:nvSpPr>
@@ -45598,7 +46187,7 @@
       </p:sp>
       <p:sp>
         <p:nvSpPr>
-          <p:cNvPr id="79" name="!!i 2c43a45c"/>
+          <p:cNvPr id="80" name="!!i 2c43a45c"/>
           <p:cNvSpPr/>
           <p:nvPr/>
         </p:nvSpPr>
@@ -45636,7 +46225,7 @@
       </p:sp>
       <p:sp>
         <p:nvSpPr>
-          <p:cNvPr id="80" name="!!i 44256b8a"/>
+          <p:cNvPr id="81" name="!!i 44256b8a"/>
           <p:cNvSpPr/>
           <p:nvPr/>
         </p:nvSpPr>
@@ -45666,7 +46255,7 @@
       </p:sp>
       <p:sp>
         <p:nvSpPr>
-          <p:cNvPr id="81" name="!!i 33b7d3a1"/>
+          <p:cNvPr id="82" name="!!i 33b7d3a1"/>
           <p:cNvSpPr/>
           <p:nvPr/>
         </p:nvSpPr>
@@ -45696,7 +46285,7 @@
       </p:sp>
       <p:sp>
         <p:nvSpPr>
-          <p:cNvPr id="82" name="!!T 25%"/>
+          <p:cNvPr id="83" name="!!T 25%"/>
           <p:cNvSpPr txBox="1"/>
           <p:nvPr/>
         </p:nvSpPr>
@@ -45741,7 +46330,7 @@
       </p:sp>
       <p:cxnSp>
         <p:nvCxnSpPr>
-          <p:cNvPr id="83" name="!!Rule 86aa8b7b"/>
+          <p:cNvPr id="84" name="!!Rule 86aa8b7b"/>
           <p:cNvCxnSpPr/>
           <p:nvPr/>
         </p:nvCxnSpPr>
@@ -45777,7 +46366,7 @@
       </p:cxnSp>
       <p:sp>
         <p:nvSpPr>
-          <p:cNvPr id="84" name="!!Rule 2df83914"/>
+          <p:cNvPr id="85" name="!!Rule 2df83914"/>
           <p:cNvSpPr/>
           <p:nvPr/>
         </p:nvSpPr>
@@ -45807,7 +46396,7 @@
       </p:sp>
       <p:sp>
         <p:nvSpPr>
-          <p:cNvPr id="85" name="!!T +14 points"/>
+          <p:cNvPr id="86" name="!!T +14 points"/>
           <p:cNvSpPr txBox="1"/>
           <p:nvPr/>
         </p:nvSpPr>
@@ -45852,7 +46441,7 @@
       </p:sp>
       <p:sp>
         <p:nvSpPr>
-          <p:cNvPr id="86" name="!!Arrowhead 823caef2"/>
+          <p:cNvPr id="87" name="!!Arrowhead 823caef2"/>
           <p:cNvSpPr/>
           <p:nvPr/>
         </p:nvSpPr>
